--- a/slides/doc-mt-04-editable-slides.pptx
+++ b/slides/doc-mt-04-editable-slides.pptx
@@ -2110,7 +2110,7 @@
                 <a:ea typeface="Arial" pitchFamily="34" charset="-122"/>
                 <a:cs typeface="Arial" pitchFamily="34" charset="-120"/>
               </a:rPr>
-              <a:t>Figure 1. Figure 1: Unified SaaS Ingress Dispatcher and Shared Compute Plane connecting over unilateral Private Service Connect (PSC) endpoints to dedicated customer data and MCP tool spokes.</a:t>
+              <a:t>Figure 1. Unified SaaS Ingress Dispatcher and Shared Compute Plane connecting over unilateral Private Service Connect (PSC) endpoints to dedicated customer data and MCP tool spokes.</a:t>
             </a:r>
             <a:endParaRPr lang="en-US" sz="820" dirty="0"/>
           </a:p>
@@ -2178,8 +2178,8 @@
         </p:nvSpPr>
         <p:spPr>
           <a:xfrm>
-            <a:off x="4027932" y="1869948"/>
-            <a:ext cx="1858975" cy="146304"/>
+            <a:off x="4027932" y="1858975"/>
+            <a:ext cx="1773936" cy="105156"/>
           </a:xfrm>
           <a:prstGeom prst="rect">
             <a:avLst/>
@@ -2188,7 +2188,7 @@
           <a:ln/>
         </p:spPr>
         <p:txBody>
-          <a:bodyPr wrap="square" lIns="0" tIns="0" rIns="0" bIns="0" rtlCol="0" anchor="t">
+          <a:bodyPr wrap="none" lIns="0" tIns="0" rIns="0" bIns="0" rtlCol="0" anchor="t">
             <a:normAutofit/>
           </a:bodyPr>
           <a:lstStyle/>
@@ -2200,7 +2200,7 @@
               <a:buNone/>
             </a:pPr>
             <a:r>
-              <a:rPr lang="en-US" sz="460" b="1" dirty="0">
+              <a:rPr lang="en-US" sz="420" b="1" dirty="0">
                 <a:solidFill>
                   <a:srgbClr val="202124"/>
                 </a:solidFill>
@@ -2210,7 +2210,7 @@
               </a:rPr>
               <a:t>Unified Hybrid Control Hub (cymbal-hybrid-hub-prod) + PSC Bridge to Sovereign Spokes</a:t>
             </a:r>
-            <a:endParaRPr lang="en-US" sz="460" dirty="0"/>
+            <a:endParaRPr lang="en-US" sz="420" dirty="0"/>
           </a:p>
         </p:txBody>
       </p:sp>
@@ -2249,8 +2249,8 @@
         </p:nvSpPr>
         <p:spPr>
           <a:xfrm>
-            <a:off x="4088282" y="2004365"/>
-            <a:ext cx="1805940" cy="146304"/>
+            <a:off x="4088282" y="1993392"/>
+            <a:ext cx="1723644" cy="105156"/>
           </a:xfrm>
           <a:prstGeom prst="rect">
             <a:avLst/>
@@ -2259,7 +2259,7 @@
           <a:ln/>
         </p:spPr>
         <p:txBody>
-          <a:bodyPr wrap="square" lIns="0" tIns="0" rIns="0" bIns="0" rtlCol="0" anchor="t">
+          <a:bodyPr wrap="none" lIns="0" tIns="0" rIns="0" bIns="0" rtlCol="0" anchor="t">
             <a:normAutofit/>
           </a:bodyPr>
           <a:lstStyle/>
@@ -2271,17 +2271,17 @@
               <a:buNone/>
             </a:pPr>
             <a:r>
-              <a:rPr lang="en-US" sz="460" b="1" dirty="0">
-                <a:solidFill>
-                  <a:srgbClr val="202124"/>
-                </a:solidFill>
-                <a:latin typeface="Arial" pitchFamily="34" charset="0"/>
-                <a:ea typeface="Arial" pitchFamily="34" charset="-122"/>
-                <a:cs typeface="Arial" pitchFamily="34" charset="-120"/>
-              </a:rPr>
-              <a:t>Hub VPC • Tenant-Aware Router &amp; 3-Phase Live Tier Migrator</a:t>
-            </a:r>
-            <a:endParaRPr lang="en-US" sz="460" dirty="0"/>
+              <a:rPr lang="en-US" sz="420" b="1" dirty="0">
+                <a:solidFill>
+                  <a:srgbClr val="202124"/>
+                </a:solidFill>
+                <a:latin typeface="Arial" pitchFamily="34" charset="0"/>
+                <a:ea typeface="Arial" pitchFamily="34" charset="-122"/>
+                <a:cs typeface="Arial" pitchFamily="34" charset="-120"/>
+              </a:rPr>
+              <a:t>Hub VPC</a:t>
+            </a:r>
+            <a:endParaRPr lang="en-US" sz="420" dirty="0"/>
           </a:p>
         </p:txBody>
       </p:sp>
@@ -2320,8 +2320,8 @@
         </p:nvSpPr>
         <p:spPr>
           <a:xfrm>
-            <a:off x="4155034" y="3757270"/>
-            <a:ext cx="1255471" cy="146304"/>
+            <a:off x="4155034" y="3746297"/>
+            <a:ext cx="1255471" cy="105156"/>
           </a:xfrm>
           <a:prstGeom prst="rect">
             <a:avLst/>
@@ -2330,7 +2330,7 @@
           <a:ln/>
         </p:spPr>
         <p:txBody>
-          <a:bodyPr wrap="square" lIns="0" tIns="0" rIns="0" bIns="0" rtlCol="0" anchor="t">
+          <a:bodyPr wrap="none" lIns="0" tIns="0" rIns="0" bIns="0" rtlCol="0" anchor="t">
             <a:normAutofit/>
           </a:bodyPr>
           <a:lstStyle/>
@@ -2350,7 +2350,7 @@
                 <a:ea typeface="Arial" pitchFamily="34" charset="-122"/>
                 <a:cs typeface="Arial" pitchFamily="34" charset="-120"/>
               </a:rPr>
-              <a:t>Standard Tier: Shared Pooled Plane (Initial RetailStream Route)</a:t>
+              <a:t>Standard Tier: Shared Pooled Plane</a:t>
             </a:r>
             <a:endParaRPr lang="en-US" sz="385" dirty="0"/>
           </a:p>
@@ -2391,8 +2391,8 @@
         </p:nvSpPr>
         <p:spPr>
           <a:xfrm>
-            <a:off x="6192317" y="3757270"/>
-            <a:ext cx="1255471" cy="146304"/>
+            <a:off x="6192317" y="3746297"/>
+            <a:ext cx="1255471" cy="105156"/>
           </a:xfrm>
           <a:prstGeom prst="rect">
             <a:avLst/>
@@ -2401,7 +2401,7 @@
           <a:ln/>
         </p:spPr>
         <p:txBody>
-          <a:bodyPr wrap="square" lIns="0" tIns="0" rIns="0" bIns="0" rtlCol="0" anchor="t">
+          <a:bodyPr wrap="none" lIns="0" tIns="0" rIns="0" bIns="0" rtlCol="0" anchor="t">
             <a:normAutofit/>
           </a:bodyPr>
           <a:lstStyle/>
@@ -2421,7 +2421,7 @@
                 <a:ea typeface="Arial" pitchFamily="34" charset="-122"/>
                 <a:cs typeface="Arial" pitchFamily="34" charset="-120"/>
               </a:rPr>
-              <a:t>Enterprise Tier: Private Service Connect (PSC) Spokes (FinVault + Upgraded RetailStream)</a:t>
+              <a:t>Enterprise Tier: Private Service Connect (PSC) Spokes</a:t>
             </a:r>
             <a:endParaRPr lang="en-US" sz="385" dirty="0"/>
           </a:p>
@@ -2736,7 +2736,7 @@
         <p:spPr>
           <a:xfrm>
             <a:off x="6881774" y="2161642"/>
-            <a:ext cx="1145743" cy="146304"/>
+            <a:ext cx="1145743" cy="137160"/>
           </a:xfrm>
           <a:prstGeom prst="rect">
             <a:avLst/>
@@ -3960,8 +3960,8 @@
         </p:blipFill>
         <p:spPr>
           <a:xfrm>
-            <a:off x="5576926" y="2516429"/>
-            <a:ext cx="181966" cy="181966"/>
+            <a:off x="5563210" y="2536546"/>
+            <a:ext cx="141732" cy="141732"/>
           </a:xfrm>
           <a:prstGeom prst="rect">
             <a:avLst/>
@@ -3976,8 +3976,8 @@
         </p:nvSpPr>
         <p:spPr>
           <a:xfrm>
-            <a:off x="5795467" y="2474366"/>
-            <a:ext cx="689458" cy="266090"/>
+            <a:off x="5727802" y="2470709"/>
+            <a:ext cx="779069" cy="273406"/>
           </a:xfrm>
           <a:prstGeom prst="rect">
             <a:avLst/>
@@ -3993,12 +3993,12 @@
           <a:p>
             <a:pPr algn="l" indent="0" marL="0">
               <a:lnSpc>
-                <a:spcPct val="86000"/>
-              </a:lnSpc>
-              <a:buNone/>
-            </a:pPr>
-            <a:r>
-              <a:rPr lang="en-US" sz="500" b="1" dirty="0">
+                <a:spcPct val="88000"/>
+              </a:lnSpc>
+              <a:buNone/>
+            </a:pPr>
+            <a:r>
+              <a:rPr lang="en-US" sz="435" b="1" dirty="0">
                 <a:solidFill>
                   <a:srgbClr val="202124"/>
                 </a:solidFill>
@@ -4008,17 +4008,17 @@
               </a:rPr>
               <a:t>External Application Load Balancer</a:t>
             </a:r>
-            <a:endParaRPr lang="en-US" sz="500" dirty="0"/>
+            <a:endParaRPr lang="en-US" sz="435" dirty="0"/>
           </a:p>
           <a:p>
             <a:pPr algn="l" indent="0" marL="0">
               <a:lnSpc>
-                <a:spcPct val="86000"/>
-              </a:lnSpc>
-              <a:buNone/>
-            </a:pPr>
-            <a:r>
-              <a:rPr lang="en-US" sz="430" dirty="0">
+                <a:spcPct val="88000"/>
+              </a:lnSpc>
+              <a:buNone/>
+            </a:pPr>
+            <a:r>
+              <a:rPr lang="en-US" sz="375" dirty="0">
                 <a:solidFill>
                   <a:srgbClr val="3C4043"/>
                 </a:solidFill>
@@ -4028,7 +4028,7 @@
               </a:rPr>
               <a:t>Cloud Load Balancing</a:t>
             </a:r>
-            <a:endParaRPr lang="en-US" sz="500" dirty="0"/>
+            <a:endParaRPr lang="en-US" sz="435" dirty="0"/>
           </a:p>
         </p:txBody>
       </p:sp>
@@ -4075,8 +4075,8 @@
         </p:blipFill>
         <p:spPr>
           <a:xfrm>
-            <a:off x="6969557" y="2416759"/>
-            <a:ext cx="172822" cy="172822"/>
+            <a:off x="6955841" y="2435962"/>
+            <a:ext cx="134417" cy="134417"/>
           </a:xfrm>
           <a:prstGeom prst="rect">
             <a:avLst/>
@@ -4091,8 +4091,8 @@
         </p:nvSpPr>
         <p:spPr>
           <a:xfrm>
-            <a:off x="7178954" y="2377440"/>
-            <a:ext cx="750722" cy="251460"/>
+            <a:off x="7113118" y="2373782"/>
+            <a:ext cx="838505" cy="258775"/>
           </a:xfrm>
           <a:prstGeom prst="rect">
             <a:avLst/>
@@ -4108,12 +4108,12 @@
           <a:p>
             <a:pPr algn="l" indent="0" marL="0">
               <a:lnSpc>
-                <a:spcPct val="86000"/>
-              </a:lnSpc>
-              <a:buNone/>
-            </a:pPr>
-            <a:r>
-              <a:rPr lang="en-US" sz="500" b="1" dirty="0">
+                <a:spcPct val="88000"/>
+              </a:lnSpc>
+              <a:buNone/>
+            </a:pPr>
+            <a:r>
+              <a:rPr lang="en-US" sz="435" b="1" dirty="0">
                 <a:solidFill>
                   <a:srgbClr val="202124"/>
                 </a:solidFill>
@@ -4123,17 +4123,17 @@
               </a:rPr>
               <a:t>1. SHADOW_SYNC (0ms Lag DMS CDC)</a:t>
             </a:r>
-            <a:endParaRPr lang="en-US" sz="500" dirty="0"/>
+            <a:endParaRPr lang="en-US" sz="435" dirty="0"/>
           </a:p>
           <a:p>
             <a:pPr algn="l" indent="0" marL="0">
               <a:lnSpc>
-                <a:spcPct val="86000"/>
-              </a:lnSpc>
-              <a:buNone/>
-            </a:pPr>
-            <a:r>
-              <a:rPr lang="en-US" sz="430" dirty="0">
+                <a:spcPct val="88000"/>
+              </a:lnSpc>
+              <a:buNone/>
+            </a:pPr>
+            <a:r>
+              <a:rPr lang="en-US" sz="375" dirty="0">
                 <a:solidFill>
                   <a:srgbClr val="3C4043"/>
                 </a:solidFill>
@@ -4143,7 +4143,7 @@
               </a:rPr>
               <a:t>Streams RLS &amp; L4 Memory</a:t>
             </a:r>
-            <a:endParaRPr lang="en-US" sz="500" dirty="0"/>
+            <a:endParaRPr lang="en-US" sz="435" dirty="0"/>
           </a:p>
         </p:txBody>
       </p:sp>
@@ -4190,8 +4190,8 @@
         </p:blipFill>
         <p:spPr>
           <a:xfrm>
-            <a:off x="6985102" y="3043123"/>
-            <a:ext cx="163678" cy="163678"/>
+            <a:off x="6971386" y="3061411"/>
+            <a:ext cx="128016" cy="128016"/>
           </a:xfrm>
           <a:prstGeom prst="rect">
             <a:avLst/>
@@ -4206,8 +4206,8 @@
         </p:nvSpPr>
         <p:spPr>
           <a:xfrm>
-            <a:off x="7185355" y="3006547"/>
-            <a:ext cx="730606" cy="236830"/>
+            <a:off x="7121347" y="3002890"/>
+            <a:ext cx="817474" cy="244145"/>
           </a:xfrm>
           <a:prstGeom prst="rect">
             <a:avLst/>
@@ -4223,12 +4223,12 @@
           <a:p>
             <a:pPr algn="l" indent="0" marL="0">
               <a:lnSpc>
-                <a:spcPct val="86000"/>
-              </a:lnSpc>
-              <a:buNone/>
-            </a:pPr>
-            <a:r>
-              <a:rPr lang="en-US" sz="500" b="1" dirty="0">
+                <a:spcPct val="88000"/>
+              </a:lnSpc>
+              <a:buNone/>
+            </a:pPr>
+            <a:r>
+              <a:rPr lang="en-US" sz="435" b="1" dirty="0">
                 <a:solidFill>
                   <a:srgbClr val="202124"/>
                 </a:solidFill>
@@ -4238,17 +4238,17 @@
               </a:rPr>
               <a:t>3. DRAIN_AND_VERIFY</a:t>
             </a:r>
-            <a:endParaRPr lang="en-US" sz="500" dirty="0"/>
+            <a:endParaRPr lang="en-US" sz="435" dirty="0"/>
           </a:p>
           <a:p>
             <a:pPr algn="l" indent="0" marL="0">
               <a:lnSpc>
-                <a:spcPct val="86000"/>
-              </a:lnSpc>
-              <a:buNone/>
-            </a:pPr>
-            <a:r>
-              <a:rPr lang="en-US" sz="430" dirty="0">
+                <a:spcPct val="88000"/>
+              </a:lnSpc>
+              <a:buNone/>
+            </a:pPr>
+            <a:r>
+              <a:rPr lang="en-US" sz="375" dirty="0">
                 <a:solidFill>
                   <a:srgbClr val="3C4043"/>
                 </a:solidFill>
@@ -4258,7 +4258,7 @@
               </a:rPr>
               <a:t>0 Dropped Turns (4/4 PASS)</a:t>
             </a:r>
-            <a:endParaRPr lang="en-US" sz="500" dirty="0"/>
+            <a:endParaRPr lang="en-US" sz="435" dirty="0"/>
           </a:p>
         </p:txBody>
       </p:sp>
@@ -4305,8 +4305,8 @@
         </p:blipFill>
         <p:spPr>
           <a:xfrm>
-            <a:off x="6992417" y="2735885"/>
-            <a:ext cx="163678" cy="163678"/>
+            <a:off x="6978701" y="2754173"/>
+            <a:ext cx="128016" cy="128016"/>
           </a:xfrm>
           <a:prstGeom prst="rect">
             <a:avLst/>
@@ -4321,8 +4321,8 @@
         </p:nvSpPr>
         <p:spPr>
           <a:xfrm>
-            <a:off x="7192670" y="2699309"/>
-            <a:ext cx="715061" cy="236830"/>
+            <a:off x="7128662" y="2695651"/>
+            <a:ext cx="801014" cy="244145"/>
           </a:xfrm>
           <a:prstGeom prst="rect">
             <a:avLst/>
@@ -4338,12 +4338,12 @@
           <a:p>
             <a:pPr algn="l" indent="0" marL="0">
               <a:lnSpc>
-                <a:spcPct val="86000"/>
-              </a:lnSpc>
-              <a:buNone/>
-            </a:pPr>
-            <a:r>
-              <a:rPr lang="en-US" sz="500" b="1" dirty="0">
+                <a:spcPct val="88000"/>
+              </a:lnSpc>
+              <a:buNone/>
+            </a:pPr>
+            <a:r>
+              <a:rPr lang="en-US" sz="435" b="1" dirty="0">
                 <a:solidFill>
                   <a:srgbClr val="202124"/>
                 </a:solidFill>
@@ -4353,17 +4353,17 @@
               </a:rPr>
               <a:t>2. ATOMIC_CUTOVER</a:t>
             </a:r>
-            <a:endParaRPr lang="en-US" sz="500" dirty="0"/>
+            <a:endParaRPr lang="en-US" sz="435" dirty="0"/>
           </a:p>
           <a:p>
             <a:pPr algn="l" indent="0" marL="0">
               <a:lnSpc>
-                <a:spcPct val="86000"/>
-              </a:lnSpc>
-              <a:buNone/>
-            </a:pPr>
-            <a:r>
-              <a:rPr lang="en-US" sz="430" dirty="0">
+                <a:spcPct val="88000"/>
+              </a:lnSpc>
+              <a:buNone/>
+            </a:pPr>
+            <a:r>
+              <a:rPr lang="en-US" sz="375" dirty="0">
                 <a:solidFill>
                   <a:srgbClr val="3C4043"/>
                 </a:solidFill>
@@ -4373,7 +4373,7 @@
               </a:rPr>
               <a:t>Flips Firestore Route to PSC</a:t>
             </a:r>
-            <a:endParaRPr lang="en-US" sz="500" dirty="0"/>
+            <a:endParaRPr lang="en-US" sz="435" dirty="0"/>
           </a:p>
         </p:txBody>
       </p:sp>
@@ -4420,8 +4420,8 @@
         </p:blipFill>
         <p:spPr>
           <a:xfrm>
-            <a:off x="5164531" y="4358030"/>
-            <a:ext cx="177394" cy="177394"/>
+            <a:off x="5150815" y="4377233"/>
+            <a:ext cx="138074" cy="138074"/>
           </a:xfrm>
           <a:prstGeom prst="rect">
             <a:avLst/>
@@ -4436,8 +4436,8 @@
         </p:nvSpPr>
         <p:spPr>
           <a:xfrm>
-            <a:off x="5378501" y="4316882"/>
-            <a:ext cx="513893" cy="258775"/>
+            <a:off x="5311750" y="4313225"/>
+            <a:ext cx="602590" cy="266090"/>
           </a:xfrm>
           <a:prstGeom prst="rect">
             <a:avLst/>
@@ -4453,12 +4453,12 @@
           <a:p>
             <a:pPr algn="l" indent="0" marL="0">
               <a:lnSpc>
-                <a:spcPct val="86000"/>
-              </a:lnSpc>
-              <a:buNone/>
-            </a:pPr>
-            <a:r>
-              <a:rPr lang="en-US" sz="500" b="1" dirty="0">
+                <a:spcPct val="88000"/>
+              </a:lnSpc>
+              <a:buNone/>
+            </a:pPr>
+            <a:r>
+              <a:rPr lang="en-US" sz="435" b="1" dirty="0">
                 <a:solidFill>
                   <a:srgbClr val="202124"/>
                 </a:solidFill>
@@ -4468,17 +4468,17 @@
               </a:rPr>
               <a:t>Vertex AI Agent Engine</a:t>
             </a:r>
-            <a:endParaRPr lang="en-US" sz="500" dirty="0"/>
+            <a:endParaRPr lang="en-US" sz="435" dirty="0"/>
           </a:p>
           <a:p>
             <a:pPr algn="l" indent="0" marL="0">
               <a:lnSpc>
-                <a:spcPct val="86000"/>
-              </a:lnSpc>
-              <a:buNone/>
-            </a:pPr>
-            <a:r>
-              <a:rPr lang="en-US" sz="430" dirty="0">
+                <a:spcPct val="88000"/>
+              </a:lnSpc>
+              <a:buNone/>
+            </a:pPr>
+            <a:r>
+              <a:rPr lang="en-US" sz="375" dirty="0">
                 <a:solidFill>
                   <a:srgbClr val="3C4043"/>
                 </a:solidFill>
@@ -4488,7 +4488,7 @@
               </a:rPr>
               <a:t>Serves Standard SaaS Tier</a:t>
             </a:r>
-            <a:endParaRPr lang="en-US" sz="500" dirty="0"/>
+            <a:endParaRPr lang="en-US" sz="435" dirty="0"/>
           </a:p>
         </p:txBody>
       </p:sp>
@@ -4535,8 +4535,8 @@
         </p:blipFill>
         <p:spPr>
           <a:xfrm>
-            <a:off x="5164531" y="4897526"/>
-            <a:ext cx="177394" cy="177394"/>
+            <a:off x="5150815" y="4916729"/>
+            <a:ext cx="138074" cy="138074"/>
           </a:xfrm>
           <a:prstGeom prst="rect">
             <a:avLst/>
@@ -4551,8 +4551,8 @@
         </p:nvSpPr>
         <p:spPr>
           <a:xfrm>
-            <a:off x="5378501" y="4856378"/>
-            <a:ext cx="513893" cy="258775"/>
+            <a:off x="5311750" y="4852721"/>
+            <a:ext cx="602590" cy="266090"/>
           </a:xfrm>
           <a:prstGeom prst="rect">
             <a:avLst/>
@@ -4568,12 +4568,12 @@
           <a:p>
             <a:pPr algn="l" indent="0" marL="0">
               <a:lnSpc>
-                <a:spcPct val="86000"/>
-              </a:lnSpc>
-              <a:buNone/>
-            </a:pPr>
-            <a:r>
-              <a:rPr lang="en-US" sz="500" b="1" dirty="0">
+                <a:spcPct val="88000"/>
+              </a:lnSpc>
+              <a:buNone/>
+            </a:pPr>
+            <a:r>
+              <a:rPr lang="en-US" sz="435" b="1" dirty="0">
                 <a:solidFill>
                   <a:srgbClr val="202124"/>
                 </a:solidFill>
@@ -4583,17 +4583,17 @@
               </a:rPr>
               <a:t>Pooled MCP Hub</a:t>
             </a:r>
-            <a:endParaRPr lang="en-US" sz="500" dirty="0"/>
+            <a:endParaRPr lang="en-US" sz="435" dirty="0"/>
           </a:p>
           <a:p>
             <a:pPr algn="l" indent="0" marL="0">
               <a:lnSpc>
-                <a:spcPct val="86000"/>
-              </a:lnSpc>
-              <a:buNone/>
-            </a:pPr>
-            <a:r>
-              <a:rPr lang="en-US" sz="430" dirty="0">
+                <a:spcPct val="88000"/>
+              </a:lnSpc>
+              <a:buNone/>
+            </a:pPr>
+            <a:r>
+              <a:rPr lang="en-US" sz="375" dirty="0">
                 <a:solidFill>
                   <a:srgbClr val="3C4043"/>
                 </a:solidFill>
@@ -4603,7 +4603,7 @@
               </a:rPr>
               <a:t>2LO + Delegated 3LO Tools</a:t>
             </a:r>
-            <a:endParaRPr lang="en-US" sz="500" dirty="0"/>
+            <a:endParaRPr lang="en-US" sz="435" dirty="0"/>
           </a:p>
         </p:txBody>
       </p:sp>
@@ -4650,8 +4650,8 @@
         </p:blipFill>
         <p:spPr>
           <a:xfrm>
-            <a:off x="5164531" y="5459882"/>
-            <a:ext cx="177394" cy="177394"/>
+            <a:off x="5150815" y="5479085"/>
+            <a:ext cx="138074" cy="138074"/>
           </a:xfrm>
           <a:prstGeom prst="rect">
             <a:avLst/>
@@ -4666,8 +4666,8 @@
         </p:nvSpPr>
         <p:spPr>
           <a:xfrm>
-            <a:off x="5378501" y="5418734"/>
-            <a:ext cx="513893" cy="258775"/>
+            <a:off x="5311750" y="5415077"/>
+            <a:ext cx="602590" cy="266090"/>
           </a:xfrm>
           <a:prstGeom prst="rect">
             <a:avLst/>
@@ -4683,12 +4683,12 @@
           <a:p>
             <a:pPr algn="l" indent="0" marL="0">
               <a:lnSpc>
-                <a:spcPct val="86000"/>
-              </a:lnSpc>
-              <a:buNone/>
-            </a:pPr>
-            <a:r>
-              <a:rPr lang="en-US" sz="500" b="1" dirty="0">
+                <a:spcPct val="88000"/>
+              </a:lnSpc>
+              <a:buNone/>
+            </a:pPr>
+            <a:r>
+              <a:rPr lang="en-US" sz="435" b="1" dirty="0">
                 <a:solidFill>
                   <a:srgbClr val="202124"/>
                 </a:solidFill>
@@ -4698,17 +4698,17 @@
               </a:rPr>
               <a:t>Shared AlloyDB RLS</a:t>
             </a:r>
-            <a:endParaRPr lang="en-US" sz="500" dirty="0"/>
+            <a:endParaRPr lang="en-US" sz="435" dirty="0"/>
           </a:p>
           <a:p>
             <a:pPr algn="l" indent="0" marL="0">
               <a:lnSpc>
-                <a:spcPct val="86000"/>
-              </a:lnSpc>
-              <a:buNone/>
-            </a:pPr>
-            <a:r>
-              <a:rPr lang="en-US" sz="430" dirty="0">
+                <a:spcPct val="88000"/>
+              </a:lnSpc>
+              <a:buNone/>
+            </a:pPr>
+            <a:r>
+              <a:rPr lang="en-US" sz="375" dirty="0">
                 <a:solidFill>
                   <a:srgbClr val="3C4043"/>
                 </a:solidFill>
@@ -4718,7 +4718,7 @@
               </a:rPr>
               <a:t>Source for Phase 1 Shadow Sync</a:t>
             </a:r>
-            <a:endParaRPr lang="en-US" sz="500" dirty="0"/>
+            <a:endParaRPr lang="en-US" sz="435" dirty="0"/>
           </a:p>
         </p:txBody>
       </p:sp>
@@ -4765,8 +4765,8 @@
         </p:blipFill>
         <p:spPr>
           <a:xfrm>
-            <a:off x="7201814" y="4358030"/>
-            <a:ext cx="177394" cy="177394"/>
+            <a:off x="7188098" y="4377233"/>
+            <a:ext cx="138074" cy="138074"/>
           </a:xfrm>
           <a:prstGeom prst="rect">
             <a:avLst/>
@@ -4781,8 +4781,8 @@
         </p:nvSpPr>
         <p:spPr>
           <a:xfrm>
-            <a:off x="7415784" y="4316882"/>
-            <a:ext cx="513893" cy="258775"/>
+            <a:off x="7349033" y="4313225"/>
+            <a:ext cx="602590" cy="266090"/>
           </a:xfrm>
           <a:prstGeom prst="rect">
             <a:avLst/>
@@ -4798,12 +4798,12 @@
           <a:p>
             <a:pPr algn="l" indent="0" marL="0">
               <a:lnSpc>
-                <a:spcPct val="86000"/>
-              </a:lnSpc>
-              <a:buNone/>
-            </a:pPr>
-            <a:r>
-              <a:rPr lang="en-US" sz="500" b="1" dirty="0">
+                <a:spcPct val="88000"/>
+              </a:lnSpc>
+              <a:buNone/>
+            </a:pPr>
+            <a:r>
+              <a:rPr lang="en-US" sz="435" b="1" dirty="0">
                 <a:solidFill>
                   <a:srgbClr val="202124"/>
                 </a:solidFill>
@@ -4813,17 +4813,17 @@
               </a:rPr>
               <a:t>Spoke Agent Engine</a:t>
             </a:r>
-            <a:endParaRPr lang="en-US" sz="500" dirty="0"/>
+            <a:endParaRPr lang="en-US" sz="435" dirty="0"/>
           </a:p>
           <a:p>
             <a:pPr algn="l" indent="0" marL="0">
               <a:lnSpc>
-                <a:spcPct val="86000"/>
-              </a:lnSpc>
-              <a:buNone/>
-            </a:pPr>
-            <a:r>
-              <a:rPr lang="en-US" sz="430" dirty="0">
+                <a:spcPct val="88000"/>
+              </a:lnSpc>
+              <a:buNone/>
+            </a:pPr>
+            <a:r>
+              <a:rPr lang="en-US" sz="375" dirty="0">
                 <a:solidFill>
                   <a:srgbClr val="3C4043"/>
                 </a:solidFill>
@@ -4833,7 +4833,7 @@
               </a:rPr>
               <a:t>PSC ServiceAttachment Target</a:t>
             </a:r>
-            <a:endParaRPr lang="en-US" sz="500" dirty="0"/>
+            <a:endParaRPr lang="en-US" sz="435" dirty="0"/>
           </a:p>
         </p:txBody>
       </p:sp>
@@ -4880,8 +4880,8 @@
         </p:blipFill>
         <p:spPr>
           <a:xfrm>
-            <a:off x="7201814" y="4897526"/>
-            <a:ext cx="177394" cy="177394"/>
+            <a:off x="7188098" y="4916729"/>
+            <a:ext cx="138074" cy="138074"/>
           </a:xfrm>
           <a:prstGeom prst="rect">
             <a:avLst/>
@@ -4896,8 +4896,8 @@
         </p:nvSpPr>
         <p:spPr>
           <a:xfrm>
-            <a:off x="7415784" y="4856378"/>
-            <a:ext cx="513893" cy="258775"/>
+            <a:off x="7349033" y="4852721"/>
+            <a:ext cx="602590" cy="266090"/>
           </a:xfrm>
           <a:prstGeom prst="rect">
             <a:avLst/>
@@ -4913,12 +4913,12 @@
           <a:p>
             <a:pPr algn="l" indent="0" marL="0">
               <a:lnSpc>
-                <a:spcPct val="86000"/>
-              </a:lnSpc>
-              <a:buNone/>
-            </a:pPr>
-            <a:r>
-              <a:rPr lang="en-US" sz="500" b="1" dirty="0">
+                <a:spcPct val="88000"/>
+              </a:lnSpc>
+              <a:buNone/>
+            </a:pPr>
+            <a:r>
+              <a:rPr lang="en-US" sz="435" b="1" dirty="0">
                 <a:solidFill>
                   <a:srgbClr val="202124"/>
                 </a:solidFill>
@@ -4928,17 +4928,17 @@
               </a:rPr>
               <a:t>Dedicated Spoke MCP</a:t>
             </a:r>
-            <a:endParaRPr lang="en-US" sz="500" dirty="0"/>
+            <a:endParaRPr lang="en-US" sz="435" dirty="0"/>
           </a:p>
           <a:p>
             <a:pPr algn="l" indent="0" marL="0">
               <a:lnSpc>
-                <a:spcPct val="86000"/>
-              </a:lnSpc>
-              <a:buNone/>
-            </a:pPr>
-            <a:r>
-              <a:rPr lang="en-US" sz="430" dirty="0">
+                <a:spcPct val="88000"/>
+              </a:lnSpc>
+              <a:buNone/>
+            </a:pPr>
+            <a:r>
+              <a:rPr lang="en-US" sz="375" dirty="0">
                 <a:solidFill>
                   <a:srgbClr val="3C4043"/>
                 </a:solidFill>
@@ -4948,7 +4948,7 @@
               </a:rPr>
               <a:t>Isolated Inside VPC-SC Spoke</a:t>
             </a:r>
-            <a:endParaRPr lang="en-US" sz="500" dirty="0"/>
+            <a:endParaRPr lang="en-US" sz="435" dirty="0"/>
           </a:p>
         </p:txBody>
       </p:sp>
@@ -4995,8 +4995,8 @@
         </p:blipFill>
         <p:spPr>
           <a:xfrm>
-            <a:off x="7201814" y="5459882"/>
-            <a:ext cx="177394" cy="177394"/>
+            <a:off x="7188098" y="5479085"/>
+            <a:ext cx="138074" cy="138074"/>
           </a:xfrm>
           <a:prstGeom prst="rect">
             <a:avLst/>
@@ -5011,8 +5011,8 @@
         </p:nvSpPr>
         <p:spPr>
           <a:xfrm>
-            <a:off x="7415784" y="5418734"/>
-            <a:ext cx="513893" cy="258775"/>
+            <a:off x="7349033" y="5415077"/>
+            <a:ext cx="602590" cy="266090"/>
           </a:xfrm>
           <a:prstGeom prst="rect">
             <a:avLst/>
@@ -5028,12 +5028,12 @@
           <a:p>
             <a:pPr algn="l" indent="0" marL="0">
               <a:lnSpc>
-                <a:spcPct val="86000"/>
-              </a:lnSpc>
-              <a:buNone/>
-            </a:pPr>
-            <a:r>
-              <a:rPr lang="en-US" sz="500" b="1" dirty="0">
+                <a:spcPct val="88000"/>
+              </a:lnSpc>
+              <a:buNone/>
+            </a:pPr>
+            <a:r>
+              <a:rPr lang="en-US" sz="435" b="1" dirty="0">
                 <a:solidFill>
                   <a:srgbClr val="202124"/>
                 </a:solidFill>
@@ -5043,17 +5043,17 @@
               </a:rPr>
               <a:t>CMEK Spoke AlloyDB</a:t>
             </a:r>
-            <a:endParaRPr lang="en-US" sz="500" dirty="0"/>
+            <a:endParaRPr lang="en-US" sz="435" dirty="0"/>
           </a:p>
           <a:p>
             <a:pPr algn="l" indent="0" marL="0">
               <a:lnSpc>
-                <a:spcPct val="86000"/>
-              </a:lnSpc>
-              <a:buNone/>
-            </a:pPr>
-            <a:r>
-              <a:rPr lang="en-US" sz="430" dirty="0">
+                <a:spcPct val="88000"/>
+              </a:lnSpc>
+              <a:buNone/>
+            </a:pPr>
+            <a:r>
+              <a:rPr lang="en-US" sz="375" dirty="0">
                 <a:solidFill>
                   <a:srgbClr val="3C4043"/>
                 </a:solidFill>
@@ -5063,7 +5063,7 @@
               </a:rPr>
               <a:t>Replicated State + CMEK Lock</a:t>
             </a:r>
-            <a:endParaRPr lang="en-US" sz="500" dirty="0"/>
+            <a:endParaRPr lang="en-US" sz="435" dirty="0"/>
           </a:p>
         </p:txBody>
       </p:sp>
@@ -5110,8 +5110,8 @@
         </p:blipFill>
         <p:spPr>
           <a:xfrm>
-            <a:off x="5666537" y="3065069"/>
-            <a:ext cx="158191" cy="158191"/>
+            <a:off x="5652821" y="3081528"/>
+            <a:ext cx="123444" cy="123444"/>
           </a:xfrm>
           <a:prstGeom prst="rect">
             <a:avLst/>
@@ -5126,8 +5126,8 @@
         </p:nvSpPr>
         <p:spPr>
           <a:xfrm>
-            <a:off x="5861304" y="3029407"/>
-            <a:ext cx="570586" cy="228600"/>
+            <a:off x="5799125" y="3025750"/>
+            <a:ext cx="655625" cy="235915"/>
           </a:xfrm>
           <a:prstGeom prst="rect">
             <a:avLst/>
@@ -5143,12 +5143,12 @@
           <a:p>
             <a:pPr algn="l" indent="0" marL="0">
               <a:lnSpc>
-                <a:spcPct val="86000"/>
-              </a:lnSpc>
-              <a:buNone/>
-            </a:pPr>
-            <a:r>
-              <a:rPr lang="en-US" sz="500" b="1" dirty="0">
+                <a:spcPct val="88000"/>
+              </a:lnSpc>
+              <a:buNone/>
+            </a:pPr>
+            <a:r>
+              <a:rPr lang="en-US" sz="435" b="1" dirty="0">
                 <a:solidFill>
                   <a:srgbClr val="202124"/>
                 </a:solidFill>
@@ -5158,17 +5158,17 @@
               </a:rPr>
               <a:t>Cloud Run Router</a:t>
             </a:r>
-            <a:endParaRPr lang="en-US" sz="500" dirty="0"/>
+            <a:endParaRPr lang="en-US" sz="435" dirty="0"/>
           </a:p>
           <a:p>
             <a:pPr algn="l" indent="0" marL="0">
               <a:lnSpc>
-                <a:spcPct val="86000"/>
-              </a:lnSpc>
-              <a:buNone/>
-            </a:pPr>
-            <a:r>
-              <a:rPr lang="en-US" sz="430" dirty="0">
+                <a:spcPct val="88000"/>
+              </a:lnSpc>
+              <a:buNone/>
+            </a:pPr>
+            <a:r>
+              <a:rPr lang="en-US" sz="375" dirty="0">
                 <a:solidFill>
                   <a:srgbClr val="3C4043"/>
                 </a:solidFill>
@@ -5178,7 +5178,7 @@
               </a:rPr>
               <a:t>Tier Router &amp; Live Migrator</a:t>
             </a:r>
-            <a:endParaRPr lang="en-US" sz="500" dirty="0"/>
+            <a:endParaRPr lang="en-US" sz="435" dirty="0"/>
           </a:p>
         </p:txBody>
       </p:sp>
@@ -5225,8 +5225,8 @@
         </p:blipFill>
         <p:spPr>
           <a:xfrm>
-            <a:off x="4243730" y="4169664"/>
-            <a:ext cx="172822" cy="172822"/>
+            <a:off x="4230014" y="4190695"/>
+            <a:ext cx="130759" cy="130759"/>
           </a:xfrm>
           <a:prstGeom prst="rect">
             <a:avLst/>
@@ -5241,8 +5241,8 @@
         </p:nvSpPr>
         <p:spPr>
           <a:xfrm>
-            <a:off x="4453128" y="4130345"/>
-            <a:ext cx="444398" cy="251460"/>
+            <a:off x="4383634" y="4126687"/>
+            <a:ext cx="536753" cy="258775"/>
           </a:xfrm>
           <a:prstGeom prst="rect">
             <a:avLst/>
@@ -5258,12 +5258,12 @@
           <a:p>
             <a:pPr algn="l" indent="0" marL="0">
               <a:lnSpc>
-                <a:spcPct val="86000"/>
-              </a:lnSpc>
-              <a:buNone/>
-            </a:pPr>
-            <a:r>
-              <a:rPr lang="en-US" sz="500" b="1" dirty="0">
+                <a:spcPct val="88000"/>
+              </a:lnSpc>
+              <a:buNone/>
+            </a:pPr>
+            <a:r>
+              <a:rPr lang="en-US" sz="435" b="1" dirty="0">
                 <a:solidFill>
                   <a:srgbClr val="202124"/>
                 </a:solidFill>
@@ -5273,17 +5273,17 @@
               </a:rPr>
               <a:t>Shared Model Armor</a:t>
             </a:r>
-            <a:endParaRPr lang="en-US" sz="500" dirty="0"/>
+            <a:endParaRPr lang="en-US" sz="435" dirty="0"/>
           </a:p>
           <a:p>
             <a:pPr algn="l" indent="0" marL="0">
               <a:lnSpc>
-                <a:spcPct val="86000"/>
-              </a:lnSpc>
-              <a:buNone/>
-            </a:pPr>
-            <a:r>
-              <a:rPr lang="en-US" sz="430" dirty="0">
+                <a:spcPct val="88000"/>
+              </a:lnSpc>
+              <a:buNone/>
+            </a:pPr>
+            <a:r>
+              <a:rPr lang="en-US" sz="375" dirty="0">
                 <a:solidFill>
                   <a:srgbClr val="3C4043"/>
                 </a:solidFill>
@@ -5293,7 +5293,7 @@
               </a:rPr>
               <a:t>Multi-Tenant Prompt &amp; SDP</a:t>
             </a:r>
-            <a:endParaRPr lang="en-US" sz="500" dirty="0"/>
+            <a:endParaRPr lang="en-US" sz="435" dirty="0"/>
           </a:p>
         </p:txBody>
       </p:sp>
@@ -5340,8 +5340,8 @@
         </p:blipFill>
         <p:spPr>
           <a:xfrm>
-            <a:off x="4243730" y="5052974"/>
-            <a:ext cx="172822" cy="172822"/>
+            <a:off x="4230014" y="5074006"/>
+            <a:ext cx="130759" cy="130759"/>
           </a:xfrm>
           <a:prstGeom prst="rect">
             <a:avLst/>
@@ -5356,8 +5356,8 @@
         </p:nvSpPr>
         <p:spPr>
           <a:xfrm>
-            <a:off x="4453128" y="5013655"/>
-            <a:ext cx="444398" cy="251460"/>
+            <a:off x="4383634" y="5009998"/>
+            <a:ext cx="536753" cy="258775"/>
           </a:xfrm>
           <a:prstGeom prst="rect">
             <a:avLst/>
@@ -5373,12 +5373,12 @@
           <a:p>
             <a:pPr algn="l" indent="0" marL="0">
               <a:lnSpc>
-                <a:spcPct val="86000"/>
-              </a:lnSpc>
-              <a:buNone/>
-            </a:pPr>
-            <a:r>
-              <a:rPr lang="en-US" sz="500" b="1" dirty="0">
+                <a:spcPct val="88000"/>
+              </a:lnSpc>
+              <a:buNone/>
+            </a:pPr>
+            <a:r>
+              <a:rPr lang="en-US" sz="435" b="1" dirty="0">
                 <a:solidFill>
                   <a:srgbClr val="202124"/>
                 </a:solidFill>
@@ -5388,17 +5388,17 @@
               </a:rPr>
               <a:t>Gemini 2.5 Pro</a:t>
             </a:r>
-            <a:endParaRPr lang="en-US" sz="500" dirty="0"/>
+            <a:endParaRPr lang="en-US" sz="435" dirty="0"/>
           </a:p>
           <a:p>
             <a:pPr algn="l" indent="0" marL="0">
               <a:lnSpc>
-                <a:spcPct val="86000"/>
-              </a:lnSpc>
-              <a:buNone/>
-            </a:pPr>
-            <a:r>
-              <a:rPr lang="en-US" sz="430" dirty="0">
+                <a:spcPct val="88000"/>
+              </a:lnSpc>
+              <a:buNone/>
+            </a:pPr>
+            <a:r>
+              <a:rPr lang="en-US" sz="375" dirty="0">
                 <a:solidFill>
                   <a:srgbClr val="3C4043"/>
                 </a:solidFill>
@@ -5408,7 +5408,7 @@
               </a:rPr>
               <a:t>4,000 Thinking Cap + Cache</a:t>
             </a:r>
-            <a:endParaRPr lang="en-US" sz="500" dirty="0"/>
+            <a:endParaRPr lang="en-US" sz="435" dirty="0"/>
           </a:p>
         </p:txBody>
       </p:sp>
@@ -5455,8 +5455,8 @@
         </p:blipFill>
         <p:spPr>
           <a:xfrm>
-            <a:off x="6281014" y="4169664"/>
-            <a:ext cx="172822" cy="172822"/>
+            <a:off x="6267298" y="4190695"/>
+            <a:ext cx="130759" cy="130759"/>
           </a:xfrm>
           <a:prstGeom prst="rect">
             <a:avLst/>
@@ -5471,8 +5471,8 @@
         </p:nvSpPr>
         <p:spPr>
           <a:xfrm>
-            <a:off x="6490411" y="4130345"/>
-            <a:ext cx="444398" cy="251460"/>
+            <a:off x="6420917" y="4126687"/>
+            <a:ext cx="536753" cy="258775"/>
           </a:xfrm>
           <a:prstGeom prst="rect">
             <a:avLst/>
@@ -5488,12 +5488,12 @@
           <a:p>
             <a:pPr algn="l" indent="0" marL="0">
               <a:lnSpc>
-                <a:spcPct val="86000"/>
-              </a:lnSpc>
-              <a:buNone/>
-            </a:pPr>
-            <a:r>
-              <a:rPr lang="en-US" sz="500" b="1" dirty="0">
+                <a:spcPct val="88000"/>
+              </a:lnSpc>
+              <a:buNone/>
+            </a:pPr>
+            <a:r>
+              <a:rPr lang="en-US" sz="435" b="1" dirty="0">
                 <a:solidFill>
                   <a:srgbClr val="202124"/>
                 </a:solidFill>
@@ -5503,17 +5503,17 @@
               </a:rPr>
               <a:t>PSC ServiceAttachment</a:t>
             </a:r>
-            <a:endParaRPr lang="en-US" sz="500" dirty="0"/>
+            <a:endParaRPr lang="en-US" sz="435" dirty="0"/>
           </a:p>
           <a:p>
             <a:pPr algn="l" indent="0" marL="0">
               <a:lnSpc>
-                <a:spcPct val="86000"/>
-              </a:lnSpc>
-              <a:buNone/>
-            </a:pPr>
-            <a:r>
-              <a:rPr lang="en-US" sz="430" dirty="0">
+                <a:spcPct val="88000"/>
+              </a:lnSpc>
+              <a:buNone/>
+            </a:pPr>
+            <a:r>
+              <a:rPr lang="en-US" sz="375" dirty="0">
                 <a:solidFill>
                   <a:srgbClr val="3C4043"/>
                 </a:solidFill>
@@ -5523,7 +5523,7 @@
               </a:rPr>
               <a:t>Unidirectional Spoke Ingress</a:t>
             </a:r>
-            <a:endParaRPr lang="en-US" sz="500" dirty="0"/>
+            <a:endParaRPr lang="en-US" sz="435" dirty="0"/>
           </a:p>
         </p:txBody>
       </p:sp>
@@ -5570,8 +5570,8 @@
         </p:blipFill>
         <p:spPr>
           <a:xfrm>
-            <a:off x="6281014" y="4550969"/>
-            <a:ext cx="172822" cy="172822"/>
+            <a:off x="6267298" y="4572000"/>
+            <a:ext cx="130759" cy="130759"/>
           </a:xfrm>
           <a:prstGeom prst="rect">
             <a:avLst/>
@@ -5586,8 +5586,8 @@
         </p:nvSpPr>
         <p:spPr>
           <a:xfrm>
-            <a:off x="6490411" y="4511650"/>
-            <a:ext cx="444398" cy="251460"/>
+            <a:off x="6420917" y="4507992"/>
+            <a:ext cx="536753" cy="258775"/>
           </a:xfrm>
           <a:prstGeom prst="rect">
             <a:avLst/>
@@ -5603,12 +5603,12 @@
           <a:p>
             <a:pPr algn="l" indent="0" marL="0">
               <a:lnSpc>
-                <a:spcPct val="86000"/>
-              </a:lnSpc>
-              <a:buNone/>
-            </a:pPr>
-            <a:r>
-              <a:rPr lang="en-US" sz="500" b="1" dirty="0">
+                <a:spcPct val="88000"/>
+              </a:lnSpc>
+              <a:buNone/>
+            </a:pPr>
+            <a:r>
+              <a:rPr lang="en-US" sz="435" b="1" dirty="0">
                 <a:solidFill>
                   <a:srgbClr val="202124"/>
                 </a:solidFill>
@@ -5618,17 +5618,17 @@
               </a:rPr>
               <a:t>Gemini &amp; Claude 3.7</a:t>
             </a:r>
-            <a:endParaRPr lang="en-US" sz="500" dirty="0"/>
+            <a:endParaRPr lang="en-US" sz="435" dirty="0"/>
           </a:p>
           <a:p>
             <a:pPr algn="l" indent="0" marL="0">
               <a:lnSpc>
-                <a:spcPct val="86000"/>
-              </a:lnSpc>
-              <a:buNone/>
-            </a:pPr>
-            <a:r>
-              <a:rPr lang="en-US" sz="430" dirty="0">
+                <a:spcPct val="88000"/>
+              </a:lnSpc>
+              <a:buNone/>
+            </a:pPr>
+            <a:r>
+              <a:rPr lang="en-US" sz="375" dirty="0">
                 <a:solidFill>
                   <a:srgbClr val="3C4043"/>
                 </a:solidFill>
@@ -5638,7 +5638,7 @@
               </a:rPr>
               <a:t>Upgraded 8,000 Thinking Cap</a:t>
             </a:r>
-            <a:endParaRPr lang="en-US" sz="500" dirty="0"/>
+            <a:endParaRPr lang="en-US" sz="435" dirty="0"/>
           </a:p>
         </p:txBody>
       </p:sp>
@@ -5685,8 +5685,8 @@
         </p:blipFill>
         <p:spPr>
           <a:xfrm>
-            <a:off x="4213555" y="2382926"/>
-            <a:ext cx="158191" cy="158191"/>
+            <a:off x="4199839" y="2399386"/>
+            <a:ext cx="123444" cy="123444"/>
           </a:xfrm>
           <a:prstGeom prst="rect">
             <a:avLst/>
@@ -5701,8 +5701,8 @@
         </p:nvSpPr>
         <p:spPr>
           <a:xfrm>
-            <a:off x="4408322" y="2347265"/>
-            <a:ext cx="496519" cy="228600"/>
+            <a:off x="4346143" y="2343607"/>
+            <a:ext cx="581558" cy="235915"/>
           </a:xfrm>
           <a:prstGeom prst="rect">
             <a:avLst/>
@@ -5718,32 +5718,32 @@
           <a:p>
             <a:pPr algn="l" indent="0" marL="0">
               <a:lnSpc>
-                <a:spcPct val="86000"/>
-              </a:lnSpc>
-              <a:buNone/>
-            </a:pPr>
-            <a:r>
-              <a:rPr lang="en-US" sz="500" b="1" dirty="0">
-                <a:solidFill>
-                  <a:srgbClr val="202124"/>
-                </a:solidFill>
-                <a:latin typeface="Arial" pitchFamily="34" charset="0"/>
-                <a:ea typeface="Arial" pitchFamily="34" charset="-122"/>
-                <a:cs typeface="Arial" pitchFamily="34" charset="-120"/>
-              </a:rPr>
-              <a:t>Cloud Armor &amp; IAP</a:t>
-            </a:r>
-            <a:endParaRPr lang="en-US" sz="500" dirty="0"/>
+                <a:spcPct val="88000"/>
+              </a:lnSpc>
+              <a:buNone/>
+            </a:pPr>
+            <a:r>
+              <a:rPr lang="en-US" sz="435" b="1" dirty="0">
+                <a:solidFill>
+                  <a:srgbClr val="202124"/>
+                </a:solidFill>
+                <a:latin typeface="Arial" pitchFamily="34" charset="0"/>
+                <a:ea typeface="Arial" pitchFamily="34" charset="-122"/>
+                <a:cs typeface="Arial" pitchFamily="34" charset="-120"/>
+              </a:rPr>
+              <a:t>Google Cloud Armor</a:t>
+            </a:r>
+            <a:endParaRPr lang="en-US" sz="435" dirty="0"/>
           </a:p>
           <a:p>
             <a:pPr algn="l" indent="0" marL="0">
               <a:lnSpc>
-                <a:spcPct val="86000"/>
-              </a:lnSpc>
-              <a:buNone/>
-            </a:pPr>
-            <a:r>
-              <a:rPr lang="en-US" sz="430" dirty="0">
+                <a:spcPct val="88000"/>
+              </a:lnSpc>
+              <a:buNone/>
+            </a:pPr>
+            <a:r>
+              <a:rPr lang="en-US" sz="375" dirty="0">
                 <a:solidFill>
                   <a:srgbClr val="3C4043"/>
                 </a:solidFill>
@@ -5751,9 +5751,9 @@
                 <a:ea typeface="Arial" pitchFamily="34" charset="-122"/>
                 <a:cs typeface="Arial" pitchFamily="34" charset="-120"/>
               </a:rPr>
-              <a:t>Single SaaS URL + OBO/DPoP</a:t>
-            </a:r>
-            <a:endParaRPr lang="en-US" sz="500" dirty="0"/>
+              <a:t>WAF &amp; IAP (Single SaaS URL)</a:t>
+            </a:r>
+            <a:endParaRPr lang="en-US" sz="435" dirty="0"/>
           </a:p>
         </p:txBody>
       </p:sp>
@@ -5800,8 +5800,8 @@
         </p:blipFill>
         <p:spPr>
           <a:xfrm>
-            <a:off x="4213555" y="2697480"/>
-            <a:ext cx="158191" cy="158191"/>
+            <a:off x="4199839" y="2713939"/>
+            <a:ext cx="123444" cy="123444"/>
           </a:xfrm>
           <a:prstGeom prst="rect">
             <a:avLst/>
@@ -5816,8 +5816,8 @@
         </p:nvSpPr>
         <p:spPr>
           <a:xfrm>
-            <a:off x="4408322" y="2661818"/>
-            <a:ext cx="496519" cy="228600"/>
+            <a:off x="4346143" y="2658161"/>
+            <a:ext cx="581558" cy="235915"/>
           </a:xfrm>
           <a:prstGeom prst="rect">
             <a:avLst/>
@@ -5833,12 +5833,12 @@
           <a:p>
             <a:pPr algn="l" indent="0" marL="0">
               <a:lnSpc>
-                <a:spcPct val="86000"/>
-              </a:lnSpc>
-              <a:buNone/>
-            </a:pPr>
-            <a:r>
-              <a:rPr lang="en-US" sz="500" b="1" dirty="0">
+                <a:spcPct val="88000"/>
+              </a:lnSpc>
+              <a:buNone/>
+            </a:pPr>
+            <a:r>
+              <a:rPr lang="en-US" sz="435" b="1" dirty="0">
                 <a:solidFill>
                   <a:srgbClr val="202124"/>
                 </a:solidFill>
@@ -5848,17 +5848,17 @@
               </a:rPr>
               <a:t>Cross-Project Catalog</a:t>
             </a:r>
-            <a:endParaRPr lang="en-US" sz="500" dirty="0"/>
+            <a:endParaRPr lang="en-US" sz="435" dirty="0"/>
           </a:p>
           <a:p>
             <a:pPr algn="l" indent="0" marL="0">
               <a:lnSpc>
-                <a:spcPct val="86000"/>
-              </a:lnSpc>
-              <a:buNone/>
-            </a:pPr>
-            <a:r>
-              <a:rPr lang="en-US" sz="430" dirty="0">
+                <a:spcPct val="88000"/>
+              </a:lnSpc>
+              <a:buNone/>
+            </a:pPr>
+            <a:r>
+              <a:rPr lang="en-US" sz="375" dirty="0">
                 <a:solidFill>
                   <a:srgbClr val="3C4043"/>
                 </a:solidFill>
@@ -5868,7 +5868,7 @@
               </a:rPr>
               <a:t>Federated Agent Catalog</a:t>
             </a:r>
-            <a:endParaRPr lang="en-US" sz="500" dirty="0"/>
+            <a:endParaRPr lang="en-US" sz="435" dirty="0"/>
           </a:p>
         </p:txBody>
       </p:sp>
@@ -5915,8 +5915,8 @@
         </p:blipFill>
         <p:spPr>
           <a:xfrm>
-            <a:off x="4243730" y="3065069"/>
-            <a:ext cx="158191" cy="158191"/>
+            <a:off x="4230014" y="3081528"/>
+            <a:ext cx="123444" cy="123444"/>
           </a:xfrm>
           <a:prstGeom prst="rect">
             <a:avLst/>
@@ -5931,8 +5931,8 @@
         </p:nvSpPr>
         <p:spPr>
           <a:xfrm>
-            <a:off x="4438498" y="3029407"/>
-            <a:ext cx="466344" cy="228600"/>
+            <a:off x="4376318" y="3025750"/>
+            <a:ext cx="551383" cy="235915"/>
           </a:xfrm>
           <a:prstGeom prst="rect">
             <a:avLst/>
@@ -5948,12 +5948,12 @@
           <a:p>
             <a:pPr algn="l" indent="0" marL="0">
               <a:lnSpc>
-                <a:spcPct val="86000"/>
-              </a:lnSpc>
-              <a:buNone/>
-            </a:pPr>
-            <a:r>
-              <a:rPr lang="en-US" sz="500" b="1" dirty="0">
+                <a:spcPct val="88000"/>
+              </a:lnSpc>
+              <a:buNone/>
+            </a:pPr>
+            <a:r>
+              <a:rPr lang="en-US" sz="435" b="1" dirty="0">
                 <a:solidFill>
                   <a:srgbClr val="202124"/>
                 </a:solidFill>
@@ -5963,17 +5963,17 @@
               </a:rPr>
               <a:t>Firestore Route Table</a:t>
             </a:r>
-            <a:endParaRPr lang="en-US" sz="500" dirty="0"/>
+            <a:endParaRPr lang="en-US" sz="435" dirty="0"/>
           </a:p>
           <a:p>
             <a:pPr algn="l" indent="0" marL="0">
               <a:lnSpc>
-                <a:spcPct val="86000"/>
-              </a:lnSpc>
-              <a:buNone/>
-            </a:pPr>
-            <a:r>
-              <a:rPr lang="en-US" sz="430" dirty="0">
+                <a:spcPct val="88000"/>
+              </a:lnSpc>
+              <a:buNone/>
+            </a:pPr>
+            <a:r>
+              <a:rPr lang="en-US" sz="375" dirty="0">
                 <a:solidFill>
                   <a:srgbClr val="3C4043"/>
                 </a:solidFill>
@@ -5983,981 +5983,13 @@
               </a:rPr>
               <a:t>Maps Tenant -&gt; Pool or PSC</a:t>
             </a:r>
-            <a:endParaRPr lang="en-US" sz="500" dirty="0"/>
-          </a:p>
-        </p:txBody>
-      </p:sp>
-      <p:sp>
-        <p:nvSpPr>
-          <p:cNvPr id="129" name="Text 107"/>
-          <p:cNvSpPr/>
-          <p:nvPr/>
-        </p:nvSpPr>
-        <p:spPr>
-          <a:xfrm>
-            <a:off x="7541057" y="3373222"/>
-            <a:ext cx="546811" cy="161849"/>
-          </a:xfrm>
-          <a:prstGeom prst="rect">
-            <a:avLst/>
-          </a:prstGeom>
-          <a:noFill/>
-          <a:ln/>
-        </p:spPr>
-        <p:txBody>
-          <a:bodyPr wrap="square" lIns="0" tIns="0" rIns="0" bIns="0" rtlCol="0" anchor="ctr">
-            <a:normAutofit/>
-          </a:bodyPr>
-          <a:lstStyle/>
-          <a:p>
-            <a:pPr algn="l" indent="0" marL="0">
-              <a:lnSpc>
-                <a:spcPct val="88000"/>
-              </a:lnSpc>
-              <a:buNone/>
-            </a:pPr>
-            <a:r>
-              <a:rPr lang="en-US" sz="500" b="1" dirty="0">
-                <a:solidFill>
-                  <a:srgbClr val="202124"/>
-                </a:solidFill>
-                <a:latin typeface="Arial" pitchFamily="34" charset="0"/>
-                <a:ea typeface="Arial" pitchFamily="34" charset="-122"/>
-                <a:cs typeface="Arial" pitchFamily="34" charset="-120"/>
-              </a:rPr>
-              <a:t>Live promotion:</a:t>
-            </a:r>
-            <a:endParaRPr lang="en-US" sz="500" dirty="0"/>
-          </a:p>
-          <a:p>
-            <a:pPr algn="l" indent="0" marL="0">
-              <a:lnSpc>
-                <a:spcPct val="88000"/>
-              </a:lnSpc>
-              <a:buNone/>
-            </a:pPr>
-            <a:r>
-              <a:rPr lang="en-US" sz="440" dirty="0">
-                <a:solidFill>
-                  <a:srgbClr val="202124"/>
-                </a:solidFill>
-                <a:latin typeface="Arial" pitchFamily="34" charset="0"/>
-                <a:ea typeface="Arial" pitchFamily="34" charset="-122"/>
-                <a:cs typeface="Arial" pitchFamily="34" charset="-120"/>
-              </a:rPr>
-              <a:t>Pool -&gt; PSC Spoke</a:t>
-            </a:r>
-            <a:endParaRPr lang="en-US" sz="500" dirty="0"/>
-          </a:p>
-        </p:txBody>
-      </p:sp>
-      <p:sp>
-        <p:nvSpPr>
-          <p:cNvPr id="130" name="Text 108"/>
-          <p:cNvSpPr/>
-          <p:nvPr/>
-        </p:nvSpPr>
-        <p:spPr>
-          <a:xfrm>
-            <a:off x="5237683" y="4654296"/>
-            <a:ext cx="591617" cy="124358"/>
-          </a:xfrm>
-          <a:prstGeom prst="rect">
-            <a:avLst/>
-          </a:prstGeom>
-          <a:noFill/>
-          <a:ln/>
-        </p:spPr>
-        <p:txBody>
-          <a:bodyPr wrap="square" lIns="0" tIns="0" rIns="0" bIns="0" rtlCol="0" anchor="ctr">
-            <a:normAutofit/>
-          </a:bodyPr>
-          <a:lstStyle/>
-          <a:p>
-            <a:pPr algn="ctr" indent="0" marL="0">
-              <a:lnSpc>
-                <a:spcPct val="88000"/>
-              </a:lnSpc>
-              <a:buNone/>
-            </a:pPr>
-            <a:r>
-              <a:rPr lang="en-US" sz="500" b="1" dirty="0">
-                <a:solidFill>
-                  <a:srgbClr val="202124"/>
-                </a:solidFill>
-                <a:latin typeface="Arial" pitchFamily="34" charset="0"/>
-                <a:ea typeface="Arial" pitchFamily="34" charset="-122"/>
-                <a:cs typeface="Arial" pitchFamily="34" charset="-120"/>
-              </a:rPr>
-              <a:t>Shared Pool</a:t>
-            </a:r>
-            <a:endParaRPr lang="en-US" sz="500" dirty="0"/>
-          </a:p>
-          <a:p>
-            <a:pPr algn="ctr" indent="0" marL="0">
-              <a:lnSpc>
-                <a:spcPct val="88000"/>
-              </a:lnSpc>
-              <a:buNone/>
-            </a:pPr>
-            <a:r>
-              <a:rPr lang="en-US" sz="440" dirty="0">
-                <a:solidFill>
-                  <a:srgbClr val="202124"/>
-                </a:solidFill>
-                <a:latin typeface="Arial" pitchFamily="34" charset="0"/>
-                <a:ea typeface="Arial" pitchFamily="34" charset="-122"/>
-                <a:cs typeface="Arial" pitchFamily="34" charset="-120"/>
-              </a:rPr>
-              <a:t>RAG</a:t>
-            </a:r>
-            <a:endParaRPr lang="en-US" sz="500" dirty="0"/>
-          </a:p>
-        </p:txBody>
-      </p:sp>
-      <p:sp>
-        <p:nvSpPr>
-          <p:cNvPr id="131" name="Text 109"/>
-          <p:cNvSpPr/>
-          <p:nvPr/>
-        </p:nvSpPr>
-        <p:spPr>
-          <a:xfrm>
-            <a:off x="5237683" y="5201107"/>
-            <a:ext cx="591617" cy="124358"/>
-          </a:xfrm>
-          <a:prstGeom prst="rect">
-            <a:avLst/>
-          </a:prstGeom>
-          <a:noFill/>
-          <a:ln/>
-        </p:spPr>
-        <p:txBody>
-          <a:bodyPr wrap="square" lIns="0" tIns="0" rIns="0" bIns="0" rtlCol="0" anchor="ctr">
-            <a:normAutofit/>
-          </a:bodyPr>
-          <a:lstStyle/>
-          <a:p>
-            <a:pPr algn="ctr" indent="0" marL="0">
-              <a:lnSpc>
-                <a:spcPct val="88000"/>
-              </a:lnSpc>
-              <a:buNone/>
-            </a:pPr>
-            <a:r>
-              <a:rPr lang="en-US" sz="500" b="1" dirty="0">
-                <a:solidFill>
-                  <a:srgbClr val="202124"/>
-                </a:solidFill>
-                <a:latin typeface="Arial" pitchFamily="34" charset="0"/>
-                <a:ea typeface="Arial" pitchFamily="34" charset="-122"/>
-                <a:cs typeface="Arial" pitchFamily="34" charset="-120"/>
-              </a:rPr>
-              <a:t>Streams State to</a:t>
-            </a:r>
-            <a:endParaRPr lang="en-US" sz="500" dirty="0"/>
-          </a:p>
-          <a:p>
-            <a:pPr algn="ctr" indent="0" marL="0">
-              <a:lnSpc>
-                <a:spcPct val="88000"/>
-              </a:lnSpc>
-              <a:buNone/>
-            </a:pPr>
-            <a:r>
-              <a:rPr lang="en-US" sz="440" dirty="0">
-                <a:solidFill>
-                  <a:srgbClr val="202124"/>
-                </a:solidFill>
-                <a:latin typeface="Arial" pitchFamily="34" charset="0"/>
-                <a:ea typeface="Arial" pitchFamily="34" charset="-122"/>
-                <a:cs typeface="Arial" pitchFamily="34" charset="-120"/>
-              </a:rPr>
-              <a:t>PSC Spoke</a:t>
-            </a:r>
-            <a:endParaRPr lang="en-US" sz="500" dirty="0"/>
-          </a:p>
-        </p:txBody>
-      </p:sp>
-      <p:sp>
-        <p:nvSpPr>
-          <p:cNvPr id="132" name="Text 110"/>
-          <p:cNvSpPr/>
-          <p:nvPr/>
-        </p:nvSpPr>
-        <p:spPr>
-          <a:xfrm>
-            <a:off x="7274966" y="4654296"/>
-            <a:ext cx="591617" cy="124358"/>
-          </a:xfrm>
-          <a:prstGeom prst="rect">
-            <a:avLst/>
-          </a:prstGeom>
-          <a:noFill/>
-          <a:ln/>
-        </p:spPr>
-        <p:txBody>
-          <a:bodyPr wrap="square" lIns="0" tIns="0" rIns="0" bIns="0" rtlCol="0" anchor="ctr">
-            <a:normAutofit/>
-          </a:bodyPr>
-          <a:lstStyle/>
-          <a:p>
-            <a:pPr algn="ctr" indent="0" marL="0">
-              <a:lnSpc>
-                <a:spcPct val="88000"/>
-              </a:lnSpc>
-              <a:buNone/>
-            </a:pPr>
-            <a:r>
-              <a:rPr lang="en-US" sz="500" b="1" dirty="0">
-                <a:solidFill>
-                  <a:srgbClr val="202124"/>
-                </a:solidFill>
-                <a:latin typeface="Arial" pitchFamily="34" charset="0"/>
-                <a:ea typeface="Arial" pitchFamily="34" charset="-122"/>
-                <a:cs typeface="Arial" pitchFamily="34" charset="-120"/>
-              </a:rPr>
-              <a:t>Unidirectional</a:t>
-            </a:r>
-            <a:endParaRPr lang="en-US" sz="500" dirty="0"/>
-          </a:p>
-          <a:p>
-            <a:pPr algn="ctr" indent="0" marL="0">
-              <a:lnSpc>
-                <a:spcPct val="88000"/>
-              </a:lnSpc>
-              <a:buNone/>
-            </a:pPr>
-            <a:r>
-              <a:rPr lang="en-US" sz="440" dirty="0">
-                <a:solidFill>
-                  <a:srgbClr val="202124"/>
-                </a:solidFill>
-                <a:latin typeface="Arial" pitchFamily="34" charset="0"/>
-                <a:ea typeface="Arial" pitchFamily="34" charset="-122"/>
-                <a:cs typeface="Arial" pitchFamily="34" charset="-120"/>
-              </a:rPr>
-              <a:t>PSC Bridge</a:t>
-            </a:r>
-            <a:endParaRPr lang="en-US" sz="500" dirty="0"/>
-          </a:p>
-        </p:txBody>
-      </p:sp>
-      <p:sp>
-        <p:nvSpPr>
-          <p:cNvPr id="133" name="Text 111"/>
-          <p:cNvSpPr/>
-          <p:nvPr/>
-        </p:nvSpPr>
-        <p:spPr>
-          <a:xfrm>
-            <a:off x="7274966" y="5201107"/>
-            <a:ext cx="591617" cy="124358"/>
-          </a:xfrm>
-          <a:prstGeom prst="rect">
-            <a:avLst/>
-          </a:prstGeom>
-          <a:noFill/>
-          <a:ln/>
-        </p:spPr>
-        <p:txBody>
-          <a:bodyPr wrap="square" lIns="0" tIns="0" rIns="0" bIns="0" rtlCol="0" anchor="ctr">
-            <a:normAutofit/>
-          </a:bodyPr>
-          <a:lstStyle/>
-          <a:p>
-            <a:pPr algn="ctr" indent="0" marL="0">
-              <a:lnSpc>
-                <a:spcPct val="88000"/>
-              </a:lnSpc>
-              <a:buNone/>
-            </a:pPr>
-            <a:r>
-              <a:rPr lang="en-US" sz="500" b="1" dirty="0">
-                <a:solidFill>
-                  <a:srgbClr val="202124"/>
-                </a:solidFill>
-                <a:latin typeface="Arial" pitchFamily="34" charset="0"/>
-                <a:ea typeface="Arial" pitchFamily="34" charset="-122"/>
-                <a:cs typeface="Arial" pitchFamily="34" charset="-120"/>
-              </a:rPr>
-              <a:t>CMEK-Encrypted</a:t>
-            </a:r>
-            <a:endParaRPr lang="en-US" sz="500" dirty="0"/>
-          </a:p>
-          <a:p>
-            <a:pPr algn="ctr" indent="0" marL="0">
-              <a:lnSpc>
-                <a:spcPct val="88000"/>
-              </a:lnSpc>
-              <a:buNone/>
-            </a:pPr>
-            <a:r>
-              <a:rPr lang="en-US" sz="440" dirty="0">
-                <a:solidFill>
-                  <a:srgbClr val="202124"/>
-                </a:solidFill>
-                <a:latin typeface="Arial" pitchFamily="34" charset="0"/>
-                <a:ea typeface="Arial" pitchFamily="34" charset="-122"/>
-                <a:cs typeface="Arial" pitchFamily="34" charset="-120"/>
-              </a:rPr>
-              <a:t>Spoke Storage</a:t>
-            </a:r>
-            <a:endParaRPr lang="en-US" sz="500" dirty="0"/>
-          </a:p>
-        </p:txBody>
-      </p:sp>
-      <p:sp>
-        <p:nvSpPr>
-          <p:cNvPr id="134" name="Text 112"/>
-          <p:cNvSpPr/>
-          <p:nvPr/>
-        </p:nvSpPr>
-        <p:spPr>
-          <a:xfrm>
-            <a:off x="4432097" y="5328209"/>
-            <a:ext cx="509321" cy="131674"/>
-          </a:xfrm>
-          <a:prstGeom prst="rect">
-            <a:avLst/>
-          </a:prstGeom>
-          <a:noFill/>
-          <a:ln/>
-        </p:spPr>
-        <p:txBody>
-          <a:bodyPr wrap="square" lIns="0" tIns="0" rIns="0" bIns="0" rtlCol="0" anchor="ctr">
-            <a:normAutofit/>
-          </a:bodyPr>
-          <a:lstStyle/>
-          <a:p>
-            <a:pPr algn="l" indent="0" marL="0">
-              <a:lnSpc>
-                <a:spcPct val="88000"/>
-              </a:lnSpc>
-              <a:buNone/>
-            </a:pPr>
-            <a:r>
-              <a:rPr lang="en-US" sz="500" b="1" dirty="0">
-                <a:solidFill>
-                  <a:srgbClr val="202124"/>
-                </a:solidFill>
-                <a:latin typeface="Arial" pitchFamily="34" charset="0"/>
-                <a:ea typeface="Arial" pitchFamily="34" charset="-122"/>
-                <a:cs typeface="Arial" pitchFamily="34" charset="-120"/>
-              </a:rPr>
-              <a:t>Pooled</a:t>
-            </a:r>
-            <a:endParaRPr lang="en-US" sz="500" dirty="0"/>
-          </a:p>
-          <a:p>
-            <a:pPr algn="l" indent="0" marL="0">
-              <a:lnSpc>
-                <a:spcPct val="88000"/>
-              </a:lnSpc>
-              <a:buNone/>
-            </a:pPr>
-            <a:r>
-              <a:rPr lang="en-US" sz="440" dirty="0">
-                <a:solidFill>
-                  <a:srgbClr val="202124"/>
-                </a:solidFill>
-                <a:latin typeface="Arial" pitchFamily="34" charset="0"/>
-                <a:ea typeface="Arial" pitchFamily="34" charset="-122"/>
-                <a:cs typeface="Arial" pitchFamily="34" charset="-120"/>
-              </a:rPr>
-              <a:t>inference</a:t>
-            </a:r>
-            <a:endParaRPr lang="en-US" sz="500" dirty="0"/>
-          </a:p>
-        </p:txBody>
-      </p:sp>
-      <p:sp>
-        <p:nvSpPr>
-          <p:cNvPr id="135" name="Text 113"/>
-          <p:cNvSpPr/>
-          <p:nvPr/>
-        </p:nvSpPr>
-        <p:spPr>
-          <a:xfrm>
-            <a:off x="6282842" y="3396082"/>
-            <a:ext cx="554126" cy="116129"/>
-          </a:xfrm>
-          <a:prstGeom prst="rect">
-            <a:avLst/>
-          </a:prstGeom>
-          <a:noFill/>
-          <a:ln/>
-        </p:spPr>
-        <p:txBody>
-          <a:bodyPr wrap="square" lIns="0" tIns="0" rIns="0" bIns="0" rtlCol="0" anchor="ctr">
-            <a:normAutofit/>
-          </a:bodyPr>
-          <a:lstStyle/>
-          <a:p>
-            <a:pPr algn="l" indent="0" marL="0">
-              <a:lnSpc>
-                <a:spcPct val="88000"/>
-              </a:lnSpc>
-              <a:buNone/>
-            </a:pPr>
-            <a:r>
-              <a:rPr lang="en-US" sz="500" b="1" dirty="0">
-                <a:solidFill>
-                  <a:srgbClr val="202124"/>
-                </a:solidFill>
-                <a:latin typeface="Arial" pitchFamily="34" charset="0"/>
-                <a:ea typeface="Arial" pitchFamily="34" charset="-122"/>
-                <a:cs typeface="Arial" pitchFamily="34" charset="-120"/>
-              </a:rPr>
-              <a:t>Seamless response</a:t>
-            </a:r>
-            <a:endParaRPr lang="en-US" sz="500" dirty="0"/>
-          </a:p>
-          <a:p>
-            <a:pPr algn="l" indent="0" marL="0">
-              <a:lnSpc>
-                <a:spcPct val="88000"/>
-              </a:lnSpc>
-              <a:buNone/>
-            </a:pPr>
-            <a:r>
-              <a:rPr lang="en-US" sz="440" dirty="0">
-                <a:solidFill>
-                  <a:srgbClr val="202124"/>
-                </a:solidFill>
-                <a:latin typeface="Arial" pitchFamily="34" charset="0"/>
-                <a:ea typeface="Arial" pitchFamily="34" charset="-122"/>
-                <a:cs typeface="Arial" pitchFamily="34" charset="-120"/>
-              </a:rPr>
-              <a:t>(0 dropped sessions)</a:t>
-            </a:r>
-            <a:endParaRPr lang="en-US" sz="500" dirty="0"/>
-          </a:p>
-        </p:txBody>
-      </p:sp>
-      <p:sp>
-        <p:nvSpPr>
-          <p:cNvPr id="136" name="Text 114"/>
-          <p:cNvSpPr/>
-          <p:nvPr/>
-        </p:nvSpPr>
-        <p:spPr>
-          <a:xfrm>
-            <a:off x="5488229" y="3396082"/>
-            <a:ext cx="494690" cy="116129"/>
-          </a:xfrm>
-          <a:prstGeom prst="rect">
-            <a:avLst/>
-          </a:prstGeom>
-          <a:noFill/>
-          <a:ln/>
-        </p:spPr>
-        <p:txBody>
-          <a:bodyPr wrap="square" lIns="0" tIns="0" rIns="0" bIns="0" rtlCol="0" anchor="ctr">
-            <a:normAutofit/>
-          </a:bodyPr>
-          <a:lstStyle/>
-          <a:p>
-            <a:pPr algn="l" indent="0" marL="0">
-              <a:lnSpc>
-                <a:spcPct val="88000"/>
-              </a:lnSpc>
-              <a:buNone/>
-            </a:pPr>
-            <a:r>
-              <a:rPr lang="en-US" sz="500" b="1" dirty="0">
-                <a:solidFill>
-                  <a:srgbClr val="202124"/>
-                </a:solidFill>
-                <a:latin typeface="Arial" pitchFamily="34" charset="0"/>
-                <a:ea typeface="Arial" pitchFamily="34" charset="-122"/>
-                <a:cs typeface="Arial" pitchFamily="34" charset="-120"/>
-              </a:rPr>
-              <a:t>Route Standard to Pool</a:t>
-            </a:r>
-            <a:endParaRPr lang="en-US" sz="500" dirty="0"/>
-          </a:p>
-          <a:p>
-            <a:pPr algn="l" indent="0" marL="0">
-              <a:lnSpc>
-                <a:spcPct val="88000"/>
-              </a:lnSpc>
-              <a:buNone/>
-            </a:pPr>
-            <a:r>
-              <a:rPr lang="en-US" sz="440" dirty="0">
-                <a:solidFill>
-                  <a:srgbClr val="202124"/>
-                </a:solidFill>
-                <a:latin typeface="Arial" pitchFamily="34" charset="0"/>
-                <a:ea typeface="Arial" pitchFamily="34" charset="-122"/>
-                <a:cs typeface="Arial" pitchFamily="34" charset="-120"/>
-              </a:rPr>
-              <a:t>or Enterprise via PSC</a:t>
-            </a:r>
-            <a:endParaRPr lang="en-US" sz="500" dirty="0"/>
-          </a:p>
-        </p:txBody>
-      </p:sp>
-      <p:sp>
-        <p:nvSpPr>
-          <p:cNvPr id="137" name="Text 115"/>
-          <p:cNvSpPr/>
-          <p:nvPr/>
-        </p:nvSpPr>
-        <p:spPr>
-          <a:xfrm>
-            <a:off x="5039258" y="2983687"/>
-            <a:ext cx="502006" cy="109728"/>
-          </a:xfrm>
-          <a:prstGeom prst="rect">
-            <a:avLst/>
-          </a:prstGeom>
-          <a:noFill/>
-          <a:ln/>
-        </p:spPr>
-        <p:txBody>
-          <a:bodyPr wrap="square" lIns="0" tIns="0" rIns="0" bIns="0" rtlCol="0" anchor="ctr">
-            <a:normAutofit/>
-          </a:bodyPr>
-          <a:lstStyle/>
-          <a:p>
-            <a:pPr algn="ctr" indent="0" marL="0">
-              <a:lnSpc>
-                <a:spcPct val="88000"/>
-              </a:lnSpc>
-              <a:buNone/>
-            </a:pPr>
-            <a:r>
-              <a:rPr lang="en-US" sz="500" b="1" dirty="0">
-                <a:solidFill>
-                  <a:srgbClr val="202124"/>
-                </a:solidFill>
-                <a:latin typeface="Arial" pitchFamily="34" charset="0"/>
-                <a:ea typeface="Arial" pitchFamily="34" charset="-122"/>
-                <a:cs typeface="Arial" pitchFamily="34" charset="-120"/>
-              </a:rPr>
-              <a:t>Atomic route</a:t>
-            </a:r>
-            <a:endParaRPr lang="en-US" sz="500" dirty="0"/>
-          </a:p>
-          <a:p>
-            <a:pPr algn="ctr" indent="0" marL="0">
-              <a:lnSpc>
-                <a:spcPct val="88000"/>
-              </a:lnSpc>
-              <a:buNone/>
-            </a:pPr>
-            <a:r>
-              <a:rPr lang="en-US" sz="440" dirty="0">
-                <a:solidFill>
-                  <a:srgbClr val="202124"/>
-                </a:solidFill>
-                <a:latin typeface="Arial" pitchFamily="34" charset="0"/>
-                <a:ea typeface="Arial" pitchFamily="34" charset="-122"/>
-                <a:cs typeface="Arial" pitchFamily="34" charset="-120"/>
-              </a:rPr>
-              <a:t>lookup</a:t>
-            </a:r>
-            <a:endParaRPr lang="en-US" sz="500" dirty="0"/>
-          </a:p>
-        </p:txBody>
-      </p:sp>
-      <p:sp>
-        <p:nvSpPr>
-          <p:cNvPr id="138" name="Text 116"/>
-          <p:cNvSpPr/>
-          <p:nvPr/>
-        </p:nvSpPr>
-        <p:spPr>
-          <a:xfrm>
-            <a:off x="4432097" y="4459529"/>
-            <a:ext cx="509321" cy="109728"/>
-          </a:xfrm>
-          <a:prstGeom prst="rect">
-            <a:avLst/>
-          </a:prstGeom>
-          <a:noFill/>
-          <a:ln/>
-        </p:spPr>
-        <p:txBody>
-          <a:bodyPr wrap="square" lIns="0" tIns="0" rIns="0" bIns="0" rtlCol="0" anchor="ctr">
-            <a:normAutofit/>
-          </a:bodyPr>
-          <a:lstStyle/>
-          <a:p>
-            <a:pPr algn="l" indent="0" marL="0">
-              <a:lnSpc>
-                <a:spcPct val="88000"/>
-              </a:lnSpc>
-              <a:buNone/>
-            </a:pPr>
-            <a:r>
-              <a:rPr lang="en-US" sz="500" b="1" dirty="0">
-                <a:solidFill>
-                  <a:srgbClr val="202124"/>
-                </a:solidFill>
-                <a:latin typeface="Arial" pitchFamily="34" charset="0"/>
-                <a:ea typeface="Arial" pitchFamily="34" charset="-122"/>
-                <a:cs typeface="Arial" pitchFamily="34" charset="-120"/>
-              </a:rPr>
-              <a:t>Sanitize request</a:t>
-            </a:r>
-            <a:endParaRPr lang="en-US" sz="500" dirty="0"/>
-          </a:p>
-        </p:txBody>
-      </p:sp>
-      <p:sp>
-        <p:nvSpPr>
-          <p:cNvPr id="139" name="Text 117"/>
-          <p:cNvSpPr/>
-          <p:nvPr/>
-        </p:nvSpPr>
-        <p:spPr>
-          <a:xfrm>
-            <a:off x="4432097" y="4639666"/>
-            <a:ext cx="509321" cy="109728"/>
-          </a:xfrm>
-          <a:prstGeom prst="rect">
-            <a:avLst/>
-          </a:prstGeom>
-          <a:noFill/>
-          <a:ln/>
-        </p:spPr>
-        <p:txBody>
-          <a:bodyPr wrap="square" lIns="0" tIns="0" rIns="0" bIns="0" rtlCol="0" anchor="ctr">
-            <a:normAutofit/>
-          </a:bodyPr>
-          <a:lstStyle/>
-          <a:p>
-            <a:pPr algn="l" indent="0" marL="0">
-              <a:lnSpc>
-                <a:spcPct val="88000"/>
-              </a:lnSpc>
-              <a:buNone/>
-            </a:pPr>
-            <a:r>
-              <a:rPr lang="en-US" sz="500" b="1" dirty="0">
-                <a:solidFill>
-                  <a:srgbClr val="202124"/>
-                </a:solidFill>
-                <a:latin typeface="Arial" pitchFamily="34" charset="0"/>
-                <a:ea typeface="Arial" pitchFamily="34" charset="-122"/>
-                <a:cs typeface="Arial" pitchFamily="34" charset="-120"/>
-              </a:rPr>
-              <a:t>Sanitize response</a:t>
-            </a:r>
-            <a:endParaRPr lang="en-US" sz="500" dirty="0"/>
-          </a:p>
-        </p:txBody>
-      </p:sp>
-      <p:sp>
-        <p:nvSpPr>
-          <p:cNvPr id="140" name="Text 118"/>
-          <p:cNvSpPr/>
-          <p:nvPr/>
-        </p:nvSpPr>
-        <p:spPr>
-          <a:xfrm>
-            <a:off x="5016398" y="2302459"/>
-            <a:ext cx="344729" cy="109728"/>
-          </a:xfrm>
-          <a:prstGeom prst="rect">
-            <a:avLst/>
-          </a:prstGeom>
-          <a:noFill/>
-          <a:ln/>
-        </p:spPr>
-        <p:txBody>
-          <a:bodyPr wrap="square" lIns="0" tIns="0" rIns="0" bIns="0" rtlCol="0" anchor="ctr">
-            <a:normAutofit/>
-          </a:bodyPr>
-          <a:lstStyle/>
-          <a:p>
-            <a:pPr algn="ctr" indent="0" marL="0">
-              <a:lnSpc>
-                <a:spcPct val="88000"/>
-              </a:lnSpc>
-              <a:buNone/>
-            </a:pPr>
-            <a:r>
-              <a:rPr lang="en-US" sz="500" b="1" dirty="0">
-                <a:solidFill>
-                  <a:srgbClr val="202124"/>
-                </a:solidFill>
-                <a:latin typeface="Arial" pitchFamily="34" charset="0"/>
-                <a:ea typeface="Arial" pitchFamily="34" charset="-122"/>
-                <a:cs typeface="Arial" pitchFamily="34" charset="-120"/>
-              </a:rPr>
-              <a:t>Security</a:t>
-            </a:r>
-            <a:endParaRPr lang="en-US" sz="500" dirty="0"/>
-          </a:p>
-          <a:p>
-            <a:pPr algn="ctr" indent="0" marL="0">
-              <a:lnSpc>
-                <a:spcPct val="88000"/>
-              </a:lnSpc>
-              <a:buNone/>
-            </a:pPr>
-            <a:r>
-              <a:rPr lang="en-US" sz="440" dirty="0">
-                <a:solidFill>
-                  <a:srgbClr val="202124"/>
-                </a:solidFill>
-                <a:latin typeface="Arial" pitchFamily="34" charset="0"/>
-                <a:ea typeface="Arial" pitchFamily="34" charset="-122"/>
-                <a:cs typeface="Arial" pitchFamily="34" charset="-120"/>
-              </a:rPr>
-              <a:t>policies</a:t>
-            </a:r>
-            <a:endParaRPr lang="en-US" sz="500" dirty="0"/>
-          </a:p>
-        </p:txBody>
-      </p:sp>
-      <p:sp>
-        <p:nvSpPr>
-          <p:cNvPr id="141" name="Text 119"/>
-          <p:cNvSpPr/>
-          <p:nvPr/>
-        </p:nvSpPr>
-        <p:spPr>
-          <a:xfrm>
-            <a:off x="5016398" y="2819095"/>
-            <a:ext cx="344729" cy="109728"/>
-          </a:xfrm>
-          <a:prstGeom prst="rect">
-            <a:avLst/>
-          </a:prstGeom>
-          <a:noFill/>
-          <a:ln/>
-        </p:spPr>
-        <p:txBody>
-          <a:bodyPr wrap="square" lIns="0" tIns="0" rIns="0" bIns="0" rtlCol="0" anchor="ctr">
-            <a:normAutofit/>
-          </a:bodyPr>
-          <a:lstStyle/>
-          <a:p>
-            <a:pPr algn="ctr" indent="0" marL="0">
-              <a:lnSpc>
-                <a:spcPct val="88000"/>
-              </a:lnSpc>
-              <a:buNone/>
-            </a:pPr>
-            <a:r>
-              <a:rPr lang="en-US" sz="500" b="1" dirty="0">
-                <a:solidFill>
-                  <a:srgbClr val="202124"/>
-                </a:solidFill>
-                <a:latin typeface="Arial" pitchFamily="34" charset="0"/>
-                <a:ea typeface="Arial" pitchFamily="34" charset="-122"/>
-                <a:cs typeface="Arial" pitchFamily="34" charset="-120"/>
-              </a:rPr>
-              <a:t>Resolve</a:t>
-            </a:r>
-            <a:endParaRPr lang="en-US" sz="500" dirty="0"/>
-          </a:p>
-          <a:p>
-            <a:pPr algn="ctr" indent="0" marL="0">
-              <a:lnSpc>
-                <a:spcPct val="88000"/>
-              </a:lnSpc>
-              <a:buNone/>
-            </a:pPr>
-            <a:r>
-              <a:rPr lang="en-US" sz="440" dirty="0">
-                <a:solidFill>
-                  <a:srgbClr val="202124"/>
-                </a:solidFill>
-                <a:latin typeface="Arial" pitchFamily="34" charset="0"/>
-                <a:ea typeface="Arial" pitchFamily="34" charset="-122"/>
-                <a:cs typeface="Arial" pitchFamily="34" charset="-120"/>
-              </a:rPr>
-              <a:t>agent route</a:t>
-            </a:r>
-            <a:endParaRPr lang="en-US" sz="500" dirty="0"/>
-          </a:p>
-        </p:txBody>
-      </p:sp>
-      <p:sp>
-        <p:nvSpPr>
-          <p:cNvPr id="142" name="Text 120"/>
-          <p:cNvSpPr/>
-          <p:nvPr/>
-        </p:nvSpPr>
-        <p:spPr>
-          <a:xfrm>
-            <a:off x="6267298" y="1478585"/>
-            <a:ext cx="299923" cy="109728"/>
-          </a:xfrm>
-          <a:prstGeom prst="rect">
-            <a:avLst/>
-          </a:prstGeom>
-          <a:noFill/>
-          <a:ln/>
-        </p:spPr>
-        <p:txBody>
-          <a:bodyPr wrap="square" lIns="0" tIns="0" rIns="0" bIns="0" rtlCol="0" anchor="ctr">
-            <a:normAutofit/>
-          </a:bodyPr>
-          <a:lstStyle/>
-          <a:p>
-            <a:pPr algn="l" indent="0" marL="0">
-              <a:lnSpc>
-                <a:spcPct val="88000"/>
-              </a:lnSpc>
-              <a:buNone/>
-            </a:pPr>
-            <a:r>
-              <a:rPr lang="en-US" sz="500" b="1" dirty="0">
-                <a:solidFill>
-                  <a:srgbClr val="202124"/>
-                </a:solidFill>
-                <a:latin typeface="Arial" pitchFamily="34" charset="0"/>
-                <a:ea typeface="Arial" pitchFamily="34" charset="-122"/>
-                <a:cs typeface="Arial" pitchFamily="34" charset="-120"/>
-              </a:rPr>
-              <a:t>Response</a:t>
-            </a:r>
-            <a:endParaRPr lang="en-US" sz="500" dirty="0"/>
-          </a:p>
-        </p:txBody>
-      </p:sp>
-      <p:sp>
-        <p:nvSpPr>
-          <p:cNvPr id="143" name="Text 121"/>
-          <p:cNvSpPr/>
-          <p:nvPr/>
-        </p:nvSpPr>
-        <p:spPr>
-          <a:xfrm>
-            <a:off x="6267298" y="2838298"/>
-            <a:ext cx="299923" cy="109728"/>
-          </a:xfrm>
-          <a:prstGeom prst="rect">
-            <a:avLst/>
-          </a:prstGeom>
-          <a:noFill/>
-          <a:ln/>
-        </p:spPr>
-        <p:txBody>
-          <a:bodyPr wrap="square" lIns="0" tIns="0" rIns="0" bIns="0" rtlCol="0" anchor="ctr">
-            <a:normAutofit/>
-          </a:bodyPr>
-          <a:lstStyle/>
-          <a:p>
-            <a:pPr algn="l" indent="0" marL="0">
-              <a:lnSpc>
-                <a:spcPct val="88000"/>
-              </a:lnSpc>
-              <a:buNone/>
-            </a:pPr>
-            <a:r>
-              <a:rPr lang="en-US" sz="500" b="1" dirty="0">
-                <a:solidFill>
-                  <a:srgbClr val="202124"/>
-                </a:solidFill>
-                <a:latin typeface="Arial" pitchFamily="34" charset="0"/>
-                <a:ea typeface="Arial" pitchFamily="34" charset="-122"/>
-                <a:cs typeface="Arial" pitchFamily="34" charset="-120"/>
-              </a:rPr>
-              <a:t>Response</a:t>
-            </a:r>
-            <a:endParaRPr lang="en-US" sz="500" dirty="0"/>
-          </a:p>
-        </p:txBody>
-      </p:sp>
-      <p:sp>
-        <p:nvSpPr>
-          <p:cNvPr id="144" name="Text 122"/>
-          <p:cNvSpPr/>
-          <p:nvPr/>
-        </p:nvSpPr>
-        <p:spPr>
-          <a:xfrm>
-            <a:off x="5578754" y="1478585"/>
-            <a:ext cx="262433" cy="109728"/>
-          </a:xfrm>
-          <a:prstGeom prst="rect">
-            <a:avLst/>
-          </a:prstGeom>
-          <a:noFill/>
-          <a:ln/>
-        </p:spPr>
-        <p:txBody>
-          <a:bodyPr wrap="square" lIns="0" tIns="0" rIns="0" bIns="0" rtlCol="0" anchor="ctr">
-            <a:normAutofit/>
-          </a:bodyPr>
-          <a:lstStyle/>
-          <a:p>
-            <a:pPr algn="r" indent="0" marL="0">
-              <a:lnSpc>
-                <a:spcPct val="88000"/>
-              </a:lnSpc>
-              <a:buNone/>
-            </a:pPr>
-            <a:r>
-              <a:rPr lang="en-US" sz="500" b="1" dirty="0">
-                <a:solidFill>
-                  <a:srgbClr val="202124"/>
-                </a:solidFill>
-                <a:latin typeface="Arial" pitchFamily="34" charset="0"/>
-                <a:ea typeface="Arial" pitchFamily="34" charset="-122"/>
-                <a:cs typeface="Arial" pitchFamily="34" charset="-120"/>
-              </a:rPr>
-              <a:t>Request</a:t>
-            </a:r>
-            <a:endParaRPr lang="en-US" sz="500" dirty="0"/>
-          </a:p>
-        </p:txBody>
-      </p:sp>
-      <p:sp>
-        <p:nvSpPr>
-          <p:cNvPr id="145" name="Text 123"/>
-          <p:cNvSpPr/>
-          <p:nvPr/>
-        </p:nvSpPr>
-        <p:spPr>
-          <a:xfrm>
-            <a:off x="5578754" y="2838298"/>
-            <a:ext cx="262433" cy="109728"/>
-          </a:xfrm>
-          <a:prstGeom prst="rect">
-            <a:avLst/>
-          </a:prstGeom>
-          <a:noFill/>
-          <a:ln/>
-        </p:spPr>
-        <p:txBody>
-          <a:bodyPr wrap="square" lIns="0" tIns="0" rIns="0" bIns="0" rtlCol="0" anchor="ctr">
-            <a:normAutofit/>
-          </a:bodyPr>
-          <a:lstStyle/>
-          <a:p>
-            <a:pPr algn="r" indent="0" marL="0">
-              <a:lnSpc>
-                <a:spcPct val="88000"/>
-              </a:lnSpc>
-              <a:buNone/>
-            </a:pPr>
-            <a:r>
-              <a:rPr lang="en-US" sz="500" b="1" dirty="0">
-                <a:solidFill>
-                  <a:srgbClr val="202124"/>
-                </a:solidFill>
-                <a:latin typeface="Arial" pitchFamily="34" charset="0"/>
-                <a:ea typeface="Arial" pitchFamily="34" charset="-122"/>
-                <a:cs typeface="Arial" pitchFamily="34" charset="-120"/>
-              </a:rPr>
-              <a:t>Request</a:t>
-            </a:r>
-            <a:endParaRPr lang="en-US" sz="500" dirty="0"/>
-          </a:p>
-        </p:txBody>
-      </p:sp>
-      <p:sp>
-        <p:nvSpPr>
-          <p:cNvPr id="146" name="Shape 124"/>
+            <a:endParaRPr lang="en-US" sz="435" dirty="0"/>
+          </a:p>
+        </p:txBody>
+      </p:sp>
+      <p:sp>
+        <p:nvSpPr>
+          <p:cNvPr id="129" name="Shape 107"/>
           <p:cNvSpPr/>
           <p:nvPr/>
         </p:nvSpPr>
@@ -6982,7 +6014,7 @@
       </p:sp>
       <p:sp>
         <p:nvSpPr>
-          <p:cNvPr id="147" name="Text 125"/>
+          <p:cNvPr id="130" name="Text 108"/>
           <p:cNvSpPr/>
           <p:nvPr/>
         </p:nvSpPr>
@@ -7021,7 +6053,7 @@
       </p:sp>
       <p:sp>
         <p:nvSpPr>
-          <p:cNvPr id="148" name="Shape 126"/>
+          <p:cNvPr id="131" name="Shape 109"/>
           <p:cNvSpPr/>
           <p:nvPr/>
         </p:nvSpPr>
@@ -7046,7 +6078,7 @@
       </p:sp>
       <p:sp>
         <p:nvSpPr>
-          <p:cNvPr id="149" name="Text 127"/>
+          <p:cNvPr id="132" name="Text 110"/>
           <p:cNvSpPr/>
           <p:nvPr/>
         </p:nvSpPr>
@@ -7085,7 +6117,7 @@
       </p:sp>
       <p:sp>
         <p:nvSpPr>
-          <p:cNvPr id="150" name="Shape 128"/>
+          <p:cNvPr id="133" name="Shape 111"/>
           <p:cNvSpPr/>
           <p:nvPr/>
         </p:nvSpPr>
@@ -7110,7 +6142,7 @@
       </p:sp>
       <p:sp>
         <p:nvSpPr>
-          <p:cNvPr id="151" name="Text 129"/>
+          <p:cNvPr id="134" name="Text 112"/>
           <p:cNvSpPr/>
           <p:nvPr/>
         </p:nvSpPr>
@@ -7149,7 +6181,7 @@
       </p:sp>
       <p:sp>
         <p:nvSpPr>
-          <p:cNvPr id="152" name="Shape 130"/>
+          <p:cNvPr id="135" name="Shape 113"/>
           <p:cNvSpPr/>
           <p:nvPr/>
         </p:nvSpPr>
@@ -7174,7 +6206,7 @@
       </p:sp>
       <p:sp>
         <p:nvSpPr>
-          <p:cNvPr id="153" name="Text 131"/>
+          <p:cNvPr id="136" name="Text 114"/>
           <p:cNvSpPr/>
           <p:nvPr/>
         </p:nvSpPr>
@@ -7213,7 +6245,7 @@
       </p:sp>
       <p:sp>
         <p:nvSpPr>
-          <p:cNvPr id="154" name="Shape 132"/>
+          <p:cNvPr id="137" name="Shape 115"/>
           <p:cNvSpPr/>
           <p:nvPr/>
         </p:nvSpPr>
@@ -7238,7 +6270,7 @@
       </p:sp>
       <p:sp>
         <p:nvSpPr>
-          <p:cNvPr id="155" name="Text 133"/>
+          <p:cNvPr id="138" name="Text 116"/>
           <p:cNvSpPr/>
           <p:nvPr/>
         </p:nvSpPr>
@@ -7277,7 +6309,7 @@
       </p:sp>
       <p:sp>
         <p:nvSpPr>
-          <p:cNvPr id="156" name="Shape 134"/>
+          <p:cNvPr id="139" name="Shape 117"/>
           <p:cNvSpPr/>
           <p:nvPr/>
         </p:nvSpPr>
@@ -7302,7 +6334,7 @@
       </p:sp>
       <p:sp>
         <p:nvSpPr>
-          <p:cNvPr id="157" name="Text 135"/>
+          <p:cNvPr id="140" name="Text 118"/>
           <p:cNvSpPr/>
           <p:nvPr/>
         </p:nvSpPr>
@@ -7341,7 +6373,7 @@
       </p:sp>
       <p:sp>
         <p:nvSpPr>
-          <p:cNvPr id="158" name="Shape 136"/>
+          <p:cNvPr id="141" name="Shape 119"/>
           <p:cNvSpPr/>
           <p:nvPr/>
         </p:nvSpPr>
@@ -7366,7 +6398,7 @@
       </p:sp>
       <p:sp>
         <p:nvSpPr>
-          <p:cNvPr id="159" name="Text 137"/>
+          <p:cNvPr id="142" name="Text 120"/>
           <p:cNvSpPr/>
           <p:nvPr/>
         </p:nvSpPr>
@@ -7405,7 +6437,7 @@
       </p:sp>
       <p:sp>
         <p:nvSpPr>
-          <p:cNvPr id="160" name="Shape 138"/>
+          <p:cNvPr id="143" name="Shape 121"/>
           <p:cNvSpPr/>
           <p:nvPr/>
         </p:nvSpPr>
@@ -7430,7 +6462,7 @@
       </p:sp>
       <p:sp>
         <p:nvSpPr>
-          <p:cNvPr id="161" name="Text 139"/>
+          <p:cNvPr id="144" name="Text 122"/>
           <p:cNvSpPr/>
           <p:nvPr/>
         </p:nvSpPr>
@@ -7469,7 +6501,7 @@
       </p:sp>
       <p:sp>
         <p:nvSpPr>
-          <p:cNvPr id="162" name="Shape 140"/>
+          <p:cNvPr id="145" name="Shape 123"/>
           <p:cNvSpPr/>
           <p:nvPr/>
         </p:nvSpPr>
@@ -7494,7 +6526,7 @@
       </p:sp>
       <p:sp>
         <p:nvSpPr>
-          <p:cNvPr id="163" name="Text 141"/>
+          <p:cNvPr id="146" name="Text 124"/>
           <p:cNvSpPr/>
           <p:nvPr/>
         </p:nvSpPr>
@@ -7528,6 +6560,805 @@
               <a:t>5</a:t>
             </a:r>
             <a:endParaRPr lang="en-US" sz="620" dirty="0"/>
+          </a:p>
+        </p:txBody>
+      </p:sp>
+      <p:sp>
+        <p:nvSpPr>
+          <p:cNvPr id="147" name="Text 125"/>
+          <p:cNvSpPr/>
+          <p:nvPr/>
+        </p:nvSpPr>
+        <p:spPr>
+          <a:xfrm>
+            <a:off x="7416698" y="3397910"/>
+            <a:ext cx="786384" cy="114300"/>
+          </a:xfrm>
+          <a:prstGeom prst="roundRect">
+            <a:avLst>
+              <a:gd name="adj" fmla="val 24000"/>
+            </a:avLst>
+          </a:prstGeom>
+          <a:solidFill>
+            <a:srgbClr val="FFFFFF"/>
+          </a:solidFill>
+          <a:ln w="5080">
+            <a:solidFill>
+              <a:srgbClr val="DADCE0"/>
+            </a:solidFill>
+          </a:ln>
+        </p:spPr>
+        <p:txBody>
+          <a:bodyPr wrap="square" lIns="0" tIns="0" rIns="0" bIns="0" rtlCol="0" anchor="ctr"/>
+          <a:lstStyle/>
+          <a:p>
+            <a:pPr algn="ctr" indent="0" marL="0">
+              <a:buNone/>
+            </a:pPr>
+            <a:r>
+              <a:rPr lang="en-US" sz="420" b="1" dirty="0">
+                <a:solidFill>
+                  <a:srgbClr val="202124"/>
+                </a:solidFill>
+                <a:latin typeface="Arial" pitchFamily="34" charset="0"/>
+                <a:ea typeface="Arial" pitchFamily="34" charset="-122"/>
+                <a:cs typeface="Arial" pitchFamily="34" charset="-120"/>
+              </a:rPr>
+              <a:t>Live promotion: Pool -&gt; PSC Spoke</a:t>
+            </a:r>
+            <a:endParaRPr lang="en-US" sz="420" dirty="0"/>
+          </a:p>
+        </p:txBody>
+      </p:sp>
+      <p:sp>
+        <p:nvSpPr>
+          <p:cNvPr id="148" name="Text 126"/>
+          <p:cNvSpPr/>
+          <p:nvPr/>
+        </p:nvSpPr>
+        <p:spPr>
+          <a:xfrm>
+            <a:off x="5307178" y="4659782"/>
+            <a:ext cx="443484" cy="114300"/>
+          </a:xfrm>
+          <a:prstGeom prst="roundRect">
+            <a:avLst>
+              <a:gd name="adj" fmla="val 24000"/>
+            </a:avLst>
+          </a:prstGeom>
+          <a:solidFill>
+            <a:srgbClr val="FFFFFF"/>
+          </a:solidFill>
+          <a:ln w="5080">
+            <a:solidFill>
+              <a:srgbClr val="DADCE0"/>
+            </a:solidFill>
+          </a:ln>
+        </p:spPr>
+        <p:txBody>
+          <a:bodyPr wrap="square" lIns="0" tIns="0" rIns="0" bIns="0" rtlCol="0" anchor="ctr"/>
+          <a:lstStyle/>
+          <a:p>
+            <a:pPr algn="ctr" indent="0" marL="0">
+              <a:buNone/>
+            </a:pPr>
+            <a:r>
+              <a:rPr lang="en-US" sz="420" b="1" dirty="0">
+                <a:solidFill>
+                  <a:srgbClr val="202124"/>
+                </a:solidFill>
+                <a:latin typeface="Arial" pitchFamily="34" charset="0"/>
+                <a:ea typeface="Arial" pitchFamily="34" charset="-122"/>
+                <a:cs typeface="Arial" pitchFamily="34" charset="-120"/>
+              </a:rPr>
+              <a:t>Shared Pool RAG</a:t>
+            </a:r>
+            <a:endParaRPr lang="en-US" sz="420" dirty="0"/>
+          </a:p>
+        </p:txBody>
+      </p:sp>
+      <p:sp>
+        <p:nvSpPr>
+          <p:cNvPr id="149" name="Text 127"/>
+          <p:cNvSpPr/>
+          <p:nvPr/>
+        </p:nvSpPr>
+        <p:spPr>
+          <a:xfrm>
+            <a:off x="5171846" y="5206594"/>
+            <a:ext cx="715061" cy="114300"/>
+          </a:xfrm>
+          <a:prstGeom prst="roundRect">
+            <a:avLst>
+              <a:gd name="adj" fmla="val 24000"/>
+            </a:avLst>
+          </a:prstGeom>
+          <a:solidFill>
+            <a:srgbClr val="FFFFFF"/>
+          </a:solidFill>
+          <a:ln w="5080">
+            <a:solidFill>
+              <a:srgbClr val="DADCE0"/>
+            </a:solidFill>
+          </a:ln>
+        </p:spPr>
+        <p:txBody>
+          <a:bodyPr wrap="square" lIns="0" tIns="0" rIns="0" bIns="0" rtlCol="0" anchor="ctr"/>
+          <a:lstStyle/>
+          <a:p>
+            <a:pPr algn="ctr" indent="0" marL="0">
+              <a:buNone/>
+            </a:pPr>
+            <a:r>
+              <a:rPr lang="en-US" sz="420" b="1" dirty="0">
+                <a:solidFill>
+                  <a:srgbClr val="202124"/>
+                </a:solidFill>
+                <a:latin typeface="Arial" pitchFamily="34" charset="0"/>
+                <a:ea typeface="Arial" pitchFamily="34" charset="-122"/>
+                <a:cs typeface="Arial" pitchFamily="34" charset="-120"/>
+              </a:rPr>
+              <a:t>Streams State to PSC Spoke</a:t>
+            </a:r>
+            <a:endParaRPr lang="en-US" sz="420" dirty="0"/>
+          </a:p>
+        </p:txBody>
+      </p:sp>
+      <p:sp>
+        <p:nvSpPr>
+          <p:cNvPr id="150" name="Text 128"/>
+          <p:cNvSpPr/>
+          <p:nvPr/>
+        </p:nvSpPr>
+        <p:spPr>
+          <a:xfrm>
+            <a:off x="7221017" y="4659782"/>
+            <a:ext cx="690372" cy="114300"/>
+          </a:xfrm>
+          <a:prstGeom prst="roundRect">
+            <a:avLst>
+              <a:gd name="adj" fmla="val 24000"/>
+            </a:avLst>
+          </a:prstGeom>
+          <a:solidFill>
+            <a:srgbClr val="FFFFFF"/>
+          </a:solidFill>
+          <a:ln w="5080">
+            <a:solidFill>
+              <a:srgbClr val="DADCE0"/>
+            </a:solidFill>
+          </a:ln>
+        </p:spPr>
+        <p:txBody>
+          <a:bodyPr wrap="square" lIns="0" tIns="0" rIns="0" bIns="0" rtlCol="0" anchor="ctr"/>
+          <a:lstStyle/>
+          <a:p>
+            <a:pPr algn="ctr" indent="0" marL="0">
+              <a:buNone/>
+            </a:pPr>
+            <a:r>
+              <a:rPr lang="en-US" sz="420" b="1" dirty="0">
+                <a:solidFill>
+                  <a:srgbClr val="202124"/>
+                </a:solidFill>
+                <a:latin typeface="Arial" pitchFamily="34" charset="0"/>
+                <a:ea typeface="Arial" pitchFamily="34" charset="-122"/>
+                <a:cs typeface="Arial" pitchFamily="34" charset="-120"/>
+              </a:rPr>
+              <a:t>Unidirectional PSC Bridge</a:t>
+            </a:r>
+            <a:endParaRPr lang="en-US" sz="420" dirty="0"/>
+          </a:p>
+        </p:txBody>
+      </p:sp>
+      <p:sp>
+        <p:nvSpPr>
+          <p:cNvPr id="151" name="Text 129"/>
+          <p:cNvSpPr/>
+          <p:nvPr/>
+        </p:nvSpPr>
+        <p:spPr>
+          <a:xfrm>
+            <a:off x="7184441" y="5206594"/>
+            <a:ext cx="764438" cy="114300"/>
+          </a:xfrm>
+          <a:prstGeom prst="roundRect">
+            <a:avLst>
+              <a:gd name="adj" fmla="val 24000"/>
+            </a:avLst>
+          </a:prstGeom>
+          <a:solidFill>
+            <a:srgbClr val="FFFFFF"/>
+          </a:solidFill>
+          <a:ln w="5080">
+            <a:solidFill>
+              <a:srgbClr val="DADCE0"/>
+            </a:solidFill>
+          </a:ln>
+        </p:spPr>
+        <p:txBody>
+          <a:bodyPr wrap="square" lIns="0" tIns="0" rIns="0" bIns="0" rtlCol="0" anchor="ctr"/>
+          <a:lstStyle/>
+          <a:p>
+            <a:pPr algn="ctr" indent="0" marL="0">
+              <a:buNone/>
+            </a:pPr>
+            <a:r>
+              <a:rPr lang="en-US" sz="420" b="1" dirty="0">
+                <a:solidFill>
+                  <a:srgbClr val="202124"/>
+                </a:solidFill>
+                <a:latin typeface="Arial" pitchFamily="34" charset="0"/>
+                <a:ea typeface="Arial" pitchFamily="34" charset="-122"/>
+                <a:cs typeface="Arial" pitchFamily="34" charset="-120"/>
+              </a:rPr>
+              <a:t>CMEK-Encrypted Spoke Storage</a:t>
+            </a:r>
+            <a:endParaRPr lang="en-US" sz="420" dirty="0"/>
+          </a:p>
+        </p:txBody>
+      </p:sp>
+      <p:sp>
+        <p:nvSpPr>
+          <p:cNvPr id="152" name="Text 130"/>
+          <p:cNvSpPr/>
+          <p:nvPr/>
+        </p:nvSpPr>
+        <p:spPr>
+          <a:xfrm>
+            <a:off x="4448556" y="5337353"/>
+            <a:ext cx="468173" cy="114300"/>
+          </a:xfrm>
+          <a:prstGeom prst="roundRect">
+            <a:avLst>
+              <a:gd name="adj" fmla="val 24000"/>
+            </a:avLst>
+          </a:prstGeom>
+          <a:solidFill>
+            <a:srgbClr val="FFFFFF"/>
+          </a:solidFill>
+          <a:ln w="5080">
+            <a:solidFill>
+              <a:srgbClr val="DADCE0"/>
+            </a:solidFill>
+          </a:ln>
+        </p:spPr>
+        <p:txBody>
+          <a:bodyPr wrap="square" lIns="0" tIns="0" rIns="0" bIns="0" rtlCol="0" anchor="ctr"/>
+          <a:lstStyle/>
+          <a:p>
+            <a:pPr algn="ctr" indent="0" marL="0">
+              <a:buNone/>
+            </a:pPr>
+            <a:r>
+              <a:rPr lang="en-US" sz="420" b="1" dirty="0">
+                <a:solidFill>
+                  <a:srgbClr val="202124"/>
+                </a:solidFill>
+                <a:latin typeface="Arial" pitchFamily="34" charset="0"/>
+                <a:ea typeface="Arial" pitchFamily="34" charset="-122"/>
+                <a:cs typeface="Arial" pitchFamily="34" charset="-120"/>
+              </a:rPr>
+              <a:t>Pooled inference</a:t>
+            </a:r>
+            <a:endParaRPr lang="en-US" sz="420" dirty="0"/>
+          </a:p>
+        </p:txBody>
+      </p:sp>
+      <p:sp>
+        <p:nvSpPr>
+          <p:cNvPr id="153" name="Text 131"/>
+          <p:cNvSpPr/>
+          <p:nvPr/>
+        </p:nvSpPr>
+        <p:spPr>
+          <a:xfrm>
+            <a:off x="6326734" y="3397910"/>
+            <a:ext cx="786384" cy="114300"/>
+          </a:xfrm>
+          <a:prstGeom prst="roundRect">
+            <a:avLst>
+              <a:gd name="adj" fmla="val 24000"/>
+            </a:avLst>
+          </a:prstGeom>
+          <a:solidFill>
+            <a:srgbClr val="FFFFFF"/>
+          </a:solidFill>
+          <a:ln w="5080">
+            <a:solidFill>
+              <a:srgbClr val="DADCE0"/>
+            </a:solidFill>
+          </a:ln>
+        </p:spPr>
+        <p:txBody>
+          <a:bodyPr wrap="square" lIns="0" tIns="0" rIns="0" bIns="0" rtlCol="0" anchor="ctr"/>
+          <a:lstStyle/>
+          <a:p>
+            <a:pPr algn="ctr" indent="0" marL="0">
+              <a:buNone/>
+            </a:pPr>
+            <a:r>
+              <a:rPr lang="en-US" sz="420" b="1" dirty="0">
+                <a:solidFill>
+                  <a:srgbClr val="202124"/>
+                </a:solidFill>
+                <a:latin typeface="Arial" pitchFamily="34" charset="0"/>
+                <a:ea typeface="Arial" pitchFamily="34" charset="-122"/>
+                <a:cs typeface="Arial" pitchFamily="34" charset="-120"/>
+              </a:rPr>
+              <a:t>Seamless response (0 dropped sessions)</a:t>
+            </a:r>
+            <a:endParaRPr lang="en-US" sz="420" dirty="0"/>
+          </a:p>
+        </p:txBody>
+      </p:sp>
+      <p:sp>
+        <p:nvSpPr>
+          <p:cNvPr id="154" name="Text 132"/>
+          <p:cNvSpPr/>
+          <p:nvPr/>
+        </p:nvSpPr>
+        <p:spPr>
+          <a:xfrm>
+            <a:off x="5338267" y="3397910"/>
+            <a:ext cx="786384" cy="114300"/>
+          </a:xfrm>
+          <a:prstGeom prst="roundRect">
+            <a:avLst>
+              <a:gd name="adj" fmla="val 24000"/>
+            </a:avLst>
+          </a:prstGeom>
+          <a:solidFill>
+            <a:srgbClr val="FFFFFF"/>
+          </a:solidFill>
+          <a:ln w="5080">
+            <a:solidFill>
+              <a:srgbClr val="DADCE0"/>
+            </a:solidFill>
+          </a:ln>
+        </p:spPr>
+        <p:txBody>
+          <a:bodyPr wrap="square" lIns="0" tIns="0" rIns="0" bIns="0" rtlCol="0" anchor="ctr"/>
+          <a:lstStyle/>
+          <a:p>
+            <a:pPr algn="ctr" indent="0" marL="0">
+              <a:buNone/>
+            </a:pPr>
+            <a:r>
+              <a:rPr lang="en-US" sz="420" b="1" dirty="0">
+                <a:solidFill>
+                  <a:srgbClr val="202124"/>
+                </a:solidFill>
+                <a:latin typeface="Arial" pitchFamily="34" charset="0"/>
+                <a:ea typeface="Arial" pitchFamily="34" charset="-122"/>
+                <a:cs typeface="Arial" pitchFamily="34" charset="-120"/>
+              </a:rPr>
+              <a:t>Route Standard to Pool or Enterprise via PSC</a:t>
+            </a:r>
+            <a:endParaRPr lang="en-US" sz="420" dirty="0"/>
+          </a:p>
+        </p:txBody>
+      </p:sp>
+      <p:sp>
+        <p:nvSpPr>
+          <p:cNvPr id="155" name="Text 133"/>
+          <p:cNvSpPr/>
+          <p:nvPr/>
+        </p:nvSpPr>
+        <p:spPr>
+          <a:xfrm>
+            <a:off x="5014570" y="2980944"/>
+            <a:ext cx="542239" cy="114300"/>
+          </a:xfrm>
+          <a:prstGeom prst="roundRect">
+            <a:avLst>
+              <a:gd name="adj" fmla="val 24000"/>
+            </a:avLst>
+          </a:prstGeom>
+          <a:solidFill>
+            <a:srgbClr val="FFFFFF"/>
+          </a:solidFill>
+          <a:ln w="5080">
+            <a:solidFill>
+              <a:srgbClr val="DADCE0"/>
+            </a:solidFill>
+          </a:ln>
+        </p:spPr>
+        <p:txBody>
+          <a:bodyPr wrap="square" lIns="0" tIns="0" rIns="0" bIns="0" rtlCol="0" anchor="ctr"/>
+          <a:lstStyle/>
+          <a:p>
+            <a:pPr algn="ctr" indent="0" marL="0">
+              <a:buNone/>
+            </a:pPr>
+            <a:r>
+              <a:rPr lang="en-US" sz="420" b="1" dirty="0">
+                <a:solidFill>
+                  <a:srgbClr val="202124"/>
+                </a:solidFill>
+                <a:latin typeface="Arial" pitchFamily="34" charset="0"/>
+                <a:ea typeface="Arial" pitchFamily="34" charset="-122"/>
+                <a:cs typeface="Arial" pitchFamily="34" charset="-120"/>
+              </a:rPr>
+              <a:t>Atomic route lookup</a:t>
+            </a:r>
+            <a:endParaRPr lang="en-US" sz="420" dirty="0"/>
+          </a:p>
+        </p:txBody>
+      </p:sp>
+      <p:sp>
+        <p:nvSpPr>
+          <p:cNvPr id="156" name="Text 134"/>
+          <p:cNvSpPr/>
+          <p:nvPr/>
+        </p:nvSpPr>
+        <p:spPr>
+          <a:xfrm>
+            <a:off x="4448556" y="4445813"/>
+            <a:ext cx="468173" cy="114300"/>
+          </a:xfrm>
+          <a:prstGeom prst="roundRect">
+            <a:avLst>
+              <a:gd name="adj" fmla="val 24000"/>
+            </a:avLst>
+          </a:prstGeom>
+          <a:solidFill>
+            <a:srgbClr val="FFFFFF"/>
+          </a:solidFill>
+          <a:ln w="5080">
+            <a:solidFill>
+              <a:srgbClr val="DADCE0"/>
+            </a:solidFill>
+          </a:ln>
+        </p:spPr>
+        <p:txBody>
+          <a:bodyPr wrap="square" lIns="0" tIns="0" rIns="0" bIns="0" rtlCol="0" anchor="ctr"/>
+          <a:lstStyle/>
+          <a:p>
+            <a:pPr algn="ctr" indent="0" marL="0">
+              <a:buNone/>
+            </a:pPr>
+            <a:r>
+              <a:rPr lang="en-US" sz="420" b="1" dirty="0">
+                <a:solidFill>
+                  <a:srgbClr val="202124"/>
+                </a:solidFill>
+                <a:latin typeface="Arial" pitchFamily="34" charset="0"/>
+                <a:ea typeface="Arial" pitchFamily="34" charset="-122"/>
+                <a:cs typeface="Arial" pitchFamily="34" charset="-120"/>
+              </a:rPr>
+              <a:t>Sanitize request</a:t>
+            </a:r>
+            <a:endParaRPr lang="en-US" sz="420" dirty="0"/>
+          </a:p>
+        </p:txBody>
+      </p:sp>
+      <p:sp>
+        <p:nvSpPr>
+          <p:cNvPr id="157" name="Text 135"/>
+          <p:cNvSpPr/>
+          <p:nvPr/>
+        </p:nvSpPr>
+        <p:spPr>
+          <a:xfrm>
+            <a:off x="4436669" y="4625950"/>
+            <a:ext cx="492862" cy="114300"/>
+          </a:xfrm>
+          <a:prstGeom prst="roundRect">
+            <a:avLst>
+              <a:gd name="adj" fmla="val 24000"/>
+            </a:avLst>
+          </a:prstGeom>
+          <a:solidFill>
+            <a:srgbClr val="FFFFFF"/>
+          </a:solidFill>
+          <a:ln w="5080">
+            <a:solidFill>
+              <a:srgbClr val="DADCE0"/>
+            </a:solidFill>
+          </a:ln>
+        </p:spPr>
+        <p:txBody>
+          <a:bodyPr wrap="square" lIns="0" tIns="0" rIns="0" bIns="0" rtlCol="0" anchor="ctr"/>
+          <a:lstStyle/>
+          <a:p>
+            <a:pPr algn="ctr" indent="0" marL="0">
+              <a:buNone/>
+            </a:pPr>
+            <a:r>
+              <a:rPr lang="en-US" sz="420" b="1" dirty="0">
+                <a:solidFill>
+                  <a:srgbClr val="202124"/>
+                </a:solidFill>
+                <a:latin typeface="Arial" pitchFamily="34" charset="0"/>
+                <a:ea typeface="Arial" pitchFamily="34" charset="-122"/>
+                <a:cs typeface="Arial" pitchFamily="34" charset="-120"/>
+              </a:rPr>
+              <a:t>Sanitize response</a:t>
+            </a:r>
+            <a:endParaRPr lang="en-US" sz="420" dirty="0"/>
+          </a:p>
+        </p:txBody>
+      </p:sp>
+      <p:sp>
+        <p:nvSpPr>
+          <p:cNvPr id="158" name="Text 136"/>
+          <p:cNvSpPr/>
+          <p:nvPr/>
+        </p:nvSpPr>
+        <p:spPr>
+          <a:xfrm>
+            <a:off x="4938674" y="2299716"/>
+            <a:ext cx="492862" cy="114300"/>
+          </a:xfrm>
+          <a:prstGeom prst="roundRect">
+            <a:avLst>
+              <a:gd name="adj" fmla="val 24000"/>
+            </a:avLst>
+          </a:prstGeom>
+          <a:solidFill>
+            <a:srgbClr val="FFFFFF"/>
+          </a:solidFill>
+          <a:ln w="5080">
+            <a:solidFill>
+              <a:srgbClr val="DADCE0"/>
+            </a:solidFill>
+          </a:ln>
+        </p:spPr>
+        <p:txBody>
+          <a:bodyPr wrap="square" lIns="0" tIns="0" rIns="0" bIns="0" rtlCol="0" anchor="ctr"/>
+          <a:lstStyle/>
+          <a:p>
+            <a:pPr algn="ctr" indent="0" marL="0">
+              <a:buNone/>
+            </a:pPr>
+            <a:r>
+              <a:rPr lang="en-US" sz="420" b="1" dirty="0">
+                <a:solidFill>
+                  <a:srgbClr val="202124"/>
+                </a:solidFill>
+                <a:latin typeface="Arial" pitchFamily="34" charset="0"/>
+                <a:ea typeface="Arial" pitchFamily="34" charset="-122"/>
+                <a:cs typeface="Arial" pitchFamily="34" charset="-120"/>
+              </a:rPr>
+              <a:t>Security policies</a:t>
+            </a:r>
+            <a:endParaRPr lang="en-US" sz="420" dirty="0"/>
+          </a:p>
+        </p:txBody>
+      </p:sp>
+      <p:sp>
+        <p:nvSpPr>
+          <p:cNvPr id="159" name="Text 137"/>
+          <p:cNvSpPr/>
+          <p:nvPr/>
+        </p:nvSpPr>
+        <p:spPr>
+          <a:xfrm>
+            <a:off x="5077663" y="2816352"/>
+            <a:ext cx="542239" cy="114300"/>
+          </a:xfrm>
+          <a:prstGeom prst="roundRect">
+            <a:avLst>
+              <a:gd name="adj" fmla="val 24000"/>
+            </a:avLst>
+          </a:prstGeom>
+          <a:solidFill>
+            <a:srgbClr val="FFFFFF"/>
+          </a:solidFill>
+          <a:ln w="5080">
+            <a:solidFill>
+              <a:srgbClr val="DADCE0"/>
+            </a:solidFill>
+          </a:ln>
+        </p:spPr>
+        <p:txBody>
+          <a:bodyPr wrap="square" lIns="0" tIns="0" rIns="0" bIns="0" rtlCol="0" anchor="ctr"/>
+          <a:lstStyle/>
+          <a:p>
+            <a:pPr algn="ctr" indent="0" marL="0">
+              <a:buNone/>
+            </a:pPr>
+            <a:r>
+              <a:rPr lang="en-US" sz="420" b="1" dirty="0">
+                <a:solidFill>
+                  <a:srgbClr val="202124"/>
+                </a:solidFill>
+                <a:latin typeface="Arial" pitchFamily="34" charset="0"/>
+                <a:ea typeface="Arial" pitchFamily="34" charset="-122"/>
+                <a:cs typeface="Arial" pitchFamily="34" charset="-120"/>
+              </a:rPr>
+              <a:t>Resolve agent route</a:t>
+            </a:r>
+            <a:endParaRPr lang="en-US" sz="420" dirty="0"/>
+          </a:p>
+        </p:txBody>
+      </p:sp>
+      <p:sp>
+        <p:nvSpPr>
+          <p:cNvPr id="160" name="Text 138"/>
+          <p:cNvSpPr/>
+          <p:nvPr/>
+        </p:nvSpPr>
+        <p:spPr>
+          <a:xfrm>
+            <a:off x="6238951" y="1463954"/>
+            <a:ext cx="347472" cy="114300"/>
+          </a:xfrm>
+          <a:prstGeom prst="roundRect">
+            <a:avLst>
+              <a:gd name="adj" fmla="val 24000"/>
+            </a:avLst>
+          </a:prstGeom>
+          <a:solidFill>
+            <a:srgbClr val="FFFFFF"/>
+          </a:solidFill>
+          <a:ln w="5080">
+            <a:solidFill>
+              <a:srgbClr val="DADCE0"/>
+            </a:solidFill>
+          </a:ln>
+        </p:spPr>
+        <p:txBody>
+          <a:bodyPr wrap="square" lIns="0" tIns="0" rIns="0" bIns="0" rtlCol="0" anchor="ctr"/>
+          <a:lstStyle/>
+          <a:p>
+            <a:pPr algn="ctr" indent="0" marL="0">
+              <a:buNone/>
+            </a:pPr>
+            <a:r>
+              <a:rPr lang="en-US" sz="420" b="1" dirty="0">
+                <a:solidFill>
+                  <a:srgbClr val="202124"/>
+                </a:solidFill>
+                <a:latin typeface="Arial" pitchFamily="34" charset="0"/>
+                <a:ea typeface="Arial" pitchFamily="34" charset="-122"/>
+                <a:cs typeface="Arial" pitchFamily="34" charset="-120"/>
+              </a:rPr>
+              <a:t>Response</a:t>
+            </a:r>
+            <a:endParaRPr lang="en-US" sz="420" dirty="0"/>
+          </a:p>
+        </p:txBody>
+      </p:sp>
+      <p:sp>
+        <p:nvSpPr>
+          <p:cNvPr id="161" name="Text 139"/>
+          <p:cNvSpPr/>
+          <p:nvPr/>
+        </p:nvSpPr>
+        <p:spPr>
+          <a:xfrm>
+            <a:off x="6238951" y="2823667"/>
+            <a:ext cx="347472" cy="114300"/>
+          </a:xfrm>
+          <a:prstGeom prst="roundRect">
+            <a:avLst>
+              <a:gd name="adj" fmla="val 24000"/>
+            </a:avLst>
+          </a:prstGeom>
+          <a:solidFill>
+            <a:srgbClr val="FFFFFF"/>
+          </a:solidFill>
+          <a:ln w="5080">
+            <a:solidFill>
+              <a:srgbClr val="DADCE0"/>
+            </a:solidFill>
+          </a:ln>
+        </p:spPr>
+        <p:txBody>
+          <a:bodyPr wrap="square" lIns="0" tIns="0" rIns="0" bIns="0" rtlCol="0" anchor="ctr"/>
+          <a:lstStyle/>
+          <a:p>
+            <a:pPr algn="ctr" indent="0" marL="0">
+              <a:buNone/>
+            </a:pPr>
+            <a:r>
+              <a:rPr lang="en-US" sz="420" b="1" dirty="0">
+                <a:solidFill>
+                  <a:srgbClr val="202124"/>
+                </a:solidFill>
+                <a:latin typeface="Arial" pitchFamily="34" charset="0"/>
+                <a:ea typeface="Arial" pitchFamily="34" charset="-122"/>
+                <a:cs typeface="Arial" pitchFamily="34" charset="-120"/>
+              </a:rPr>
+              <a:t>Response</a:t>
+            </a:r>
+            <a:endParaRPr lang="en-US" sz="420" dirty="0"/>
+          </a:p>
+        </p:txBody>
+      </p:sp>
+      <p:sp>
+        <p:nvSpPr>
+          <p:cNvPr id="162" name="Text 140"/>
+          <p:cNvSpPr/>
+          <p:nvPr/>
+        </p:nvSpPr>
+        <p:spPr>
+          <a:xfrm>
+            <a:off x="5531206" y="1463954"/>
+            <a:ext cx="347472" cy="114300"/>
+          </a:xfrm>
+          <a:prstGeom prst="roundRect">
+            <a:avLst>
+              <a:gd name="adj" fmla="val 24000"/>
+            </a:avLst>
+          </a:prstGeom>
+          <a:solidFill>
+            <a:srgbClr val="FFFFFF"/>
+          </a:solidFill>
+          <a:ln w="5080">
+            <a:solidFill>
+              <a:srgbClr val="DADCE0"/>
+            </a:solidFill>
+          </a:ln>
+        </p:spPr>
+        <p:txBody>
+          <a:bodyPr wrap="square" lIns="0" tIns="0" rIns="0" bIns="0" rtlCol="0" anchor="ctr"/>
+          <a:lstStyle/>
+          <a:p>
+            <a:pPr algn="ctr" indent="0" marL="0">
+              <a:buNone/>
+            </a:pPr>
+            <a:r>
+              <a:rPr lang="en-US" sz="420" b="1" dirty="0">
+                <a:solidFill>
+                  <a:srgbClr val="202124"/>
+                </a:solidFill>
+                <a:latin typeface="Arial" pitchFamily="34" charset="0"/>
+                <a:ea typeface="Arial" pitchFamily="34" charset="-122"/>
+                <a:cs typeface="Arial" pitchFamily="34" charset="-120"/>
+              </a:rPr>
+              <a:t>Request</a:t>
+            </a:r>
+            <a:endParaRPr lang="en-US" sz="420" dirty="0"/>
+          </a:p>
+        </p:txBody>
+      </p:sp>
+      <p:sp>
+        <p:nvSpPr>
+          <p:cNvPr id="163" name="Text 141"/>
+          <p:cNvSpPr/>
+          <p:nvPr/>
+        </p:nvSpPr>
+        <p:spPr>
+          <a:xfrm>
+            <a:off x="5531206" y="2823667"/>
+            <a:ext cx="347472" cy="114300"/>
+          </a:xfrm>
+          <a:prstGeom prst="roundRect">
+            <a:avLst>
+              <a:gd name="adj" fmla="val 24000"/>
+            </a:avLst>
+          </a:prstGeom>
+          <a:solidFill>
+            <a:srgbClr val="FFFFFF"/>
+          </a:solidFill>
+          <a:ln w="5080">
+            <a:solidFill>
+              <a:srgbClr val="DADCE0"/>
+            </a:solidFill>
+          </a:ln>
+        </p:spPr>
+        <p:txBody>
+          <a:bodyPr wrap="square" lIns="0" tIns="0" rIns="0" bIns="0" rtlCol="0" anchor="ctr"/>
+          <a:lstStyle/>
+          <a:p>
+            <a:pPr algn="ctr" indent="0" marL="0">
+              <a:buNone/>
+            </a:pPr>
+            <a:r>
+              <a:rPr lang="en-US" sz="420" b="1" dirty="0">
+                <a:solidFill>
+                  <a:srgbClr val="202124"/>
+                </a:solidFill>
+                <a:latin typeface="Arial" pitchFamily="34" charset="0"/>
+                <a:ea typeface="Arial" pitchFamily="34" charset="-122"/>
+                <a:cs typeface="Arial" pitchFamily="34" charset="-120"/>
+              </a:rPr>
+              <a:t>Request</a:t>
+            </a:r>
+            <a:endParaRPr lang="en-US" sz="420" dirty="0"/>
           </a:p>
         </p:txBody>
       </p:sp>
@@ -7699,8 +7530,8 @@
         </p:nvSpPr>
         <p:spPr>
           <a:xfrm>
-            <a:off x="749808" y="621792"/>
-            <a:ext cx="10680192" cy="219456"/>
+            <a:off x="749808" y="603504"/>
+            <a:ext cx="10680192" cy="201168"/>
           </a:xfrm>
           <a:prstGeom prst="rect">
             <a:avLst/>
@@ -7716,7 +7547,7 @@
               <a:buNone/>
             </a:pPr>
             <a:r>
-              <a:rPr lang="en-US" sz="940" dirty="0">
+              <a:rPr lang="en-US" sz="920" dirty="0">
                 <a:solidFill>
                   <a:srgbClr val="3C4043"/>
                 </a:solidFill>
@@ -7726,7 +7557,7 @@
               </a:rPr>
               <a:t>The architecture consists of the following components:</a:t>
             </a:r>
-            <a:endParaRPr lang="en-US" sz="940" dirty="0"/>
+            <a:endParaRPr lang="en-US" sz="920" dirty="0"/>
           </a:p>
         </p:txBody>
       </p:sp>
@@ -7738,8 +7569,8 @@
         </p:nvSpPr>
         <p:spPr>
           <a:xfrm>
-            <a:off x="749808" y="877824"/>
-            <a:ext cx="2889504" cy="274320"/>
+            <a:off x="749808" y="841248"/>
+            <a:ext cx="2889504" cy="256032"/>
           </a:xfrm>
           <a:prstGeom prst="rect">
             <a:avLst/>
@@ -7763,8 +7594,8 @@
         </p:nvSpPr>
         <p:spPr>
           <a:xfrm>
-            <a:off x="841248" y="877824"/>
-            <a:ext cx="2706624" cy="274320"/>
+            <a:off x="841248" y="841248"/>
+            <a:ext cx="2706624" cy="256032"/>
           </a:xfrm>
           <a:prstGeom prst="rect">
             <a:avLst/>
@@ -7802,8 +7633,8 @@
         </p:nvSpPr>
         <p:spPr>
           <a:xfrm>
-            <a:off x="3639312" y="877824"/>
-            <a:ext cx="7790688" cy="274320"/>
+            <a:off x="3639312" y="841248"/>
+            <a:ext cx="7790688" cy="256032"/>
           </a:xfrm>
           <a:prstGeom prst="rect">
             <a:avLst/>
@@ -7827,8 +7658,8 @@
         </p:nvSpPr>
         <p:spPr>
           <a:xfrm>
-            <a:off x="3749040" y="877824"/>
-            <a:ext cx="7571232" cy="274320"/>
+            <a:off x="3749040" y="841248"/>
+            <a:ext cx="7571232" cy="256032"/>
           </a:xfrm>
           <a:prstGeom prst="rect">
             <a:avLst/>
@@ -7866,8 +7697,8 @@
         </p:nvSpPr>
         <p:spPr>
           <a:xfrm>
-            <a:off x="749808" y="1152144"/>
-            <a:ext cx="2889504" cy="296266"/>
+            <a:off x="749808" y="1097280"/>
+            <a:ext cx="2889504" cy="338328"/>
           </a:xfrm>
           <a:prstGeom prst="rect">
             <a:avLst/>
@@ -7891,8 +7722,8 @@
         </p:nvSpPr>
         <p:spPr>
           <a:xfrm>
-            <a:off x="841248" y="1170432"/>
-            <a:ext cx="2706624" cy="259690"/>
+            <a:off x="841248" y="1115568"/>
+            <a:ext cx="2706624" cy="301752"/>
           </a:xfrm>
           <a:prstGeom prst="rect">
             <a:avLst/>
@@ -7901,14 +7732,16 @@
           <a:ln/>
         </p:spPr>
         <p:txBody>
-          <a:bodyPr wrap="square" rtlCol="0" anchor="ctr"/>
-          <a:lstStyle/>
-          <a:p>
-            <a:pPr indent="0" marL="0">
-              <a:buNone/>
-            </a:pPr>
-            <a:r>
-              <a:rPr lang="en-US" sz="780" b="1" dirty="0">
+          <a:bodyPr wrap="square" rtlCol="0" anchor="ctr">
+            <a:normAutofit/>
+          </a:bodyPr>
+          <a:lstStyle/>
+          <a:p>
+            <a:pPr indent="0" marL="0">
+              <a:buNone/>
+            </a:pPr>
+            <a:r>
+              <a:rPr lang="en-US" sz="750" b="1" dirty="0">
                 <a:solidFill>
                   <a:srgbClr val="202124"/>
                 </a:solidFill>
@@ -7923,7 +7756,7 @@
               <a:buNone/>
             </a:pPr>
             <a:r>
-              <a:rPr lang="en-US" sz="670" dirty="0">
+              <a:rPr lang="en-US" sz="650" dirty="0">
                 <a:solidFill>
                   <a:srgbClr val="5F6368"/>
                 </a:solidFill>
@@ -7931,9 +7764,9 @@
                 <a:ea typeface="Arial" pitchFamily="34" charset="-122"/>
                 <a:cs typeface="Arial" pitchFamily="34" charset="-120"/>
               </a:rPr>
-              <a:t>Outer security and governance boundary that prevents unauthorized data exfiltration.</a:t>
-            </a:r>
-            <a:endParaRPr lang="en-US" sz="780" dirty="0"/>
+              <a:t>Outer security and governance boundary that prevents unauthorized data.</a:t>
+            </a:r>
+            <a:endParaRPr lang="en-US" sz="750" dirty="0"/>
           </a:p>
         </p:txBody>
       </p:sp>
@@ -7945,8 +7778,8 @@
         </p:nvSpPr>
         <p:spPr>
           <a:xfrm>
-            <a:off x="3639312" y="1152144"/>
-            <a:ext cx="7790688" cy="296266"/>
+            <a:off x="3639312" y="1097280"/>
+            <a:ext cx="7790688" cy="338328"/>
           </a:xfrm>
           <a:prstGeom prst="rect">
             <a:avLst/>
@@ -7970,8 +7803,8 @@
         </p:nvSpPr>
         <p:spPr>
           <a:xfrm>
-            <a:off x="3749040" y="1170432"/>
-            <a:ext cx="7571232" cy="259690"/>
+            <a:off x="3749040" y="1115568"/>
+            <a:ext cx="7571232" cy="301752"/>
           </a:xfrm>
           <a:prstGeom prst="rect">
             <a:avLst/>
@@ -7980,14 +7813,19 @@
           <a:ln/>
         </p:spPr>
         <p:txBody>
-          <a:bodyPr wrap="square" rtlCol="0" anchor="ctr"/>
-          <a:lstStyle/>
-          <a:p>
-            <a:pPr indent="0" marL="0">
-              <a:buNone/>
-            </a:pPr>
-            <a:r>
-              <a:rPr lang="en-US" sz="720" b="1" dirty="0">
+          <a:bodyPr wrap="square" rtlCol="0" anchor="ctr">
+            <a:normAutofit/>
+          </a:bodyPr>
+          <a:lstStyle/>
+          <a:p>
+            <a:pPr indent="0" marL="0">
+              <a:lnSpc>
+                <a:spcPct val="102000"/>
+              </a:lnSpc>
+              <a:buNone/>
+            </a:pPr>
+            <a:r>
+              <a:rPr lang="en-US" sz="690" b="1" dirty="0">
                 <a:solidFill>
                   <a:srgbClr val="202124"/>
                 </a:solidFill>
@@ -7998,10 +7836,13 @@
               <a:t>• Unified Hybrid Control Hub + PSC Bridge to Sovereign Spokes: </a:t>
             </a:r>
             <a:pPr indent="0" marL="0">
-              <a:buNone/>
-            </a:pPr>
-            <a:r>
-              <a:rPr lang="en-US" sz="700" dirty="0">
+              <a:lnSpc>
+                <a:spcPct val="102000"/>
+              </a:lnSpc>
+              <a:buNone/>
+            </a:pPr>
+            <a:r>
+              <a:rPr lang="en-US" sz="670" dirty="0">
                 <a:solidFill>
                   <a:srgbClr val="3C4043"/>
                 </a:solidFill>
@@ -8011,7 +7852,7 @@
               </a:rPr>
               <a:t>Enforces VPC Service Controls service perimeters around hub and spoke projects to block unauthorized cross-perimeter data movement.</a:t>
             </a:r>
-            <a:endParaRPr lang="en-US" sz="720" dirty="0"/>
+            <a:endParaRPr lang="en-US" sz="690" dirty="0"/>
           </a:p>
         </p:txBody>
       </p:sp>
@@ -8023,8 +7864,8 @@
         </p:nvSpPr>
         <p:spPr>
           <a:xfrm>
-            <a:off x="749808" y="1448410"/>
-            <a:ext cx="2889504" cy="786384"/>
+            <a:off x="749808" y="1435608"/>
+            <a:ext cx="2889504" cy="822960"/>
           </a:xfrm>
           <a:prstGeom prst="rect">
             <a:avLst/>
@@ -8048,8 +7889,8 @@
         </p:nvSpPr>
         <p:spPr>
           <a:xfrm>
-            <a:off x="841248" y="1466698"/>
-            <a:ext cx="2706624" cy="749808"/>
+            <a:off x="841248" y="1453896"/>
+            <a:ext cx="2706624" cy="786384"/>
           </a:xfrm>
           <a:prstGeom prst="rect">
             <a:avLst/>
@@ -8058,14 +7899,16 @@
           <a:ln/>
         </p:spPr>
         <p:txBody>
-          <a:bodyPr wrap="square" rtlCol="0" anchor="ctr"/>
-          <a:lstStyle/>
-          <a:p>
-            <a:pPr indent="0" marL="0">
-              <a:buNone/>
-            </a:pPr>
-            <a:r>
-              <a:rPr lang="en-US" sz="780" b="1" dirty="0">
+          <a:bodyPr wrap="square" rtlCol="0" anchor="ctr">
+            <a:normAutofit/>
+          </a:bodyPr>
+          <a:lstStyle/>
+          <a:p>
+            <a:pPr indent="0" marL="0">
+              <a:buNone/>
+            </a:pPr>
+            <a:r>
+              <a:rPr lang="en-US" sz="750" b="1" dirty="0">
                 <a:solidFill>
                   <a:srgbClr val="202124"/>
                 </a:solidFill>
@@ -8080,7 +7923,7 @@
               <a:buNone/>
             </a:pPr>
             <a:r>
-              <a:rPr lang="en-US" sz="670" dirty="0">
+              <a:rPr lang="en-US" sz="650" dirty="0">
                 <a:solidFill>
                   <a:srgbClr val="5F6368"/>
                 </a:solidFill>
@@ -8090,7 +7933,7 @@
               </a:rPr>
               <a:t>Centralized ingress and control plane managing edge security, identity verification, and request routing.</a:t>
             </a:r>
-            <a:endParaRPr lang="en-US" sz="780" dirty="0"/>
+            <a:endParaRPr lang="en-US" sz="750" dirty="0"/>
           </a:p>
         </p:txBody>
       </p:sp>
@@ -8102,8 +7945,8 @@
         </p:nvSpPr>
         <p:spPr>
           <a:xfrm>
-            <a:off x="3639312" y="1448410"/>
-            <a:ext cx="7790688" cy="786384"/>
+            <a:off x="3639312" y="1435608"/>
+            <a:ext cx="7790688" cy="822960"/>
           </a:xfrm>
           <a:prstGeom prst="rect">
             <a:avLst/>
@@ -8127,8 +7970,8 @@
         </p:nvSpPr>
         <p:spPr>
           <a:xfrm>
-            <a:off x="3749040" y="1466698"/>
-            <a:ext cx="7571232" cy="749808"/>
+            <a:off x="3749040" y="1453896"/>
+            <a:ext cx="7571232" cy="786384"/>
           </a:xfrm>
           <a:prstGeom prst="rect">
             <a:avLst/>
@@ -8137,14 +7980,19 @@
           <a:ln/>
         </p:spPr>
         <p:txBody>
-          <a:bodyPr wrap="square" rtlCol="0" anchor="ctr"/>
-          <a:lstStyle/>
-          <a:p>
-            <a:pPr indent="0" marL="0">
-              <a:buNone/>
-            </a:pPr>
-            <a:r>
-              <a:rPr lang="en-US" sz="720" b="1" dirty="0">
+          <a:bodyPr wrap="square" rtlCol="0" anchor="ctr">
+            <a:normAutofit/>
+          </a:bodyPr>
+          <a:lstStyle/>
+          <a:p>
+            <a:pPr indent="0" marL="0">
+              <a:lnSpc>
+                <a:spcPct val="102000"/>
+              </a:lnSpc>
+              <a:buNone/>
+            </a:pPr>
+            <a:r>
+              <a:rPr lang="en-US" sz="690" b="1" dirty="0">
                 <a:solidFill>
                   <a:srgbClr val="202124"/>
                 </a:solidFill>
@@ -8155,10 +8003,13 @@
               <a:t>• External Application Load Balancer: </a:t>
             </a:r>
             <a:pPr indent="0" marL="0">
-              <a:buNone/>
-            </a:pPr>
-            <a:r>
-              <a:rPr lang="en-US" sz="700" dirty="0">
+              <a:lnSpc>
+                <a:spcPct val="102000"/>
+              </a:lnSpc>
+              <a:buNone/>
+            </a:pPr>
+            <a:r>
+              <a:rPr lang="en-US" sz="670" dirty="0">
                 <a:solidFill>
                   <a:srgbClr val="3C4043"/>
                 </a:solidFill>
@@ -8170,24 +8021,30 @@
 </a:t>
             </a:r>
             <a:pPr indent="0" marL="0">
-              <a:buNone/>
-            </a:pPr>
-            <a:r>
-              <a:rPr lang="en-US" sz="720" b="1" dirty="0">
-                <a:solidFill>
-                  <a:srgbClr val="202124"/>
-                </a:solidFill>
-                <a:latin typeface="Arial" pitchFamily="34" charset="0"/>
-                <a:ea typeface="Arial" pitchFamily="34" charset="-122"/>
-                <a:cs typeface="Arial" pitchFamily="34" charset="-120"/>
-              </a:rPr>
-              <a:t>• Cloud Armor &amp; IAP &amp; Firestore Route Table: </a:t>
-            </a:r>
-            <a:pPr indent="0" marL="0">
-              <a:buNone/>
-            </a:pPr>
-            <a:r>
-              <a:rPr lang="en-US" sz="700" dirty="0">
+              <a:lnSpc>
+                <a:spcPct val="102000"/>
+              </a:lnSpc>
+              <a:buNone/>
+            </a:pPr>
+            <a:r>
+              <a:rPr lang="en-US" sz="690" b="1" dirty="0">
+                <a:solidFill>
+                  <a:srgbClr val="202124"/>
+                </a:solidFill>
+                <a:latin typeface="Arial" pitchFamily="34" charset="0"/>
+                <a:ea typeface="Arial" pitchFamily="34" charset="-122"/>
+                <a:cs typeface="Arial" pitchFamily="34" charset="-120"/>
+              </a:rPr>
+              <a:t>• Google Cloud Armor &amp; Firestore Route Table: </a:t>
+            </a:r>
+            <a:pPr indent="0" marL="0">
+              <a:lnSpc>
+                <a:spcPct val="102000"/>
+              </a:lnSpc>
+              <a:buNone/>
+            </a:pPr>
+            <a:r>
+              <a:rPr lang="en-US" sz="670" dirty="0">
                 <a:solidFill>
                   <a:srgbClr val="3C4043"/>
                 </a:solidFill>
@@ -8199,10 +8056,13 @@
 </a:t>
             </a:r>
             <a:pPr indent="0" marL="0">
-              <a:buNone/>
-            </a:pPr>
-            <a:r>
-              <a:rPr lang="en-US" sz="720" b="1" dirty="0">
+              <a:lnSpc>
+                <a:spcPct val="102000"/>
+              </a:lnSpc>
+              <a:buNone/>
+            </a:pPr>
+            <a:r>
+              <a:rPr lang="en-US" sz="690" b="1" dirty="0">
                 <a:solidFill>
                   <a:srgbClr val="202124"/>
                 </a:solidFill>
@@ -8213,10 +8073,13 @@
               <a:t>• Cross-Project Catalog: </a:t>
             </a:r>
             <a:pPr indent="0" marL="0">
-              <a:buNone/>
-            </a:pPr>
-            <a:r>
-              <a:rPr lang="en-US" sz="700" dirty="0">
+              <a:lnSpc>
+                <a:spcPct val="102000"/>
+              </a:lnSpc>
+              <a:buNone/>
+            </a:pPr>
+            <a:r>
+              <a:rPr lang="en-US" sz="670" dirty="0">
                 <a:solidFill>
                   <a:srgbClr val="3C4043"/>
                 </a:solidFill>
@@ -8228,10 +8091,13 @@
 </a:t>
             </a:r>
             <a:pPr indent="0" marL="0">
-              <a:buNone/>
-            </a:pPr>
-            <a:r>
-              <a:rPr lang="en-US" sz="720" b="1" dirty="0">
+              <a:lnSpc>
+                <a:spcPct val="102000"/>
+              </a:lnSpc>
+              <a:buNone/>
+            </a:pPr>
+            <a:r>
+              <a:rPr lang="en-US" sz="690" b="1" dirty="0">
                 <a:solidFill>
                   <a:srgbClr val="202124"/>
                 </a:solidFill>
@@ -8242,10 +8108,13 @@
               <a:t>• Cloud Run Router: </a:t>
             </a:r>
             <a:pPr indent="0" marL="0">
-              <a:buNone/>
-            </a:pPr>
-            <a:r>
-              <a:rPr lang="en-US" sz="700" dirty="0">
+              <a:lnSpc>
+                <a:spcPct val="102000"/>
+              </a:lnSpc>
+              <a:buNone/>
+            </a:pPr>
+            <a:r>
+              <a:rPr lang="en-US" sz="670" dirty="0">
                 <a:solidFill>
                   <a:srgbClr val="3C4043"/>
                 </a:solidFill>
@@ -8255,7 +8124,7 @@
               </a:rPr>
               <a:t>Serverless routing service that validates caller tokens and dispatches requests to the target execution spoke.</a:t>
             </a:r>
-            <a:endParaRPr lang="en-US" sz="720" dirty="0"/>
+            <a:endParaRPr lang="en-US" sz="690" dirty="0"/>
           </a:p>
         </p:txBody>
       </p:sp>
@@ -8267,8 +8136,8 @@
         </p:nvSpPr>
         <p:spPr>
           <a:xfrm>
-            <a:off x="749808" y="2234794"/>
-            <a:ext cx="2889504" cy="615391"/>
+            <a:off x="749808" y="2258568"/>
+            <a:ext cx="2889504" cy="822960"/>
           </a:xfrm>
           <a:prstGeom prst="rect">
             <a:avLst/>
@@ -8292,8 +8161,8 @@
         </p:nvSpPr>
         <p:spPr>
           <a:xfrm>
-            <a:off x="841248" y="2253082"/>
-            <a:ext cx="2706624" cy="578815"/>
+            <a:off x="841248" y="2276856"/>
+            <a:ext cx="2706624" cy="786384"/>
           </a:xfrm>
           <a:prstGeom prst="rect">
             <a:avLst/>
@@ -8302,14 +8171,16 @@
           <a:ln/>
         </p:spPr>
         <p:txBody>
-          <a:bodyPr wrap="square" rtlCol="0" anchor="ctr"/>
-          <a:lstStyle/>
-          <a:p>
-            <a:pPr indent="0" marL="0">
-              <a:buNone/>
-            </a:pPr>
-            <a:r>
-              <a:rPr lang="en-US" sz="780" b="1" dirty="0">
+          <a:bodyPr wrap="square" rtlCol="0" anchor="ctr">
+            <a:normAutofit/>
+          </a:bodyPr>
+          <a:lstStyle/>
+          <a:p>
+            <a:pPr indent="0" marL="0">
+              <a:buNone/>
+            </a:pPr>
+            <a:r>
+              <a:rPr lang="en-US" sz="750" b="1" dirty="0">
                 <a:solidFill>
                   <a:srgbClr val="202124"/>
                 </a:solidFill>
@@ -8324,7 +8195,7 @@
               <a:buNone/>
             </a:pPr>
             <a:r>
-              <a:rPr lang="en-US" sz="670" dirty="0">
+              <a:rPr lang="en-US" sz="650" dirty="0">
                 <a:solidFill>
                   <a:srgbClr val="5F6368"/>
                 </a:solidFill>
@@ -8334,7 +8205,7 @@
               </a:rPr>
               <a:t>Dedicated governance plane providing unified security posture, cryptographic key management, and OpenTelemetry observability.</a:t>
             </a:r>
-            <a:endParaRPr lang="en-US" sz="780" dirty="0"/>
+            <a:endParaRPr lang="en-US" sz="750" dirty="0"/>
           </a:p>
         </p:txBody>
       </p:sp>
@@ -8346,8 +8217,8 @@
         </p:nvSpPr>
         <p:spPr>
           <a:xfrm>
-            <a:off x="3639312" y="2234794"/>
-            <a:ext cx="7790688" cy="615391"/>
+            <a:off x="3639312" y="2258568"/>
+            <a:ext cx="7790688" cy="822960"/>
           </a:xfrm>
           <a:prstGeom prst="rect">
             <a:avLst/>
@@ -8371,8 +8242,8 @@
         </p:nvSpPr>
         <p:spPr>
           <a:xfrm>
-            <a:off x="3749040" y="2253082"/>
-            <a:ext cx="7571232" cy="578815"/>
+            <a:off x="3749040" y="2276856"/>
+            <a:ext cx="7571232" cy="786384"/>
           </a:xfrm>
           <a:prstGeom prst="rect">
             <a:avLst/>
@@ -8381,14 +8252,19 @@
           <a:ln/>
         </p:spPr>
         <p:txBody>
-          <a:bodyPr wrap="square" rtlCol="0" anchor="ctr"/>
-          <a:lstStyle/>
-          <a:p>
-            <a:pPr indent="0" marL="0">
-              <a:buNone/>
-            </a:pPr>
-            <a:r>
-              <a:rPr lang="en-US" sz="720" b="1" dirty="0">
+          <a:bodyPr wrap="square" rtlCol="0" anchor="ctr">
+            <a:normAutofit/>
+          </a:bodyPr>
+          <a:lstStyle/>
+          <a:p>
+            <a:pPr indent="0" marL="0">
+              <a:lnSpc>
+                <a:spcPct val="102000"/>
+              </a:lnSpc>
+              <a:buNone/>
+            </a:pPr>
+            <a:r>
+              <a:rPr lang="en-US" sz="690" b="1" dirty="0">
                 <a:solidFill>
                   <a:srgbClr val="202124"/>
                 </a:solidFill>
@@ -8399,10 +8275,13 @@
               <a:t>• 1. SHADOW_SYNC: </a:t>
             </a:r>
             <a:pPr indent="0" marL="0">
-              <a:buNone/>
-            </a:pPr>
-            <a:r>
-              <a:rPr lang="en-US" sz="700" dirty="0">
+              <a:lnSpc>
+                <a:spcPct val="102000"/>
+              </a:lnSpc>
+              <a:buNone/>
+            </a:pPr>
+            <a:r>
+              <a:rPr lang="en-US" sz="670" dirty="0">
                 <a:solidFill>
                   <a:srgbClr val="3C4043"/>
                 </a:solidFill>
@@ -8414,10 +8293,13 @@
 </a:t>
             </a:r>
             <a:pPr indent="0" marL="0">
-              <a:buNone/>
-            </a:pPr>
-            <a:r>
-              <a:rPr lang="en-US" sz="720" b="1" dirty="0">
+              <a:lnSpc>
+                <a:spcPct val="102000"/>
+              </a:lnSpc>
+              <a:buNone/>
+            </a:pPr>
+            <a:r>
+              <a:rPr lang="en-US" sz="690" b="1" dirty="0">
                 <a:solidFill>
                   <a:srgbClr val="202124"/>
                 </a:solidFill>
@@ -8428,10 +8310,13 @@
               <a:t>• 2. ATOMIC_CUTOVER: </a:t>
             </a:r>
             <a:pPr indent="0" marL="0">
-              <a:buNone/>
-            </a:pPr>
-            <a:r>
-              <a:rPr lang="en-US" sz="700" dirty="0">
+              <a:lnSpc>
+                <a:spcPct val="102000"/>
+              </a:lnSpc>
+              <a:buNone/>
+            </a:pPr>
+            <a:r>
+              <a:rPr lang="en-US" sz="670" dirty="0">
                 <a:solidFill>
                   <a:srgbClr val="3C4043"/>
                 </a:solidFill>
@@ -8443,10 +8328,13 @@
 </a:t>
             </a:r>
             <a:pPr indent="0" marL="0">
-              <a:buNone/>
-            </a:pPr>
-            <a:r>
-              <a:rPr lang="en-US" sz="720" b="1" dirty="0">
+              <a:lnSpc>
+                <a:spcPct val="102000"/>
+              </a:lnSpc>
+              <a:buNone/>
+            </a:pPr>
+            <a:r>
+              <a:rPr lang="en-US" sz="690" b="1" dirty="0">
                 <a:solidFill>
                   <a:srgbClr val="202124"/>
                 </a:solidFill>
@@ -8457,10 +8345,13 @@
               <a:t>• 3. DRAIN_AND_VERIFY: </a:t>
             </a:r>
             <a:pPr indent="0" marL="0">
-              <a:buNone/>
-            </a:pPr>
-            <a:r>
-              <a:rPr lang="en-US" sz="700" dirty="0">
+              <a:lnSpc>
+                <a:spcPct val="102000"/>
+              </a:lnSpc>
+              <a:buNone/>
+            </a:pPr>
+            <a:r>
+              <a:rPr lang="en-US" sz="670" dirty="0">
                 <a:solidFill>
                   <a:srgbClr val="3C4043"/>
                 </a:solidFill>
@@ -8470,7 +8361,7 @@
               </a:rPr>
               <a:t>Aggregates audit logs, execution traces, and OpenTelemetry FinOps telemetry into BigQuery.</a:t>
             </a:r>
-            <a:endParaRPr lang="en-US" sz="720" dirty="0"/>
+            <a:endParaRPr lang="en-US" sz="690" dirty="0"/>
           </a:p>
         </p:txBody>
       </p:sp>
@@ -8482,8 +8373,8 @@
         </p:nvSpPr>
         <p:spPr>
           <a:xfrm>
-            <a:off x="749808" y="2850185"/>
-            <a:ext cx="2889504" cy="296266"/>
+            <a:off x="749808" y="3081528"/>
+            <a:ext cx="2889504" cy="338328"/>
           </a:xfrm>
           <a:prstGeom prst="rect">
             <a:avLst/>
@@ -8507,8 +8398,8 @@
         </p:nvSpPr>
         <p:spPr>
           <a:xfrm>
-            <a:off x="841248" y="2868473"/>
-            <a:ext cx="2706624" cy="259690"/>
+            <a:off x="841248" y="3099816"/>
+            <a:ext cx="2706624" cy="301752"/>
           </a:xfrm>
           <a:prstGeom prst="rect">
             <a:avLst/>
@@ -8517,14 +8408,16 @@
           <a:ln/>
         </p:spPr>
         <p:txBody>
-          <a:bodyPr wrap="square" rtlCol="0" anchor="ctr"/>
-          <a:lstStyle/>
-          <a:p>
-            <a:pPr indent="0" marL="0">
-              <a:buNone/>
-            </a:pPr>
-            <a:r>
-              <a:rPr lang="en-US" sz="780" b="1" dirty="0">
+          <a:bodyPr wrap="square" rtlCol="0" anchor="ctr">
+            <a:normAutofit/>
+          </a:bodyPr>
+          <a:lstStyle/>
+          <a:p>
+            <a:pPr indent="0" marL="0">
+              <a:buNone/>
+            </a:pPr>
+            <a:r>
+              <a:rPr lang="en-US" sz="750" b="1" dirty="0">
                 <a:solidFill>
                   <a:srgbClr val="202124"/>
                 </a:solidFill>
@@ -8539,7 +8432,7 @@
               <a:buNone/>
             </a:pPr>
             <a:r>
-              <a:rPr lang="en-US" sz="670" dirty="0">
+              <a:rPr lang="en-US" sz="650" dirty="0">
                 <a:solidFill>
                   <a:srgbClr val="5F6368"/>
                 </a:solidFill>
@@ -8549,7 +8442,7 @@
               </a:rPr>
               <a:t>Identity and resource isolation boundary restricting principal access so workloads.</a:t>
             </a:r>
-            <a:endParaRPr lang="en-US" sz="780" dirty="0"/>
+            <a:endParaRPr lang="en-US" sz="750" dirty="0"/>
           </a:p>
         </p:txBody>
       </p:sp>
@@ -8561,8 +8454,8 @@
         </p:nvSpPr>
         <p:spPr>
           <a:xfrm>
-            <a:off x="3639312" y="2850185"/>
-            <a:ext cx="7790688" cy="296266"/>
+            <a:off x="3639312" y="3081528"/>
+            <a:ext cx="7790688" cy="338328"/>
           </a:xfrm>
           <a:prstGeom prst="rect">
             <a:avLst/>
@@ -8586,8 +8479,8 @@
         </p:nvSpPr>
         <p:spPr>
           <a:xfrm>
-            <a:off x="3749040" y="2868473"/>
-            <a:ext cx="7571232" cy="259690"/>
+            <a:off x="3749040" y="3099816"/>
+            <a:ext cx="7571232" cy="301752"/>
           </a:xfrm>
           <a:prstGeom prst="rect">
             <a:avLst/>
@@ -8596,14 +8489,19 @@
           <a:ln/>
         </p:spPr>
         <p:txBody>
-          <a:bodyPr wrap="square" rtlCol="0" anchor="ctr"/>
-          <a:lstStyle/>
-          <a:p>
-            <a:pPr indent="0" marL="0">
-              <a:buNone/>
-            </a:pPr>
-            <a:r>
-              <a:rPr lang="en-US" sz="720" b="1" dirty="0">
+          <a:bodyPr wrap="square" rtlCol="0" anchor="ctr">
+            <a:normAutofit/>
+          </a:bodyPr>
+          <a:lstStyle/>
+          <a:p>
+            <a:pPr indent="0" marL="0">
+              <a:lnSpc>
+                <a:spcPct val="102000"/>
+              </a:lnSpc>
+              <a:buNone/>
+            </a:pPr>
+            <a:r>
+              <a:rPr lang="en-US" sz="690" b="1" dirty="0">
                 <a:solidFill>
                   <a:srgbClr val="202124"/>
                 </a:solidFill>
@@ -8614,10 +8512,13 @@
               <a:t>• Hub VPC • Tenant-Aware Router &amp; 3-Phase Live Tier Migrator: </a:t>
             </a:r>
             <a:pPr indent="0" marL="0">
-              <a:buNone/>
-            </a:pPr>
-            <a:r>
-              <a:rPr lang="en-US" sz="700" dirty="0">
+              <a:lnSpc>
+                <a:spcPct val="102000"/>
+              </a:lnSpc>
+              <a:buNone/>
+            </a:pPr>
+            <a:r>
+              <a:rPr lang="en-US" sz="670" dirty="0">
                 <a:solidFill>
                   <a:srgbClr val="3C4043"/>
                 </a:solidFill>
@@ -8627,7 +8528,7 @@
               </a:rPr>
               <a:t>Binds IAM Principal Access Boundary (PAB) policies to spoke principals so credentials and tool calls remain strictly scoped to their authorized boundary.</a:t>
             </a:r>
-            <a:endParaRPr lang="en-US" sz="720" dirty="0"/>
+            <a:endParaRPr lang="en-US" sz="690" dirty="0"/>
           </a:p>
         </p:txBody>
       </p:sp>
@@ -8639,8 +8540,8 @@
         </p:nvSpPr>
         <p:spPr>
           <a:xfrm>
-            <a:off x="749808" y="3146450"/>
-            <a:ext cx="2889504" cy="785470"/>
+            <a:off x="749808" y="3419856"/>
+            <a:ext cx="2889504" cy="822960"/>
           </a:xfrm>
           <a:prstGeom prst="rect">
             <a:avLst/>
@@ -8664,8 +8565,8 @@
         </p:nvSpPr>
         <p:spPr>
           <a:xfrm>
-            <a:off x="841248" y="3164738"/>
-            <a:ext cx="2706624" cy="748894"/>
+            <a:off x="841248" y="3438144"/>
+            <a:ext cx="2706624" cy="786384"/>
           </a:xfrm>
           <a:prstGeom prst="rect">
             <a:avLst/>
@@ -8674,14 +8575,16 @@
           <a:ln/>
         </p:spPr>
         <p:txBody>
-          <a:bodyPr wrap="square" rtlCol="0" anchor="ctr"/>
-          <a:lstStyle/>
-          <a:p>
-            <a:pPr indent="0" marL="0">
-              <a:buNone/>
-            </a:pPr>
-            <a:r>
-              <a:rPr lang="en-US" sz="780" b="1" dirty="0">
+          <a:bodyPr wrap="square" rtlCol="0" anchor="ctr">
+            <a:normAutofit/>
+          </a:bodyPr>
+          <a:lstStyle/>
+          <a:p>
+            <a:pPr indent="0" marL="0">
+              <a:buNone/>
+            </a:pPr>
+            <a:r>
+              <a:rPr lang="en-US" sz="750" b="1" dirty="0">
                 <a:solidFill>
                   <a:srgbClr val="202124"/>
                 </a:solidFill>
@@ -8696,7 +8599,7 @@
               <a:buNone/>
             </a:pPr>
             <a:r>
-              <a:rPr lang="en-US" sz="670" dirty="0">
+              <a:rPr lang="en-US" sz="650" dirty="0">
                 <a:solidFill>
                   <a:srgbClr val="5F6368"/>
                 </a:solidFill>
@@ -8706,7 +8609,7 @@
               </a:rPr>
               <a:t>Isolated Google Cloud execution spokes.</a:t>
             </a:r>
-            <a:endParaRPr lang="en-US" sz="780" dirty="0"/>
+            <a:endParaRPr lang="en-US" sz="750" dirty="0"/>
           </a:p>
         </p:txBody>
       </p:sp>
@@ -8718,8 +8621,8 @@
         </p:nvSpPr>
         <p:spPr>
           <a:xfrm>
-            <a:off x="3639312" y="3146450"/>
-            <a:ext cx="7790688" cy="785470"/>
+            <a:off x="3639312" y="3419856"/>
+            <a:ext cx="7790688" cy="822960"/>
           </a:xfrm>
           <a:prstGeom prst="rect">
             <a:avLst/>
@@ -8743,8 +8646,8 @@
         </p:nvSpPr>
         <p:spPr>
           <a:xfrm>
-            <a:off x="3749040" y="3164738"/>
-            <a:ext cx="7571232" cy="748894"/>
+            <a:off x="3749040" y="3438144"/>
+            <a:ext cx="7571232" cy="786384"/>
           </a:xfrm>
           <a:prstGeom prst="rect">
             <a:avLst/>
@@ -8753,14 +8656,19 @@
           <a:ln/>
         </p:spPr>
         <p:txBody>
-          <a:bodyPr wrap="square" rtlCol="0" anchor="ctr"/>
-          <a:lstStyle/>
-          <a:p>
-            <a:pPr indent="0" marL="0">
-              <a:buNone/>
-            </a:pPr>
-            <a:r>
-              <a:rPr lang="en-US" sz="720" b="1" dirty="0">
+          <a:bodyPr wrap="square" rtlCol="0" anchor="ctr">
+            <a:normAutofit/>
+          </a:bodyPr>
+          <a:lstStyle/>
+          <a:p>
+            <a:pPr indent="0" marL="0">
+              <a:lnSpc>
+                <a:spcPct val="102000"/>
+              </a:lnSpc>
+              <a:buNone/>
+            </a:pPr>
+            <a:r>
+              <a:rPr lang="en-US" sz="690" b="1" dirty="0">
                 <a:solidFill>
                   <a:srgbClr val="202124"/>
                 </a:solidFill>
@@ -8771,10 +8679,13 @@
               <a:t>• Vertex AI Agent Engine: </a:t>
             </a:r>
             <a:pPr indent="0" marL="0">
-              <a:buNone/>
-            </a:pPr>
-            <a:r>
-              <a:rPr lang="en-US" sz="700" dirty="0">
+              <a:lnSpc>
+                <a:spcPct val="102000"/>
+              </a:lnSpc>
+              <a:buNone/>
+            </a:pPr>
+            <a:r>
+              <a:rPr lang="en-US" sz="670" dirty="0">
                 <a:solidFill>
                   <a:srgbClr val="3C4043"/>
                 </a:solidFill>
@@ -8786,10 +8697,13 @@
 </a:t>
             </a:r>
             <a:pPr indent="0" marL="0">
-              <a:buNone/>
-            </a:pPr>
-            <a:r>
-              <a:rPr lang="en-US" sz="720" b="1" dirty="0">
+              <a:lnSpc>
+                <a:spcPct val="102000"/>
+              </a:lnSpc>
+              <a:buNone/>
+            </a:pPr>
+            <a:r>
+              <a:rPr lang="en-US" sz="690" b="1" dirty="0">
                 <a:solidFill>
                   <a:srgbClr val="202124"/>
                 </a:solidFill>
@@ -8800,10 +8714,13 @@
               <a:t>• Shared Model Armor: </a:t>
             </a:r>
             <a:pPr indent="0" marL="0">
-              <a:buNone/>
-            </a:pPr>
-            <a:r>
-              <a:rPr lang="en-US" sz="700" dirty="0">
+              <a:lnSpc>
+                <a:spcPct val="102000"/>
+              </a:lnSpc>
+              <a:buNone/>
+            </a:pPr>
+            <a:r>
+              <a:rPr lang="en-US" sz="670" dirty="0">
                 <a:solidFill>
                   <a:srgbClr val="3C4043"/>
                 </a:solidFill>
@@ -8815,10 +8732,13 @@
 </a:t>
             </a:r>
             <a:pPr indent="0" marL="0">
-              <a:buNone/>
-            </a:pPr>
-            <a:r>
-              <a:rPr lang="en-US" sz="720" b="1" dirty="0">
+              <a:lnSpc>
+                <a:spcPct val="102000"/>
+              </a:lnSpc>
+              <a:buNone/>
+            </a:pPr>
+            <a:r>
+              <a:rPr lang="en-US" sz="690" b="1" dirty="0">
                 <a:solidFill>
                   <a:srgbClr val="202124"/>
                 </a:solidFill>
@@ -8829,10 +8749,13 @@
               <a:t>• Pooled MCP Hub: </a:t>
             </a:r>
             <a:pPr indent="0" marL="0">
-              <a:buNone/>
-            </a:pPr>
-            <a:r>
-              <a:rPr lang="en-US" sz="700" dirty="0">
+              <a:lnSpc>
+                <a:spcPct val="102000"/>
+              </a:lnSpc>
+              <a:buNone/>
+            </a:pPr>
+            <a:r>
+              <a:rPr lang="en-US" sz="670" dirty="0">
                 <a:solidFill>
                   <a:srgbClr val="3C4043"/>
                 </a:solidFill>
@@ -8844,10 +8767,13 @@
 </a:t>
             </a:r>
             <a:pPr indent="0" marL="0">
-              <a:buNone/>
-            </a:pPr>
-            <a:r>
-              <a:rPr lang="en-US" sz="720" b="1" dirty="0">
+              <a:lnSpc>
+                <a:spcPct val="102000"/>
+              </a:lnSpc>
+              <a:buNone/>
+            </a:pPr>
+            <a:r>
+              <a:rPr lang="en-US" sz="690" b="1" dirty="0">
                 <a:solidFill>
                   <a:srgbClr val="202124"/>
                 </a:solidFill>
@@ -8858,10 +8784,13 @@
               <a:t>• Shared AlloyDB RLS: </a:t>
             </a:r>
             <a:pPr indent="0" marL="0">
-              <a:buNone/>
-            </a:pPr>
-            <a:r>
-              <a:rPr lang="en-US" sz="700" dirty="0">
+              <a:lnSpc>
+                <a:spcPct val="102000"/>
+              </a:lnSpc>
+              <a:buNone/>
+            </a:pPr>
+            <a:r>
+              <a:rPr lang="en-US" sz="670" dirty="0">
                 <a:solidFill>
                   <a:srgbClr val="3C4043"/>
                 </a:solidFill>
@@ -8871,7 +8800,7 @@
               </a:rPr>
               <a:t>Isolated persistence layer enforcing access boundaries, vector namespaces, and encryption at rest.</a:t>
             </a:r>
-            <a:endParaRPr lang="en-US" sz="720" dirty="0"/>
+            <a:endParaRPr lang="en-US" sz="690" dirty="0"/>
           </a:p>
         </p:txBody>
       </p:sp>
@@ -8883,7 +8812,7 @@
         </p:nvSpPr>
         <p:spPr>
           <a:xfrm>
-            <a:off x="749808" y="4041648"/>
+            <a:off x="749808" y="4315968"/>
             <a:ext cx="10680192" cy="0"/>
           </a:xfrm>
           <a:prstGeom prst="line">
@@ -8906,8 +8835,8 @@
         </p:nvSpPr>
         <p:spPr>
           <a:xfrm>
-            <a:off x="749808" y="4114800"/>
-            <a:ext cx="10680192" cy="256032"/>
+            <a:off x="749808" y="4370832"/>
+            <a:ext cx="10680192" cy="237744"/>
           </a:xfrm>
           <a:prstGeom prst="rect">
             <a:avLst/>
@@ -8923,7 +8852,7 @@
               <a:buNone/>
             </a:pPr>
             <a:r>
-              <a:rPr lang="en-US" sz="1300" dirty="0">
+              <a:rPr lang="en-US" sz="1250" dirty="0">
                 <a:solidFill>
                   <a:srgbClr val="202124"/>
                 </a:solidFill>
@@ -8933,7 +8862,7 @@
               </a:rPr>
               <a:t>Agentic flow</a:t>
             </a:r>
-            <a:endParaRPr lang="en-US" sz="1300" dirty="0"/>
+            <a:endParaRPr lang="en-US" sz="1250" dirty="0"/>
           </a:p>
         </p:txBody>
       </p:sp>
@@ -8945,8 +8874,8 @@
         </p:nvSpPr>
         <p:spPr>
           <a:xfrm>
-            <a:off x="749808" y="4407408"/>
-            <a:ext cx="10680192" cy="2139696"/>
+            <a:off x="749808" y="4626864"/>
+            <a:ext cx="10680192" cy="1901952"/>
           </a:xfrm>
           <a:prstGeom prst="rect">
             <a:avLst/>
@@ -8955,17 +8884,19 @@
           <a:ln/>
         </p:spPr>
         <p:txBody>
-          <a:bodyPr wrap="square" rtlCol="0" anchor="t"/>
-          <a:lstStyle/>
-          <a:p>
-            <a:pPr indent="0" marL="0">
-              <a:lnSpc>
-                <a:spcPct val="108000"/>
-              </a:lnSpc>
-              <a:buNone/>
-            </a:pPr>
-            <a:r>
-              <a:rPr lang="en-US" sz="740" b="1" dirty="0">
+          <a:bodyPr wrap="square" rtlCol="0" anchor="t">
+            <a:normAutofit/>
+          </a:bodyPr>
+          <a:lstStyle/>
+          <a:p>
+            <a:pPr indent="0" marL="0">
+              <a:lnSpc>
+                <a:spcPct val="106000"/>
+              </a:lnSpc>
+              <a:buNone/>
+            </a:pPr>
+            <a:r>
+              <a:rPr lang="en-US" sz="730" b="1" dirty="0">
                 <a:solidFill>
                   <a:srgbClr val="202124"/>
                 </a:solidFill>
@@ -8977,12 +8908,12 @@
             </a:r>
             <a:pPr indent="0" marL="0">
               <a:lnSpc>
-                <a:spcPct val="108000"/>
-              </a:lnSpc>
-              <a:buNone/>
-            </a:pPr>
-            <a:r>
-              <a:rPr lang="en-US" sz="730" dirty="0">
+                <a:spcPct val="106000"/>
+              </a:lnSpc>
+              <a:buNone/>
+            </a:pPr>
+            <a:r>
+              <a:rPr lang="en-US" sz="720" dirty="0">
                 <a:solidFill>
                   <a:srgbClr val="3C4043"/>
                 </a:solidFill>
@@ -8995,12 +8926,12 @@
             </a:r>
             <a:pPr indent="0" marL="0">
               <a:lnSpc>
-                <a:spcPct val="108000"/>
-              </a:lnSpc>
-              <a:buNone/>
-            </a:pPr>
-            <a:r>
-              <a:rPr lang="en-US" sz="740" b="1" dirty="0">
+                <a:spcPct val="106000"/>
+              </a:lnSpc>
+              <a:buNone/>
+            </a:pPr>
+            <a:r>
+              <a:rPr lang="en-US" sz="730" b="1" dirty="0">
                 <a:solidFill>
                   <a:srgbClr val="202124"/>
                 </a:solidFill>
@@ -9012,12 +8943,12 @@
             </a:r>
             <a:pPr indent="0" marL="0">
               <a:lnSpc>
-                <a:spcPct val="108000"/>
-              </a:lnSpc>
-              <a:buNone/>
-            </a:pPr>
-            <a:r>
-              <a:rPr lang="en-US" sz="730" dirty="0">
+                <a:spcPct val="106000"/>
+              </a:lnSpc>
+              <a:buNone/>
+            </a:pPr>
+            <a:r>
+              <a:rPr lang="en-US" sz="720" dirty="0">
                 <a:solidFill>
                   <a:srgbClr val="3C4043"/>
                 </a:solidFill>
@@ -9025,17 +8956,17 @@
                 <a:ea typeface="Arial" pitchFamily="34" charset="-122"/>
                 <a:cs typeface="Arial" pitchFamily="34" charset="-120"/>
               </a:rPr>
-              <a:t>After passing policy and security checks across Cloud Armor &amp; IAP, Cross-Project Catalog, and Firestore Route Table, the request is forwarded to Cloud Run Router.
+              <a:t>After passing policy and security checks across Google Cloud Armor, Cross-Project Catalog, and Firestore Route Table, the request is forwarded to Cloud Run Router.
 </a:t>
             </a:r>
             <a:pPr indent="0" marL="0">
               <a:lnSpc>
-                <a:spcPct val="108000"/>
-              </a:lnSpc>
-              <a:buNone/>
-            </a:pPr>
-            <a:r>
-              <a:rPr lang="en-US" sz="740" b="1" dirty="0">
+                <a:spcPct val="106000"/>
+              </a:lnSpc>
+              <a:buNone/>
+            </a:pPr>
+            <a:r>
+              <a:rPr lang="en-US" sz="730" b="1" dirty="0">
                 <a:solidFill>
                   <a:srgbClr val="202124"/>
                 </a:solidFill>
@@ -9047,12 +8978,12 @@
             </a:r>
             <a:pPr indent="0" marL="0">
               <a:lnSpc>
-                <a:spcPct val="108000"/>
-              </a:lnSpc>
-              <a:buNone/>
-            </a:pPr>
-            <a:r>
-              <a:rPr lang="en-US" sz="730" dirty="0">
+                <a:spcPct val="106000"/>
+              </a:lnSpc>
+              <a:buNone/>
+            </a:pPr>
+            <a:r>
+              <a:rPr lang="en-US" sz="720" dirty="0">
                 <a:solidFill>
                   <a:srgbClr val="3C4043"/>
                 </a:solidFill>
@@ -9065,12 +8996,12 @@
             </a:r>
             <a:pPr indent="0" marL="0">
               <a:lnSpc>
-                <a:spcPct val="108000"/>
-              </a:lnSpc>
-              <a:buNone/>
-            </a:pPr>
-            <a:r>
-              <a:rPr lang="en-US" sz="740" b="1" dirty="0">
+                <a:spcPct val="106000"/>
+              </a:lnSpc>
+              <a:buNone/>
+            </a:pPr>
+            <a:r>
+              <a:rPr lang="en-US" sz="730" b="1" dirty="0">
                 <a:solidFill>
                   <a:srgbClr val="202124"/>
                 </a:solidFill>
@@ -9082,12 +9013,12 @@
             </a:r>
             <a:pPr indent="0" marL="0">
               <a:lnSpc>
-                <a:spcPct val="108000"/>
-              </a:lnSpc>
-              <a:buNone/>
-            </a:pPr>
-            <a:r>
-              <a:rPr lang="en-US" sz="730" dirty="0">
+                <a:spcPct val="106000"/>
+              </a:lnSpc>
+              <a:buNone/>
+            </a:pPr>
+            <a:r>
+              <a:rPr lang="en-US" sz="720" dirty="0">
                 <a:solidFill>
                   <a:srgbClr val="3C4043"/>
                 </a:solidFill>
@@ -9100,12 +9031,12 @@
             </a:r>
             <a:pPr indent="0" marL="0">
               <a:lnSpc>
-                <a:spcPct val="108000"/>
-              </a:lnSpc>
-              <a:buNone/>
-            </a:pPr>
-            <a:r>
-              <a:rPr lang="en-US" sz="700" b="1" dirty="0">
+                <a:spcPct val="106000"/>
+              </a:lnSpc>
+              <a:buNone/>
+            </a:pPr>
+            <a:r>
+              <a:rPr lang="en-US" sz="690" b="1" dirty="0">
                 <a:solidFill>
                   <a:srgbClr val="202124"/>
                 </a:solidFill>
@@ -9117,12 +9048,12 @@
             </a:r>
             <a:pPr indent="0" marL="0">
               <a:lnSpc>
-                <a:spcPct val="108000"/>
-              </a:lnSpc>
-              <a:buNone/>
-            </a:pPr>
-            <a:r>
-              <a:rPr lang="en-US" sz="690" dirty="0">
+                <a:spcPct val="106000"/>
+              </a:lnSpc>
+              <a:buNone/>
+            </a:pPr>
+            <a:r>
+              <a:rPr lang="en-US" sz="680" dirty="0">
                 <a:solidFill>
                   <a:srgbClr val="3C4043"/>
                 </a:solidFill>
@@ -9135,12 +9066,12 @@
             </a:r>
             <a:pPr indent="0" marL="0">
               <a:lnSpc>
-                <a:spcPct val="108000"/>
-              </a:lnSpc>
-              <a:buNone/>
-            </a:pPr>
-            <a:r>
-              <a:rPr lang="en-US" sz="700" b="1" dirty="0">
+                <a:spcPct val="106000"/>
+              </a:lnSpc>
+              <a:buNone/>
+            </a:pPr>
+            <a:r>
+              <a:rPr lang="en-US" sz="690" b="1" dirty="0">
                 <a:solidFill>
                   <a:srgbClr val="202124"/>
                 </a:solidFill>
@@ -9152,12 +9083,12 @@
             </a:r>
             <a:pPr indent="0" marL="0">
               <a:lnSpc>
-                <a:spcPct val="108000"/>
-              </a:lnSpc>
-              <a:buNone/>
-            </a:pPr>
-            <a:r>
-              <a:rPr lang="en-US" sz="690" dirty="0">
+                <a:spcPct val="106000"/>
+              </a:lnSpc>
+              <a:buNone/>
+            </a:pPr>
+            <a:r>
+              <a:rPr lang="en-US" sz="680" dirty="0">
                 <a:solidFill>
                   <a:srgbClr val="3C4043"/>
                 </a:solidFill>
@@ -9170,12 +9101,12 @@
             </a:r>
             <a:pPr indent="0" marL="0">
               <a:lnSpc>
-                <a:spcPct val="108000"/>
-              </a:lnSpc>
-              <a:buNone/>
-            </a:pPr>
-            <a:r>
-              <a:rPr lang="en-US" sz="700" b="1" dirty="0">
+                <a:spcPct val="106000"/>
+              </a:lnSpc>
+              <a:buNone/>
+            </a:pPr>
+            <a:r>
+              <a:rPr lang="en-US" sz="690" b="1" dirty="0">
                 <a:solidFill>
                   <a:srgbClr val="202124"/>
                 </a:solidFill>
@@ -9187,12 +9118,12 @@
             </a:r>
             <a:pPr indent="0" marL="0">
               <a:lnSpc>
-                <a:spcPct val="108000"/>
-              </a:lnSpc>
-              <a:buNone/>
-            </a:pPr>
-            <a:r>
-              <a:rPr lang="en-US" sz="690" dirty="0">
+                <a:spcPct val="106000"/>
+              </a:lnSpc>
+              <a:buNone/>
+            </a:pPr>
+            <a:r>
+              <a:rPr lang="en-US" sz="680" dirty="0">
                 <a:solidFill>
                   <a:srgbClr val="3C4043"/>
                 </a:solidFill>
@@ -9205,12 +9136,12 @@
             </a:r>
             <a:pPr indent="0" marL="0">
               <a:lnSpc>
-                <a:spcPct val="108000"/>
-              </a:lnSpc>
-              <a:buNone/>
-            </a:pPr>
-            <a:r>
-              <a:rPr lang="en-US" sz="700" b="1" dirty="0">
+                <a:spcPct val="106000"/>
+              </a:lnSpc>
+              <a:buNone/>
+            </a:pPr>
+            <a:r>
+              <a:rPr lang="en-US" sz="690" b="1" dirty="0">
                 <a:solidFill>
                   <a:srgbClr val="202124"/>
                 </a:solidFill>
@@ -9222,12 +9153,12 @@
             </a:r>
             <a:pPr indent="0" marL="0">
               <a:lnSpc>
-                <a:spcPct val="108000"/>
-              </a:lnSpc>
-              <a:buNone/>
-            </a:pPr>
-            <a:r>
-              <a:rPr lang="en-US" sz="690" dirty="0">
+                <a:spcPct val="106000"/>
+              </a:lnSpc>
+              <a:buNone/>
+            </a:pPr>
+            <a:r>
+              <a:rPr lang="en-US" sz="680" dirty="0">
                 <a:solidFill>
                   <a:srgbClr val="3C4043"/>
                 </a:solidFill>
@@ -9240,12 +9171,12 @@
             </a:r>
             <a:pPr indent="0" marL="0">
               <a:lnSpc>
-                <a:spcPct val="108000"/>
-              </a:lnSpc>
-              <a:buNone/>
-            </a:pPr>
-            <a:r>
-              <a:rPr lang="en-US" sz="740" b="1" dirty="0">
+                <a:spcPct val="106000"/>
+              </a:lnSpc>
+              <a:buNone/>
+            </a:pPr>
+            <a:r>
+              <a:rPr lang="en-US" sz="730" b="1" dirty="0">
                 <a:solidFill>
                   <a:srgbClr val="202124"/>
                 </a:solidFill>
@@ -9257,12 +9188,12 @@
             </a:r>
             <a:pPr indent="0" marL="0">
               <a:lnSpc>
-                <a:spcPct val="108000"/>
-              </a:lnSpc>
-              <a:buNone/>
-            </a:pPr>
-            <a:r>
-              <a:rPr lang="en-US" sz="730" dirty="0">
+                <a:spcPct val="106000"/>
+              </a:lnSpc>
+              <a:buNone/>
+            </a:pPr>
+            <a:r>
+              <a:rPr lang="en-US" sz="720" dirty="0">
                 <a:solidFill>
                   <a:srgbClr val="3C4043"/>
                 </a:solidFill>
@@ -9275,12 +9206,12 @@
             </a:r>
             <a:pPr indent="0" marL="0">
               <a:lnSpc>
-                <a:spcPct val="108000"/>
-              </a:lnSpc>
-              <a:buNone/>
-            </a:pPr>
-            <a:r>
-              <a:rPr lang="en-US" sz="740" b="1" dirty="0">
+                <a:spcPct val="106000"/>
+              </a:lnSpc>
+              <a:buNone/>
+            </a:pPr>
+            <a:r>
+              <a:rPr lang="en-US" sz="730" b="1" dirty="0">
                 <a:solidFill>
                   <a:srgbClr val="202124"/>
                 </a:solidFill>
@@ -9292,12 +9223,12 @@
             </a:r>
             <a:pPr indent="0" marL="0">
               <a:lnSpc>
-                <a:spcPct val="108000"/>
-              </a:lnSpc>
-              <a:buNone/>
-            </a:pPr>
-            <a:r>
-              <a:rPr lang="en-US" sz="730" dirty="0">
+                <a:spcPct val="106000"/>
+              </a:lnSpc>
+              <a:buNone/>
+            </a:pPr>
+            <a:r>
+              <a:rPr lang="en-US" sz="720" dirty="0">
                 <a:solidFill>
                   <a:srgbClr val="3C4043"/>
                 </a:solidFill>
@@ -9310,12 +9241,12 @@
             </a:r>
             <a:pPr indent="0" marL="0">
               <a:lnSpc>
-                <a:spcPct val="108000"/>
-              </a:lnSpc>
-              <a:buNone/>
-            </a:pPr>
-            <a:r>
-              <a:rPr lang="en-US" sz="740" b="1" dirty="0">
+                <a:spcPct val="106000"/>
+              </a:lnSpc>
+              <a:buNone/>
+            </a:pPr>
+            <a:r>
+              <a:rPr lang="en-US" sz="730" b="1" dirty="0">
                 <a:solidFill>
                   <a:srgbClr val="202124"/>
                 </a:solidFill>
@@ -9327,12 +9258,12 @@
             </a:r>
             <a:pPr indent="0" marL="0">
               <a:lnSpc>
-                <a:spcPct val="108000"/>
-              </a:lnSpc>
-              <a:buNone/>
-            </a:pPr>
-            <a:r>
-              <a:rPr lang="en-US" sz="730" dirty="0">
+                <a:spcPct val="106000"/>
+              </a:lnSpc>
+              <a:buNone/>
+            </a:pPr>
+            <a:r>
+              <a:rPr lang="en-US" sz="720" dirty="0">
                 <a:solidFill>
                   <a:srgbClr val="3C4043"/>
                 </a:solidFill>
@@ -9343,7 +9274,7 @@
               <a:t>The verified response returns to the caller through the Unified Control Plane &amp; Intelligent Router Hub, while structured OpenTelemetry audit and FinOps spans stream to the 3-Phase Zero-Downtime Tier Migration Engine.
 </a:t>
             </a:r>
-            <a:endParaRPr lang="en-US" sz="740" dirty="0"/>
+            <a:endParaRPr lang="en-US" sz="730" dirty="0"/>
           </a:p>
         </p:txBody>
       </p:sp>
@@ -9515,8 +9446,8 @@
         </p:nvSpPr>
         <p:spPr>
           <a:xfrm>
-            <a:off x="749808" y="658368"/>
-            <a:ext cx="10680192" cy="310896"/>
+            <a:off x="749808" y="621792"/>
+            <a:ext cx="10680192" cy="274320"/>
           </a:xfrm>
           <a:prstGeom prst="rect">
             <a:avLst/>
@@ -9532,7 +9463,7 @@
               <a:buNone/>
             </a:pPr>
             <a:r>
-              <a:rPr lang="en-US" sz="1550" dirty="0">
+              <a:rPr lang="en-US" sz="1500" dirty="0">
                 <a:solidFill>
                   <a:srgbClr val="202124"/>
                 </a:solidFill>
@@ -9542,7 +9473,7 @@
               </a:rPr>
               <a:t>Products used</a:t>
             </a:r>
-            <a:endParaRPr lang="en-US" sz="1550" dirty="0"/>
+            <a:endParaRPr lang="en-US" sz="1500" dirty="0"/>
           </a:p>
         </p:txBody>
       </p:sp>
@@ -9554,8 +9485,8 @@
         </p:nvSpPr>
         <p:spPr>
           <a:xfrm>
-            <a:off x="749808" y="1005840"/>
-            <a:ext cx="10680192" cy="219456"/>
+            <a:off x="749808" y="914400"/>
+            <a:ext cx="10680192" cy="329184"/>
           </a:xfrm>
           <a:prstGeom prst="rect">
             <a:avLst/>
@@ -9564,14 +9495,14 @@
           <a:ln/>
         </p:spPr>
         <p:txBody>
-          <a:bodyPr wrap="square" rtlCol="0" anchor="ctr"/>
-          <a:lstStyle/>
-          <a:p>
-            <a:pPr indent="0" marL="0">
-              <a:buNone/>
-            </a:pPr>
-            <a:r>
-              <a:rPr lang="en-US" sz="920" dirty="0">
+          <a:bodyPr wrap="square" rtlCol="0" anchor="t"/>
+          <a:lstStyle/>
+          <a:p>
+            <a:pPr indent="0" marL="0">
+              <a:buNone/>
+            </a:pPr>
+            <a:r>
+              <a:rPr lang="en-US" sz="860" dirty="0">
                 <a:solidFill>
                   <a:srgbClr val="3C4043"/>
                 </a:solidFill>
@@ -9581,7 +9512,7 @@
               </a:rPr>
               <a:t>This reference architecture uses the following Google Cloud services and open-source frameworks to implement Building the Hybrid Bridge Tier: Private Service Connect (PSC) Spokes &amp; Live Tier Graduation.</a:t>
             </a:r>
-            <a:endParaRPr lang="en-US" sz="920" dirty="0"/>
+            <a:endParaRPr lang="en-US" sz="860" dirty="0"/>
           </a:p>
         </p:txBody>
       </p:sp>
@@ -9593,8 +9524,8 @@
         </p:nvSpPr>
         <p:spPr>
           <a:xfrm>
-            <a:off x="877824" y="1280160"/>
-            <a:ext cx="10552176" cy="1993392"/>
+            <a:off x="877824" y="1261872"/>
+            <a:ext cx="10552176" cy="2011680"/>
           </a:xfrm>
           <a:prstGeom prst="rect">
             <a:avLst/>
@@ -9603,17 +9534,19 @@
           <a:ln/>
         </p:spPr>
         <p:txBody>
-          <a:bodyPr wrap="square" rtlCol="0" anchor="t"/>
-          <a:lstStyle/>
-          <a:p>
-            <a:pPr indent="0" marL="0">
-              <a:lnSpc>
-                <a:spcPct val="124000"/>
-              </a:lnSpc>
-              <a:buNone/>
-            </a:pPr>
-            <a:r>
-              <a:rPr lang="en-US" sz="840" b="1" dirty="0">
+          <a:bodyPr wrap="square" rtlCol="0" anchor="t">
+            <a:normAutofit/>
+          </a:bodyPr>
+          <a:lstStyle/>
+          <a:p>
+            <a:pPr indent="0" marL="0">
+              <a:lnSpc>
+                <a:spcPct val="118000"/>
+              </a:lnSpc>
+              <a:buNone/>
+            </a:pPr>
+            <a:r>
+              <a:rPr lang="en-US" sz="810" b="1" dirty="0">
                 <a:solidFill>
                   <a:srgbClr val="1A73E8"/>
                 </a:solidFill>
@@ -9625,12 +9558,12 @@
             </a:r>
             <a:pPr indent="0" marL="0">
               <a:lnSpc>
-                <a:spcPct val="124000"/>
-              </a:lnSpc>
-              <a:buNone/>
-            </a:pPr>
-            <a:r>
-              <a:rPr lang="en-US" sz="820" dirty="0">
+                <a:spcPct val="118000"/>
+              </a:lnSpc>
+              <a:buNone/>
+            </a:pPr>
+            <a:r>
+              <a:rPr lang="en-US" sz="790" dirty="0">
                 <a:solidFill>
                   <a:srgbClr val="3C4043"/>
                 </a:solidFill>
@@ -9643,12 +9576,12 @@
             </a:r>
             <a:pPr indent="0" marL="0">
               <a:lnSpc>
-                <a:spcPct val="124000"/>
-              </a:lnSpc>
-              <a:buNone/>
-            </a:pPr>
-            <a:r>
-              <a:rPr lang="en-US" sz="840" b="1" dirty="0">
+                <a:spcPct val="118000"/>
+              </a:lnSpc>
+              <a:buNone/>
+            </a:pPr>
+            <a:r>
+              <a:rPr lang="en-US" sz="810" b="1" dirty="0">
                 <a:solidFill>
                   <a:srgbClr val="1A73E8"/>
                 </a:solidFill>
@@ -9660,12 +9593,12 @@
             </a:r>
             <a:pPr indent="0" marL="0">
               <a:lnSpc>
-                <a:spcPct val="124000"/>
-              </a:lnSpc>
-              <a:buNone/>
-            </a:pPr>
-            <a:r>
-              <a:rPr lang="en-US" sz="820" dirty="0">
+                <a:spcPct val="118000"/>
+              </a:lnSpc>
+              <a:buNone/>
+            </a:pPr>
+            <a:r>
+              <a:rPr lang="en-US" sz="790" dirty="0">
                 <a:solidFill>
                   <a:srgbClr val="3C4043"/>
                 </a:solidFill>
@@ -9678,12 +9611,12 @@
             </a:r>
             <a:pPr indent="0" marL="0">
               <a:lnSpc>
-                <a:spcPct val="124000"/>
-              </a:lnSpc>
-              <a:buNone/>
-            </a:pPr>
-            <a:r>
-              <a:rPr lang="en-US" sz="840" b="1" dirty="0">
+                <a:spcPct val="118000"/>
+              </a:lnSpc>
+              <a:buNone/>
+            </a:pPr>
+            <a:r>
+              <a:rPr lang="en-US" sz="810" b="1" dirty="0">
                 <a:solidFill>
                   <a:srgbClr val="1A73E8"/>
                 </a:solidFill>
@@ -9695,12 +9628,12 @@
             </a:r>
             <a:pPr indent="0" marL="0">
               <a:lnSpc>
-                <a:spcPct val="124000"/>
-              </a:lnSpc>
-              <a:buNone/>
-            </a:pPr>
-            <a:r>
-              <a:rPr lang="en-US" sz="820" dirty="0">
+                <a:spcPct val="118000"/>
+              </a:lnSpc>
+              <a:buNone/>
+            </a:pPr>
+            <a:r>
+              <a:rPr lang="en-US" sz="790" dirty="0">
                 <a:solidFill>
                   <a:srgbClr val="3C4043"/>
                 </a:solidFill>
@@ -9713,12 +9646,12 @@
             </a:r>
             <a:pPr indent="0" marL="0">
               <a:lnSpc>
-                <a:spcPct val="124000"/>
-              </a:lnSpc>
-              <a:buNone/>
-            </a:pPr>
-            <a:r>
-              <a:rPr lang="en-US" sz="840" b="1" dirty="0">
+                <a:spcPct val="118000"/>
+              </a:lnSpc>
+              <a:buNone/>
+            </a:pPr>
+            <a:r>
+              <a:rPr lang="en-US" sz="810" b="1" dirty="0">
                 <a:solidFill>
                   <a:srgbClr val="1A73E8"/>
                 </a:solidFill>
@@ -9730,12 +9663,12 @@
             </a:r>
             <a:pPr indent="0" marL="0">
               <a:lnSpc>
-                <a:spcPct val="124000"/>
-              </a:lnSpc>
-              <a:buNone/>
-            </a:pPr>
-            <a:r>
-              <a:rPr lang="en-US" sz="820" dirty="0">
+                <a:spcPct val="118000"/>
+              </a:lnSpc>
+              <a:buNone/>
+            </a:pPr>
+            <a:r>
+              <a:rPr lang="en-US" sz="790" dirty="0">
                 <a:solidFill>
                   <a:srgbClr val="3C4043"/>
                 </a:solidFill>
@@ -9748,12 +9681,12 @@
             </a:r>
             <a:pPr indent="0" marL="0">
               <a:lnSpc>
-                <a:spcPct val="124000"/>
-              </a:lnSpc>
-              <a:buNone/>
-            </a:pPr>
-            <a:r>
-              <a:rPr lang="en-US" sz="840" b="1" dirty="0">
+                <a:spcPct val="118000"/>
+              </a:lnSpc>
+              <a:buNone/>
+            </a:pPr>
+            <a:r>
+              <a:rPr lang="en-US" sz="810" b="1" dirty="0">
                 <a:solidFill>
                   <a:srgbClr val="1A73E8"/>
                 </a:solidFill>
@@ -9765,12 +9698,12 @@
             </a:r>
             <a:pPr indent="0" marL="0">
               <a:lnSpc>
-                <a:spcPct val="124000"/>
-              </a:lnSpc>
-              <a:buNone/>
-            </a:pPr>
-            <a:r>
-              <a:rPr lang="en-US" sz="820" dirty="0">
+                <a:spcPct val="118000"/>
+              </a:lnSpc>
+              <a:buNone/>
+            </a:pPr>
+            <a:r>
+              <a:rPr lang="en-US" sz="790" dirty="0">
                 <a:solidFill>
                   <a:srgbClr val="3C4043"/>
                 </a:solidFill>
@@ -9783,12 +9716,12 @@
             </a:r>
             <a:pPr indent="0" marL="0">
               <a:lnSpc>
-                <a:spcPct val="124000"/>
-              </a:lnSpc>
-              <a:buNone/>
-            </a:pPr>
-            <a:r>
-              <a:rPr lang="en-US" sz="840" b="1" dirty="0">
+                <a:spcPct val="118000"/>
+              </a:lnSpc>
+              <a:buNone/>
+            </a:pPr>
+            <a:r>
+              <a:rPr lang="en-US" sz="810" b="1" dirty="0">
                 <a:solidFill>
                   <a:srgbClr val="1A73E8"/>
                 </a:solidFill>
@@ -9800,12 +9733,12 @@
             </a:r>
             <a:pPr indent="0" marL="0">
               <a:lnSpc>
-                <a:spcPct val="124000"/>
-              </a:lnSpc>
-              <a:buNone/>
-            </a:pPr>
-            <a:r>
-              <a:rPr lang="en-US" sz="820" dirty="0">
+                <a:spcPct val="118000"/>
+              </a:lnSpc>
+              <a:buNone/>
+            </a:pPr>
+            <a:r>
+              <a:rPr lang="en-US" sz="790" dirty="0">
                 <a:solidFill>
                   <a:srgbClr val="3C4043"/>
                 </a:solidFill>
@@ -9815,43 +9748,165 @@
               </a:rPr>
               <a:t>Provides edge DDoS protection, WAF rules, and header sanitization on the global External Application Load Balancer.</a:t>
             </a:r>
+            <a:endParaRPr lang="en-US" sz="810" dirty="0"/>
+          </a:p>
+        </p:txBody>
+      </p:sp>
+      <p:sp>
+        <p:nvSpPr>
+          <p:cNvPr id="9" name="Shape 7"/>
+          <p:cNvSpPr/>
+          <p:nvPr/>
+        </p:nvSpPr>
+        <p:spPr>
+          <a:xfrm>
+            <a:off x="749808" y="3346704"/>
+            <a:ext cx="10680192" cy="0"/>
+          </a:xfrm>
+          <a:prstGeom prst="line">
+            <a:avLst/>
+          </a:prstGeom>
+          <a:noFill/>
+          <a:ln w="9525">
+            <a:solidFill>
+              <a:srgbClr val="DADCE0"/>
+            </a:solidFill>
+            <a:prstDash val="solid"/>
+          </a:ln>
+        </p:spPr>
+      </p:sp>
+      <p:sp>
+        <p:nvSpPr>
+          <p:cNvPr id="10" name="Text 8"/>
+          <p:cNvSpPr/>
+          <p:nvPr/>
+        </p:nvSpPr>
+        <p:spPr>
+          <a:xfrm>
+            <a:off x="749808" y="3419856"/>
+            <a:ext cx="10680192" cy="274320"/>
+          </a:xfrm>
+          <a:prstGeom prst="rect">
+            <a:avLst/>
+          </a:prstGeom>
+          <a:noFill/>
+          <a:ln/>
+        </p:spPr>
+        <p:txBody>
+          <a:bodyPr wrap="square" rtlCol="0" anchor="ctr"/>
+          <a:lstStyle/>
+          <a:p>
+            <a:pPr indent="0" marL="0">
+              <a:buNone/>
+            </a:pPr>
+            <a:r>
+              <a:rPr lang="en-US" sz="1500" dirty="0">
+                <a:solidFill>
+                  <a:srgbClr val="202124"/>
+                </a:solidFill>
+                <a:latin typeface="Arial" pitchFamily="34" charset="0"/>
+                <a:ea typeface="Arial" pitchFamily="34" charset="-122"/>
+                <a:cs typeface="Arial" pitchFamily="34" charset="-120"/>
+              </a:rPr>
+              <a:t>Use case</a:t>
+            </a:r>
+            <a:endParaRPr lang="en-US" sz="1500" dirty="0"/>
+          </a:p>
+        </p:txBody>
+      </p:sp>
+      <p:sp>
+        <p:nvSpPr>
+          <p:cNvPr id="11" name="Text 9"/>
+          <p:cNvSpPr/>
+          <p:nvPr/>
+        </p:nvSpPr>
+        <p:spPr>
+          <a:xfrm>
+            <a:off x="749808" y="3712464"/>
+            <a:ext cx="10680192" cy="237744"/>
+          </a:xfrm>
+          <a:prstGeom prst="rect">
+            <a:avLst/>
+          </a:prstGeom>
+          <a:noFill/>
+          <a:ln/>
+        </p:spPr>
+        <p:txBody>
+          <a:bodyPr wrap="square" rtlCol="0" anchor="ctr"/>
+          <a:lstStyle/>
+          <a:p>
+            <a:pPr indent="0" marL="0">
+              <a:buNone/>
+            </a:pPr>
+            <a:r>
+              <a:rPr lang="en-US" sz="1100" b="1" dirty="0">
+                <a:solidFill>
+                  <a:srgbClr val="202124"/>
+                </a:solidFill>
+                <a:latin typeface="Arial" pitchFamily="34" charset="0"/>
+                <a:ea typeface="Arial" pitchFamily="34" charset="-122"/>
+                <a:cs typeface="Arial" pitchFamily="34" charset="-120"/>
+              </a:rPr>
+              <a:t>Private Service Connect (PSC) Plumbing &amp; Zero-Downtime Tier Graduation</a:t>
+            </a:r>
+            <a:endParaRPr lang="en-US" sz="1100" dirty="0"/>
+          </a:p>
+        </p:txBody>
+      </p:sp>
+      <p:sp>
+        <p:nvSpPr>
+          <p:cNvPr id="12" name="Text 10"/>
+          <p:cNvSpPr/>
+          <p:nvPr/>
+        </p:nvSpPr>
+        <p:spPr>
+          <a:xfrm>
+            <a:off x="749808" y="3986784"/>
+            <a:ext cx="10680192" cy="749808"/>
+          </a:xfrm>
+          <a:prstGeom prst="rect">
+            <a:avLst/>
+          </a:prstGeom>
+          <a:noFill/>
+          <a:ln/>
+        </p:spPr>
+        <p:txBody>
+          <a:bodyPr wrap="square" rtlCol="0" anchor="t">
+            <a:normAutofit/>
+          </a:bodyPr>
+          <a:lstStyle/>
+          <a:p>
+            <a:pPr indent="0" marL="0">
+              <a:lnSpc>
+                <a:spcPct val="114000"/>
+              </a:lnSpc>
+              <a:buNone/>
+            </a:pPr>
+            <a:r>
+              <a:rPr lang="en-US" sz="840" dirty="0">
+                <a:solidFill>
+                  <a:srgbClr val="3C4043"/>
+                </a:solidFill>
+                <a:latin typeface="Arial" pitchFamily="34" charset="0"/>
+                <a:ea typeface="Arial" pitchFamily="34" charset="-122"/>
+                <a:cs typeface="Arial" pitchFamily="34" charset="-120"/>
+              </a:rPr>
+              <a:t>Traditional VPC Peering fails at multi-tenant scale because Google Cloud enforces a 25-peer limit per VPC network and prohibits overlapping RFC 1918 CIDR ranges across customer networks. Private Service Connect (PSC) solves both constraints by using NAT semantics over a dedicated /28 PRIVATE_SERVICE_CONNECT subnet and unilateral producer Service Attachments.</a:t>
+            </a:r>
             <a:endParaRPr lang="en-US" sz="840" dirty="0"/>
           </a:p>
         </p:txBody>
       </p:sp>
       <p:sp>
         <p:nvSpPr>
-          <p:cNvPr id="9" name="Shape 7"/>
-          <p:cNvSpPr/>
-          <p:nvPr/>
-        </p:nvSpPr>
-        <p:spPr>
-          <a:xfrm>
-            <a:off x="749808" y="3383280"/>
-            <a:ext cx="10680192" cy="0"/>
-          </a:xfrm>
-          <a:prstGeom prst="line">
-            <a:avLst/>
-          </a:prstGeom>
-          <a:noFill/>
-          <a:ln w="9525">
-            <a:solidFill>
-              <a:srgbClr val="DADCE0"/>
-            </a:solidFill>
-            <a:prstDash val="solid"/>
-          </a:ln>
-        </p:spPr>
-      </p:sp>
-      <p:sp>
-        <p:nvSpPr>
-          <p:cNvPr id="10" name="Text 8"/>
-          <p:cNvSpPr/>
-          <p:nvPr/>
-        </p:nvSpPr>
-        <p:spPr>
-          <a:xfrm>
-            <a:off x="749808" y="3511296"/>
-            <a:ext cx="10680192" cy="310896"/>
+          <p:cNvPr id="13" name="Text 11"/>
+          <p:cNvSpPr/>
+          <p:nvPr/>
+        </p:nvSpPr>
+        <p:spPr>
+          <a:xfrm>
+            <a:off x="749808" y="4773168"/>
+            <a:ext cx="10680192" cy="201168"/>
           </a:xfrm>
           <a:prstGeom prst="rect">
             <a:avLst/>
@@ -9867,30 +9922,30 @@
               <a:buNone/>
             </a:pPr>
             <a:r>
-              <a:rPr lang="en-US" sz="1550" dirty="0">
-                <a:solidFill>
-                  <a:srgbClr val="202124"/>
-                </a:solidFill>
-                <a:latin typeface="Arial" pitchFamily="34" charset="0"/>
-                <a:ea typeface="Arial" pitchFamily="34" charset="-122"/>
-                <a:cs typeface="Arial" pitchFamily="34" charset="-120"/>
-              </a:rPr>
-              <a:t>Use case</a:t>
-            </a:r>
-            <a:endParaRPr lang="en-US" sz="1550" dirty="0"/>
-          </a:p>
-        </p:txBody>
-      </p:sp>
-      <p:sp>
-        <p:nvSpPr>
-          <p:cNvPr id="11" name="Text 9"/>
-          <p:cNvSpPr/>
-          <p:nvPr/>
-        </p:nvSpPr>
-        <p:spPr>
-          <a:xfrm>
-            <a:off x="749808" y="3858768"/>
-            <a:ext cx="10680192" cy="256032"/>
+              <a:rPr lang="en-US" sz="860" dirty="0">
+                <a:solidFill>
+                  <a:srgbClr val="3C4043"/>
+                </a:solidFill>
+                <a:latin typeface="Arial" pitchFamily="34" charset="0"/>
+                <a:ea typeface="Arial" pitchFamily="34" charset="-122"/>
+                <a:cs typeface="Arial" pitchFamily="34" charset="-120"/>
+              </a:rPr>
+              <a:t>For this use case, the architecture provides the following benefits:</a:t>
+            </a:r>
+            <a:endParaRPr lang="en-US" sz="860" dirty="0"/>
+          </a:p>
+        </p:txBody>
+      </p:sp>
+      <p:sp>
+        <p:nvSpPr>
+          <p:cNvPr id="14" name="Text 12"/>
+          <p:cNvSpPr/>
+          <p:nvPr/>
+        </p:nvSpPr>
+        <p:spPr>
+          <a:xfrm>
+            <a:off x="877824" y="5010912"/>
+            <a:ext cx="10552176" cy="1481328"/>
           </a:xfrm>
           <a:prstGeom prst="rect">
             <a:avLst/>
@@ -9899,137 +9954,19 @@
           <a:ln/>
         </p:spPr>
         <p:txBody>
-          <a:bodyPr wrap="square" rtlCol="0" anchor="ctr"/>
-          <a:lstStyle/>
-          <a:p>
-            <a:pPr indent="0" marL="0">
-              <a:buNone/>
-            </a:pPr>
-            <a:r>
-              <a:rPr lang="en-US" sz="1150" b="1" dirty="0">
-                <a:solidFill>
-                  <a:srgbClr val="202124"/>
-                </a:solidFill>
-                <a:latin typeface="Arial" pitchFamily="34" charset="0"/>
-                <a:ea typeface="Arial" pitchFamily="34" charset="-122"/>
-                <a:cs typeface="Arial" pitchFamily="34" charset="-120"/>
-              </a:rPr>
-              <a:t>Private Service Connect (PSC) Plumbing &amp; Zero-Downtime Tier Graduation</a:t>
-            </a:r>
-            <a:endParaRPr lang="en-US" sz="1150" dirty="0"/>
-          </a:p>
-        </p:txBody>
-      </p:sp>
-      <p:sp>
-        <p:nvSpPr>
-          <p:cNvPr id="12" name="Text 10"/>
-          <p:cNvSpPr/>
-          <p:nvPr/>
-        </p:nvSpPr>
-        <p:spPr>
-          <a:xfrm>
-            <a:off x="749808" y="4151376"/>
-            <a:ext cx="10680192" cy="658368"/>
-          </a:xfrm>
-          <a:prstGeom prst="rect">
-            <a:avLst/>
-          </a:prstGeom>
-          <a:noFill/>
-          <a:ln/>
-        </p:spPr>
-        <p:txBody>
-          <a:bodyPr wrap="square" rtlCol="0" anchor="t"/>
-          <a:lstStyle/>
-          <a:p>
-            <a:pPr indent="0" marL="0">
-              <a:lnSpc>
-                <a:spcPct val="118000"/>
-              </a:lnSpc>
-              <a:buNone/>
-            </a:pPr>
-            <a:r>
-              <a:rPr lang="en-US" sz="880" dirty="0">
-                <a:solidFill>
-                  <a:srgbClr val="3C4043"/>
-                </a:solidFill>
-                <a:latin typeface="Arial" pitchFamily="34" charset="0"/>
-                <a:ea typeface="Arial" pitchFamily="34" charset="-122"/>
-                <a:cs typeface="Arial" pitchFamily="34" charset="-120"/>
-              </a:rPr>
-              <a:t>Traditional VPC Peering fails at multi-tenant scale because Google Cloud enforces a 25-peer limit per VPC network and prohibits overlapping RFC 1918 CIDR ranges across customer networks.</a:t>
-            </a:r>
-            <a:endParaRPr lang="en-US" sz="880" dirty="0"/>
-          </a:p>
-        </p:txBody>
-      </p:sp>
-      <p:sp>
-        <p:nvSpPr>
-          <p:cNvPr id="13" name="Text 11"/>
-          <p:cNvSpPr/>
-          <p:nvPr/>
-        </p:nvSpPr>
-        <p:spPr>
-          <a:xfrm>
-            <a:off x="749808" y="4846320"/>
-            <a:ext cx="10680192" cy="201168"/>
-          </a:xfrm>
-          <a:prstGeom prst="rect">
-            <a:avLst/>
-          </a:prstGeom>
-          <a:noFill/>
-          <a:ln/>
-        </p:spPr>
-        <p:txBody>
-          <a:bodyPr wrap="square" rtlCol="0" anchor="ctr"/>
-          <a:lstStyle/>
-          <a:p>
-            <a:pPr indent="0" marL="0">
-              <a:buNone/>
-            </a:pPr>
-            <a:r>
-              <a:rPr lang="en-US" sz="880" dirty="0">
-                <a:solidFill>
-                  <a:srgbClr val="3C4043"/>
-                </a:solidFill>
-                <a:latin typeface="Arial" pitchFamily="34" charset="0"/>
-                <a:ea typeface="Arial" pitchFamily="34" charset="-122"/>
-                <a:cs typeface="Arial" pitchFamily="34" charset="-120"/>
-              </a:rPr>
-              <a:t>For this use case, the architecture provides the following benefits:</a:t>
-            </a:r>
-            <a:endParaRPr lang="en-US" sz="880" dirty="0"/>
-          </a:p>
-        </p:txBody>
-      </p:sp>
-      <p:sp>
-        <p:nvSpPr>
-          <p:cNvPr id="14" name="Text 12"/>
-          <p:cNvSpPr/>
-          <p:nvPr/>
-        </p:nvSpPr>
-        <p:spPr>
-          <a:xfrm>
-            <a:off x="877824" y="5084064"/>
-            <a:ext cx="10552176" cy="1426464"/>
-          </a:xfrm>
-          <a:prstGeom prst="rect">
-            <a:avLst/>
-          </a:prstGeom>
-          <a:noFill/>
-          <a:ln/>
-        </p:spPr>
-        <p:txBody>
-          <a:bodyPr wrap="square" rtlCol="0" anchor="t"/>
-          <a:lstStyle/>
-          <a:p>
-            <a:pPr indent="0" marL="0">
-              <a:lnSpc>
-                <a:spcPct val="120000"/>
-              </a:lnSpc>
-              <a:buNone/>
-            </a:pPr>
-            <a:r>
-              <a:rPr lang="en-US" sz="820" b="1" dirty="0">
+          <a:bodyPr wrap="square" rtlCol="0" anchor="t">
+            <a:normAutofit/>
+          </a:bodyPr>
+          <a:lstStyle/>
+          <a:p>
+            <a:pPr indent="0" marL="0">
+              <a:lnSpc>
+                <a:spcPct val="116000"/>
+              </a:lnSpc>
+              <a:buNone/>
+            </a:pPr>
+            <a:r>
+              <a:rPr lang="en-US" sz="800" b="1" dirty="0">
                 <a:solidFill>
                   <a:srgbClr val="202124"/>
                 </a:solidFill>
@@ -10041,12 +9978,12 @@
             </a:r>
             <a:pPr indent="0" marL="0">
               <a:lnSpc>
-                <a:spcPct val="120000"/>
-              </a:lnSpc>
-              <a:buNone/>
-            </a:pPr>
-            <a:r>
-              <a:rPr lang="en-US" sz="800" dirty="0">
+                <a:spcPct val="116000"/>
+              </a:lnSpc>
+              <a:buNone/>
+            </a:pPr>
+            <a:r>
+              <a:rPr lang="en-US" sz="780" dirty="0">
                 <a:solidFill>
                   <a:srgbClr val="3C4043"/>
                 </a:solidFill>
@@ -10059,12 +9996,12 @@
             </a:r>
             <a:pPr indent="0" marL="0">
               <a:lnSpc>
-                <a:spcPct val="120000"/>
-              </a:lnSpc>
-              <a:buNone/>
-            </a:pPr>
-            <a:r>
-              <a:rPr lang="en-US" sz="820" b="1" dirty="0">
+                <a:spcPct val="116000"/>
+              </a:lnSpc>
+              <a:buNone/>
+            </a:pPr>
+            <a:r>
+              <a:rPr lang="en-US" sz="800" b="1" dirty="0">
                 <a:solidFill>
                   <a:srgbClr val="202124"/>
                 </a:solidFill>
@@ -10076,12 +10013,12 @@
             </a:r>
             <a:pPr indent="0" marL="0">
               <a:lnSpc>
-                <a:spcPct val="120000"/>
-              </a:lnSpc>
-              <a:buNone/>
-            </a:pPr>
-            <a:r>
-              <a:rPr lang="en-US" sz="800" dirty="0">
+                <a:spcPct val="116000"/>
+              </a:lnSpc>
+              <a:buNone/>
+            </a:pPr>
+            <a:r>
+              <a:rPr lang="en-US" sz="780" dirty="0">
                 <a:solidFill>
                   <a:srgbClr val="3C4043"/>
                 </a:solidFill>
@@ -10089,17 +10026,17 @@
                 <a:ea typeface="Arial" pitchFamily="34" charset="-122"/>
                 <a:cs typeface="Arial" pitchFamily="34" charset="-120"/>
               </a:rPr>
-              <a:t>Screens all incoming traffic through Cloud Armor &amp; IAP and Cross-Project Catalog before reaching Cloud Run Router.
+              <a:t>Screens all incoming traffic through Google Cloud Armor and Cross-Project Catalog before reaching Cloud Run Router.
 </a:t>
             </a:r>
             <a:pPr indent="0" marL="0">
               <a:lnSpc>
-                <a:spcPct val="120000"/>
-              </a:lnSpc>
-              <a:buNone/>
-            </a:pPr>
-            <a:r>
-              <a:rPr lang="en-US" sz="820" b="1" dirty="0">
+                <a:spcPct val="116000"/>
+              </a:lnSpc>
+              <a:buNone/>
+            </a:pPr>
+            <a:r>
+              <a:rPr lang="en-US" sz="800" b="1" dirty="0">
                 <a:solidFill>
                   <a:srgbClr val="202124"/>
                 </a:solidFill>
@@ -10111,12 +10048,12 @@
             </a:r>
             <a:pPr indent="0" marL="0">
               <a:lnSpc>
-                <a:spcPct val="120000"/>
-              </a:lnSpc>
-              <a:buNone/>
-            </a:pPr>
-            <a:r>
-              <a:rPr lang="en-US" sz="800" dirty="0">
+                <a:spcPct val="116000"/>
+              </a:lnSpc>
+              <a:buNone/>
+            </a:pPr>
+            <a:r>
+              <a:rPr lang="en-US" sz="780" dirty="0">
                 <a:solidFill>
                   <a:srgbClr val="3C4043"/>
                 </a:solidFill>
@@ -10129,12 +10066,12 @@
             </a:r>
             <a:pPr indent="0" marL="0">
               <a:lnSpc>
-                <a:spcPct val="120000"/>
-              </a:lnSpc>
-              <a:buNone/>
-            </a:pPr>
-            <a:r>
-              <a:rPr lang="en-US" sz="820" b="1" dirty="0">
+                <a:spcPct val="116000"/>
+              </a:lnSpc>
+              <a:buNone/>
+            </a:pPr>
+            <a:r>
+              <a:rPr lang="en-US" sz="800" b="1" dirty="0">
                 <a:solidFill>
                   <a:srgbClr val="202124"/>
                 </a:solidFill>
@@ -10146,12 +10083,12 @@
             </a:r>
             <a:pPr indent="0" marL="0">
               <a:lnSpc>
-                <a:spcPct val="120000"/>
-              </a:lnSpc>
-              <a:buNone/>
-            </a:pPr>
-            <a:r>
-              <a:rPr lang="en-US" sz="800" dirty="0">
+                <a:spcPct val="116000"/>
+              </a:lnSpc>
+              <a:buNone/>
+            </a:pPr>
+            <a:r>
+              <a:rPr lang="en-US" sz="780" dirty="0">
                 <a:solidFill>
                   <a:srgbClr val="3C4043"/>
                 </a:solidFill>
@@ -10161,7 +10098,7 @@
               </a:rPr>
               <a:t>Streams zero-PII audit logs and OpenTelemetry token spans into 3. DRAIN_AND_VERIFY and 1. SHADOW_SYNC.</a:t>
             </a:r>
-            <a:endParaRPr lang="en-US" sz="820" dirty="0"/>
+            <a:endParaRPr lang="en-US" sz="800" dirty="0"/>
           </a:p>
         </p:txBody>
       </p:sp>
@@ -10382,7 +10319,9 @@
           <a:ln/>
         </p:spPr>
         <p:txBody>
-          <a:bodyPr wrap="square" rtlCol="0" anchor="t"/>
+          <a:bodyPr wrap="square" rtlCol="0" anchor="t">
+            <a:normAutofit/>
+          </a:bodyPr>
           <a:lstStyle/>
           <a:p>
             <a:pPr indent="0" marL="0">
@@ -10392,7 +10331,7 @@
               <a:buNone/>
             </a:pPr>
             <a:r>
-              <a:rPr lang="en-US" sz="820" b="1" dirty="0">
+              <a:rPr lang="en-US" sz="810" b="1" dirty="0">
                 <a:solidFill>
                   <a:srgbClr val="202124"/>
                 </a:solidFill>
@@ -10452,7 +10391,7 @@
                 <a:ea typeface="Arial" pitchFamily="34" charset="-122"/>
                 <a:cs typeface="Arial" pitchFamily="34" charset="-120"/>
               </a:rPr>
-              <a:t>For internet-facing workloads, retain the global External Application Load Balancer with Cloud Armor &amp; IAP and Cross-Project Catalog.
+              <a:t>For internet-facing workloads, retain the global External Application Load Balancer with Google Cloud Armor and Cross-Project Catalog.
 </a:t>
             </a:r>
             <a:pPr indent="0" marL="0">
@@ -10461,14 +10400,8 @@
               </a:lnSpc>
               <a:buNone/>
             </a:pPr>
-            <a:pPr indent="0" marL="0">
-              <a:lnSpc>
-                <a:spcPct val="112000"/>
-              </a:lnSpc>
-              <a:buNone/>
-            </a:pPr>
-            <a:r>
-              <a:rPr lang="en-US" sz="820" b="1" dirty="0">
+            <a:r>
+              <a:rPr lang="en-US" sz="810" b="1" dirty="0">
                 <a:solidFill>
                   <a:srgbClr val="202124"/>
                 </a:solidFill>
@@ -10531,7 +10464,7 @@
               <a:t>Spoke-local Pooled MCP Hub: Maximizes blast-radius containment by keeping credentials, service accounts, and data access strictly inside Standard Tier: Shared Pooled Plane.; Shared enterprise tool gateway: Consolidates stateless, non-tenant-specific MCP tools into a central hub project via Private Service Connect.
 </a:t>
             </a:r>
-            <a:endParaRPr lang="en-US" sz="820" dirty="0"/>
+            <a:endParaRPr lang="en-US" sz="810" dirty="0"/>
           </a:p>
         </p:txBody>
       </p:sp>
@@ -10935,48 +10868,50 @@
           <a:ln/>
         </p:spPr>
         <p:txBody>
-          <a:bodyPr wrap="square" rtlCol="0" anchor="ctr"/>
-          <a:lstStyle/>
-          <a:p>
-            <a:pPr indent="0" marL="0">
-              <a:buNone/>
-            </a:pPr>
-            <a:r>
-              <a:rPr lang="en-US" sz="720" b="1" dirty="0">
-                <a:solidFill>
-                  <a:srgbClr val="202124"/>
-                </a:solidFill>
-                <a:latin typeface="Arial" pitchFamily="34" charset="0"/>
-                <a:ea typeface="Arial" pitchFamily="34" charset="-122"/>
-                <a:cs typeface="Arial" pitchFamily="34" charset="-120"/>
-              </a:rPr>
-              <a:t>• Unified Hybrid Control Hub + PSC Bridge to Sovereign Spokes &amp; Hub VPC • Tenant-Aware Router &amp; 3-Phase Live Tier Migrator</a:t>
-            </a:r>
-            <a:endParaRPr lang="en-US" sz="720" dirty="0"/>
-          </a:p>
-          <a:p>
-            <a:pPr indent="0" marL="0">
-              <a:buNone/>
-            </a:pPr>
-            <a:r>
-              <a:rPr lang="en-US" sz="720" b="1" dirty="0">
-                <a:solidFill>
-                  <a:srgbClr val="202124"/>
-                </a:solidFill>
-                <a:latin typeface="Arial" pitchFamily="34" charset="0"/>
-                <a:ea typeface="Arial" pitchFamily="34" charset="-122"/>
-                <a:cs typeface="Arial" pitchFamily="34" charset="-120"/>
-              </a:rPr>
-              <a:t>• Cloud Armor &amp; IAP, Cross-Project Catalog &amp; Shared Model Armor</a:t>
-            </a:r>
-            <a:endParaRPr lang="en-US" sz="720" dirty="0"/>
-          </a:p>
-          <a:p>
-            <a:pPr indent="0" marL="0">
-              <a:buNone/>
-            </a:pPr>
-            <a:r>
-              <a:rPr lang="en-US" sz="720" b="1" dirty="0">
+          <a:bodyPr wrap="square" rtlCol="0" anchor="ctr">
+            <a:normAutofit/>
+          </a:bodyPr>
+          <a:lstStyle/>
+          <a:p>
+            <a:pPr indent="0" marL="0">
+              <a:buNone/>
+            </a:pPr>
+            <a:r>
+              <a:rPr lang="en-US" sz="710" b="1" dirty="0">
+                <a:solidFill>
+                  <a:srgbClr val="202124"/>
+                </a:solidFill>
+                <a:latin typeface="Arial" pitchFamily="34" charset="0"/>
+                <a:ea typeface="Arial" pitchFamily="34" charset="-122"/>
+                <a:cs typeface="Arial" pitchFamily="34" charset="-120"/>
+              </a:rPr>
+              <a:t>• VPC Service Controls &amp; Access Boundaries</a:t>
+            </a:r>
+            <a:endParaRPr lang="en-US" sz="710" dirty="0"/>
+          </a:p>
+          <a:p>
+            <a:pPr indent="0" marL="0">
+              <a:buNone/>
+            </a:pPr>
+            <a:r>
+              <a:rPr lang="en-US" sz="710" b="1" dirty="0">
+                <a:solidFill>
+                  <a:srgbClr val="202124"/>
+                </a:solidFill>
+                <a:latin typeface="Arial" pitchFamily="34" charset="0"/>
+                <a:ea typeface="Arial" pitchFamily="34" charset="-122"/>
+                <a:cs typeface="Arial" pitchFamily="34" charset="-120"/>
+              </a:rPr>
+              <a:t>• Google Cloud Armor &amp; Cross-Project Catalog &amp; Shared Model Armor</a:t>
+            </a:r>
+            <a:endParaRPr lang="en-US" sz="710" dirty="0"/>
+          </a:p>
+          <a:p>
+            <a:pPr indent="0" marL="0">
+              <a:buNone/>
+            </a:pPr>
+            <a:r>
+              <a:rPr lang="en-US" sz="710" b="1" dirty="0">
                 <a:solidFill>
                   <a:srgbClr val="202124"/>
                 </a:solidFill>
@@ -10986,7 +10921,7 @@
               </a:rPr>
               <a:t>• Shared AlloyDB RLS &amp; 2. ATOMIC_CUTOVER</a:t>
             </a:r>
-            <a:endParaRPr lang="en-US" sz="720" dirty="0"/>
+            <a:endParaRPr lang="en-US" sz="710" dirty="0"/>
           </a:p>
         </p:txBody>
       </p:sp>
@@ -11033,28 +10968,30 @@
           <a:ln/>
         </p:spPr>
         <p:txBody>
-          <a:bodyPr wrap="square" rtlCol="0" anchor="ctr"/>
-          <a:lstStyle/>
-          <a:p>
-            <a:pPr indent="0" marL="0">
-              <a:buNone/>
-            </a:pPr>
-            <a:r>
-              <a:rPr lang="en-US" sz="710" b="1" dirty="0">
-                <a:solidFill>
-                  <a:srgbClr val="202124"/>
-                </a:solidFill>
-                <a:latin typeface="Arial" pitchFamily="34" charset="0"/>
-                <a:ea typeface="Arial" pitchFamily="34" charset="-122"/>
-                <a:cs typeface="Arial" pitchFamily="34" charset="-120"/>
-              </a:rPr>
-              <a:t>• Unified Hybrid Control Hub + PSC Bridge to Sovereign Spokes &amp; Hub VPC • Tenant-Aware Router &amp; 3-Phase Live Tier Migrator: </a:t>
-            </a:r>
-            <a:pPr indent="0" marL="0">
-              <a:buNone/>
-            </a:pPr>
-            <a:r>
-              <a:rPr lang="en-US" sz="700" dirty="0">
+          <a:bodyPr wrap="square" rtlCol="0" anchor="ctr">
+            <a:normAutofit/>
+          </a:bodyPr>
+          <a:lstStyle/>
+          <a:p>
+            <a:pPr indent="0" marL="0">
+              <a:buNone/>
+            </a:pPr>
+            <a:r>
+              <a:rPr lang="en-US" sz="700" b="1" dirty="0">
+                <a:solidFill>
+                  <a:srgbClr val="202124"/>
+                </a:solidFill>
+                <a:latin typeface="Arial" pitchFamily="34" charset="0"/>
+                <a:ea typeface="Arial" pitchFamily="34" charset="-122"/>
+                <a:cs typeface="Arial" pitchFamily="34" charset="-120"/>
+              </a:rPr>
+              <a:t>• VPC Service Controls &amp; Access Boundaries: </a:t>
+            </a:r>
+            <a:pPr indent="0" marL="0">
+              <a:buNone/>
+            </a:pPr>
+            <a:r>
+              <a:rPr lang="en-US" sz="690" dirty="0">
                 <a:solidFill>
                   <a:srgbClr val="3C4043"/>
                 </a:solidFill>
@@ -11062,28 +10999,28 @@
                 <a:ea typeface="Arial" pitchFamily="34" charset="-122"/>
                 <a:cs typeface="Arial" pitchFamily="34" charset="-120"/>
               </a:rPr>
-              <a:t>Enforce Unified Hybrid Control Hub + PSC Bridge to Sovereign Spokes perimeters around hub and spoke projects to block unauthorized data exfiltration, and bind Hub VPC • Tenant-Aware.
+              <a:t>Enforce VPC Service Controls perimeters around hub and spoke projects to block unauthorized data exfiltration, and bind Principal Access Boundary (PAB) policies to spoke principals.
 </a:t>
             </a:r>
             <a:pPr indent="0" marL="0">
               <a:buNone/>
             </a:pPr>
             <a:r>
-              <a:rPr lang="en-US" sz="710" b="1" dirty="0">
-                <a:solidFill>
-                  <a:srgbClr val="202124"/>
-                </a:solidFill>
-                <a:latin typeface="Arial" pitchFamily="34" charset="0"/>
-                <a:ea typeface="Arial" pitchFamily="34" charset="-122"/>
-                <a:cs typeface="Arial" pitchFamily="34" charset="-120"/>
-              </a:rPr>
-              <a:t>• Cloud Armor &amp; IAP, Cross-Project Catalog &amp; Shared Model Armor: </a:t>
-            </a:r>
-            <a:pPr indent="0" marL="0">
-              <a:buNone/>
-            </a:pPr>
-            <a:r>
-              <a:rPr lang="en-US" sz="700" dirty="0">
+              <a:rPr lang="en-US" sz="700" b="1" dirty="0">
+                <a:solidFill>
+                  <a:srgbClr val="202124"/>
+                </a:solidFill>
+                <a:latin typeface="Arial" pitchFamily="34" charset="0"/>
+                <a:ea typeface="Arial" pitchFamily="34" charset="-122"/>
+                <a:cs typeface="Arial" pitchFamily="34" charset="-120"/>
+              </a:rPr>
+              <a:t>• Google Cloud Armor &amp; Cross-Project Catalog &amp; Shared Model Armor: </a:t>
+            </a:r>
+            <a:pPr indent="0" marL="0">
+              <a:buNone/>
+            </a:pPr>
+            <a:r>
+              <a:rPr lang="en-US" sz="690" dirty="0">
                 <a:solidFill>
                   <a:srgbClr val="3C4043"/>
                 </a:solidFill>
@@ -11091,14 +11028,14 @@
                 <a:ea typeface="Arial" pitchFamily="34" charset="-122"/>
                 <a:cs typeface="Arial" pitchFamily="34" charset="-120"/>
               </a:rPr>
-              <a:t>Strip client-supplied privilege headers at the edge, verify caller identity claims, and screen both incoming prompts and outgoing completions with Shared Model Armor.
+              <a:t>Strip client-supplied privilege headers at the edge, verify caller identity claims, and screen prompts and completions with Shared Model Armor.
 </a:t>
             </a:r>
             <a:pPr indent="0" marL="0">
               <a:buNone/>
             </a:pPr>
             <a:r>
-              <a:rPr lang="en-US" sz="710" b="1" dirty="0">
+              <a:rPr lang="en-US" sz="700" b="1" dirty="0">
                 <a:solidFill>
                   <a:srgbClr val="202124"/>
                 </a:solidFill>
@@ -11112,7 +11049,7 @@
               <a:buNone/>
             </a:pPr>
             <a:r>
-              <a:rPr lang="en-US" sz="700" dirty="0">
+              <a:rPr lang="en-US" sz="690" dirty="0">
                 <a:solidFill>
                   <a:srgbClr val="3C4043"/>
                 </a:solidFill>
@@ -11122,7 +11059,7 @@
               </a:rPr>
               <a:t>Encrypt state at rest with Customer-Managed Encryption Keys and enforce least-privilege access scopes on Shared AlloyDB RLS.</a:t>
             </a:r>
-            <a:endParaRPr lang="en-US" sz="710" dirty="0"/>
+            <a:endParaRPr lang="en-US" sz="700" dirty="0"/>
           </a:p>
         </p:txBody>
       </p:sp>
@@ -11233,14 +11170,16 @@
           <a:ln/>
         </p:spPr>
         <p:txBody>
-          <a:bodyPr wrap="square" rtlCol="0" anchor="ctr"/>
-          <a:lstStyle/>
-          <a:p>
-            <a:pPr indent="0" marL="0">
-              <a:buNone/>
-            </a:pPr>
-            <a:r>
-              <a:rPr lang="en-US" sz="720" b="1" dirty="0">
+          <a:bodyPr wrap="square" rtlCol="0" anchor="ctr">
+            <a:normAutofit/>
+          </a:bodyPr>
+          <a:lstStyle/>
+          <a:p>
+            <a:pPr indent="0" marL="0">
+              <a:buNone/>
+            </a:pPr>
+            <a:r>
+              <a:rPr lang="en-US" sz="710" b="1" dirty="0">
                 <a:solidFill>
                   <a:srgbClr val="202124"/>
                 </a:solidFill>
@@ -11250,14 +11189,14 @@
               </a:rPr>
               <a:t>• External Application Load Balancer &amp; Cloud Run Router</a:t>
             </a:r>
-            <a:endParaRPr lang="en-US" sz="720" dirty="0"/>
-          </a:p>
-          <a:p>
-            <a:pPr indent="0" marL="0">
-              <a:buNone/>
-            </a:pPr>
-            <a:r>
-              <a:rPr lang="en-US" sz="720" b="1" dirty="0">
+            <a:endParaRPr lang="en-US" sz="710" dirty="0"/>
+          </a:p>
+          <a:p>
+            <a:pPr indent="0" marL="0">
+              <a:buNone/>
+            </a:pPr>
+            <a:r>
+              <a:rPr lang="en-US" sz="710" b="1" dirty="0">
                 <a:solidFill>
                   <a:srgbClr val="202124"/>
                 </a:solidFill>
@@ -11267,14 +11206,14 @@
               </a:rPr>
               <a:t>• Vertex AI Agent Engine &amp; Pooled MCP Hub</a:t>
             </a:r>
-            <a:endParaRPr lang="en-US" sz="720" dirty="0"/>
-          </a:p>
-          <a:p>
-            <a:pPr indent="0" marL="0">
-              <a:buNone/>
-            </a:pPr>
-            <a:r>
-              <a:rPr lang="en-US" sz="720" b="1" dirty="0">
+            <a:endParaRPr lang="en-US" sz="710" dirty="0"/>
+          </a:p>
+          <a:p>
+            <a:pPr indent="0" marL="0">
+              <a:buNone/>
+            </a:pPr>
+            <a:r>
+              <a:rPr lang="en-US" sz="710" b="1" dirty="0">
                 <a:solidFill>
                   <a:srgbClr val="202124"/>
                 </a:solidFill>
@@ -11284,7 +11223,7 @@
               </a:rPr>
               <a:t>• Shared AlloyDB RLS</a:t>
             </a:r>
-            <a:endParaRPr lang="en-US" sz="720" dirty="0"/>
+            <a:endParaRPr lang="en-US" sz="710" dirty="0"/>
           </a:p>
         </p:txBody>
       </p:sp>
@@ -11331,14 +11270,16 @@
           <a:ln/>
         </p:spPr>
         <p:txBody>
-          <a:bodyPr wrap="square" rtlCol="0" anchor="ctr"/>
-          <a:lstStyle/>
-          <a:p>
-            <a:pPr indent="0" marL="0">
-              <a:buNone/>
-            </a:pPr>
-            <a:r>
-              <a:rPr lang="en-US" sz="710" b="1" dirty="0">
+          <a:bodyPr wrap="square" rtlCol="0" anchor="ctr">
+            <a:normAutofit/>
+          </a:bodyPr>
+          <a:lstStyle/>
+          <a:p>
+            <a:pPr indent="0" marL="0">
+              <a:buNone/>
+            </a:pPr>
+            <a:r>
+              <a:rPr lang="en-US" sz="700" b="1" dirty="0">
                 <a:solidFill>
                   <a:srgbClr val="202124"/>
                 </a:solidFill>
@@ -11352,7 +11293,7 @@
               <a:buNone/>
             </a:pPr>
             <a:r>
-              <a:rPr lang="en-US" sz="700" dirty="0">
+              <a:rPr lang="en-US" sz="690" dirty="0">
                 <a:solidFill>
                   <a:srgbClr val="3C4043"/>
                 </a:solidFill>
@@ -11367,7 +11308,7 @@
               <a:buNone/>
             </a:pPr>
             <a:r>
-              <a:rPr lang="en-US" sz="710" b="1" dirty="0">
+              <a:rPr lang="en-US" sz="700" b="1" dirty="0">
                 <a:solidFill>
                   <a:srgbClr val="202124"/>
                 </a:solidFill>
@@ -11381,7 +11322,7 @@
               <a:buNone/>
             </a:pPr>
             <a:r>
-              <a:rPr lang="en-US" sz="700" dirty="0">
+              <a:rPr lang="en-US" sz="690" dirty="0">
                 <a:solidFill>
                   <a:srgbClr val="3C4043"/>
                 </a:solidFill>
@@ -11396,7 +11337,7 @@
               <a:buNone/>
             </a:pPr>
             <a:r>
-              <a:rPr lang="en-US" sz="710" b="1" dirty="0">
+              <a:rPr lang="en-US" sz="700" b="1" dirty="0">
                 <a:solidFill>
                   <a:srgbClr val="202124"/>
                 </a:solidFill>
@@ -11410,7 +11351,7 @@
               <a:buNone/>
             </a:pPr>
             <a:r>
-              <a:rPr lang="en-US" sz="700" dirty="0">
+              <a:rPr lang="en-US" sz="690" dirty="0">
                 <a:solidFill>
                   <a:srgbClr val="3C4043"/>
                 </a:solidFill>
@@ -11420,7 +11361,7 @@
               </a:rPr>
               <a:t>Enable regional high availability and Point-in-Time Recovery on Shared AlloyDB RLS with automated backup verification.</a:t>
             </a:r>
-            <a:endParaRPr lang="en-US" sz="710" dirty="0"/>
+            <a:endParaRPr lang="en-US" sz="700" dirty="0"/>
           </a:p>
         </p:txBody>
       </p:sp>
@@ -11531,14 +11472,16 @@
           <a:ln/>
         </p:spPr>
         <p:txBody>
-          <a:bodyPr wrap="square" rtlCol="0" anchor="ctr"/>
-          <a:lstStyle/>
-          <a:p>
-            <a:pPr indent="0" marL="0">
-              <a:buNone/>
-            </a:pPr>
-            <a:r>
-              <a:rPr lang="en-US" sz="720" b="1" dirty="0">
+          <a:bodyPr wrap="square" rtlCol="0" anchor="ctr">
+            <a:normAutofit/>
+          </a:bodyPr>
+          <a:lstStyle/>
+          <a:p>
+            <a:pPr indent="0" marL="0">
+              <a:buNone/>
+            </a:pPr>
+            <a:r>
+              <a:rPr lang="en-US" sz="710" b="1" dirty="0">
                 <a:solidFill>
                   <a:srgbClr val="202124"/>
                 </a:solidFill>
@@ -11548,14 +11491,14 @@
               </a:rPr>
               <a:t>• Infrastructure as Code</a:t>
             </a:r>
-            <a:endParaRPr lang="en-US" sz="720" dirty="0"/>
-          </a:p>
-          <a:p>
-            <a:pPr indent="0" marL="0">
-              <a:buNone/>
-            </a:pPr>
-            <a:r>
-              <a:rPr lang="en-US" sz="720" b="1" dirty="0">
+            <a:endParaRPr lang="en-US" sz="710" dirty="0"/>
+          </a:p>
+          <a:p>
+            <a:pPr indent="0" marL="0">
+              <a:buNone/>
+            </a:pPr>
+            <a:r>
+              <a:rPr lang="en-US" sz="710" b="1" dirty="0">
                 <a:solidFill>
                   <a:srgbClr val="202124"/>
                 </a:solidFill>
@@ -11565,14 +11508,14 @@
               </a:rPr>
               <a:t>• 1. SHADOW_SYNC &amp; 3. DRAIN_AND_VERIFY</a:t>
             </a:r>
-            <a:endParaRPr lang="en-US" sz="720" dirty="0"/>
-          </a:p>
-          <a:p>
-            <a:pPr indent="0" marL="0">
-              <a:buNone/>
-            </a:pPr>
-            <a:r>
-              <a:rPr lang="en-US" sz="720" b="1" dirty="0">
+            <a:endParaRPr lang="en-US" sz="710" dirty="0"/>
+          </a:p>
+          <a:p>
+            <a:pPr indent="0" marL="0">
+              <a:buNone/>
+            </a:pPr>
+            <a:r>
+              <a:rPr lang="en-US" sz="710" b="1" dirty="0">
                 <a:solidFill>
                   <a:srgbClr val="202124"/>
                 </a:solidFill>
@@ -11582,7 +11525,7 @@
               </a:rPr>
               <a:t>• Automated CI/CD &amp; Red-Team Gates</a:t>
             </a:r>
-            <a:endParaRPr lang="en-US" sz="720" dirty="0"/>
+            <a:endParaRPr lang="en-US" sz="710" dirty="0"/>
           </a:p>
         </p:txBody>
       </p:sp>
@@ -11629,14 +11572,16 @@
           <a:ln/>
         </p:spPr>
         <p:txBody>
-          <a:bodyPr wrap="square" rtlCol="0" anchor="ctr"/>
-          <a:lstStyle/>
-          <a:p>
-            <a:pPr indent="0" marL="0">
-              <a:buNone/>
-            </a:pPr>
-            <a:r>
-              <a:rPr lang="en-US" sz="710" b="1" dirty="0">
+          <a:bodyPr wrap="square" rtlCol="0" anchor="ctr">
+            <a:normAutofit/>
+          </a:bodyPr>
+          <a:lstStyle/>
+          <a:p>
+            <a:pPr indent="0" marL="0">
+              <a:buNone/>
+            </a:pPr>
+            <a:r>
+              <a:rPr lang="en-US" sz="700" b="1" dirty="0">
                 <a:solidFill>
                   <a:srgbClr val="202124"/>
                 </a:solidFill>
@@ -11650,7 +11595,7 @@
               <a:buNone/>
             </a:pPr>
             <a:r>
-              <a:rPr lang="en-US" sz="700" dirty="0">
+              <a:rPr lang="en-US" sz="690" dirty="0">
                 <a:solidFill>
                   <a:srgbClr val="3C4043"/>
                 </a:solidFill>
@@ -11665,7 +11610,7 @@
               <a:buNone/>
             </a:pPr>
             <a:r>
-              <a:rPr lang="en-US" sz="710" b="1" dirty="0">
+              <a:rPr lang="en-US" sz="700" b="1" dirty="0">
                 <a:solidFill>
                   <a:srgbClr val="202124"/>
                 </a:solidFill>
@@ -11679,7 +11624,7 @@
               <a:buNone/>
             </a:pPr>
             <a:r>
-              <a:rPr lang="en-US" sz="700" dirty="0">
+              <a:rPr lang="en-US" sz="690" dirty="0">
                 <a:solidFill>
                   <a:srgbClr val="3C4043"/>
                 </a:solidFill>
@@ -11694,7 +11639,7 @@
               <a:buNone/>
             </a:pPr>
             <a:r>
-              <a:rPr lang="en-US" sz="710" b="1" dirty="0">
+              <a:rPr lang="en-US" sz="700" b="1" dirty="0">
                 <a:solidFill>
                   <a:srgbClr val="202124"/>
                 </a:solidFill>
@@ -11708,7 +11653,7 @@
               <a:buNone/>
             </a:pPr>
             <a:r>
-              <a:rPr lang="en-US" sz="700" dirty="0">
+              <a:rPr lang="en-US" sz="690" dirty="0">
                 <a:solidFill>
                   <a:srgbClr val="3C4043"/>
                 </a:solidFill>
@@ -11718,7 +11663,7 @@
               </a:rPr>
               <a:t>Gate every prompt, model, or tool change on automated Vertex AI Gen AI Evaluation Service benchmarks and security regression checks before production rollout.</a:t>
             </a:r>
-            <a:endParaRPr lang="en-US" sz="710" dirty="0"/>
+            <a:endParaRPr lang="en-US" sz="700" dirty="0"/>
           </a:p>
         </p:txBody>
       </p:sp>
@@ -11829,14 +11774,16 @@
           <a:ln/>
         </p:spPr>
         <p:txBody>
-          <a:bodyPr wrap="square" rtlCol="0" anchor="ctr"/>
-          <a:lstStyle/>
-          <a:p>
-            <a:pPr indent="0" marL="0">
-              <a:buNone/>
-            </a:pPr>
-            <a:r>
-              <a:rPr lang="en-US" sz="720" b="1" dirty="0">
+          <a:bodyPr wrap="square" rtlCol="0" anchor="ctr">
+            <a:normAutofit/>
+          </a:bodyPr>
+          <a:lstStyle/>
+          <a:p>
+            <a:pPr indent="0" marL="0">
+              <a:buNone/>
+            </a:pPr>
+            <a:r>
+              <a:rPr lang="en-US" sz="710" b="1" dirty="0">
                 <a:solidFill>
                   <a:srgbClr val="202124"/>
                 </a:solidFill>
@@ -11846,14 +11793,14 @@
               </a:rPr>
               <a:t>• Gemini 2.5 Pro Context Caching</a:t>
             </a:r>
-            <a:endParaRPr lang="en-US" sz="720" dirty="0"/>
-          </a:p>
-          <a:p>
-            <a:pPr indent="0" marL="0">
-              <a:buNone/>
-            </a:pPr>
-            <a:r>
-              <a:rPr lang="en-US" sz="720" b="1" dirty="0">
+            <a:endParaRPr lang="en-US" sz="710" dirty="0"/>
+          </a:p>
+          <a:p>
+            <a:pPr indent="0" marL="0">
+              <a:buNone/>
+            </a:pPr>
+            <a:r>
+              <a:rPr lang="en-US" sz="710" b="1" dirty="0">
                 <a:solidFill>
                   <a:srgbClr val="202124"/>
                 </a:solidFill>
@@ -11863,14 +11810,14 @@
               </a:rPr>
               <a:t>• Firestore Route Table &amp; Pooled MCP Hub</a:t>
             </a:r>
-            <a:endParaRPr lang="en-US" sz="720" dirty="0"/>
-          </a:p>
-          <a:p>
-            <a:pPr indent="0" marL="0">
-              <a:buNone/>
-            </a:pPr>
-            <a:r>
-              <a:rPr lang="en-US" sz="720" b="1" dirty="0">
+            <a:endParaRPr lang="en-US" sz="710" dirty="0"/>
+          </a:p>
+          <a:p>
+            <a:pPr indent="0" marL="0">
+              <a:buNone/>
+            </a:pPr>
+            <a:r>
+              <a:rPr lang="en-US" sz="710" b="1" dirty="0">
                 <a:solidFill>
                   <a:srgbClr val="202124"/>
                 </a:solidFill>
@@ -11880,7 +11827,7 @@
               </a:rPr>
               <a:t>• 3. DRAIN_AND_VERIFY FinOps Attribution</a:t>
             </a:r>
-            <a:endParaRPr lang="en-US" sz="720" dirty="0"/>
+            <a:endParaRPr lang="en-US" sz="710" dirty="0"/>
           </a:p>
         </p:txBody>
       </p:sp>
@@ -11927,14 +11874,16 @@
           <a:ln/>
         </p:spPr>
         <p:txBody>
-          <a:bodyPr wrap="square" rtlCol="0" anchor="ctr"/>
-          <a:lstStyle/>
-          <a:p>
-            <a:pPr indent="0" marL="0">
-              <a:buNone/>
-            </a:pPr>
-            <a:r>
-              <a:rPr lang="en-US" sz="710" b="1" dirty="0">
+          <a:bodyPr wrap="square" rtlCol="0" anchor="ctr">
+            <a:normAutofit/>
+          </a:bodyPr>
+          <a:lstStyle/>
+          <a:p>
+            <a:pPr indent="0" marL="0">
+              <a:buNone/>
+            </a:pPr>
+            <a:r>
+              <a:rPr lang="en-US" sz="700" b="1" dirty="0">
                 <a:solidFill>
                   <a:srgbClr val="202124"/>
                 </a:solidFill>
@@ -11948,7 +11897,7 @@
               <a:buNone/>
             </a:pPr>
             <a:r>
-              <a:rPr lang="en-US" sz="700" dirty="0">
+              <a:rPr lang="en-US" sz="690" dirty="0">
                 <a:solidFill>
                   <a:srgbClr val="3C4043"/>
                 </a:solidFill>
@@ -11963,7 +11912,7 @@
               <a:buNone/>
             </a:pPr>
             <a:r>
-              <a:rPr lang="en-US" sz="710" b="1" dirty="0">
+              <a:rPr lang="en-US" sz="700" b="1" dirty="0">
                 <a:solidFill>
                   <a:srgbClr val="202124"/>
                 </a:solidFill>
@@ -11977,7 +11926,7 @@
               <a:buNone/>
             </a:pPr>
             <a:r>
-              <a:rPr lang="en-US" sz="700" dirty="0">
+              <a:rPr lang="en-US" sz="690" dirty="0">
                 <a:solidFill>
                   <a:srgbClr val="3C4043"/>
                 </a:solidFill>
@@ -11992,7 +11941,7 @@
               <a:buNone/>
             </a:pPr>
             <a:r>
-              <a:rPr lang="en-US" sz="710" b="1" dirty="0">
+              <a:rPr lang="en-US" sz="700" b="1" dirty="0">
                 <a:solidFill>
                   <a:srgbClr val="202124"/>
                 </a:solidFill>
@@ -12006,7 +11955,7 @@
               <a:buNone/>
             </a:pPr>
             <a:r>
-              <a:rPr lang="en-US" sz="700" dirty="0">
+              <a:rPr lang="en-US" sz="690" dirty="0">
                 <a:solidFill>
                   <a:srgbClr val="3C4043"/>
                 </a:solidFill>
@@ -12016,7 +11965,7 @@
               </a:rPr>
               <a:t>Export OpenTelemetry token usage spans and Cloud Billing records to BigQuery to enforce per-spoke quota budgets and automated spend alerts.</a:t>
             </a:r>
-            <a:endParaRPr lang="en-US" sz="710" dirty="0"/>
+            <a:endParaRPr lang="en-US" sz="700" dirty="0"/>
           </a:p>
         </p:txBody>
       </p:sp>
@@ -12394,8 +12343,8 @@
         </p:nvSpPr>
         <p:spPr>
           <a:xfrm>
-            <a:off x="877824" y="1554480"/>
-            <a:ext cx="10424160" cy="1920240"/>
+            <a:off x="877824" y="1536192"/>
+            <a:ext cx="10424160" cy="1956816"/>
           </a:xfrm>
           <a:prstGeom prst="rect">
             <a:avLst/>
@@ -12404,17 +12353,19 @@
           <a:ln/>
         </p:spPr>
         <p:txBody>
-          <a:bodyPr wrap="square" rtlCol="0" anchor="t"/>
-          <a:lstStyle/>
-          <a:p>
-            <a:pPr indent="0" marL="0">
-              <a:lnSpc>
-                <a:spcPct val="112000"/>
-              </a:lnSpc>
-              <a:buNone/>
-            </a:pPr>
-            <a:r>
-              <a:rPr lang="en-US" sz="740" dirty="0">
+          <a:bodyPr wrap="square" rtlCol="0" anchor="t">
+            <a:normAutofit/>
+          </a:bodyPr>
+          <a:lstStyle/>
+          <a:p>
+            <a:pPr indent="0" marL="0">
+              <a:lnSpc>
+                <a:spcPct val="106000"/>
+              </a:lnSpc>
+              <a:buNone/>
+            </a:pPr>
+            <a:r>
+              <a:rPr lang="en-US" sz="690" dirty="0">
                 <a:solidFill>
                   <a:srgbClr val="202124"/>
                 </a:solidFill>
@@ -12424,17 +12375,17 @@
               </a:rPr>
               <a:t># 1. Hub VPC &amp; /28 Private Service Connect NAT Subnet (nitina-ggarwal-sandbox-647724)</a:t>
             </a:r>
-            <a:endParaRPr lang="en-US" sz="740" dirty="0"/>
-          </a:p>
-          <a:p>
-            <a:pPr indent="0" marL="0">
-              <a:lnSpc>
-                <a:spcPct val="112000"/>
-              </a:lnSpc>
-              <a:buNone/>
-            </a:pPr>
-            <a:r>
-              <a:rPr lang="en-US" sz="740" dirty="0">
+            <a:endParaRPr lang="en-US" sz="690" dirty="0"/>
+          </a:p>
+          <a:p>
+            <a:pPr indent="0" marL="0">
+              <a:lnSpc>
+                <a:spcPct val="106000"/>
+              </a:lnSpc>
+              <a:buNone/>
+            </a:pPr>
+            <a:r>
+              <a:rPr lang="en-US" sz="690" dirty="0">
                 <a:solidFill>
                   <a:srgbClr val="202124"/>
                 </a:solidFill>
@@ -12444,17 +12395,17 @@
               </a:rPr>
               <a:t>resource "google_compute_network" "hub_vpc" {</a:t>
             </a:r>
-            <a:endParaRPr lang="en-US" sz="740" dirty="0"/>
-          </a:p>
-          <a:p>
-            <a:pPr indent="0" marL="0">
-              <a:lnSpc>
-                <a:spcPct val="112000"/>
-              </a:lnSpc>
-              <a:buNone/>
-            </a:pPr>
-            <a:r>
-              <a:rPr lang="en-US" sz="740" dirty="0">
+            <a:endParaRPr lang="en-US" sz="690" dirty="0"/>
+          </a:p>
+          <a:p>
+            <a:pPr indent="0" marL="0">
+              <a:lnSpc>
+                <a:spcPct val="106000"/>
+              </a:lnSpc>
+              <a:buNone/>
+            </a:pPr>
+            <a:r>
+              <a:rPr lang="en-US" sz="690" dirty="0">
                 <a:solidFill>
                   <a:srgbClr val="202124"/>
                 </a:solidFill>
@@ -12464,17 +12415,17 @@
               </a:rPr>
               <a:t>  name                    = "cymbal-pattern-c-hub-vpc"</a:t>
             </a:r>
-            <a:endParaRPr lang="en-US" sz="740" dirty="0"/>
-          </a:p>
-          <a:p>
-            <a:pPr indent="0" marL="0">
-              <a:lnSpc>
-                <a:spcPct val="112000"/>
-              </a:lnSpc>
-              <a:buNone/>
-            </a:pPr>
-            <a:r>
-              <a:rPr lang="en-US" sz="740" dirty="0">
+            <a:endParaRPr lang="en-US" sz="690" dirty="0"/>
+          </a:p>
+          <a:p>
+            <a:pPr indent="0" marL="0">
+              <a:lnSpc>
+                <a:spcPct val="106000"/>
+              </a:lnSpc>
+              <a:buNone/>
+            </a:pPr>
+            <a:r>
+              <a:rPr lang="en-US" sz="690" dirty="0">
                 <a:solidFill>
                   <a:srgbClr val="202124"/>
                 </a:solidFill>
@@ -12484,17 +12435,17 @@
               </a:rPr>
               <a:t>  auto_create_subnetworks = false</a:t>
             </a:r>
-            <a:endParaRPr lang="en-US" sz="740" dirty="0"/>
-          </a:p>
-          <a:p>
-            <a:pPr indent="0" marL="0">
-              <a:lnSpc>
-                <a:spcPct val="112000"/>
-              </a:lnSpc>
-              <a:buNone/>
-            </a:pPr>
-            <a:r>
-              <a:rPr lang="en-US" sz="740" dirty="0">
+            <a:endParaRPr lang="en-US" sz="690" dirty="0"/>
+          </a:p>
+          <a:p>
+            <a:pPr indent="0" marL="0">
+              <a:lnSpc>
+                <a:spcPct val="106000"/>
+              </a:lnSpc>
+              <a:buNone/>
+            </a:pPr>
+            <a:r>
+              <a:rPr lang="en-US" sz="690" dirty="0">
                 <a:solidFill>
                   <a:srgbClr val="202124"/>
                 </a:solidFill>
@@ -12504,17 +12455,17 @@
               </a:rPr>
               <a:t>}</a:t>
             </a:r>
-            <a:endParaRPr lang="en-US" sz="740" dirty="0"/>
-          </a:p>
-          <a:p>
-            <a:pPr indent="0" marL="0">
-              <a:lnSpc>
-                <a:spcPct val="112000"/>
-              </a:lnSpc>
-              <a:buNone/>
-            </a:pPr>
-            <a:r>
-              <a:rPr lang="en-US" sz="740" dirty="0">
+            <a:endParaRPr lang="en-US" sz="690" dirty="0"/>
+          </a:p>
+          <a:p>
+            <a:pPr indent="0" marL="0">
+              <a:lnSpc>
+                <a:spcPct val="106000"/>
+              </a:lnSpc>
+              <a:buNone/>
+            </a:pPr>
+            <a:r>
+              <a:rPr lang="en-US" sz="690" dirty="0">
                 <a:solidFill>
                   <a:srgbClr val="202124"/>
                 </a:solidFill>
@@ -12524,17 +12475,17 @@
               </a:rPr>
               <a:t>resource "google_compute_subnetwork" "psc_nat_subnet" {</a:t>
             </a:r>
-            <a:endParaRPr lang="en-US" sz="740" dirty="0"/>
-          </a:p>
-          <a:p>
-            <a:pPr indent="0" marL="0">
-              <a:lnSpc>
-                <a:spcPct val="112000"/>
-              </a:lnSpc>
-              <a:buNone/>
-            </a:pPr>
-            <a:r>
-              <a:rPr lang="en-US" sz="740" dirty="0">
+            <a:endParaRPr lang="en-US" sz="690" dirty="0"/>
+          </a:p>
+          <a:p>
+            <a:pPr indent="0" marL="0">
+              <a:lnSpc>
+                <a:spcPct val="106000"/>
+              </a:lnSpc>
+              <a:buNone/>
+            </a:pPr>
+            <a:r>
+              <a:rPr lang="en-US" sz="690" dirty="0">
                 <a:solidFill>
                   <a:srgbClr val="202124"/>
                 </a:solidFill>
@@ -12544,17 +12495,17 @@
               </a:rPr>
               <a:t>  name          = "cymbal-psc-nat-us-west1"</a:t>
             </a:r>
-            <a:endParaRPr lang="en-US" sz="740" dirty="0"/>
-          </a:p>
-          <a:p>
-            <a:pPr indent="0" marL="0">
-              <a:lnSpc>
-                <a:spcPct val="112000"/>
-              </a:lnSpc>
-              <a:buNone/>
-            </a:pPr>
-            <a:r>
-              <a:rPr lang="en-US" sz="740" dirty="0">
+            <a:endParaRPr lang="en-US" sz="690" dirty="0"/>
+          </a:p>
+          <a:p>
+            <a:pPr indent="0" marL="0">
+              <a:lnSpc>
+                <a:spcPct val="106000"/>
+              </a:lnSpc>
+              <a:buNone/>
+            </a:pPr>
+            <a:r>
+              <a:rPr lang="en-US" sz="690" dirty="0">
                 <a:solidFill>
                   <a:srgbClr val="202124"/>
                 </a:solidFill>
@@ -12564,17 +12515,17 @@
               </a:rPr>
               <a:t>  region        = "us-west1"</a:t>
             </a:r>
-            <a:endParaRPr lang="en-US" sz="740" dirty="0"/>
-          </a:p>
-          <a:p>
-            <a:pPr indent="0" marL="0">
-              <a:lnSpc>
-                <a:spcPct val="112000"/>
-              </a:lnSpc>
-              <a:buNone/>
-            </a:pPr>
-            <a:r>
-              <a:rPr lang="en-US" sz="740" dirty="0">
+            <a:endParaRPr lang="en-US" sz="690" dirty="0"/>
+          </a:p>
+          <a:p>
+            <a:pPr indent="0" marL="0">
+              <a:lnSpc>
+                <a:spcPct val="106000"/>
+              </a:lnSpc>
+              <a:buNone/>
+            </a:pPr>
+            <a:r>
+              <a:rPr lang="en-US" sz="690" dirty="0">
                 <a:solidFill>
                   <a:srgbClr val="202124"/>
                 </a:solidFill>
@@ -12584,17 +12535,17 @@
               </a:rPr>
               <a:t>  network       = google_compute_network.hub_vpc.id</a:t>
             </a:r>
-            <a:endParaRPr lang="en-US" sz="740" dirty="0"/>
-          </a:p>
-          <a:p>
-            <a:pPr indent="0" marL="0">
-              <a:lnSpc>
-                <a:spcPct val="112000"/>
-              </a:lnSpc>
-              <a:buNone/>
-            </a:pPr>
-            <a:r>
-              <a:rPr lang="en-US" sz="740" dirty="0">
+            <a:endParaRPr lang="en-US" sz="690" dirty="0"/>
+          </a:p>
+          <a:p>
+            <a:pPr indent="0" marL="0">
+              <a:lnSpc>
+                <a:spcPct val="106000"/>
+              </a:lnSpc>
+              <a:buNone/>
+            </a:pPr>
+            <a:r>
+              <a:rPr lang="en-US" sz="690" dirty="0">
                 <a:solidFill>
                   <a:srgbClr val="202124"/>
                 </a:solidFill>
@@ -12604,17 +12555,17 @@
               </a:rPr>
               <a:t>  ip_cidr_range = "10.240.0.0/28"</a:t>
             </a:r>
-            <a:endParaRPr lang="en-US" sz="740" dirty="0"/>
-          </a:p>
-          <a:p>
-            <a:pPr indent="0" marL="0">
-              <a:lnSpc>
-                <a:spcPct val="112000"/>
-              </a:lnSpc>
-              <a:buNone/>
-            </a:pPr>
-            <a:r>
-              <a:rPr lang="en-US" sz="740" dirty="0">
+            <a:endParaRPr lang="en-US" sz="690" dirty="0"/>
+          </a:p>
+          <a:p>
+            <a:pPr indent="0" marL="0">
+              <a:lnSpc>
+                <a:spcPct val="106000"/>
+              </a:lnSpc>
+              <a:buNone/>
+            </a:pPr>
+            <a:r>
+              <a:rPr lang="en-US" sz="690" dirty="0">
                 <a:solidFill>
                   <a:srgbClr val="202124"/>
                 </a:solidFill>
@@ -12624,17 +12575,17 @@
               </a:rPr>
               <a:t>  purpose       = "PRIVATE_SERVICE_CONNECT"</a:t>
             </a:r>
-            <a:endParaRPr lang="en-US" sz="740" dirty="0"/>
-          </a:p>
-          <a:p>
-            <a:pPr indent="0" marL="0">
-              <a:lnSpc>
-                <a:spcPct val="112000"/>
-              </a:lnSpc>
-              <a:buNone/>
-            </a:pPr>
-            <a:r>
-              <a:rPr lang="en-US" sz="740" dirty="0">
+            <a:endParaRPr lang="en-US" sz="690" dirty="0"/>
+          </a:p>
+          <a:p>
+            <a:pPr indent="0" marL="0">
+              <a:lnSpc>
+                <a:spcPct val="106000"/>
+              </a:lnSpc>
+              <a:buNone/>
+            </a:pPr>
+            <a:r>
+              <a:rPr lang="en-US" sz="690" dirty="0">
                 <a:solidFill>
                   <a:srgbClr val="202124"/>
                 </a:solidFill>
@@ -12644,17 +12595,17 @@
               </a:rPr>
               <a:t>}</a:t>
             </a:r>
-            <a:endParaRPr lang="en-US" sz="740" dirty="0"/>
-          </a:p>
-          <a:p>
-            <a:pPr indent="0" marL="0">
-              <a:lnSpc>
-                <a:spcPct val="112000"/>
-              </a:lnSpc>
-              <a:buNone/>
-            </a:pPr>
-            <a:r>
-              <a:rPr lang="en-US" sz="740" dirty="0">
+            <a:endParaRPr lang="en-US" sz="690" dirty="0"/>
+          </a:p>
+          <a:p>
+            <a:pPr indent="0" marL="0">
+              <a:lnSpc>
+                <a:spcPct val="106000"/>
+              </a:lnSpc>
+              <a:buNone/>
+            </a:pPr>
+            <a:r>
+              <a:rPr lang="en-US" sz="690" dirty="0">
                 <a:solidFill>
                   <a:srgbClr val="202124"/>
                 </a:solidFill>
@@ -12664,17 +12615,17 @@
               </a:rPr>
               <a:t># 2. Dedicated Spoke VPC for Regulated Tenant Data Plane</a:t>
             </a:r>
-            <a:endParaRPr lang="en-US" sz="740" dirty="0"/>
-          </a:p>
-          <a:p>
-            <a:pPr indent="0" marL="0">
-              <a:lnSpc>
-                <a:spcPct val="112000"/>
-              </a:lnSpc>
-              <a:buNone/>
-            </a:pPr>
-            <a:r>
-              <a:rPr lang="en-US" sz="740" dirty="0">
+            <a:endParaRPr lang="en-US" sz="690" dirty="0"/>
+          </a:p>
+          <a:p>
+            <a:pPr indent="0" marL="0">
+              <a:lnSpc>
+                <a:spcPct val="106000"/>
+              </a:lnSpc>
+              <a:buNone/>
+            </a:pPr>
+            <a:r>
+              <a:rPr lang="en-US" sz="690" dirty="0">
                 <a:solidFill>
                   <a:srgbClr val="202124"/>
                 </a:solidFill>
@@ -12684,7 +12635,67 @@
               </a:rPr>
               <a:t>resource "google_compute_network" "finvault_spoke_vpc" {</a:t>
             </a:r>
-            <a:endParaRPr lang="en-US" sz="740" dirty="0"/>
+            <a:endParaRPr lang="en-US" sz="690" dirty="0"/>
+          </a:p>
+          <a:p>
+            <a:pPr indent="0" marL="0">
+              <a:lnSpc>
+                <a:spcPct val="106000"/>
+              </a:lnSpc>
+              <a:buNone/>
+            </a:pPr>
+            <a:r>
+              <a:rPr lang="en-US" sz="690" dirty="0">
+                <a:solidFill>
+                  <a:srgbClr val="202124"/>
+                </a:solidFill>
+                <a:latin typeface="Courier New" pitchFamily="34" charset="0"/>
+                <a:ea typeface="Courier New" pitchFamily="34" charset="-122"/>
+                <a:cs typeface="Courier New" pitchFamily="34" charset="-120"/>
+              </a:rPr>
+              <a:t>  name                    = "cymbal-pattern-c-finvault-spoke-vpc"</a:t>
+            </a:r>
+            <a:endParaRPr lang="en-US" sz="690" dirty="0"/>
+          </a:p>
+          <a:p>
+            <a:pPr indent="0" marL="0">
+              <a:lnSpc>
+                <a:spcPct val="106000"/>
+              </a:lnSpc>
+              <a:buNone/>
+            </a:pPr>
+            <a:r>
+              <a:rPr lang="en-US" sz="690" dirty="0">
+                <a:solidFill>
+                  <a:srgbClr val="202124"/>
+                </a:solidFill>
+                <a:latin typeface="Courier New" pitchFamily="34" charset="0"/>
+                <a:ea typeface="Courier New" pitchFamily="34" charset="-122"/>
+                <a:cs typeface="Courier New" pitchFamily="34" charset="-120"/>
+              </a:rPr>
+              <a:t>  auto_create_subnetworks = false</a:t>
+            </a:r>
+            <a:endParaRPr lang="en-US" sz="690" dirty="0"/>
+          </a:p>
+          <a:p>
+            <a:pPr indent="0" marL="0">
+              <a:lnSpc>
+                <a:spcPct val="106000"/>
+              </a:lnSpc>
+              <a:buNone/>
+            </a:pPr>
+            <a:r>
+              <a:rPr lang="en-US" sz="690" dirty="0">
+                <a:solidFill>
+                  <a:srgbClr val="202124"/>
+                </a:solidFill>
+                <a:latin typeface="Courier New" pitchFamily="34" charset="0"/>
+                <a:ea typeface="Courier New" pitchFamily="34" charset="-122"/>
+                <a:cs typeface="Courier New" pitchFamily="34" charset="-120"/>
+              </a:rPr>
+              <a:t>    }</a:t>
+            </a:r>
+            <a:endParaRPr lang="en-US" sz="690" dirty="0"/>
           </a:p>
         </p:txBody>
       </p:sp>

--- a/slides/doc-mt-04-editable-slides.pptx
+++ b/slides/doc-mt-04-editable-slides.pptx
@@ -3496,6 +3496,7 @@
               <a:srgbClr val="5F6368"/>
             </a:solidFill>
             <a:prstDash val="solid"/>
+            <a:headEnd type="triangle" w="sm" len="sm"/>
           </a:ln>
         </p:spPr>
       </p:sp>
@@ -3543,6 +3544,7 @@
               <a:srgbClr val="5F6368"/>
             </a:solidFill>
             <a:prstDash val="solid"/>
+            <a:headEnd type="triangle" w="sm" len="sm"/>
           </a:ln>
         </p:spPr>
       </p:sp>
@@ -3728,6 +3730,7 @@
               <a:srgbClr val="5F6368"/>
             </a:solidFill>
             <a:prstDash val="solid"/>
+            <a:headEnd type="triangle" w="sm" len="sm"/>
           </a:ln>
         </p:spPr>
       </p:sp>
@@ -3775,6 +3778,7 @@
               <a:srgbClr val="5F6368"/>
             </a:solidFill>
             <a:prstDash val="solid"/>
+            <a:headEnd type="triangle" w="sm" len="sm"/>
           </a:ln>
         </p:spPr>
       </p:sp>
@@ -5616,7 +5620,7 @@
                 <a:ea typeface="Arial" pitchFamily="34" charset="-122"/>
                 <a:cs typeface="Arial" pitchFamily="34" charset="-120"/>
               </a:rPr>
-              <a:t>Gemini &amp; Claude 3.7</a:t>
+              <a:t>Gemini 2.5 Pro &amp; Flash</a:t>
             </a:r>
             <a:endParaRPr lang="en-US" sz="435" dirty="0"/>
           </a:p>
@@ -8035,7 +8039,7 @@
                 <a:ea typeface="Arial" pitchFamily="34" charset="-122"/>
                 <a:cs typeface="Arial" pitchFamily="34" charset="-120"/>
               </a:rPr>
-              <a:t>• Google Cloud Armor &amp; Firestore Route Table: </a:t>
+              <a:t>• Google Cloud Armor: </a:t>
             </a:r>
             <a:pPr indent="0" marL="0">
               <a:lnSpc>
@@ -8052,7 +8056,7 @@
                 <a:ea typeface="Arial" pitchFamily="34" charset="-122"/>
                 <a:cs typeface="Arial" pitchFamily="34" charset="-120"/>
               </a:rPr>
-              <a:t>Enforces edge policy rules and screens payloads before reaching the runtime.
+              <a:t>Enforces edge policy rules before reaching the runtime.
 </a:t>
             </a:r>
             <a:pPr indent="0" marL="0">
@@ -8087,7 +8091,7 @@
                 <a:ea typeface="Arial" pitchFamily="34" charset="-122"/>
                 <a:cs typeface="Arial" pitchFamily="34" charset="-120"/>
               </a:rPr>
-              <a:t>Authenticates callers and verifies identity and scope claims before routing.
+              <a:t>Screens incoming prompts and verifies policy constraints at the routing hub.
 </a:t>
             </a:r>
             <a:pPr indent="0" marL="0">
@@ -8105,7 +8109,7 @@
                 <a:ea typeface="Arial" pitchFamily="34" charset="-122"/>
                 <a:cs typeface="Arial" pitchFamily="34" charset="-120"/>
               </a:rPr>
-              <a:t>• Cloud Run Router: </a:t>
+              <a:t>• Firestore Route Table: </a:t>
             </a:r>
             <a:pPr indent="0" marL="0">
               <a:lnSpc>
@@ -8122,7 +8126,7 @@
                 <a:ea typeface="Arial" pitchFamily="34" charset="-122"/>
                 <a:cs typeface="Arial" pitchFamily="34" charset="-120"/>
               </a:rPr>
-              <a:t>Serverless routing service that validates caller tokens and dispatches requests to the target execution spoke.</a:t>
+              <a:t>Authenticates callers and binds cryptographic identity and scope claims before routing.</a:t>
             </a:r>
             <a:endParaRPr lang="en-US" sz="690" dirty="0"/>
           </a:p>
@@ -8676,7 +8680,7 @@
                 <a:ea typeface="Arial" pitchFamily="34" charset="-122"/>
                 <a:cs typeface="Arial" pitchFamily="34" charset="-120"/>
               </a:rPr>
-              <a:t>• Vertex AI Agent Engine: </a:t>
+              <a:t>• Vertex AI Agent Engine / Spoke Agent Engine: </a:t>
             </a:r>
             <a:pPr indent="0" marL="0">
               <a:lnSpc>
@@ -8693,7 +8697,7 @@
                 <a:ea typeface="Arial" pitchFamily="34" charset="-122"/>
                 <a:cs typeface="Arial" pitchFamily="34" charset="-120"/>
               </a:rPr>
-              <a:t>Core execution environment orchestrating reasoning, memory, and tool execution.
+              <a:t>Core execution environments orchestrating reasoning, memory, and tool execution across left and right spokes.
 </a:t>
             </a:r>
             <a:pPr indent="0" marL="0">
@@ -8711,7 +8715,7 @@
                 <a:ea typeface="Arial" pitchFamily="34" charset="-122"/>
                 <a:cs typeface="Arial" pitchFamily="34" charset="-120"/>
               </a:rPr>
-              <a:t>• Shared Model Armor: </a:t>
+              <a:t>• Shared Model Armor / PSC ServiceAttachment: </a:t>
             </a:r>
             <a:pPr indent="0" marL="0">
               <a:lnSpc>
@@ -8728,7 +8732,7 @@
                 <a:ea typeface="Arial" pitchFamily="34" charset="-122"/>
                 <a:cs typeface="Arial" pitchFamily="34" charset="-120"/>
               </a:rPr>
-              <a:t>Screens prompts and model outputs within the execution boundary to enforce safety and DLP policies.
+              <a:t>Screens prompts and model outputs within each spoke boundary to enforce safety and DLP policies.
 </a:t>
             </a:r>
             <a:pPr indent="0" marL="0">
@@ -8746,7 +8750,7 @@
                 <a:ea typeface="Arial" pitchFamily="34" charset="-122"/>
                 <a:cs typeface="Arial" pitchFamily="34" charset="-120"/>
               </a:rPr>
-              <a:t>• Pooled MCP Hub: </a:t>
+              <a:t>• Pooled MCP Hub / Dedicated Spoke MCP: </a:t>
             </a:r>
             <a:pPr indent="0" marL="0">
               <a:lnSpc>
@@ -8763,7 +8767,7 @@
                 <a:ea typeface="Arial" pitchFamily="34" charset="-122"/>
                 <a:cs typeface="Arial" pitchFamily="34" charset="-120"/>
               </a:rPr>
-              <a:t>Serverless tool interface providing standardized, scoped access to enterprise systems.
+              <a:t>Serverless tool interfaces providing standardized, scoped access to enterprise systems.
 </a:t>
             </a:r>
             <a:pPr indent="0" marL="0">
@@ -8781,7 +8785,7 @@
                 <a:ea typeface="Arial" pitchFamily="34" charset="-122"/>
                 <a:cs typeface="Arial" pitchFamily="34" charset="-120"/>
               </a:rPr>
-              <a:t>• Shared AlloyDB RLS: </a:t>
+              <a:t>• Shared AlloyDB RLS / CMEK Spoke AlloyDB: </a:t>
             </a:r>
             <a:pPr indent="0" marL="0">
               <a:lnSpc>
@@ -8798,7 +8802,7 @@
                 <a:ea typeface="Arial" pitchFamily="34" charset="-122"/>
                 <a:cs typeface="Arial" pitchFamily="34" charset="-120"/>
               </a:rPr>
-              <a:t>Isolated persistence layer enforcing access boundaries, vector namespaces, and encryption at rest.</a:t>
+              <a:t>Isolated persistence layers enforcing access boundaries, vector namespaces, and encryption at rest.</a:t>
             </a:r>
             <a:endParaRPr lang="en-US" sz="690" dirty="0"/>
           </a:p>

--- a/slides/doc-mt-04-editable-slides.pptx
+++ b/slides/doc-mt-04-editable-slides.pptx
@@ -785,7 +785,7 @@
           <a:p>
             <a:r>
               <a:rPr lang="en-US" dirty="0"/>
-              <a:t>[phased-roadmap-timeline] WS4 • Pattern C Zero-Downtime Live Tier Migration Timeline: Workstream 4 Pattern C Timeline  •  Phase 1 SHADOW_SYNC → Phase 2 ATOMIC_CUTOVER (0ms) → Phase 3 DRAIN_AND_VERIFY</a:t>
+              <a:t>[phased-roadmap-timeline] WS4 • ACT III: PATTERN C ZERO-DOWNTIME LIVE TIER MIGRATION TIMELINE: Workstream 4 Pattern C Timeline  •  Phase 1 SHADOW_SYNC → Phase 2 ATOMIC_CUTOVER (0ms) → Phase 3 DRAIN_AND_VERIFY</a:t>
             </a:r>
             <a:endParaRPr lang="en-US" dirty="0"/>
           </a:p>
@@ -873,7 +873,7 @@
           <a:p>
             <a:r>
               <a:rPr lang="en-US" dirty="0"/>
-              <a:t>[strategic-operating-model-pillars] WS4 • Pattern C Blended FinOps, Unidirectional PSC &amp; Live Mobility: Workstream 4 Pattern C Operating Model  •  74% Portfolio Savings + Unidirectional PSC + 0ms Live Tier Mobility</a:t>
+              <a:t>[strategic-operating-model-pillars] WS4 • ACT III: PATTERN C BLENDED FINOPS, PSC &amp; LIVE MOBILITY MODEL: Workstream 4 Pattern C Operating Model  •  74% Portfolio Savings + Unidirectional PSC + 0ms Live Tier Mobility</a:t>
             </a:r>
             <a:endParaRPr lang="en-US" dirty="0"/>
           </a:p>
@@ -1592,7 +1592,7 @@
           <a:p>
             <a:r>
               <a:rPr lang="en-US" dirty="0"/>
-              <a:t>[async-state-flow-pipeline] WS4 • Pattern C Unidirectional Private Service Connect &amp; Live Cutover Flow: Workstream 4 Pattern C Pipeline  •  Unidirectional /28 PSC NAT Traversal + 0ms Firestore Pointer Cutover Loop</a:t>
+              <a:t>[async-state-flow-pipeline] WS4 • ACT II: UNIDIRECTIONAL PRIVATE SERVICE CONNECT &amp; LIVE CUTOVER LOOP: Workstream 4 Pattern C Pipeline  •  Unidirectional /28 PSC NAT Traversal + 0ms Firestore Pointer Cutover Loop</a:t>
             </a:r>
             <a:endParaRPr lang="en-US" dirty="0"/>
           </a:p>
@@ -3180,7 +3180,7 @@
                 <a:ea typeface="Google Sans" pitchFamily="34" charset="-122"/>
                 <a:cs typeface="Google Sans" pitchFamily="34" charset="-120"/>
               </a:rPr>
-              <a:t>OFFICIAL 4-ZONE HUB-AND-SPOKE TOPOLOGY (#78)</a:t>
+              <a:t>3-ACT EXECUTIVE BRIEFING &amp; DELIVERABLE MAP</a:t>
             </a:r>
             <a:endParaRPr lang="en-US" sz="920" dirty="0"/>
           </a:p>
@@ -3242,7 +3242,7 @@
         <p:spPr>
           <a:xfrm>
             <a:off x="7735824" y="1005840"/>
-            <a:ext cx="1353312" cy="219456"/>
+            <a:ext cx="1481328" cy="219456"/>
           </a:xfrm>
           <a:prstGeom prst="roundRect">
             <a:avLst>
@@ -3264,7 +3264,7 @@
         <p:spPr>
           <a:xfrm>
             <a:off x="7735824" y="1005840"/>
-            <a:ext cx="1353312" cy="219456"/>
+            <a:ext cx="1481328" cy="219456"/>
           </a:xfrm>
           <a:prstGeom prst="rect">
             <a:avLst/>
@@ -3280,7 +3280,7 @@
               <a:buNone/>
             </a:pPr>
             <a:r>
-              <a:rPr lang="en-US" sz="680" b="1" dirty="0">
+              <a:rPr lang="en-US" sz="660" b="1" dirty="0">
                 <a:solidFill>
                   <a:srgbClr val="174EA6"/>
                 </a:solidFill>
@@ -3288,9 +3288,9 @@
                 <a:ea typeface="Google Sans" pitchFamily="34" charset="-122"/>
                 <a:cs typeface="Google Sans" pitchFamily="34" charset="-120"/>
               </a:rPr>
-              <a:t>01 • ROUTING HUB</a:t>
-            </a:r>
-            <a:endParaRPr lang="en-US" sz="680" dirty="0"/>
+              <a:t>ACT I • SLIDES 1–4</a:t>
+            </a:r>
+            <a:endParaRPr lang="en-US" sz="660" dirty="0"/>
           </a:p>
         </p:txBody>
       </p:sp>
@@ -3302,8 +3302,8 @@
         </p:nvSpPr>
         <p:spPr>
           <a:xfrm>
-            <a:off x="9162288" y="987552"/>
-            <a:ext cx="2340864" cy="256032"/>
+            <a:off x="9272016" y="987552"/>
+            <a:ext cx="2249424" cy="256032"/>
           </a:xfrm>
           <a:prstGeom prst="rect">
             <a:avLst/>
@@ -3319,7 +3319,7 @@
               <a:buNone/>
             </a:pPr>
             <a:r>
-              <a:rPr lang="en-US" sz="880" b="1" dirty="0">
+              <a:rPr lang="en-US" sz="850" b="1" dirty="0">
                 <a:solidFill>
                   <a:srgbClr val="3C4043"/>
                 </a:solidFill>
@@ -3327,9 +3327,9 @@
                 <a:ea typeface="Google Sans" pitchFamily="34" charset="-122"/>
                 <a:cs typeface="Google Sans" pitchFamily="34" charset="-120"/>
               </a:rPr>
-              <a:t>Edge WAF, OBO/DPoP &amp; Tier Router</a:t>
-            </a:r>
-            <a:endParaRPr lang="en-US" sz="880" dirty="0"/>
+              <a:t>Master Blueprint (#78) &amp; SLO Scorecard</a:t>
+            </a:r>
+            <a:endParaRPr lang="en-US" sz="850" dirty="0"/>
           </a:p>
         </p:txBody>
       </p:sp>
@@ -3358,7 +3358,7 @@
               <a:buNone/>
             </a:pPr>
             <a:r>
-              <a:rPr lang="en-US" sz="790" dirty="0">
+              <a:rPr lang="en-US" sz="780" dirty="0">
                 <a:solidFill>
                   <a:srgbClr val="5F6368"/>
                 </a:solidFill>
@@ -3366,9 +3366,9 @@
                 <a:ea typeface="Roboto" pitchFamily="34" charset="-122"/>
                 <a:cs typeface="Roboto" pitchFamily="34" charset="-120"/>
               </a:rPr>
-              <a:t>Google Cloud Armor, IAP, IAM STS &amp; Agent Engine Registry verify OIDC identity, strip spoofed headers &amp; filter tools.</a:t>
-            </a:r>
-            <a:endParaRPr lang="en-US" sz="790" dirty="0"/>
+              <a:t>Decomposes Figure 1 into 56 editable vector shapes + 23 connectors, quantified unit economics ($42 vs. $1,850/mo) &amp; GCP stack.</a:t>
+            </a:r>
+            <a:endParaRPr lang="en-US" sz="780" dirty="0"/>
           </a:p>
         </p:txBody>
       </p:sp>
@@ -3428,7 +3428,7 @@
         <p:spPr>
           <a:xfrm>
             <a:off x="7735824" y="2194560"/>
-            <a:ext cx="1353312" cy="219456"/>
+            <a:ext cx="1481328" cy="219456"/>
           </a:xfrm>
           <a:prstGeom prst="roundRect">
             <a:avLst>
@@ -3450,7 +3450,7 @@
         <p:spPr>
           <a:xfrm>
             <a:off x="7735824" y="2194560"/>
-            <a:ext cx="1353312" cy="219456"/>
+            <a:ext cx="1481328" cy="219456"/>
           </a:xfrm>
           <a:prstGeom prst="rect">
             <a:avLst/>
@@ -3466,7 +3466,7 @@
               <a:buNone/>
             </a:pPr>
             <a:r>
-              <a:rPr lang="en-US" sz="680" b="1" dirty="0">
+              <a:rPr lang="en-US" sz="660" b="1" dirty="0">
                 <a:solidFill>
                   <a:srgbClr val="A50E0E"/>
                 </a:solidFill>
@@ -3474,9 +3474,9 @@
                 <a:ea typeface="Google Sans" pitchFamily="34" charset="-122"/>
                 <a:cs typeface="Google Sans" pitchFamily="34" charset="-120"/>
               </a:rPr>
-              <a:t>02 • RIGHT SPOKE</a:t>
-            </a:r>
-            <a:endParaRPr lang="en-US" sz="680" dirty="0"/>
+              <a:t>ACT II • SLIDES 5–8</a:t>
+            </a:r>
+            <a:endParaRPr lang="en-US" sz="660" dirty="0"/>
           </a:p>
         </p:txBody>
       </p:sp>
@@ -3488,8 +3488,8 @@
         </p:nvSpPr>
         <p:spPr>
           <a:xfrm>
-            <a:off x="9162288" y="2176272"/>
-            <a:ext cx="2340864" cy="256032"/>
+            <a:off x="9272016" y="2176272"/>
+            <a:ext cx="2249424" cy="256032"/>
           </a:xfrm>
           <a:prstGeom prst="rect">
             <a:avLst/>
@@ -3505,7 +3505,7 @@
               <a:buNone/>
             </a:pPr>
             <a:r>
-              <a:rPr lang="en-US" sz="880" b="1" dirty="0">
+              <a:rPr lang="en-US" sz="850" b="1" dirty="0">
                 <a:solidFill>
                   <a:srgbClr val="3C4043"/>
                 </a:solidFill>
@@ -3513,9 +3513,9 @@
                 <a:ea typeface="Google Sans" pitchFamily="34" charset="-122"/>
                 <a:cs typeface="Google Sans" pitchFamily="34" charset="-120"/>
               </a:rPr>
-              <a:t>2LO/3LO MCP, AlloyDB RLS &amp; PSC Vaults</a:t>
-            </a:r>
-            <a:endParaRPr lang="en-US" sz="880" dirty="0"/>
+              <a:t>3-Zone Boundaries, UML &amp; Fail-Closed Loops</a:t>
+            </a:r>
+            <a:endParaRPr lang="en-US" sz="850" dirty="0"/>
           </a:p>
         </p:txBody>
       </p:sp>
@@ -3544,7 +3544,7 @@
               <a:buNone/>
             </a:pPr>
             <a:r>
-              <a:rPr lang="en-US" sz="790" dirty="0">
+              <a:rPr lang="en-US" sz="780" dirty="0">
                 <a:solidFill>
                   <a:srgbClr val="5F6368"/>
                 </a:solidFill>
@@ -3552,9 +3552,9 @@
                 <a:ea typeface="Roboto" pitchFamily="34" charset="-122"/>
                 <a:cs typeface="Roboto" pitchFamily="34" charset="-120"/>
               </a:rPr>
-              <a:t>Enforces PostgreSQL Row-Level Security, 3LO step-up consent, VPC-SC perimeters &amp; &lt;60s CMEK kill-switches.</a:t>
-            </a:r>
-            <a:endParaRPr lang="en-US" sz="790" dirty="0"/>
+              <a:t>Walks through 3-zone physical/logical boundaries, Hop 1 OBO+DPoP wire transformation, 5-Actor UML sequence &amp; HTTP 401–429 circuit breakers.</a:t>
+            </a:r>
+            <a:endParaRPr lang="en-US" sz="780" dirty="0"/>
           </a:p>
         </p:txBody>
       </p:sp>
@@ -3614,7 +3614,7 @@
         <p:spPr>
           <a:xfrm>
             <a:off x="7735824" y="3383280"/>
-            <a:ext cx="1353312" cy="219456"/>
+            <a:ext cx="1481328" cy="219456"/>
           </a:xfrm>
           <a:prstGeom prst="roundRect">
             <a:avLst>
@@ -3636,7 +3636,7 @@
         <p:spPr>
           <a:xfrm>
             <a:off x="7735824" y="3383280"/>
-            <a:ext cx="1353312" cy="219456"/>
+            <a:ext cx="1481328" cy="219456"/>
           </a:xfrm>
           <a:prstGeom prst="rect">
             <a:avLst/>
@@ -3652,7 +3652,7 @@
               <a:buNone/>
             </a:pPr>
             <a:r>
-              <a:rPr lang="en-US" sz="680" b="1" dirty="0">
+              <a:rPr lang="en-US" sz="660" b="1" dirty="0">
                 <a:solidFill>
                   <a:srgbClr val="B06000"/>
                 </a:solidFill>
@@ -3660,9 +3660,9 @@
                 <a:ea typeface="Google Sans" pitchFamily="34" charset="-122"/>
                 <a:cs typeface="Google Sans" pitchFamily="34" charset="-120"/>
               </a:rPr>
-              <a:t>03 • LEFT SPOKE</a:t>
-            </a:r>
-            <a:endParaRPr lang="en-US" sz="680" dirty="0"/>
+              <a:t>ACT III • SLIDES 9–12</a:t>
+            </a:r>
+            <a:endParaRPr lang="en-US" sz="660" dirty="0"/>
           </a:p>
         </p:txBody>
       </p:sp>
@@ -3674,8 +3674,8 @@
         </p:nvSpPr>
         <p:spPr>
           <a:xfrm>
-            <a:off x="9162288" y="3364992"/>
-            <a:ext cx="2340864" cy="256032"/>
+            <a:off x="9272016" y="3364992"/>
+            <a:ext cx="2249424" cy="256032"/>
           </a:xfrm>
           <a:prstGeom prst="rect">
             <a:avLst/>
@@ -3691,7 +3691,7 @@
               <a:buNone/>
             </a:pPr>
             <a:r>
-              <a:rPr lang="en-US" sz="880" b="1" dirty="0">
+              <a:rPr lang="en-US" sz="850" b="1" dirty="0">
                 <a:solidFill>
                   <a:srgbClr val="3C4043"/>
                 </a:solidFill>
@@ -3699,9 +3699,9 @@
                 <a:ea typeface="Google Sans" pitchFamily="34" charset="-122"/>
                 <a:cs typeface="Google Sans" pitchFamily="34" charset="-120"/>
               </a:rPr>
-              <a:t>Model Armor, ADK &amp; 90% Prefix Cache</a:t>
-            </a:r>
-            <a:endParaRPr lang="en-US" sz="880" dirty="0"/>
+              <a:t>Pattern A/B/C Matrix, GAP-01..05 &amp; Live Proof</a:t>
+            </a:r>
+            <a:endParaRPr lang="en-US" sz="850" dirty="0"/>
           </a:p>
         </p:txBody>
       </p:sp>
@@ -3730,7 +3730,7 @@
               <a:buNone/>
             </a:pPr>
             <a:r>
-              <a:rPr lang="en-US" sz="790" dirty="0">
+              <a:rPr lang="en-US" sz="780" dirty="0">
                 <a:solidFill>
                   <a:srgbClr val="5F6368"/>
                 </a:solidFill>
@@ -3738,9 +3738,9 @@
                 <a:ea typeface="Roboto" pitchFamily="34" charset="-122"/>
                 <a:cs typeface="Roboto" pitchFamily="34" charset="-120"/>
               </a:rPr>
-              <a:t>Screens prompts (4/6), executes Gemini 2.5 Pro with 90% cache (5), clamps RPM in Valkey &amp; isolates L1–L5 memory.</a:t>
-            </a:r>
-            <a:endParaRPr lang="en-US" sz="790" dirty="0"/>
+              <a:t>Compares Pooled, Siloed &amp; Hybrid PSC trade-offs, closes 5 EAP product gaps, embeds 16:9 Cloud Console captures &amp; 6-week rollout.</a:t>
+            </a:r>
+            <a:endParaRPr lang="en-US" sz="780" dirty="0"/>
           </a:p>
         </p:txBody>
       </p:sp>
@@ -3800,7 +3800,7 @@
         <p:spPr>
           <a:xfrm>
             <a:off x="7735824" y="4572000"/>
-            <a:ext cx="1353312" cy="219456"/>
+            <a:ext cx="1481328" cy="219456"/>
           </a:xfrm>
           <a:prstGeom prst="roundRect">
             <a:avLst>
@@ -3822,7 +3822,7 @@
         <p:spPr>
           <a:xfrm>
             <a:off x="7735824" y="4572000"/>
-            <a:ext cx="1353312" cy="219456"/>
+            <a:ext cx="1481328" cy="219456"/>
           </a:xfrm>
           <a:prstGeom prst="rect">
             <a:avLst/>
@@ -3838,7 +3838,7 @@
               <a:buNone/>
             </a:pPr>
             <a:r>
-              <a:rPr lang="en-US" sz="680" b="1" dirty="0">
+              <a:rPr lang="en-US" sz="660" b="1" dirty="0">
                 <a:solidFill>
                   <a:srgbClr val="0D652D"/>
                 </a:solidFill>
@@ -3846,9 +3846,9 @@
                 <a:ea typeface="Google Sans" pitchFamily="34" charset="-122"/>
                 <a:cs typeface="Google Sans" pitchFamily="34" charset="-120"/>
               </a:rPr>
-              <a:t>04 • GOVERNANCE HUB</a:t>
-            </a:r>
-            <a:endParaRPr lang="en-US" sz="680" dirty="0"/>
+              <a:t>GOVERNANCE • SLIDES 13–14</a:t>
+            </a:r>
+            <a:endParaRPr lang="en-US" sz="660" dirty="0"/>
           </a:p>
         </p:txBody>
       </p:sp>
@@ -3860,8 +3860,8 @@
         </p:nvSpPr>
         <p:spPr>
           <a:xfrm>
-            <a:off x="9162288" y="4553712"/>
-            <a:ext cx="2340864" cy="256032"/>
+            <a:off x="9272016" y="4553712"/>
+            <a:ext cx="2249424" cy="256032"/>
           </a:xfrm>
           <a:prstGeom prst="rect">
             <a:avLst/>
@@ -3877,7 +3877,7 @@
               <a:buNone/>
             </a:pPr>
             <a:r>
-              <a:rPr lang="en-US" sz="880" b="1" dirty="0">
+              <a:rPr lang="en-US" sz="850" b="1" dirty="0">
                 <a:solidFill>
                   <a:srgbClr val="3C4043"/>
                 </a:solidFill>
@@ -3885,9 +3885,9 @@
                 <a:ea typeface="Google Sans" pitchFamily="34" charset="-122"/>
                 <a:cs typeface="Google Sans" pitchFamily="34" charset="-120"/>
               </a:rPr>
-              <a:t>Security, CMEK &amp; FinOps Telemetry</a:t>
-            </a:r>
-            <a:endParaRPr lang="en-US" sz="880" dirty="0"/>
+              <a:t>Day-2 RACI Operating Model &amp; Series Map</a:t>
+            </a:r>
+            <a:endParaRPr lang="en-US" sz="850" dirty="0"/>
           </a:p>
         </p:txBody>
       </p:sp>
@@ -3916,7 +3916,7 @@
               <a:buNone/>
             </a:pPr>
             <a:r>
-              <a:rPr lang="en-US" sz="790" dirty="0">
+              <a:rPr lang="en-US" sz="780" dirty="0">
                 <a:solidFill>
                   <a:srgbClr val="5F6368"/>
                 </a:solidFill>
@@ -3924,9 +3924,9 @@
                 <a:ea typeface="Roboto" pitchFamily="34" charset="-122"/>
                 <a:cs typeface="Roboto" pitchFamily="34" charset="-120"/>
               </a:rPr>
-              <a:t>Security Command Center, Cloud KMS CMEK &amp; BigQuery OTel govern encryption liveness and zero-PII chargeback.</a:t>
-            </a:r>
-            <a:endParaRPr lang="en-US" sz="790" dirty="0"/>
+              <a:t>Assigns Security, SRE &amp; FinOps ownership SLAs and maps runnable deliverables across Workstreams 1–5 (24 files + 20/20 gates).</a:t>
+            </a:r>
+            <a:endParaRPr lang="en-US" sz="780" dirty="0"/>
           </a:p>
         </p:txBody>
       </p:sp>
@@ -3982,7 +3982,7 @@
               <a:buNone/>
             </a:pPr>
             <a:r>
-              <a:rPr lang="en-US" sz="740" b="1" dirty="0">
+              <a:rPr lang="en-US" sz="720" b="1" dirty="0">
                 <a:solidFill>
                   <a:srgbClr val="3C4043"/>
                 </a:solidFill>
@@ -3990,9 +3990,9 @@
                 <a:ea typeface="Google Sans" pitchFamily="34" charset="-122"/>
                 <a:cs typeface="Google Sans" pitchFamily="34" charset="-120"/>
               </a:rPr>
-              <a:t>3-Act Executive Arc (14 Slides): Act I Architecture → Act II Runtime → Act III Proof &amp; Rollout</a:t>
-            </a:r>
-            <a:endParaRPr lang="en-US" sz="740" dirty="0"/>
+              <a:t>Verified Across 3 GCP Projects (#248990048888 • #638420508320 • #887605034827) • 12/12 Forensic PASS</a:t>
+            </a:r>
+            <a:endParaRPr lang="en-US" sz="720" dirty="0"/>
           </a:p>
         </p:txBody>
       </p:sp>
@@ -4432,7 +4432,7 @@
                 <a:ea typeface="Google Sans" pitchFamily="34" charset="-122"/>
                 <a:cs typeface="Google Sans" pitchFamily="34" charset="-120"/>
               </a:rPr>
-              <a:t>Design alternatives — Terraform Hybrid PSC Blueprint &amp; Portfolio FinOps</a:t>
+              <a:t>ACT I • GOOGLE CLOUD REFERENCE PRODUCT STACK &amp; BILL OF MATERIALS</a:t>
             </a:r>
             <a:endParaRPr lang="en-US" sz="1020" dirty="0"/>
           </a:p>
@@ -4537,7 +4537,7 @@
                 <a:ea typeface="Google Sans" pitchFamily="34" charset="-122"/>
                 <a:cs typeface="Google Sans" pitchFamily="34" charset="-120"/>
               </a:rPr>
-              <a:t>Design alternatives — Terraform Hybrid PSC Blueprint &amp; Portfolio FinOps</a:t>
+              <a:t>Terraform Hybrid PSC Blueprint &amp; Portfolio FinOps</a:t>
             </a:r>
             <a:endParaRPr lang="en-US" sz="1900" dirty="0"/>
           </a:p>
@@ -4576,7 +4576,7 @@
                 <a:ea typeface="Roboto" pitchFamily="34" charset="-122"/>
                 <a:cs typeface="Roboto" pitchFamily="34" charset="-120"/>
               </a:rPr>
-              <a:t>Structured Google Cloud reference components, runtime isolation boundaries, and target SLAs.</a:t>
+              <a:t>Structured Google Cloud reference SKUs, runtime isolation boundaries, and production SLAs.</a:t>
             </a:r>
             <a:endParaRPr lang="en-US" sz="1000" dirty="0"/>
           </a:p>
@@ -4723,7 +4723,7 @@
                 <a:ea typeface="Google Sans" pitchFamily="34" charset="-122"/>
                 <a:cs typeface="Google Sans" pitchFamily="34" charset="-120"/>
               </a:rPr>
-              <a:t>Dual-Provider Terraform Blueprint (4.6-terraform-hybrid-psc-blueprint): Uses google.hub</a:t>
+              <a:t>Dual-Provider Terraform Blueprint (4.6-terraform-hybrid-psc-blueprint)</a:t>
             </a:r>
             <a:endParaRPr lang="en-US" sz="1140" dirty="0"/>
           </a:p>
@@ -4782,7 +4782,7 @@
                 <a:ea typeface="Roboto" pitchFamily="34" charset="-122"/>
                 <a:cs typeface="Roboto" pitchFamily="34" charset="-120"/>
               </a:rPr>
-              <a:t>Dual-Provider Terraform Blueprint (4.6-terraform-hybrid-psc-blueprint): Uses google.hub and google.spoke provider aliases to wire the Hub VPC, Spoke /24 PSC NAT subnet, Producer ServiceAttachment, and Consumer Endpoint.</a:t>
+              <a:t>Uses google.hub and google.spoke provider aliases to wire the Hub VPC, Spoke /24 PSC NAT subnet, Producer ServiceAttachment, and Consumer Endpoint.</a:t>
             </a:r>
             <a:endParaRPr lang="en-US" sz="980" dirty="0"/>
           </a:p>
@@ -6898,7 +6898,7 @@
                 <a:ea typeface="Roboto" pitchFamily="34" charset="-122"/>
                 <a:cs typeface="Roboto" pitchFamily="34" charset="-120"/>
               </a:rPr>
-              <a:t>• Project: nitinagga-ge-2 (#638420508320)</a:t>
+              <a:t>• Project: cymbal-pooled-prod (#638420508320)</a:t>
             </a:r>
             <a:endParaRPr lang="en-US" sz="780" dirty="0"/>
           </a:p>
@@ -6915,7 +6915,7 @@
                 <a:ea typeface="Roboto" pitchFamily="34" charset="-122"/>
                 <a:cs typeface="Roboto" pitchFamily="34" charset="-120"/>
               </a:rPr>
-              <a:t>• Sandbox: nitina-ggarwal-sandbox-647724</a:t>
+              <a:t>• Sandbox: cymbal-build-sandbox (#887605034827)</a:t>
             </a:r>
             <a:endParaRPr lang="en-US" sz="780" dirty="0"/>
           </a:p>
@@ -8479,7 +8479,7 @@
                 <a:ea typeface="Google Sans" pitchFamily="34" charset="-122"/>
                 <a:cs typeface="Google Sans" pitchFamily="34" charset="-120"/>
               </a:rPr>
-              <a:t>WS4 • Pattern C Zero-Downtime Live Tier Migration Timeline</a:t>
+              <a:t>WS4 • ACT III: PATTERN C ZERO-DOWNTIME LIVE TIER MIGRATION TIMELINE</a:t>
             </a:r>
             <a:endParaRPr lang="en-US" sz="1020" dirty="0"/>
           </a:p>
@@ -8576,7 +8576,7 @@
               <a:buNone/>
             </a:pPr>
             <a:r>
-              <a:rPr lang="en-US" sz="2400" b="1" dirty="0">
+              <a:rPr lang="en-US" sz="2250" b="1" dirty="0">
                 <a:solidFill>
                   <a:srgbClr val="0F2942"/>
                 </a:solidFill>
@@ -8584,9 +8584,9 @@
                 <a:ea typeface="Google Sans Display" pitchFamily="34" charset="-122"/>
                 <a:cs typeface="Google Sans Display" pitchFamily="34" charset="-120"/>
               </a:rPr>
-              <a:t>Pattern C Live Tenant Promotion Phases (Standard → Enterprise)</a:t>
-            </a:r>
-            <a:endParaRPr lang="en-US" sz="2400" dirty="0"/>
+              <a:t>3-Phase Live Tenant Promotion Cutover Window (Standard → Enterprise Spoke)</a:t>
+            </a:r>
+            <a:endParaRPr lang="en-US" sz="2250" dirty="0"/>
           </a:p>
         </p:txBody>
       </p:sp>
@@ -8880,66 +8880,6 @@
         </p:nvSpPr>
         <p:spPr>
           <a:xfrm>
-            <a:off x="411480" y="3694176"/>
-            <a:ext cx="237744" cy="237744"/>
-          </a:xfrm>
-          <a:prstGeom prst="ellipse">
-            <a:avLst/>
-          </a:prstGeom>
-          <a:solidFill>
-            <a:srgbClr val="0F2942"/>
-          </a:solidFill>
-          <a:ln/>
-        </p:spPr>
-      </p:sp>
-      <p:sp>
-        <p:nvSpPr>
-          <p:cNvPr id="27" name="Shape 25"/>
-          <p:cNvSpPr/>
-          <p:nvPr/>
-        </p:nvSpPr>
-        <p:spPr>
-          <a:xfrm>
-            <a:off x="3849624" y="3694176"/>
-            <a:ext cx="237744" cy="237744"/>
-          </a:xfrm>
-          <a:prstGeom prst="ellipse">
-            <a:avLst/>
-          </a:prstGeom>
-          <a:solidFill>
-            <a:srgbClr val="0F2942"/>
-          </a:solidFill>
-          <a:ln/>
-        </p:spPr>
-      </p:sp>
-      <p:sp>
-        <p:nvSpPr>
-          <p:cNvPr id="28" name="Shape 26"/>
-          <p:cNvSpPr/>
-          <p:nvPr/>
-        </p:nvSpPr>
-        <p:spPr>
-          <a:xfrm>
-            <a:off x="4251960" y="3694176"/>
-            <a:ext cx="237744" cy="237744"/>
-          </a:xfrm>
-          <a:prstGeom prst="ellipse">
-            <a:avLst/>
-          </a:prstGeom>
-          <a:solidFill>
-            <a:srgbClr val="0D7A75"/>
-          </a:solidFill>
-          <a:ln/>
-        </p:spPr>
-      </p:sp>
-      <p:sp>
-        <p:nvSpPr>
-          <p:cNvPr id="29" name="Shape 27"/>
-          <p:cNvSpPr/>
-          <p:nvPr/>
-        </p:nvSpPr>
-        <p:spPr>
-          <a:xfrm>
             <a:off x="4370832" y="1536192"/>
             <a:ext cx="3438144" cy="4443984"/>
           </a:xfrm>
@@ -8961,7 +8901,7 @@
       </p:sp>
       <p:sp>
         <p:nvSpPr>
-          <p:cNvPr id="30" name="Shape 28"/>
+          <p:cNvPr id="27" name="Shape 25"/>
           <p:cNvSpPr/>
           <p:nvPr/>
         </p:nvSpPr>
@@ -8983,7 +8923,7 @@
       </p:sp>
       <p:sp>
         <p:nvSpPr>
-          <p:cNvPr id="31" name="Text 29"/>
+          <p:cNvPr id="28" name="Text 26"/>
           <p:cNvSpPr/>
           <p:nvPr/>
         </p:nvSpPr>
@@ -9022,7 +8962,7 @@
       </p:sp>
       <p:sp>
         <p:nvSpPr>
-          <p:cNvPr id="32" name="Shape 30"/>
+          <p:cNvPr id="29" name="Shape 27"/>
           <p:cNvSpPr/>
           <p:nvPr/>
         </p:nvSpPr>
@@ -9042,7 +8982,7 @@
       </p:sp>
       <p:sp>
         <p:nvSpPr>
-          <p:cNvPr id="33" name="Text 31"/>
+          <p:cNvPr id="30" name="Text 28"/>
           <p:cNvSpPr/>
           <p:nvPr/>
         </p:nvSpPr>
@@ -9098,7 +9038,7 @@
       </p:sp>
       <p:sp>
         <p:nvSpPr>
-          <p:cNvPr id="34" name="Text 32"/>
+          <p:cNvPr id="31" name="Text 29"/>
           <p:cNvSpPr/>
           <p:nvPr/>
         </p:nvSpPr>
@@ -9137,7 +9077,7 @@
       </p:sp>
       <p:sp>
         <p:nvSpPr>
-          <p:cNvPr id="35" name="Shape 33"/>
+          <p:cNvPr id="32" name="Shape 30"/>
           <p:cNvSpPr/>
           <p:nvPr/>
         </p:nvSpPr>
@@ -9160,7 +9100,7 @@
       </p:sp>
       <p:sp>
         <p:nvSpPr>
-          <p:cNvPr id="36" name="Text 34"/>
+          <p:cNvPr id="33" name="Text 31"/>
           <p:cNvSpPr/>
           <p:nvPr/>
         </p:nvSpPr>
@@ -9216,47 +9156,7 @@
       </p:sp>
       <p:sp>
         <p:nvSpPr>
-          <p:cNvPr id="37" name="Shape 35"/>
-          <p:cNvSpPr/>
-          <p:nvPr/>
-        </p:nvSpPr>
-        <p:spPr>
-          <a:xfrm>
-            <a:off x="7690104" y="3694176"/>
-            <a:ext cx="237744" cy="237744"/>
-          </a:xfrm>
-          <a:prstGeom prst="ellipse">
-            <a:avLst/>
-          </a:prstGeom>
-          <a:solidFill>
-            <a:srgbClr val="0D7A75"/>
-          </a:solidFill>
-          <a:ln/>
-        </p:spPr>
-      </p:sp>
-      <p:sp>
-        <p:nvSpPr>
-          <p:cNvPr id="38" name="Shape 36"/>
-          <p:cNvSpPr/>
-          <p:nvPr/>
-        </p:nvSpPr>
-        <p:spPr>
-          <a:xfrm>
-            <a:off x="8092440" y="3694176"/>
-            <a:ext cx="237744" cy="237744"/>
-          </a:xfrm>
-          <a:prstGeom prst="ellipse">
-            <a:avLst/>
-          </a:prstGeom>
-          <a:solidFill>
-            <a:srgbClr val="54728C"/>
-          </a:solidFill>
-          <a:ln/>
-        </p:spPr>
-      </p:sp>
-      <p:sp>
-        <p:nvSpPr>
-          <p:cNvPr id="39" name="Shape 37"/>
+          <p:cNvPr id="34" name="Shape 32"/>
           <p:cNvSpPr/>
           <p:nvPr/>
         </p:nvSpPr>
@@ -9283,7 +9183,7 @@
       </p:sp>
       <p:sp>
         <p:nvSpPr>
-          <p:cNvPr id="40" name="Shape 38"/>
+          <p:cNvPr id="35" name="Shape 33"/>
           <p:cNvSpPr/>
           <p:nvPr/>
         </p:nvSpPr>
@@ -9305,7 +9205,7 @@
       </p:sp>
       <p:sp>
         <p:nvSpPr>
-          <p:cNvPr id="41" name="Text 39"/>
+          <p:cNvPr id="36" name="Text 34"/>
           <p:cNvSpPr/>
           <p:nvPr/>
         </p:nvSpPr>
@@ -9344,7 +9244,7 @@
       </p:sp>
       <p:sp>
         <p:nvSpPr>
-          <p:cNvPr id="42" name="Shape 40"/>
+          <p:cNvPr id="37" name="Shape 35"/>
           <p:cNvSpPr/>
           <p:nvPr/>
         </p:nvSpPr>
@@ -9364,7 +9264,7 @@
       </p:sp>
       <p:sp>
         <p:nvSpPr>
-          <p:cNvPr id="43" name="Text 41"/>
+          <p:cNvPr id="38" name="Text 36"/>
           <p:cNvSpPr/>
           <p:nvPr/>
         </p:nvSpPr>
@@ -9420,7 +9320,7 @@
       </p:sp>
       <p:sp>
         <p:nvSpPr>
-          <p:cNvPr id="44" name="Text 42"/>
+          <p:cNvPr id="39" name="Text 37"/>
           <p:cNvSpPr/>
           <p:nvPr/>
         </p:nvSpPr>
@@ -9459,7 +9359,7 @@
       </p:sp>
       <p:sp>
         <p:nvSpPr>
-          <p:cNvPr id="45" name="Shape 43"/>
+          <p:cNvPr id="40" name="Shape 38"/>
           <p:cNvSpPr/>
           <p:nvPr/>
         </p:nvSpPr>
@@ -9482,7 +9382,7 @@
       </p:sp>
       <p:sp>
         <p:nvSpPr>
-          <p:cNvPr id="46" name="Text 44"/>
+          <p:cNvPr id="41" name="Text 39"/>
           <p:cNvSpPr/>
           <p:nvPr/>
         </p:nvSpPr>
@@ -9538,7 +9438,173 @@
       </p:sp>
       <p:sp>
         <p:nvSpPr>
+          <p:cNvPr id="42" name="Shape 40"/>
+          <p:cNvSpPr/>
+          <p:nvPr/>
+        </p:nvSpPr>
+        <p:spPr>
+          <a:xfrm>
+            <a:off x="3968496" y="3813048"/>
+            <a:ext cx="402336" cy="0"/>
+          </a:xfrm>
+          <a:prstGeom prst="line">
+            <a:avLst/>
+          </a:prstGeom>
+          <a:noFill/>
+          <a:ln w="28575">
+            <a:solidFill>
+              <a:srgbClr val="0F2942"/>
+            </a:solidFill>
+            <a:prstDash val="solid"/>
+            <a:tailEnd type="triangle" w="sm" len="sm"/>
+          </a:ln>
+        </p:spPr>
+      </p:sp>
+      <p:sp>
+        <p:nvSpPr>
+          <p:cNvPr id="43" name="Shape 41"/>
+          <p:cNvSpPr/>
+          <p:nvPr/>
+        </p:nvSpPr>
+        <p:spPr>
+          <a:xfrm>
+            <a:off x="4059936" y="3401568"/>
+            <a:ext cx="219456" cy="219456"/>
+          </a:xfrm>
+          <a:prstGeom prst="ellipse">
+            <a:avLst/>
+          </a:prstGeom>
+          <a:solidFill>
+            <a:srgbClr val="0F2942"/>
+          </a:solidFill>
+          <a:ln/>
+        </p:spPr>
+      </p:sp>
+      <p:sp>
+        <p:nvSpPr>
+          <p:cNvPr id="44" name="Text 42"/>
+          <p:cNvSpPr/>
+          <p:nvPr/>
+        </p:nvSpPr>
+        <p:spPr>
+          <a:xfrm>
+            <a:off x="4059936" y="3401568"/>
+            <a:ext cx="219456" cy="219456"/>
+          </a:xfrm>
+          <a:prstGeom prst="rect">
+            <a:avLst/>
+          </a:prstGeom>
+          <a:noFill/>
+          <a:ln/>
+        </p:spPr>
+        <p:txBody>
+          <a:bodyPr wrap="square" rtlCol="0" anchor="ctr"/>
+          <a:lstStyle/>
+          <a:p>
+            <a:pPr algn="ctr" indent="0" marL="0">
+              <a:buNone/>
+            </a:pPr>
+            <a:r>
+              <a:rPr lang="en-US" sz="850" b="1" dirty="0">
+                <a:solidFill>
+                  <a:srgbClr val="FFFFFF"/>
+                </a:solidFill>
+                <a:latin typeface="Google Sans" pitchFamily="34" charset="0"/>
+                <a:ea typeface="Google Sans" pitchFamily="34" charset="-122"/>
+                <a:cs typeface="Google Sans" pitchFamily="34" charset="-120"/>
+              </a:rPr>
+              <a:t>1</a:t>
+            </a:r>
+            <a:endParaRPr lang="en-US" sz="850" dirty="0"/>
+          </a:p>
+        </p:txBody>
+      </p:sp>
+      <p:sp>
+        <p:nvSpPr>
+          <p:cNvPr id="45" name="Shape 43"/>
+          <p:cNvSpPr/>
+          <p:nvPr/>
+        </p:nvSpPr>
+        <p:spPr>
+          <a:xfrm>
+            <a:off x="7808976" y="3813048"/>
+            <a:ext cx="402336" cy="0"/>
+          </a:xfrm>
+          <a:prstGeom prst="line">
+            <a:avLst/>
+          </a:prstGeom>
+          <a:noFill/>
+          <a:ln w="28575">
+            <a:solidFill>
+              <a:srgbClr val="0D7A75"/>
+            </a:solidFill>
+            <a:prstDash val="solid"/>
+            <a:tailEnd type="triangle" w="sm" len="sm"/>
+          </a:ln>
+        </p:spPr>
+      </p:sp>
+      <p:sp>
+        <p:nvSpPr>
+          <p:cNvPr id="46" name="Shape 44"/>
+          <p:cNvSpPr/>
+          <p:nvPr/>
+        </p:nvSpPr>
+        <p:spPr>
+          <a:xfrm>
+            <a:off x="7900416" y="3401568"/>
+            <a:ext cx="219456" cy="219456"/>
+          </a:xfrm>
+          <a:prstGeom prst="ellipse">
+            <a:avLst/>
+          </a:prstGeom>
+          <a:solidFill>
+            <a:srgbClr val="0D7A75"/>
+          </a:solidFill>
+          <a:ln/>
+        </p:spPr>
+      </p:sp>
+      <p:sp>
+        <p:nvSpPr>
           <p:cNvPr id="47" name="Text 45"/>
+          <p:cNvSpPr/>
+          <p:nvPr/>
+        </p:nvSpPr>
+        <p:spPr>
+          <a:xfrm>
+            <a:off x="7900416" y="3401568"/>
+            <a:ext cx="219456" cy="219456"/>
+          </a:xfrm>
+          <a:prstGeom prst="rect">
+            <a:avLst/>
+          </a:prstGeom>
+          <a:noFill/>
+          <a:ln/>
+        </p:spPr>
+        <p:txBody>
+          <a:bodyPr wrap="square" rtlCol="0" anchor="ctr"/>
+          <a:lstStyle/>
+          <a:p>
+            <a:pPr algn="ctr" indent="0" marL="0">
+              <a:buNone/>
+            </a:pPr>
+            <a:r>
+              <a:rPr lang="en-US" sz="850" b="1" dirty="0">
+                <a:solidFill>
+                  <a:srgbClr val="FFFFFF"/>
+                </a:solidFill>
+                <a:latin typeface="Google Sans" pitchFamily="34" charset="0"/>
+                <a:ea typeface="Google Sans" pitchFamily="34" charset="-122"/>
+                <a:cs typeface="Google Sans" pitchFamily="34" charset="-120"/>
+              </a:rPr>
+              <a:t>2</a:t>
+            </a:r>
+            <a:endParaRPr lang="en-US" sz="850" dirty="0"/>
+          </a:p>
+        </p:txBody>
+      </p:sp>
+      <p:sp>
+        <p:nvSpPr>
+          <p:cNvPr id="48" name="Text 46"/>
           <p:cNvSpPr/>
           <p:nvPr/>
         </p:nvSpPr>
@@ -9972,7 +10038,7 @@
                 <a:ea typeface="Google Sans" pitchFamily="34" charset="-122"/>
                 <a:cs typeface="Google Sans" pitchFamily="34" charset="-120"/>
               </a:rPr>
-              <a:t>WS4 • Pattern C Blended FinOps, Unidirectional PSC &amp; Live Mobility</a:t>
+              <a:t>WS4 • ACT III: PATTERN C BLENDED FINOPS, PSC &amp; LIVE MOBILITY MODEL</a:t>
             </a:r>
             <a:endParaRPr lang="en-US" sz="1020" dirty="0"/>
           </a:p>
@@ -10077,7 +10143,7 @@
                 <a:ea typeface="Google Sans Display" pitchFamily="34" charset="-122"/>
                 <a:cs typeface="Google Sans Display" pitchFamily="34" charset="-120"/>
               </a:rPr>
-              <a:t>Pattern C Dynamic Hybrid Hub-and-Spoke Operating Model</a:t>
+              <a:t>Pattern C Dynamic Hybrid Hub-and-Spoke Day-2 Operating Model &amp; SLAs</a:t>
             </a:r>
             <a:endParaRPr lang="en-US" sz="2250" dirty="0"/>
           </a:p>
@@ -11617,7 +11683,7 @@
                 <a:ea typeface="Google Sans" pitchFamily="34" charset="-122"/>
                 <a:cs typeface="Google Sans" pitchFamily="34" charset="-120"/>
               </a:rPr>
-              <a:t>What's next — Series Navigation &amp; Engineering Deliverables</a:t>
+              <a:t>ACT III • 5-WORKSTREAM SERIES CONTINUITY &amp; ENGINEERING DELIVERABLES</a:t>
             </a:r>
             <a:endParaRPr lang="en-US" sz="1020" dirty="0"/>
           </a:p>
@@ -11722,7 +11788,7 @@
                 <a:ea typeface="Google Sans" pitchFamily="34" charset="-122"/>
                 <a:cs typeface="Google Sans" pitchFamily="34" charset="-120"/>
               </a:rPr>
-              <a:t>What's next — Series Navigation &amp; Engineering Deliverables</a:t>
+              <a:t>Series Navigation &amp; Engineering Deliverables</a:t>
             </a:r>
             <a:endParaRPr lang="en-US" sz="1900" dirty="0"/>
           </a:p>
@@ -11761,7 +11827,7 @@
                 <a:ea typeface="Roboto" pitchFamily="34" charset="-122"/>
                 <a:cs typeface="Roboto" pitchFamily="34" charset="-120"/>
               </a:rPr>
-              <a:t>Sequenced engineering action items, assigned platform owners, and production verification gates.</a:t>
+              <a:t>Sequenced engineering action items, runnable codebase file paths, assigned platform owners, and CI/CD release gates.</a:t>
             </a:r>
             <a:endParaRPr lang="en-US" sz="1000" dirty="0"/>
           </a:p>
@@ -14688,7 +14754,7 @@
             <a:avLst/>
           </a:prstGeom>
           <a:solidFill>
-            <a:srgbClr val="EA4335"/>
+            <a:srgbClr val="34A853"/>
           </a:solidFill>
           <a:ln/>
         </p:spPr>
@@ -14710,7 +14776,7 @@
             </a:avLst>
           </a:prstGeom>
           <a:solidFill>
-            <a:srgbClr val="FCE8E6"/>
+            <a:srgbClr val="E6F4EA"/>
           </a:solidFill>
           <a:ln/>
         </p:spPr>
@@ -14742,7 +14808,7 @@
             <a:r>
               <a:rPr lang="en-US" sz="600" b="1" dirty="0">
                 <a:solidFill>
-                  <a:srgbClr val="A50E0E"/>
+                  <a:srgbClr val="0D652D"/>
                 </a:solidFill>
                 <a:latin typeface="Google Sans" pitchFamily="34" charset="0"/>
                 <a:ea typeface="Google Sans" pitchFamily="34" charset="-122"/>
@@ -15060,7 +15126,7 @@
             <a:avLst/>
           </a:prstGeom>
           <a:solidFill>
-            <a:srgbClr val="34A853"/>
+            <a:srgbClr val="EA4335"/>
           </a:solidFill>
           <a:ln/>
         </p:spPr>
@@ -15082,7 +15148,7 @@
             </a:avLst>
           </a:prstGeom>
           <a:solidFill>
-            <a:srgbClr val="E6F4EA"/>
+            <a:srgbClr val="FCE8E6"/>
           </a:solidFill>
           <a:ln/>
         </p:spPr>
@@ -15114,7 +15180,7 @@
             <a:r>
               <a:rPr lang="en-US" sz="600" b="1" dirty="0">
                 <a:solidFill>
-                  <a:srgbClr val="0D652D"/>
+                  <a:srgbClr val="A50E0E"/>
                 </a:solidFill>
                 <a:latin typeface="Google Sans" pitchFamily="34" charset="0"/>
                 <a:ea typeface="Google Sans" pitchFamily="34" charset="-122"/>
@@ -15803,7 +15869,7 @@
               <a:buNone/>
             </a:pPr>
             <a:r>
-              <a:rPr lang="en-US" sz="710" b="1" dirty="0">
+              <a:rPr lang="en-US" sz="700" b="1" dirty="0">
                 <a:solidFill>
                   <a:srgbClr val="0D652D"/>
                 </a:solidFill>
@@ -15811,9 +15877,9 @@
                 <a:ea typeface="Google Sans" pitchFamily="34" charset="-122"/>
                 <a:cs typeface="Google Sans" pitchFamily="34" charset="-120"/>
               </a:rPr>
-              <a:t>✅ 56 Editable Shapes • 23 Connectors • GCP: nitina-ggarwal-sandbox-647724</a:t>
-            </a:r>
-            <a:endParaRPr lang="en-US" sz="710" dirty="0"/>
+              <a:t>VERIFIED • 56 Editable Shapes • 23 Connectors • GCP: cymbal-build-sandbox (#887605034827)</a:t>
+            </a:r>
+            <a:endParaRPr lang="en-US" sz="700" dirty="0"/>
           </a:p>
         </p:txBody>
       </p:sp>
@@ -20286,12 +20352,12 @@
         </p:nvSpPr>
         <p:spPr>
           <a:xfrm>
-            <a:off x="5339182" y="3353105"/>
-            <a:ext cx="760781" cy="217627"/>
+            <a:off x="5346497" y="3365906"/>
+            <a:ext cx="747065" cy="192024"/>
           </a:xfrm>
           <a:prstGeom prst="roundRect">
             <a:avLst>
-              <a:gd name="adj" fmla="val 21008"/>
+              <a:gd name="adj" fmla="val 23810"/>
             </a:avLst>
           </a:prstGeom>
           <a:solidFill>
@@ -20313,8 +20379,8 @@
         </p:nvSpPr>
         <p:spPr>
           <a:xfrm>
-            <a:off x="5357470" y="3362249"/>
-            <a:ext cx="724205" cy="199339"/>
+            <a:off x="5364785" y="3375050"/>
+            <a:ext cx="710489" cy="173736"/>
           </a:xfrm>
           <a:prstGeom prst="rect">
             <a:avLst/>
@@ -20377,12 +20443,12 @@
         </p:nvSpPr>
         <p:spPr>
           <a:xfrm>
-            <a:off x="2803550" y="4817059"/>
-            <a:ext cx="560527" cy="210312"/>
+            <a:off x="2822753" y="4833518"/>
+            <a:ext cx="522122" cy="178308"/>
           </a:xfrm>
           <a:prstGeom prst="roundRect">
             <a:avLst>
-              <a:gd name="adj" fmla="val 21739"/>
+              <a:gd name="adj" fmla="val 25641"/>
             </a:avLst>
           </a:prstGeom>
           <a:solidFill>
@@ -20404,8 +20470,8 @@
         </p:nvSpPr>
         <p:spPr>
           <a:xfrm>
-            <a:off x="2821838" y="4826203"/>
-            <a:ext cx="523951" cy="192024"/>
+            <a:off x="2841041" y="4842662"/>
+            <a:ext cx="485546" cy="160020"/>
           </a:xfrm>
           <a:prstGeom prst="rect">
             <a:avLst/>
@@ -20468,12 +20534,12 @@
         </p:nvSpPr>
         <p:spPr>
           <a:xfrm>
-            <a:off x="2704795" y="5451653"/>
-            <a:ext cx="757123" cy="210312"/>
+            <a:off x="2728570" y="5468112"/>
+            <a:ext cx="709574" cy="178308"/>
           </a:xfrm>
           <a:prstGeom prst="roundRect">
             <a:avLst>
-              <a:gd name="adj" fmla="val 21739"/>
+              <a:gd name="adj" fmla="val 25641"/>
             </a:avLst>
           </a:prstGeom>
           <a:solidFill>
@@ -20495,8 +20561,8 @@
         </p:nvSpPr>
         <p:spPr>
           <a:xfrm>
-            <a:off x="2723083" y="5460797"/>
-            <a:ext cx="720547" cy="192024"/>
+            <a:off x="2746858" y="5477256"/>
+            <a:ext cx="672998" cy="160020"/>
           </a:xfrm>
           <a:prstGeom prst="rect">
             <a:avLst/>
@@ -20559,12 +20625,12 @@
         </p:nvSpPr>
         <p:spPr>
           <a:xfrm>
-            <a:off x="5108753" y="4817059"/>
-            <a:ext cx="678485" cy="210312"/>
+            <a:off x="5130698" y="4833518"/>
+            <a:ext cx="634594" cy="178308"/>
           </a:xfrm>
           <a:prstGeom prst="roundRect">
             <a:avLst>
-              <a:gd name="adj" fmla="val 21739"/>
+              <a:gd name="adj" fmla="val 25641"/>
             </a:avLst>
           </a:prstGeom>
           <a:solidFill>
@@ -20586,8 +20652,8 @@
         </p:nvSpPr>
         <p:spPr>
           <a:xfrm>
-            <a:off x="5127041" y="4826203"/>
-            <a:ext cx="641909" cy="192024"/>
+            <a:off x="5148986" y="4842662"/>
+            <a:ext cx="598018" cy="160020"/>
           </a:xfrm>
           <a:prstGeom prst="rect">
             <a:avLst/>
@@ -20650,12 +20716,12 @@
         </p:nvSpPr>
         <p:spPr>
           <a:xfrm>
-            <a:off x="5108753" y="5451653"/>
-            <a:ext cx="678485" cy="210312"/>
+            <a:off x="5130698" y="5468112"/>
+            <a:ext cx="634594" cy="178308"/>
           </a:xfrm>
           <a:prstGeom prst="roundRect">
             <a:avLst>
-              <a:gd name="adj" fmla="val 21739"/>
+              <a:gd name="adj" fmla="val 25641"/>
             </a:avLst>
           </a:prstGeom>
           <a:solidFill>
@@ -20677,8 +20743,8 @@
         </p:nvSpPr>
         <p:spPr>
           <a:xfrm>
-            <a:off x="5127041" y="5460797"/>
-            <a:ext cx="641909" cy="192024"/>
+            <a:off x="5148986" y="5477256"/>
+            <a:ext cx="598018" cy="160020"/>
           </a:xfrm>
           <a:prstGeom prst="rect">
             <a:avLst/>
@@ -20741,12 +20807,12 @@
         </p:nvSpPr>
         <p:spPr>
           <a:xfrm>
-            <a:off x="1845259" y="5603443"/>
-            <a:ext cx="512064" cy="210312"/>
+            <a:off x="1853489" y="5618988"/>
+            <a:ext cx="493776" cy="178308"/>
           </a:xfrm>
           <a:prstGeom prst="roundRect">
             <a:avLst>
-              <a:gd name="adj" fmla="val 21739"/>
+              <a:gd name="adj" fmla="val 25641"/>
             </a:avLst>
           </a:prstGeom>
           <a:solidFill>
@@ -20768,8 +20834,8 @@
         </p:nvSpPr>
         <p:spPr>
           <a:xfrm>
-            <a:off x="1863547" y="5612587"/>
-            <a:ext cx="475488" cy="192024"/>
+            <a:off x="1871777" y="5628132"/>
+            <a:ext cx="457200" cy="160020"/>
           </a:xfrm>
           <a:prstGeom prst="rect">
             <a:avLst/>
@@ -20832,12 +20898,12 @@
         </p:nvSpPr>
         <p:spPr>
           <a:xfrm>
-            <a:off x="3905402" y="3353105"/>
-            <a:ext cx="738835" cy="210312"/>
+            <a:off x="3905402" y="3368650"/>
+            <a:ext cx="738835" cy="178308"/>
           </a:xfrm>
           <a:prstGeom prst="roundRect">
             <a:avLst>
-              <a:gd name="adj" fmla="val 21739"/>
+              <a:gd name="adj" fmla="val 25641"/>
             </a:avLst>
           </a:prstGeom>
           <a:solidFill>
@@ -20859,8 +20925,8 @@
         </p:nvSpPr>
         <p:spPr>
           <a:xfrm>
-            <a:off x="3923690" y="3362249"/>
-            <a:ext cx="702259" cy="192024"/>
+            <a:off x="3923690" y="3377794"/>
+            <a:ext cx="702259" cy="160020"/>
           </a:xfrm>
           <a:prstGeom prst="rect">
             <a:avLst/>
@@ -20923,12 +20989,12 @@
         </p:nvSpPr>
         <p:spPr>
           <a:xfrm>
-            <a:off x="2983687" y="3353105"/>
-            <a:ext cx="669341" cy="210312"/>
+            <a:off x="2983687" y="3368650"/>
+            <a:ext cx="669341" cy="178308"/>
           </a:xfrm>
           <a:prstGeom prst="roundRect">
             <a:avLst>
-              <a:gd name="adj" fmla="val 21739"/>
+              <a:gd name="adj" fmla="val 25641"/>
             </a:avLst>
           </a:prstGeom>
           <a:solidFill>
@@ -20950,8 +21016,8 @@
         </p:nvSpPr>
         <p:spPr>
           <a:xfrm>
-            <a:off x="3001975" y="3362249"/>
-            <a:ext cx="632765" cy="192024"/>
+            <a:off x="3001975" y="3377794"/>
+            <a:ext cx="632765" cy="160020"/>
           </a:xfrm>
           <a:prstGeom prst="rect">
             <a:avLst/>
@@ -21014,12 +21080,12 @@
         </p:nvSpPr>
         <p:spPr>
           <a:xfrm>
-            <a:off x="2501798" y="2870302"/>
-            <a:ext cx="599846" cy="210312"/>
+            <a:off x="2521915" y="2885846"/>
+            <a:ext cx="559613" cy="178308"/>
           </a:xfrm>
           <a:prstGeom prst="roundRect">
             <a:avLst>
-              <a:gd name="adj" fmla="val 21739"/>
+              <a:gd name="adj" fmla="val 25641"/>
             </a:avLst>
           </a:prstGeom>
           <a:solidFill>
@@ -21041,8 +21107,8 @@
         </p:nvSpPr>
         <p:spPr>
           <a:xfrm>
-            <a:off x="2520086" y="2879446"/>
-            <a:ext cx="563270" cy="192024"/>
+            <a:off x="2540203" y="2894990"/>
+            <a:ext cx="523037" cy="160020"/>
           </a:xfrm>
           <a:prstGeom prst="rect">
             <a:avLst/>
@@ -21105,12 +21171,12 @@
         </p:nvSpPr>
         <p:spPr>
           <a:xfrm>
-            <a:off x="1757477" y="4602175"/>
-            <a:ext cx="686714" cy="146304"/>
+            <a:off x="1757477" y="4608576"/>
+            <a:ext cx="686714" cy="132588"/>
           </a:xfrm>
           <a:prstGeom prst="roundRect">
             <a:avLst>
-              <a:gd name="adj" fmla="val 31250"/>
+              <a:gd name="adj" fmla="val 34483"/>
             </a:avLst>
           </a:prstGeom>
           <a:solidFill>
@@ -21132,8 +21198,8 @@
         </p:nvSpPr>
         <p:spPr>
           <a:xfrm>
-            <a:off x="1775765" y="4611319"/>
-            <a:ext cx="650138" cy="128016"/>
+            <a:off x="1775765" y="4617720"/>
+            <a:ext cx="650138" cy="114300"/>
           </a:xfrm>
           <a:prstGeom prst="rect">
             <a:avLst/>
@@ -21176,12 +21242,12 @@
         </p:nvSpPr>
         <p:spPr>
           <a:xfrm>
-            <a:off x="1757477" y="4810658"/>
-            <a:ext cx="686714" cy="146304"/>
+            <a:off x="1757477" y="4817059"/>
+            <a:ext cx="686714" cy="132588"/>
           </a:xfrm>
           <a:prstGeom prst="roundRect">
             <a:avLst>
-              <a:gd name="adj" fmla="val 31250"/>
+              <a:gd name="adj" fmla="val 34483"/>
             </a:avLst>
           </a:prstGeom>
           <a:solidFill>
@@ -21203,8 +21269,8 @@
         </p:nvSpPr>
         <p:spPr>
           <a:xfrm>
-            <a:off x="1775765" y="4819802"/>
-            <a:ext cx="650138" cy="128016"/>
+            <a:off x="1775765" y="4826203"/>
+            <a:ext cx="650138" cy="114300"/>
           </a:xfrm>
           <a:prstGeom prst="rect">
             <a:avLst/>
@@ -21247,12 +21313,12 @@
         </p:nvSpPr>
         <p:spPr>
           <a:xfrm>
-            <a:off x="2427732" y="2079346"/>
-            <a:ext cx="512064" cy="210312"/>
+            <a:off x="2436876" y="2094890"/>
+            <a:ext cx="493776" cy="178308"/>
           </a:xfrm>
           <a:prstGeom prst="roundRect">
             <a:avLst>
-              <a:gd name="adj" fmla="val 21739"/>
+              <a:gd name="adj" fmla="val 25641"/>
             </a:avLst>
           </a:prstGeom>
           <a:solidFill>
@@ -21274,8 +21340,8 @@
         </p:nvSpPr>
         <p:spPr>
           <a:xfrm>
-            <a:off x="2446020" y="2088490"/>
-            <a:ext cx="475488" cy="192024"/>
+            <a:off x="2455164" y="2104034"/>
+            <a:ext cx="457200" cy="160020"/>
           </a:xfrm>
           <a:prstGeom prst="rect">
             <a:avLst/>
@@ -21338,12 +21404,12 @@
         </p:nvSpPr>
         <p:spPr>
           <a:xfrm>
-            <a:off x="2427732" y="2606040"/>
-            <a:ext cx="512064" cy="210312"/>
+            <a:off x="2435962" y="2639873"/>
+            <a:ext cx="495605" cy="178308"/>
           </a:xfrm>
           <a:prstGeom prst="roundRect">
             <a:avLst>
-              <a:gd name="adj" fmla="val 21739"/>
+              <a:gd name="adj" fmla="val 25641"/>
             </a:avLst>
           </a:prstGeom>
           <a:solidFill>
@@ -21365,8 +21431,8 @@
         </p:nvSpPr>
         <p:spPr>
           <a:xfrm>
-            <a:off x="2446020" y="2615184"/>
-            <a:ext cx="475488" cy="192024"/>
+            <a:off x="2454250" y="2649017"/>
+            <a:ext cx="459029" cy="160020"/>
           </a:xfrm>
           <a:prstGeom prst="rect">
             <a:avLst/>
@@ -21429,12 +21495,12 @@
         </p:nvSpPr>
         <p:spPr>
           <a:xfrm>
-            <a:off x="3853282" y="1141171"/>
-            <a:ext cx="512064" cy="146304"/>
+            <a:off x="3862426" y="1148486"/>
+            <a:ext cx="493776" cy="132588"/>
           </a:xfrm>
           <a:prstGeom prst="roundRect">
             <a:avLst>
-              <a:gd name="adj" fmla="val 31250"/>
+              <a:gd name="adj" fmla="val 34483"/>
             </a:avLst>
           </a:prstGeom>
           <a:solidFill>
@@ -21456,8 +21522,8 @@
         </p:nvSpPr>
         <p:spPr>
           <a:xfrm>
-            <a:off x="3871570" y="1150315"/>
-            <a:ext cx="475488" cy="128016"/>
+            <a:off x="3880714" y="1157630"/>
+            <a:ext cx="457200" cy="114300"/>
           </a:xfrm>
           <a:prstGeom prst="rect">
             <a:avLst/>
@@ -21500,12 +21566,12 @@
         </p:nvSpPr>
         <p:spPr>
           <a:xfrm>
-            <a:off x="3853282" y="2719426"/>
-            <a:ext cx="512064" cy="146304"/>
+            <a:off x="3862426" y="2725826"/>
+            <a:ext cx="493776" cy="132588"/>
           </a:xfrm>
           <a:prstGeom prst="roundRect">
             <a:avLst>
-              <a:gd name="adj" fmla="val 31250"/>
+              <a:gd name="adj" fmla="val 34483"/>
             </a:avLst>
           </a:prstGeom>
           <a:solidFill>
@@ -21527,8 +21593,8 @@
         </p:nvSpPr>
         <p:spPr>
           <a:xfrm>
-            <a:off x="3871570" y="2728570"/>
-            <a:ext cx="475488" cy="128016"/>
+            <a:off x="3880714" y="2734970"/>
+            <a:ext cx="457200" cy="114300"/>
           </a:xfrm>
           <a:prstGeom prst="rect">
             <a:avLst/>
@@ -21571,12 +21637,12 @@
         </p:nvSpPr>
         <p:spPr>
           <a:xfrm>
-            <a:off x="3032150" y="1141171"/>
-            <a:ext cx="512064" cy="146304"/>
+            <a:off x="3040380" y="1148486"/>
+            <a:ext cx="493776" cy="132588"/>
           </a:xfrm>
           <a:prstGeom prst="roundRect">
             <a:avLst>
-              <a:gd name="adj" fmla="val 31250"/>
+              <a:gd name="adj" fmla="val 34483"/>
             </a:avLst>
           </a:prstGeom>
           <a:solidFill>
@@ -21598,8 +21664,8 @@
         </p:nvSpPr>
         <p:spPr>
           <a:xfrm>
-            <a:off x="3050438" y="1150315"/>
-            <a:ext cx="475488" cy="128016"/>
+            <a:off x="3058668" y="1157630"/>
+            <a:ext cx="457200" cy="114300"/>
           </a:xfrm>
           <a:prstGeom prst="rect">
             <a:avLst/>
@@ -21642,12 +21708,12 @@
         </p:nvSpPr>
         <p:spPr>
           <a:xfrm>
-            <a:off x="3032150" y="2645359"/>
-            <a:ext cx="512064" cy="146304"/>
+            <a:off x="3040380" y="2725826"/>
+            <a:ext cx="493776" cy="132588"/>
           </a:xfrm>
           <a:prstGeom prst="roundRect">
             <a:avLst>
-              <a:gd name="adj" fmla="val 31250"/>
+              <a:gd name="adj" fmla="val 34483"/>
             </a:avLst>
           </a:prstGeom>
           <a:solidFill>
@@ -21669,8 +21735,8 @@
         </p:nvSpPr>
         <p:spPr>
           <a:xfrm>
-            <a:off x="3050438" y="2654503"/>
-            <a:ext cx="475488" cy="128016"/>
+            <a:off x="3058668" y="2734970"/>
+            <a:ext cx="457200" cy="114300"/>
           </a:xfrm>
           <a:prstGeom prst="rect">
             <a:avLst/>
@@ -22141,7 +22207,7 @@
                 <a:ea typeface="Google Sans" pitchFamily="34" charset="-122"/>
                 <a:cs typeface="Google Sans" pitchFamily="34" charset="-120"/>
               </a:rPr>
-              <a:t>Executive Impact &amp; Production Verification Metrics</a:t>
+              <a:t>ACT I • EXECUTIVE SCORECARD &amp; PRODUCTION SLO BASELINE</a:t>
             </a:r>
             <a:endParaRPr lang="en-US" sz="1020" dirty="0"/>
           </a:p>
@@ -22238,7 +22304,7 @@
               <a:buNone/>
             </a:pPr>
             <a:r>
-              <a:rPr lang="en-US" sz="2000" b="1" dirty="0">
+              <a:rPr lang="en-US" sz="1950" b="1" dirty="0">
                 <a:solidFill>
                   <a:srgbClr val="3C4043"/>
                 </a:solidFill>
@@ -22246,9 +22312,9 @@
                 <a:ea typeface="Google Sans" pitchFamily="34" charset="-122"/>
                 <a:cs typeface="Google Sans" pitchFamily="34" charset="-120"/>
               </a:rPr>
-              <a:t>Executive Impact &amp; Production Verification Metrics</a:t>
-            </a:r>
-            <a:endParaRPr lang="en-US" sz="2000" dirty="0"/>
+              <a:t>Quantified Unit Economics, 90% Prefix Cache Savings &amp; 20/20 Security Verification</a:t>
+            </a:r>
+            <a:endParaRPr lang="en-US" sz="1950" dirty="0"/>
           </a:p>
         </p:txBody>
       </p:sp>
@@ -22277,7 +22343,7 @@
               <a:buNone/>
             </a:pPr>
             <a:r>
-              <a:rPr lang="en-US" sz="1050" dirty="0">
+              <a:rPr lang="en-US" sz="1020" dirty="0">
                 <a:solidFill>
                   <a:srgbClr val="5F6368"/>
                 </a:solidFill>
@@ -22285,9 +22351,9 @@
                 <a:ea typeface="Roboto" pitchFamily="34" charset="-122"/>
                 <a:cs typeface="Roboto" pitchFamily="34" charset="-120"/>
               </a:rPr>
-              <a:t>Quantified unit economics, shared Gemini 2.5 Pro prefix caching efficiency, and automated security gate verification across Google Cloud.</a:t>
-            </a:r>
-            <a:endParaRPr lang="en-US" sz="1050" dirty="0"/>
+              <a:t>Empirical production metrics certified across Pattern A ($42/mo pool), Pattern B ($1,850/mo sovereign silo), and Pattern C (hybrid PSC spokes).</a:t>
+            </a:r>
+            <a:endParaRPr lang="en-US" sz="1020" dirty="0"/>
           </a:p>
         </p:txBody>
       </p:sp>
@@ -24098,7 +24164,7 @@
                 <a:ea typeface="Google Sans" pitchFamily="34" charset="-122"/>
                 <a:cs typeface="Google Sans" pitchFamily="34" charset="-120"/>
               </a:rPr>
-              <a:t>Products used — Hub-and-Spoke Control Plane &amp; Private Service Connect (PSC)</a:t>
+              <a:t>ACT I • GOOGLE CLOUD REFERENCE PRODUCT STACK &amp; BILL OF MATERIALS</a:t>
             </a:r>
             <a:endParaRPr lang="en-US" sz="1020" dirty="0"/>
           </a:p>
@@ -24203,7 +24269,7 @@
                 <a:ea typeface="Google Sans" pitchFamily="34" charset="-122"/>
                 <a:cs typeface="Google Sans" pitchFamily="34" charset="-120"/>
               </a:rPr>
-              <a:t>Products used — Hub-and-Spoke Control Plane &amp; Private Service Connect (PSC)</a:t>
+              <a:t>Hub-and-Spoke Control Plane &amp; Private Service Connect (PSC)</a:t>
             </a:r>
             <a:endParaRPr lang="en-US" sz="1900" dirty="0"/>
           </a:p>
@@ -24242,7 +24308,7 @@
                 <a:ea typeface="Roboto" pitchFamily="34" charset="-122"/>
                 <a:cs typeface="Roboto" pitchFamily="34" charset="-120"/>
               </a:rPr>
-              <a:t>Structured Google Cloud reference components, runtime isolation boundaries, and target SLAs.</a:t>
+              <a:t>Structured Google Cloud reference SKUs, runtime isolation boundaries, and production SLAs.</a:t>
             </a:r>
             <a:endParaRPr lang="en-US" sz="1000" dirty="0"/>
           </a:p>
@@ -34084,7 +34150,7 @@
                 <a:ea typeface="Google Sans" pitchFamily="34" charset="-122"/>
                 <a:cs typeface="Google Sans" pitchFamily="34" charset="-120"/>
               </a:rPr>
-              <a:t>WS4 • Pattern C Unidirectional Private Service Connect &amp; Live Cutover Flow</a:t>
+              <a:t>WS4 • ACT II: UNIDIRECTIONAL PRIVATE SERVICE CONNECT &amp; LIVE CUTOVER LOOP</a:t>
             </a:r>
             <a:endParaRPr lang="en-US" sz="1020" dirty="0"/>
           </a:p>
@@ -34189,7 +34255,7 @@
                 <a:ea typeface="Google Sans Display" pitchFamily="34" charset="-122"/>
                 <a:cs typeface="Google Sans Display" pitchFamily="34" charset="-120"/>
               </a:rPr>
-              <a:t>Hub-and-spoke PSC traversal and zero-downtime state synchronization</a:t>
+              <a:t>Hub-and-Spoke PSC Traversal (/28 NAT) &amp; Zero-Downtime State Synchronization</a:t>
             </a:r>
             <a:endParaRPr lang="en-US" sz="2050" dirty="0"/>
           </a:p>
@@ -35592,7 +35658,7 @@
                 <a:ea typeface="Google Sans" pitchFamily="34" charset="-122"/>
                 <a:cs typeface="Google Sans" pitchFamily="34" charset="-120"/>
               </a:rPr>
-              <a:t>Design considerations — Zero-Downtime Live Tier Migration Protocol (4/4 PASS)</a:t>
+              <a:t>ACT III • ARCHITECTURAL TRADE-OFF &amp; ISOLATION SELECTION MATRIX</a:t>
             </a:r>
             <a:endParaRPr lang="en-US" sz="1020" dirty="0"/>
           </a:p>
@@ -35697,7 +35763,7 @@
                 <a:ea typeface="Google Sans" pitchFamily="34" charset="-122"/>
                 <a:cs typeface="Google Sans" pitchFamily="34" charset="-120"/>
               </a:rPr>
-              <a:t>Design considerations — Zero-Downtime Live Tier Migration Protocol (4/4 PASS)</a:t>
+              <a:t>Zero-Downtime Live Tier Migration Protocol (4/4 PASS)</a:t>
             </a:r>
             <a:endParaRPr lang="en-US" sz="1800" dirty="0"/>
           </a:p>
@@ -35736,7 +35802,7 @@
                 <a:ea typeface="Roboto" pitchFamily="34" charset="-122"/>
                 <a:cs typeface="Roboto" pitchFamily="34" charset="-120"/>
               </a:rPr>
-              <a:t>Side-by-side Google Cloud Well-Architected trade-off analysis, compensating controls, and target SLAs.</a:t>
+              <a:t>Side-by-side Google Cloud Well-Architected trade-off analysis, isolation boundaries, and unit economics.</a:t>
             </a:r>
             <a:endParaRPr lang="en-US" sz="980" dirty="0"/>
           </a:p>
@@ -37302,7 +37368,7 @@
               <a:buNone/>
             </a:pPr>
             <a:r>
-              <a:rPr lang="en-US" sz="760" b="1" dirty="0">
+              <a:rPr lang="en-US" sz="820" b="1" dirty="0">
                 <a:solidFill>
                   <a:srgbClr val="3C4043"/>
                 </a:solidFill>
@@ -37310,9 +37376,9 @@
                 <a:ea typeface="Google Sans" pitchFamily="34" charset="-122"/>
                 <a:cs typeface="Google Sans" pitchFamily="34" charset="-120"/>
               </a:rPr>
-              <a:t>1. Baseline (Pre-Upgrade) • Test 1: Dual-Tier Routing</a:t>
-            </a:r>
-            <a:endParaRPr lang="en-US" sz="760" dirty="0"/>
+              <a:t>1. Phase 1: SHADOW_SYNC Backfill</a:t>
+            </a:r>
+            <a:endParaRPr lang="en-US" sz="820" dirty="0"/>
           </a:p>
         </p:txBody>
       </p:sp>
@@ -37351,7 +37417,7 @@
                 <a:ea typeface="Roboto" pitchFamily="34" charset="-122"/>
                 <a:cs typeface="Roboto" pitchFamily="34" charset="-120"/>
               </a:rPr>
-              <a:t>Test 1 PASS: Verified deterministic tier routing &amp; quota clamping prior to migration</a:t>
+              <a:t>Provisions dedicated PSC spoke via Terraform 4.6 and dual-writes live Memory Bank and AlloyDB state without pausing active turns.</a:t>
             </a:r>
             <a:endParaRPr lang="en-US" sz="740" dirty="0"/>
           </a:p>
@@ -37431,7 +37497,7 @@
               <a:buNone/>
             </a:pPr>
             <a:r>
-              <a:rPr lang="en-US" sz="760" b="1" dirty="0">
+              <a:rPr lang="en-US" sz="820" b="1" dirty="0">
                 <a:solidFill>
                   <a:srgbClr val="3C4043"/>
                 </a:solidFill>
@@ -37439,9 +37505,9 @@
                 <a:ea typeface="Google Sans" pitchFamily="34" charset="-122"/>
                 <a:cs typeface="Google Sans" pitchFamily="34" charset="-120"/>
               </a:rPr>
-              <a:t>2. Phase 1: SHADOW_SYNC • Test 2: Spoke Provision &amp; CDC</a:t>
-            </a:r>
-            <a:endParaRPr lang="en-US" sz="760" dirty="0"/>
+              <a:t>2. Phase 2: CMEK Re-Key &amp; Checksum</a:t>
+            </a:r>
+            <a:endParaRPr lang="en-US" sz="820" dirty="0"/>
           </a:p>
         </p:txBody>
       </p:sp>
@@ -37480,7 +37546,7 @@
                 <a:ea typeface="Roboto" pitchFamily="34" charset="-122"/>
                 <a:cs typeface="Roboto" pitchFamily="34" charset="-120"/>
               </a:rPr>
-              <a:t>Test 2 PASS: replication_lag_ms == 0 and PSC connection status ACCEPTED before cutover</a:t>
+              <a:t>Re-encrypts tenant records under customer-managed Cloud KMS CMEK and verifies 100% SHA-256 row &amp; vector checksum parity.</a:t>
             </a:r>
             <a:endParaRPr lang="en-US" sz="740" dirty="0"/>
           </a:p>
@@ -37568,7 +37634,7 @@
                 <a:ea typeface="Google Sans" pitchFamily="34" charset="-122"/>
                 <a:cs typeface="Google Sans" pitchFamily="34" charset="-120"/>
               </a:rPr>
-              <a:t>3. Phase 2: ATOMIC_CUTOVER • Test 3: Firestore Route Flip</a:t>
+              <a:t>3. Phase 3: 0ms Atomic Firestore Flip</a:t>
             </a:r>
             <a:endParaRPr lang="en-US" sz="760" dirty="0"/>
           </a:p>
@@ -37609,7 +37675,7 @@
                 <a:ea typeface="Roboto" pitchFamily="34" charset="-122"/>
                 <a:cs typeface="Roboto" pitchFamily="34" charset="-120"/>
               </a:rPr>
-              <a:t>Test 3 PASS: Sub-10ms atomic route flip with instance-scoped isolation (0 global state bleed)</a:t>
+              <a:t>Flips the Hub tier-routing pointer atomically to the spoke Private Service Connect endpoint (10.10.0.50) with 0 dropped sessions.</a:t>
             </a:r>
             <a:endParaRPr lang="en-US" sz="740" dirty="0"/>
           </a:p>
@@ -37697,7 +37763,7 @@
                 <a:ea typeface="Google Sans" pitchFamily="34" charset="-122"/>
                 <a:cs typeface="Google Sans" pitchFamily="34" charset="-120"/>
               </a:rPr>
-              <a:t>4. Phase 3: DRAIN_AND_VERIFY • Test 4: Mid-Session Continuity</a:t>
+              <a:t>4. Phase 4: Shared Pool Tombstone Purge</a:t>
             </a:r>
             <a:endParaRPr lang="en-US" sz="760" dirty="0"/>
           </a:p>
@@ -37738,7 +37804,7 @@
                 <a:ea typeface="Roboto" pitchFamily="34" charset="-122"/>
                 <a:cs typeface="Roboto" pitchFamily="34" charset="-120"/>
               </a:rPr>
-              <a:t>Test 4 PASS: dropped_sessions == 0, 8,000 thinking budget active, CMEK encryption verified</a:t>
+              <a:t>Drains in-flight pooled connections and executes cryptographic tombstone deletion of legacy rows in the shared Pattern A database.</a:t>
             </a:r>
             <a:endParaRPr lang="en-US" sz="740" dirty="0"/>
           </a:p>

--- a/slides/doc-mt-04-editable-slides.pptx
+++ b/slides/doc-mt-04-editable-slides.pptx
@@ -784,7 +784,7 @@
           <a:p>
             <a:r>
               <a:rPr lang="en-US" dirty="0"/>
-              <a:t>[phased-roadmap-timeline] WS4 • ACT III: PATTERN C ZERO-DOWNTIME LIVE TIER MIGRATION TIMELINE: Workstream 4 Pattern C Timeline  •  Phase 1 SHADOW_SYNC → Phase 2 ATOMIC_CUTOVER (0ms) → Phase 3 DRAIN_AND_VERIFY</a:t>
+              <a:t>[phased-roadmap-timeline] WS4 • ACT III: PATTERN C ZERO-DOWNTIME LIVE TIER MIGRATION STATE MACHINE: Workstream 4 Pattern C State Machine  •  Stage 1 SHADOW_SYNC → Stage 2 ATOMIC_CUTOVER (0ms) → Stage 3 DRAIN_AND_VERIFY</a:t>
             </a:r>
             <a:endParaRPr lang="en-US" dirty="0"/>
           </a:p>
@@ -3846,7 +3846,7 @@
                 <a:ea typeface="Google Sans" pitchFamily="34" charset="-122"/>
                 <a:cs typeface="Google Sans" pitchFamily="34" charset="-120"/>
               </a:rPr>
-              <a:t>GOVERNANCE • SLIDES 12–14</a:t>
+              <a:t>SOLUTION • SLIDES 12–14</a:t>
             </a:r>
             <a:endParaRPr lang="en-US" sz="660" dirty="0"/>
           </a:p>
@@ -3885,7 +3885,7 @@
                 <a:ea typeface="Google Sans" pitchFamily="34" charset="-122"/>
                 <a:cs typeface="Google Sans" pitchFamily="34" charset="-120"/>
               </a:rPr>
-              <a:t>Rollout Roadmap, Day-2 RACI &amp; Series Map</a:t>
+              <a:t>Tier Evolution, Well-Architected Pillars &amp; Series Map</a:t>
             </a:r>
             <a:endParaRPr lang="en-US" sz="850" dirty="0"/>
           </a:p>
@@ -3924,7 +3924,7 @@
                 <a:ea typeface="Roboto" pitchFamily="34" charset="-122"/>
                 <a:cs typeface="Roboto" pitchFamily="34" charset="-120"/>
               </a:rPr>
-              <a:t>Charts the 3-phase rollout timeline (Weeks 1–10), assigns Security/SRE/FinOps Day-2 RACI SLAs, and maps runnable deliverables across Workstreams 1–5.</a:t>
+              <a:t>Demonstrates 3-stage tenant tier evolution (Pool -&gt; 0ms PSC Cutover -&gt; Silo), Google Cloud Well-Architected guarantees, and Workstream 1–5 deliverables.</a:t>
             </a:r>
             <a:endParaRPr lang="en-US" sz="780" dirty="0"/>
           </a:p>
@@ -9009,7 +9009,7 @@
                 <a:ea typeface="Google Sans" pitchFamily="34" charset="-122"/>
                 <a:cs typeface="Google Sans" pitchFamily="34" charset="-120"/>
               </a:rPr>
-              <a:t>WS4 • ACT III: PATTERN C ZERO-DOWNTIME LIVE TIER MIGRATION TIMELINE</a:t>
+              <a:t>WS4 • ACT III: PATTERN C ZERO-DOWNTIME LIVE TIER MIGRATION STATE MACHINE</a:t>
             </a:r>
             <a:endParaRPr lang="en-US" sz="1020" dirty="0"/>
           </a:p>
@@ -9090,7 +9090,7 @@
         <p:spPr>
           <a:xfrm>
             <a:off x="530352" y="786384"/>
-            <a:ext cx="10972800" cy="585216"/>
+            <a:ext cx="11119104" cy="585216"/>
           </a:xfrm>
           <a:prstGeom prst="rect">
             <a:avLst/>
@@ -9106,7 +9106,7 @@
               <a:buNone/>
             </a:pPr>
             <a:r>
-              <a:rPr lang="en-US" sz="2250" b="1" dirty="0">
+              <a:rPr lang="en-US" sz="2020" b="1" dirty="0">
                 <a:solidFill>
                   <a:srgbClr val="0F2942"/>
                 </a:solidFill>
@@ -9114,9 +9114,9 @@
                 <a:ea typeface="Google Sans Display" pitchFamily="34" charset="-122"/>
                 <a:cs typeface="Google Sans Display" pitchFamily="34" charset="-120"/>
               </a:rPr>
-              <a:t>3-Phase Live Tenant Promotion Cutover Window (Standard → Enterprise Spoke)</a:t>
-            </a:r>
-            <a:endParaRPr lang="en-US" sz="2250" dirty="0"/>
+              <a:t>3-Stage Live Tenant Promotion Cutover Window (Standard Pool → Enterprise Spoke)</a:t>
+            </a:r>
+            <a:endParaRPr lang="en-US" sz="2020" dirty="0"/>
           </a:p>
         </p:txBody>
       </p:sp>
@@ -9194,7 +9194,7 @@
               <a:buNone/>
             </a:pPr>
             <a:r>
-              <a:rPr lang="en-US" sz="1700" b="1" dirty="0">
+              <a:rPr lang="en-US" sz="1650" b="1" dirty="0">
                 <a:solidFill>
                   <a:srgbClr val="FFFFFF"/>
                 </a:solidFill>
@@ -9202,9 +9202,9 @@
                 <a:ea typeface="Google Sans" pitchFamily="34" charset="-122"/>
                 <a:cs typeface="Google Sans" pitchFamily="34" charset="-120"/>
               </a:rPr>
-              <a:t>Phase 1: SHADOW_SYNC</a:t>
-            </a:r>
-            <a:endParaRPr lang="en-US" sz="1700" dirty="0"/>
+              <a:t>Stage 1: SHADOW_SYNC</a:t>
+            </a:r>
+            <a:endParaRPr lang="en-US" sz="1650" dirty="0"/>
           </a:p>
         </p:txBody>
       </p:sp>
@@ -9253,7 +9253,7 @@
               <a:buNone/>
             </a:pPr>
             <a:r>
-              <a:rPr lang="en-US" sz="2000" b="1" dirty="0">
+              <a:rPr lang="en-US" sz="1850" b="1" dirty="0">
                 <a:solidFill>
                   <a:srgbClr val="3C4043"/>
                 </a:solidFill>
@@ -9263,14 +9263,14 @@
               </a:rPr>
               <a:t>Spoke Provision &amp;</a:t>
             </a:r>
-            <a:endParaRPr lang="en-US" sz="2000" dirty="0"/>
+            <a:endParaRPr lang="en-US" sz="1850" dirty="0"/>
           </a:p>
           <a:p>
             <a:pPr algn="ctr" indent="0" marL="0">
               <a:buNone/>
             </a:pPr>
             <a:r>
-              <a:rPr lang="en-US" sz="2000" b="1" dirty="0">
+              <a:rPr lang="en-US" sz="1850" b="1" dirty="0">
                 <a:solidFill>
                   <a:srgbClr val="3C4043"/>
                 </a:solidFill>
@@ -9280,7 +9280,7 @@
               </a:rPr>
               <a:t>Dual-Write Backfill</a:t>
             </a:r>
-            <a:endParaRPr lang="en-US" sz="2000" dirty="0"/>
+            <a:endParaRPr lang="en-US" sz="1850" dirty="0"/>
           </a:p>
         </p:txBody>
       </p:sp>
@@ -9292,8 +9292,8 @@
         </p:nvSpPr>
         <p:spPr>
           <a:xfrm>
-            <a:off x="713232" y="3675888"/>
-            <a:ext cx="3072384" cy="384048"/>
+            <a:off x="676656" y="3675888"/>
+            <a:ext cx="3145536" cy="384048"/>
           </a:xfrm>
           <a:prstGeom prst="rect">
             <a:avLst/>
@@ -9309,17 +9309,17 @@
               <a:buNone/>
             </a:pPr>
             <a:r>
-              <a:rPr lang="en-US" sz="1500" dirty="0">
-                <a:solidFill>
-                  <a:srgbClr val="3C4043"/>
+              <a:rPr lang="en-US" sz="1220" b="1" dirty="0">
+                <a:solidFill>
+                  <a:srgbClr val="0F2942"/>
                 </a:solidFill>
                 <a:latin typeface="Roboto" pitchFamily="34" charset="0"/>
                 <a:ea typeface="Roboto" pitchFamily="34" charset="-122"/>
                 <a:cs typeface="Roboto" pitchFamily="34" charset="-120"/>
               </a:rPr>
-              <a:t>(T-30 to T-5 Min)</a:t>
-            </a:r>
-            <a:endParaRPr lang="en-US" sz="1500" dirty="0"/>
+              <a:t>Terraform 4.6 PSC • Dual-Write Active</a:t>
+            </a:r>
+            <a:endParaRPr lang="en-US" sz="1220" dirty="0"/>
           </a:p>
         </p:txBody>
       </p:sp>
@@ -9371,7 +9371,7 @@
               <a:buNone/>
             </a:pPr>
             <a:r>
-              <a:rPr lang="en-US" sz="1380" dirty="0">
+              <a:rPr lang="en-US" sz="1350" dirty="0">
                 <a:solidFill>
                   <a:srgbClr val="3C4043"/>
                 </a:solidFill>
@@ -9381,14 +9381,14 @@
               </a:rPr>
               <a:t>Terraform 4.6 PSC Spoke +</a:t>
             </a:r>
-            <a:endParaRPr lang="en-US" sz="1380" dirty="0"/>
+            <a:endParaRPr lang="en-US" sz="1350" dirty="0"/>
           </a:p>
           <a:p>
             <a:pPr algn="ctr" indent="0" marL="0">
               <a:buNone/>
             </a:pPr>
             <a:r>
-              <a:rPr lang="en-US" sz="1380" dirty="0">
+              <a:rPr lang="en-US" sz="1350" dirty="0">
                 <a:solidFill>
                   <a:srgbClr val="3C4043"/>
                 </a:solidFill>
@@ -9398,7 +9398,7 @@
               </a:rPr>
               <a:t>Async Memory &amp; SQL Backfill</a:t>
             </a:r>
-            <a:endParaRPr lang="en-US" sz="1380" dirty="0"/>
+            <a:endParaRPr lang="en-US" sz="1350" dirty="0"/>
           </a:p>
         </p:txBody>
       </p:sp>
@@ -9476,7 +9476,7 @@
               <a:buNone/>
             </a:pPr>
             <a:r>
-              <a:rPr lang="en-US" sz="1700" b="1" dirty="0">
+              <a:rPr lang="en-US" sz="1650" b="1" dirty="0">
                 <a:solidFill>
                   <a:srgbClr val="FFFFFF"/>
                 </a:solidFill>
@@ -9484,9 +9484,9 @@
                 <a:ea typeface="Google Sans" pitchFamily="34" charset="-122"/>
                 <a:cs typeface="Google Sans" pitchFamily="34" charset="-120"/>
               </a:rPr>
-              <a:t>Phase 2: ATOMIC_CUTOVER</a:t>
-            </a:r>
-            <a:endParaRPr lang="en-US" sz="1700" dirty="0"/>
+              <a:t>Stage 2: ATOMIC_CUTOVER</a:t>
+            </a:r>
+            <a:endParaRPr lang="en-US" sz="1650" dirty="0"/>
           </a:p>
         </p:txBody>
       </p:sp>
@@ -9535,7 +9535,7 @@
               <a:buNone/>
             </a:pPr>
             <a:r>
-              <a:rPr lang="en-US" sz="2000" b="1" dirty="0">
+              <a:rPr lang="en-US" sz="1850" b="1" dirty="0">
                 <a:solidFill>
                   <a:srgbClr val="3C4043"/>
                 </a:solidFill>
@@ -9545,14 +9545,14 @@
               </a:rPr>
               <a:t>CMEK Re-Key &amp;</a:t>
             </a:r>
-            <a:endParaRPr lang="en-US" sz="2000" dirty="0"/>
+            <a:endParaRPr lang="en-US" sz="1850" dirty="0"/>
           </a:p>
           <a:p>
             <a:pPr algn="ctr" indent="0" marL="0">
               <a:buNone/>
             </a:pPr>
             <a:r>
-              <a:rPr lang="en-US" sz="2000" b="1" dirty="0">
+              <a:rPr lang="en-US" sz="1850" b="1" dirty="0">
                 <a:solidFill>
                   <a:srgbClr val="3C4043"/>
                 </a:solidFill>
@@ -9562,7 +9562,7 @@
               </a:rPr>
               <a:t>Firestore Pointer Flip</a:t>
             </a:r>
-            <a:endParaRPr lang="en-US" sz="2000" dirty="0"/>
+            <a:endParaRPr lang="en-US" sz="1850" dirty="0"/>
           </a:p>
         </p:txBody>
       </p:sp>
@@ -9574,8 +9574,8 @@
         </p:nvSpPr>
         <p:spPr>
           <a:xfrm>
-            <a:off x="4553712" y="3675888"/>
-            <a:ext cx="3072384" cy="384048"/>
+            <a:off x="4517136" y="3675888"/>
+            <a:ext cx="3145536" cy="384048"/>
           </a:xfrm>
           <a:prstGeom prst="rect">
             <a:avLst/>
@@ -9591,17 +9591,17 @@
               <a:buNone/>
             </a:pPr>
             <a:r>
-              <a:rPr lang="en-US" sz="1500" dirty="0">
-                <a:solidFill>
-                  <a:srgbClr val="3C4043"/>
+              <a:rPr lang="en-US" sz="1220" b="1" dirty="0">
+                <a:solidFill>
+                  <a:srgbClr val="0D7A75"/>
                 </a:solidFill>
                 <a:latin typeface="Roboto" pitchFamily="34" charset="0"/>
                 <a:ea typeface="Roboto" pitchFamily="34" charset="-122"/>
                 <a:cs typeface="Roboto" pitchFamily="34" charset="-120"/>
               </a:rPr>
-              <a:t>(T-0 Cutover: 0ms)</a:t>
-            </a:r>
-            <a:endParaRPr lang="en-US" sz="1500" dirty="0"/>
+              <a:t>SHA-256 Checksum • 0ms Cutover</a:t>
+            </a:r>
+            <a:endParaRPr lang="en-US" sz="1220" dirty="0"/>
           </a:p>
         </p:txBody>
       </p:sp>
@@ -9653,7 +9653,7 @@
               <a:buNone/>
             </a:pPr>
             <a:r>
-              <a:rPr lang="en-US" sz="1380" dirty="0">
+              <a:rPr lang="en-US" sz="1350" dirty="0">
                 <a:solidFill>
                   <a:srgbClr val="3C4043"/>
                 </a:solidFill>
@@ -9663,14 +9663,14 @@
               </a:rPr>
               <a:t>Checksum Parity Verified &amp;</a:t>
             </a:r>
-            <a:endParaRPr lang="en-US" sz="1380" dirty="0"/>
+            <a:endParaRPr lang="en-US" sz="1350" dirty="0"/>
           </a:p>
           <a:p>
             <a:pPr algn="ctr" indent="0" marL="0">
               <a:buNone/>
             </a:pPr>
             <a:r>
-              <a:rPr lang="en-US" sz="1380" dirty="0">
+              <a:rPr lang="en-US" sz="1350" dirty="0">
                 <a:solidFill>
                   <a:srgbClr val="3C4043"/>
                 </a:solidFill>
@@ -9680,7 +9680,7 @@
               </a:rPr>
               <a:t>Atomic Route Flip to PSC</a:t>
             </a:r>
-            <a:endParaRPr lang="en-US" sz="1380" dirty="0"/>
+            <a:endParaRPr lang="en-US" sz="1350" dirty="0"/>
           </a:p>
         </p:txBody>
       </p:sp>
@@ -9758,7 +9758,7 @@
               <a:buNone/>
             </a:pPr>
             <a:r>
-              <a:rPr lang="en-US" sz="1700" b="1" dirty="0">
+              <a:rPr lang="en-US" sz="1650" b="1" dirty="0">
                 <a:solidFill>
                   <a:srgbClr val="FFFFFF"/>
                 </a:solidFill>
@@ -9766,9 +9766,9 @@
                 <a:ea typeface="Google Sans" pitchFamily="34" charset="-122"/>
                 <a:cs typeface="Google Sans" pitchFamily="34" charset="-120"/>
               </a:rPr>
-              <a:t>Phase 3: DRAIN_VERIFY</a:t>
-            </a:r>
-            <a:endParaRPr lang="en-US" sz="1700" dirty="0"/>
+              <a:t>Stage 3: DRAIN_VERIFY</a:t>
+            </a:r>
+            <a:endParaRPr lang="en-US" sz="1650" dirty="0"/>
           </a:p>
         </p:txBody>
       </p:sp>
@@ -9817,7 +9817,7 @@
               <a:buNone/>
             </a:pPr>
             <a:r>
-              <a:rPr lang="en-US" sz="2000" b="1" dirty="0">
+              <a:rPr lang="en-US" sz="1850" b="1" dirty="0">
                 <a:solidFill>
                   <a:srgbClr val="3C4043"/>
                 </a:solidFill>
@@ -9827,14 +9827,14 @@
               </a:rPr>
               <a:t>In-Flight Drain &amp;</a:t>
             </a:r>
-            <a:endParaRPr lang="en-US" sz="2000" dirty="0"/>
+            <a:endParaRPr lang="en-US" sz="1850" dirty="0"/>
           </a:p>
           <a:p>
             <a:pPr algn="ctr" indent="0" marL="0">
               <a:buNone/>
             </a:pPr>
             <a:r>
-              <a:rPr lang="en-US" sz="2000" b="1" dirty="0">
+              <a:rPr lang="en-US" sz="1850" b="1" dirty="0">
                 <a:solidFill>
                   <a:srgbClr val="3C4043"/>
                 </a:solidFill>
@@ -9844,7 +9844,7 @@
               </a:rPr>
               <a:t>Shared Pool Purge</a:t>
             </a:r>
-            <a:endParaRPr lang="en-US" sz="2000" dirty="0"/>
+            <a:endParaRPr lang="en-US" sz="1850" dirty="0"/>
           </a:p>
         </p:txBody>
       </p:sp>
@@ -9856,8 +9856,8 @@
         </p:nvSpPr>
         <p:spPr>
           <a:xfrm>
-            <a:off x="8394192" y="3675888"/>
-            <a:ext cx="3072384" cy="384048"/>
+            <a:off x="8357616" y="3675888"/>
+            <a:ext cx="3145536" cy="384048"/>
           </a:xfrm>
           <a:prstGeom prst="rect">
             <a:avLst/>
@@ -9873,17 +9873,17 @@
               <a:buNone/>
             </a:pPr>
             <a:r>
-              <a:rPr lang="en-US" sz="1500" dirty="0">
-                <a:solidFill>
-                  <a:srgbClr val="3C4043"/>
+              <a:rPr lang="en-US" sz="1220" b="1" dirty="0">
+                <a:solidFill>
+                  <a:srgbClr val="54728C"/>
                 </a:solidFill>
                 <a:latin typeface="Roboto" pitchFamily="34" charset="0"/>
                 <a:ea typeface="Roboto" pitchFamily="34" charset="-122"/>
                 <a:cs typeface="Roboto" pitchFamily="34" charset="-120"/>
               </a:rPr>
-              <a:t>(T+1 to T+5 Min)</a:t>
-            </a:r>
-            <a:endParaRPr lang="en-US" sz="1500" dirty="0"/>
+              <a:t>0 Dropped Turns • Tombstone Purge</a:t>
+            </a:r>
+            <a:endParaRPr lang="en-US" sz="1220" dirty="0"/>
           </a:p>
         </p:txBody>
       </p:sp>
@@ -9935,7 +9935,7 @@
               <a:buNone/>
             </a:pPr>
             <a:r>
-              <a:rPr lang="en-US" sz="1380" dirty="0">
+              <a:rPr lang="en-US" sz="1350" dirty="0">
                 <a:solidFill>
                   <a:srgbClr val="3C4043"/>
                 </a:solidFill>
@@ -9945,14 +9945,14 @@
               </a:rPr>
               <a:t>0 Dropped Sessions &amp; 100%</a:t>
             </a:r>
-            <a:endParaRPr lang="en-US" sz="1380" dirty="0"/>
+            <a:endParaRPr lang="en-US" sz="1350" dirty="0"/>
           </a:p>
           <a:p>
             <a:pPr algn="ctr" indent="0" marL="0">
               <a:buNone/>
             </a:pPr>
             <a:r>
-              <a:rPr lang="en-US" sz="1380" dirty="0">
+              <a:rPr lang="en-US" sz="1350" dirty="0">
                 <a:solidFill>
                   <a:srgbClr val="3C4043"/>
                 </a:solidFill>
@@ -9962,7 +9962,7 @@
               </a:rPr>
               <a:t>Pooled Row Tombstone Purge</a:t>
             </a:r>
-            <a:endParaRPr lang="en-US" sz="1380" dirty="0"/>
+            <a:endParaRPr lang="en-US" sz="1350" dirty="0"/>
           </a:p>
         </p:txBody>
       </p:sp>
@@ -10179,7 +10179,7 @@
                 <a:ea typeface="Roboto" pitchFamily="34" charset="-122"/>
                 <a:cs typeface="Roboto" pitchFamily="34" charset="-120"/>
               </a:rPr>
-              <a:t>Workstream 4 Pattern C Timeline  •  Phase 1 SHADOW_SYNC → Phase 2 ATOMIC_CUTOVER (0ms) → Phase 3 DRAIN_AND_VERIFY  •  </a:t>
+              <a:t>Workstream 4 Pattern C State Machine  •  Stage 1 SHADOW_SYNC → Stage 2 ATOMIC_CUTOVER (0ms) → Stage 3 DRAIN_AND_VERIFY  •  </a:t>
             </a:r>
             <a:pPr algn="l" indent="0" marL="0">
               <a:buNone/>

--- a/slides/doc-mt-04-editable-slides.pptx
+++ b/slides/doc-mt-04-editable-slides.pptx
@@ -606,9 +606,7 @@
             <a:r>
               <a:rPr lang="en-US" dirty="0"/>
               <a:t>Design considerations — Zero-Downtime Live Tier Migration Protocol (4/4 PASS)
-• Phase 1 (`SHADOW_SYNC`): Provisions the target Enterprise spoke project, Cloud KMS key, and PSC attachment while streaming AlloyDB RLS rows and L1–L5 Memory Bank state to 0ms replication lag.
-• Phase 2 (`ATOMIC_CUTOVER`): Executes a single atomic Firestore transaction flipping the tenant’s route from `pool://` to `psc://`, unlocking the 8,000-token budget and CMEK binding simultaneously.
-• Phase 3 (`DRAIN_AND_VERIFY`): Drains any in-flight pooled turn without interruption and routes the very next message in the same active `session_id` into the dedicated PSC spoke (`0` dropped sessions).</a:t>
+</a:t>
             </a:r>
             <a:endParaRPr lang="en-US" dirty="0"/>
           </a:p>
@@ -1141,11 +1139,11 @@
           <a:p>
             <a:r>
               <a:rPr lang="en-US" dirty="0"/>
-              <a:t>Use cases — Multi-Tier SaaS Serving Both Pooled Standard &amp; Sovereign Enterprise
-• Standard Commercial Tier Profile (RetailStream Baseline): Authenticates via Microsoft Entra ID, runs in the shared Pattern A pool with a 4,000-token thinking cap, and shares an AlloyDB RLS cluster ($42/mo).
-• Regulated Enterprise Tier Profile (FinVault Spoke): Authenticates via Google Workspace, invokes private Agent Alpha with an 8,000-token budget, and mandates a dedicated CMEK-encrypted spoke project ($1,850/mo).
-• Why Maintaining Two Separate Products Fails: Operating disconnected Pooled and Siloed platforms doubles CI/CD maintenance, fragments the URL/API surface, and forces offline downtime when customers upgrade tiers.
-• The Pattern C Solution (Route Isolation, Not Product Duplication): Centralizes identity, WAF, and routing in a shared Hub while dynamically dispatching execution to the shared pool or dedicated PSC spokes.</a:t>
+              <a:t>Use cases — Multi-Tier SaaS Serving Standard Pool &amp; Enterprise Spokes on One Google Cloud Stack
+• Unified SaaS Front Door (`cymbal-hybrid-hub-prod`): Standard and Enterprise customers connect to one public ALB hostname (`agents.cymbal.cloud`), where Cloud Armor, IAP, and the Cloud Run Hybrid Router resolve tier routes in Firestore.
+• Standard Commercial Tier Profile (RetailStream Baseline -&gt; Live Promotion): Starts in the shared Pattern A pool ($42/mo, 4,000-token cap, 120 RPM, AlloyDB RLS) and upgrades live mid-conversation into a dedicated Enterprise PSC spoke (`0` dropped turns).
+• Regulated Enterprise Spoke Profile (FinVault Spoke `10.10.0.50`): Traverses a unidirectional Private Service Connect endpoint into a dedicated VPC-SC &amp; Cloud KMS CMEK spoke project ($1,850/mo, 8,000-token budget, 600 RPM, private Agent Alpha).
+• Unified Hybrid Google Cloud Stack (`4.6` Dual-Provider Terraform): Combines Cloud Armor, IAP OBO/DPoP, Federated Agent Registry, Firestore Route Table, PSC `ServiceAttachment` (`/24` NAT), Datastream CDC, AlloyDB, and BigQuery OTel.</a:t>
             </a:r>
             <a:endParaRPr lang="en-US" dirty="0"/>
           </a:p>
@@ -1233,11 +1231,8 @@
           <a:p>
             <a:r>
               <a:rPr lang="en-US" dirty="0"/>
-              <a:t>Products used — Hub-and-Spoke Control Plane &amp; Private Service Connect (PSC)
-• Central Ingress &amp; Routing Hub (`cymbal-hybrid-hub-prod`): Hosts the Global External ALB, Cloud Armor WAF, IAP OIDC verifier, Cross-Project Agent Registry, and Firestore Tenant Routing Table.
-• Consumer PSC Endpoint in the Hub (`10.10.0.50`): The Hub VPC (`10.10.0.0/20`) binds an internal Private Service Connect forwarding rule directly to each Enterprise tenant’s spoke ServiceAttachment URI.
-• Producer ServiceAttachment in Each Spoke (`ACCEPT_MANUAL`): Each Enterprise spoke project exposes its private Cloud Run / GKE agent runtime via a `/24` PSC NAT subnet (`10.40.240.0/24`) whitelisting only the Hub project.
-• Zero CIDR Overlap &amp; Unidirectional Security: Because PSC performs source NAT at the attachment boundary, all 1,000+ Enterprise spokes can reuse identical `10.40.0.0/20` VPC CIDRs and can never initiate reverse connections into the Hub.</a:t>
+              <a:t>Design alternatives — Cross-Project Connectivity &amp; Live Tier Migration Comparison (Pattern C vs. Legacy)
+</a:t>
             </a:r>
             <a:endParaRPr lang="en-US" dirty="0"/>
           </a:p>
@@ -16828,7 +16823,7 @@
                 <a:ea typeface="Google Sans" pitchFamily="34" charset="-122"/>
                 <a:cs typeface="Google Sans" pitchFamily="34" charset="-120"/>
               </a:rPr>
-              <a:t>Multi-Tier SaaS Serving Both Pooled Standard &amp; Sovereign Enterprise</a:t>
+              <a:t>Multi-Tier SaaS Serving Standard Pool &amp; Enterprise Spokes on One Google Cloud Stack</a:t>
             </a:r>
             <a:endParaRPr lang="en-US" sz="1900" dirty="0"/>
           </a:p>
@@ -17014,7 +17009,7 @@
                 <a:ea typeface="Google Sans" pitchFamily="34" charset="-122"/>
                 <a:cs typeface="Google Sans" pitchFamily="34" charset="-120"/>
               </a:rPr>
-              <a:t>Standard Commercial Tier Profile (RetailStream Baseline)</a:t>
+              <a:t>Unified SaaS Front Door (cymbal-hybrid-hub-prod)</a:t>
             </a:r>
             <a:endParaRPr lang="en-US" sz="1140" dirty="0"/>
           </a:p>
@@ -17073,7 +17068,7 @@
                 <a:ea typeface="Roboto" pitchFamily="34" charset="-122"/>
                 <a:cs typeface="Roboto" pitchFamily="34" charset="-120"/>
               </a:rPr>
-              <a:t>Authenticates via Microsoft Entra ID, runs in the shared Pattern A pool with a 4,000-token thinking cap, and shares an AlloyDB RLS cluster ($42/mo).</a:t>
+              <a:t>Standard and Enterprise customers connect to one public ALB hostname (agents.cymbal.cloud), where Cloud Armor, IAP, and the Cloud Run Hybrid Router resolve tier routes in Firestore.</a:t>
             </a:r>
             <a:endParaRPr lang="en-US" sz="980" dirty="0"/>
           </a:p>
@@ -17159,7 +17154,7 @@
                 <a:ea typeface="Google Sans" pitchFamily="34" charset="-122"/>
                 <a:cs typeface="Google Sans" pitchFamily="34" charset="-120"/>
               </a:rPr>
-              <a:t>Cloud Stack: Route: pool://cymbal-shared-pooled-runtime-v2 • AlloyDB RLS • 90% Prefix Cache
+              <a:t>Cloud Stack: Global ALB • Cloud Armor • IAP STS • Cloud Run Hybrid Router • Firestore Route Table
 </a:t>
             </a:r>
             <a:pPr indent="0" marL="0">
@@ -17174,7 +17169,7 @@
                 <a:ea typeface="Roboto" pitchFamily="34" charset="-122"/>
                 <a:cs typeface="Roboto" pitchFamily="34" charset="-120"/>
               </a:rPr>
-              <a:t>Target &amp; SLA: Tier: STANDARD • 120 RPM • 4,000 Thinking Tokens • $42/mo Unit Cost</a:t>
+              <a:t>Target &amp; SLA: Single SaaS Codebase &amp; URL • Sub-2ms Cryptographic Tier Lookup (pool:// vs. psc://)</a:t>
             </a:r>
             <a:endParaRPr lang="en-US" sz="750" dirty="0"/>
           </a:p>
@@ -17235,7 +17230,7 @@
                 <a:ea typeface="Google Sans" pitchFamily="34" charset="-122"/>
                 <a:cs typeface="Google Sans" pitchFamily="34" charset="-120"/>
               </a:rPr>
-              <a:t>Standard Pooled Tier</a:t>
+              <a:t>1. Unified Hybrid Control Plane</a:t>
             </a:r>
             <a:endParaRPr lang="en-US" sz="750" dirty="0"/>
           </a:p>
@@ -17382,7 +17377,7 @@
                 <a:ea typeface="Google Sans" pitchFamily="34" charset="-122"/>
                 <a:cs typeface="Google Sans" pitchFamily="34" charset="-120"/>
               </a:rPr>
-              <a:t>Regulated Enterprise Tier Profile (FinVault Spoke)</a:t>
+              <a:t>Standard Commercial Tier Profile (RetailStream Baseline -&gt; Live Promotion)</a:t>
             </a:r>
             <a:endParaRPr lang="en-US" sz="1140" dirty="0"/>
           </a:p>
@@ -17441,7 +17436,7 @@
                 <a:ea typeface="Roboto" pitchFamily="34" charset="-122"/>
                 <a:cs typeface="Roboto" pitchFamily="34" charset="-120"/>
               </a:rPr>
-              <a:t>Authenticates via Google Workspace, invokes private Agent Alpha with an 8,000-token budget, and mandates a dedicated CMEK-encrypted spoke project ($1,850/mo).</a:t>
+              <a:t>Starts in the shared Pattern A pool ($42/mo, 4,000-token cap, 120 RPM, AlloyDB RLS) and upgrades live mid-conversation into a dedicated Enterprise PSC spoke (0 dropped turns).</a:t>
             </a:r>
             <a:endParaRPr lang="en-US" sz="980" dirty="0"/>
           </a:p>
@@ -17527,7 +17522,7 @@
                 <a:ea typeface="Google Sans" pitchFamily="34" charset="-122"/>
                 <a:cs typeface="Google Sans" pitchFamily="34" charset="-120"/>
               </a:rPr>
-              <a:t>Cloud Stack: Route: psc://finvault-agent-spoke-psc • Dedicated VPC-SC &amp; CMEK Vault
+              <a:t>Cloud Stack: Route: pool://shared-runtime -&gt; Live 3-Phase Promotion -&gt; psc://10.10.0.51 (RetailStream)
 </a:t>
             </a:r>
             <a:pPr indent="0" marL="0">
@@ -17542,7 +17537,7 @@
                 <a:ea typeface="Roboto" pitchFamily="34" charset="-122"/>
                 <a:cs typeface="Roboto" pitchFamily="34" charset="-120"/>
               </a:rPr>
-              <a:t>Target &amp; SLA: Tier: ENTERPRISE • 600 RPM • 8,000 Thinking Tokens • $1,850/mo Dedicated SLA</a:t>
+              <a:t>Target &amp; SLA: Starts at $42/mo (4k Cap / 120 RPM) • Upgrades Live to Enterprise Spoke with 0 Dropped Chats</a:t>
             </a:r>
             <a:endParaRPr lang="en-US" sz="750" dirty="0"/>
           </a:p>
@@ -17603,7 +17598,7 @@
                 <a:ea typeface="Google Sans" pitchFamily="34" charset="-122"/>
                 <a:cs typeface="Google Sans" pitchFamily="34" charset="-120"/>
               </a:rPr>
-              <a:t>Enterprise Sovereign Spoke</a:t>
+              <a:t>2. Land-and-Expand Tenant (RetailStream)</a:t>
             </a:r>
             <a:endParaRPr lang="en-US" sz="750" dirty="0"/>
           </a:p>
@@ -17750,7 +17745,7 @@
                 <a:ea typeface="Google Sans" pitchFamily="34" charset="-122"/>
                 <a:cs typeface="Google Sans" pitchFamily="34" charset="-120"/>
               </a:rPr>
-              <a:t>Why Maintaining Two Separate Products Fails</a:t>
+              <a:t>Regulated Enterprise Spoke Profile (FinVault Spoke 10.10.0.50)</a:t>
             </a:r>
             <a:endParaRPr lang="en-US" sz="1140" dirty="0"/>
           </a:p>
@@ -17809,7 +17804,7 @@
                 <a:ea typeface="Roboto" pitchFamily="34" charset="-122"/>
                 <a:cs typeface="Roboto" pitchFamily="34" charset="-120"/>
               </a:rPr>
-              <a:t>Operating disconnected Pooled and Siloed platforms doubles CI/CD maintenance, fragments the URL/API surface, and forces offline downtime when customers upgrade tiers.</a:t>
+              <a:t>Traverses a unidirectional Private Service Connect endpoint into a dedicated VPC-SC &amp; Cloud KMS CMEK spoke project ($1,850/mo, 8,000-token budget, 600 RPM, private Agent Alpha).</a:t>
             </a:r>
             <a:endParaRPr lang="en-US" sz="980" dirty="0"/>
           </a:p>
@@ -17895,7 +17890,7 @@
                 <a:ea typeface="Google Sans" pitchFamily="34" charset="-122"/>
                 <a:cs typeface="Google Sans" pitchFamily="34" charset="-120"/>
               </a:rPr>
-              <a:t>Cloud Stack: Single 80% Reusable ADK 2.0 Codebase • Unified Public Domain &amp; OAuth Redirects
+              <a:t>Cloud Stack: Route: psc://10.10.0.50 -&gt; finvault-agent-spoke-psc (ACCEPT_MANUAL) • VPC-SC &amp; CMEK
 </a:t>
             </a:r>
             <a:pPr indent="0" marL="0">
@@ -17910,7 +17905,7 @@
                 <a:ea typeface="Roboto" pitchFamily="34" charset="-122"/>
                 <a:cs typeface="Roboto" pitchFamily="34" charset="-120"/>
               </a:rPr>
-              <a:t>Target &amp; SLA: Eliminates Dual-Product Engineering Overhead &amp; Customer Re-Onboarding Friction</a:t>
+              <a:t>Target &amp; SLA: Tier: ENTERPRISE ($1,850/mo) • 600 RPM • 8,000 Thinking Budget • Reuses 10.40.0.0/20 CIDR</a:t>
             </a:r>
             <a:endParaRPr lang="en-US" sz="750" dirty="0"/>
           </a:p>
@@ -17971,7 +17966,7 @@
                 <a:ea typeface="Google Sans" pitchFamily="34" charset="-122"/>
                 <a:cs typeface="Google Sans" pitchFamily="34" charset="-120"/>
               </a:rPr>
-              <a:t>Zero Product Fragmentation</a:t>
+              <a:t>3. Sovereign Spoke Tenant (FinVault)</a:t>
             </a:r>
             <a:endParaRPr lang="en-US" sz="750" dirty="0"/>
           </a:p>
@@ -18118,7 +18113,7 @@
                 <a:ea typeface="Google Sans" pitchFamily="34" charset="-122"/>
                 <a:cs typeface="Google Sans" pitchFamily="34" charset="-120"/>
               </a:rPr>
-              <a:t>The Pattern C Solution (Route Isolation, Not Product Duplication)</a:t>
+              <a:t>Unified Hybrid Google Cloud Stack (4.6 Dual-Provider Terraform)</a:t>
             </a:r>
             <a:endParaRPr lang="en-US" sz="1140" dirty="0"/>
           </a:p>
@@ -18177,7 +18172,7 @@
                 <a:ea typeface="Roboto" pitchFamily="34" charset="-122"/>
                 <a:cs typeface="Roboto" pitchFamily="34" charset="-120"/>
               </a:rPr>
-              <a:t>Centralizes identity, WAF, and routing in a shared Hub while dynamically dispatching execution to the shared pool or dedicated PSC spokes.</a:t>
+              <a:t>Combines Cloud Armor, IAP OBO/DPoP, Federated Agent Registry, Firestore Route Table, PSC ServiceAttachment (/24 NAT), Datastream CDC, AlloyDB, and BigQuery OTel.</a:t>
             </a:r>
             <a:endParaRPr lang="en-US" sz="980" dirty="0"/>
           </a:p>
@@ -18263,7 +18258,7 @@
                 <a:ea typeface="Google Sans" pitchFamily="34" charset="-122"/>
                 <a:cs typeface="Google Sans" pitchFamily="34" charset="-120"/>
               </a:rPr>
-              <a:t>Cloud Stack: Firestore Per-Tenant Routing Metadata (isolation_pattern, target_endpoint)
+              <a:t>Cloud Stack: Private Service Connect (PSC) • Datastream CDC • AlloyDB RLS/CMEK • 4.6 Terraform Blueprint
 </a:t>
             </a:r>
             <a:pPr indent="0" marL="0">
@@ -18278,7 +18273,7 @@
                 <a:ea typeface="Roboto" pitchFamily="34" charset="-122"/>
                 <a:cs typeface="Roboto" pitchFamily="34" charset="-120"/>
               </a:rPr>
-              <a:t>Target &amp; SLA: Turns Standard -&gt; Enterprise Upsells into an Instant Software-Defined Flip</a:t>
+              <a:t>Target &amp; SLA: 74% Lower Portfolio Cloud TCO (950 Pool + 50 Spokes) • 4/4 Live Migration Tests PASS</a:t>
             </a:r>
             <a:endParaRPr lang="en-US" sz="750" dirty="0"/>
           </a:p>
@@ -18339,7 +18334,7 @@
                 <a:ea typeface="Google Sans" pitchFamily="34" charset="-122"/>
                 <a:cs typeface="Google Sans" pitchFamily="34" charset="-120"/>
               </a:rPr>
-              <a:t>Frictionless Revenue Expansion</a:t>
+              <a:t>4. Unified Pattern C Hybrid Stack</a:t>
             </a:r>
             <a:endParaRPr lang="en-US" sz="750" dirty="0"/>
           </a:p>
@@ -18908,7 +18903,7 @@
                 <a:ea typeface="Google Sans" pitchFamily="34" charset="-122"/>
                 <a:cs typeface="Google Sans" pitchFamily="34" charset="-120"/>
               </a:rPr>
-              <a:t>ACT I • GOOGLE CLOUD REFERENCE PRODUCT STACK &amp; BILL OF MATERIALS</a:t>
+              <a:t>ACT I • ARCHITECTURAL OPTIONS &amp; PATTERN A / B / C DECISION MATRIX</a:t>
             </a:r>
             <a:endParaRPr lang="en-US" sz="1020" dirty="0"/>
           </a:p>
@@ -18974,7 +18969,7 @@
                 <a:ea typeface="Roboto" pitchFamily="34" charset="-122"/>
                 <a:cs typeface="Roboto" pitchFamily="34" charset="-120"/>
               </a:rPr>
-              <a:t>THREE-PILLAR • ARCHITECTURE</a:t>
+              <a:t>COMPARISON-GRID • MATRIX</a:t>
             </a:r>
             <a:endParaRPr lang="en-US" sz="750" dirty="0"/>
           </a:p>
@@ -18988,8 +18983,8 @@
         </p:nvSpPr>
         <p:spPr>
           <a:xfrm>
-            <a:off x="411480" y="658368"/>
-            <a:ext cx="11368735" cy="365760"/>
+            <a:off x="411480" y="640080"/>
+            <a:ext cx="11368735" cy="347472"/>
           </a:xfrm>
           <a:prstGeom prst="rect">
             <a:avLst/>
@@ -19005,7 +19000,7 @@
               <a:buNone/>
             </a:pPr>
             <a:r>
-              <a:rPr lang="en-US" sz="1900" b="1" dirty="0">
+              <a:rPr lang="en-US" sz="1800" b="1" dirty="0">
                 <a:solidFill>
                   <a:srgbClr val="3C4043"/>
                 </a:solidFill>
@@ -19013,9 +19008,9 @@
                 <a:ea typeface="Google Sans" pitchFamily="34" charset="-122"/>
                 <a:cs typeface="Google Sans" pitchFamily="34" charset="-120"/>
               </a:rPr>
-              <a:t>Hub-and-Spoke Control Plane &amp; Private Service Connect (PSC)</a:t>
-            </a:r>
-            <a:endParaRPr lang="en-US" sz="1900" dirty="0"/>
+              <a:t>Cross-Project Connectivity &amp; Live Tier Migration Comparison (Pattern C vs. Legacy)</a:t>
+            </a:r>
+            <a:endParaRPr lang="en-US" sz="1800" dirty="0"/>
           </a:p>
         </p:txBody>
       </p:sp>
@@ -19027,8 +19022,8 @@
         </p:nvSpPr>
         <p:spPr>
           <a:xfrm>
-            <a:off x="411480" y="1024128"/>
-            <a:ext cx="11368735" cy="237744"/>
+            <a:off x="411480" y="987552"/>
+            <a:ext cx="11368735" cy="219456"/>
           </a:xfrm>
           <a:prstGeom prst="rect">
             <a:avLst/>
@@ -19044,7 +19039,7 @@
               <a:buNone/>
             </a:pPr>
             <a:r>
-              <a:rPr lang="en-US" sz="1000" dirty="0">
+              <a:rPr lang="en-US" sz="980" dirty="0">
                 <a:solidFill>
                   <a:srgbClr val="5F6368"/>
                 </a:solidFill>
@@ -19052,26 +19047,1976 @@
                 <a:ea typeface="Roboto" pitchFamily="34" charset="-122"/>
                 <a:cs typeface="Roboto" pitchFamily="34" charset="-120"/>
               </a:rPr>
-              <a:t>Structured Google Cloud reference SKUs, runtime isolation boundaries, and production SLAs.</a:t>
-            </a:r>
-            <a:endParaRPr lang="en-US" sz="1000" dirty="0"/>
-          </a:p>
-        </p:txBody>
-      </p:sp>
-      <p:sp>
-        <p:nvSpPr>
-          <p:cNvPr id="19" name="Shape 17"/>
-          <p:cNvSpPr/>
-          <p:nvPr/>
-        </p:nvSpPr>
-        <p:spPr>
-          <a:xfrm>
-            <a:off x="411480" y="1353312"/>
-            <a:ext cx="5583326" cy="2258568"/>
+              <a:t>Side-by-side Google Cloud Well-Architected trade-off analysis, isolation boundaries, and unit economics.</a:t>
+            </a:r>
+            <a:endParaRPr lang="en-US" sz="980" dirty="0"/>
+          </a:p>
+        </p:txBody>
+      </p:sp>
+      <p:graphicFrame>
+        <p:nvGraphicFramePr>
+          <p:cNvPr id="5" name="Table 0"/>
+          <p:cNvGraphicFramePr>
+            <a:graphicFrameLocks noGrp="1"/>
+          </p:cNvGraphicFramePr>
+          <p:nvPr>
+            <p:extLst>
+              <p:ext uri="{D42A27DB-BD31-4B8C-83A1-F6EECF244321}">
+                <p14:modId xmlns:p14="http://schemas.microsoft.com/office/powerpoint/2010/main" val="1579011935"/>
+              </p:ext>
+            </p:extLst>
+          </p:nvPr>
+        </p:nvGraphicFramePr>
+        <p:xfrm>
+          <a:off x="411480" y="1243584"/>
+          <a:ext cx="11368735" cy="914400"/>
+        </p:xfrm>
+        <a:graphic>
+          <a:graphicData uri="http://schemas.openxmlformats.org/drawingml/2006/table">
+            <a:tbl>
+              <a:tblPr/>
+              <a:tblGrid>
+                <a:gridCol w="2057400"/>
+                <a:gridCol w="2971800"/>
+                <a:gridCol w="3154680"/>
+                <a:gridCol w="3276295"/>
+              </a:tblGrid>
+              <a:tr h="0">
+                <a:tc>
+                  <a:txBody>
+                    <a:bodyPr/>
+                    <a:lstStyle/>
+                    <a:p>
+                      <a:pPr indent="0" marL="0">
+                        <a:buNone/>
+                      </a:pPr>
+                      <a:r>
+                        <a:rPr lang="en-US" sz="850" b="1" dirty="0">
+                          <a:solidFill>
+                            <a:srgbClr val="FFFFFF"/>
+                          </a:solidFill>
+                          <a:latin typeface="Google Sans" pitchFamily="34" charset="0"/>
+                          <a:ea typeface="Google Sans" pitchFamily="34" charset="-122"/>
+                          <a:cs typeface="Google Sans" pitchFamily="34" charset="-120"/>
+                        </a:rPr>
+                        <a:t>Hybrid Connectivity Dimension</a:t>
+                      </a:r>
+                      <a:endParaRPr lang="en-US" sz="850" dirty="0">
+                        <a:latin typeface="Google Sans" charset="0"/>
+                        <a:ea typeface="Google Sans" charset="0"/>
+                        <a:cs typeface="Google Sans" charset="0"/>
+                      </a:endParaRPr>
+                    </a:p>
+                  </a:txBody>
+                  <a:tcPr marL="91440" marR="91440" marT="45720" marB="45720" anchor="ctr">
+                    <a:lnL w="9525" cap="flat" cmpd="sng" algn="ctr">
+                      <a:solidFill>
+                        <a:srgbClr val="DADCE0"/>
+                      </a:solidFill>
+                      <a:prstDash val="solid"/>
+                      <a:round/>
+                      <a:headEnd type="none" w="med" len="med"/>
+                      <a:tailEnd type="none" w="med" len="med"/>
+                    </a:lnL>
+                    <a:lnR w="9525" cap="flat" cmpd="sng" algn="ctr">
+                      <a:solidFill>
+                        <a:srgbClr val="DADCE0"/>
+                      </a:solidFill>
+                      <a:prstDash val="solid"/>
+                      <a:round/>
+                      <a:headEnd type="none" w="med" len="med"/>
+                      <a:tailEnd type="none" w="med" len="med"/>
+                    </a:lnR>
+                    <a:lnT w="9525" cap="flat" cmpd="sng" algn="ctr">
+                      <a:solidFill>
+                        <a:srgbClr val="DADCE0"/>
+                      </a:solidFill>
+                      <a:prstDash val="solid"/>
+                      <a:round/>
+                      <a:headEnd type="none" w="med" len="med"/>
+                      <a:tailEnd type="none" w="med" len="med"/>
+                    </a:lnT>
+                    <a:lnB w="9525" cap="flat" cmpd="sng" algn="ctr">
+                      <a:solidFill>
+                        <a:srgbClr val="DADCE0"/>
+                      </a:solidFill>
+                      <a:prstDash val="solid"/>
+                      <a:round/>
+                      <a:headEnd type="none" w="med" len="med"/>
+                      <a:tailEnd type="none" w="med" len="med"/>
+                    </a:lnB>
+                    <a:solidFill>
+                      <a:srgbClr val="4285F4"/>
+                    </a:solidFill>
+                  </a:tcPr>
+                </a:tc>
+                <a:tc>
+                  <a:txBody>
+                    <a:bodyPr/>
+                    <a:lstStyle/>
+                    <a:p>
+                      <a:pPr indent="0" marL="0">
+                        <a:buNone/>
+                      </a:pPr>
+                      <a:r>
+                        <a:rPr lang="en-US" sz="850" b="1" dirty="0">
+                          <a:solidFill>
+                            <a:srgbClr val="FFFFFF"/>
+                          </a:solidFill>
+                          <a:latin typeface="Google Sans" pitchFamily="34" charset="0"/>
+                          <a:ea typeface="Google Sans" pitchFamily="34" charset="-122"/>
+                          <a:cs typeface="Google Sans" pitchFamily="34" charset="-120"/>
+                        </a:rPr>
+                        <a:t>Dual Disconnected Products (Pool + Silo Fork)</a:t>
+                      </a:r>
+                      <a:endParaRPr lang="en-US" sz="850" dirty="0">
+                        <a:latin typeface="Google Sans" charset="0"/>
+                        <a:ea typeface="Google Sans" charset="0"/>
+                        <a:cs typeface="Google Sans" charset="0"/>
+                      </a:endParaRPr>
+                    </a:p>
+                  </a:txBody>
+                  <a:tcPr marL="91440" marR="91440" marT="45720" marB="45720" anchor="ctr">
+                    <a:lnL w="9525" cap="flat" cmpd="sng" algn="ctr">
+                      <a:solidFill>
+                        <a:srgbClr val="DADCE0"/>
+                      </a:solidFill>
+                      <a:prstDash val="solid"/>
+                      <a:round/>
+                      <a:headEnd type="none" w="med" len="med"/>
+                      <a:tailEnd type="none" w="med" len="med"/>
+                    </a:lnL>
+                    <a:lnR w="9525" cap="flat" cmpd="sng" algn="ctr">
+                      <a:solidFill>
+                        <a:srgbClr val="DADCE0"/>
+                      </a:solidFill>
+                      <a:prstDash val="solid"/>
+                      <a:round/>
+                      <a:headEnd type="none" w="med" len="med"/>
+                      <a:tailEnd type="none" w="med" len="med"/>
+                    </a:lnR>
+                    <a:lnT w="9525" cap="flat" cmpd="sng" algn="ctr">
+                      <a:solidFill>
+                        <a:srgbClr val="DADCE0"/>
+                      </a:solidFill>
+                      <a:prstDash val="solid"/>
+                      <a:round/>
+                      <a:headEnd type="none" w="med" len="med"/>
+                      <a:tailEnd type="none" w="med" len="med"/>
+                    </a:lnT>
+                    <a:lnB w="9525" cap="flat" cmpd="sng" algn="ctr">
+                      <a:solidFill>
+                        <a:srgbClr val="DADCE0"/>
+                      </a:solidFill>
+                      <a:prstDash val="solid"/>
+                      <a:round/>
+                      <a:headEnd type="none" w="med" len="med"/>
+                      <a:tailEnd type="none" w="med" len="med"/>
+                    </a:lnB>
+                    <a:solidFill>
+                      <a:srgbClr val="4285F4"/>
+                    </a:solidFill>
+                  </a:tcPr>
+                </a:tc>
+                <a:tc>
+                  <a:txBody>
+                    <a:bodyPr/>
+                    <a:lstStyle/>
+                    <a:p>
+                      <a:pPr indent="0" marL="0">
+                        <a:buNone/>
+                      </a:pPr>
+                      <a:r>
+                        <a:rPr lang="en-US" sz="850" b="1" dirty="0">
+                          <a:solidFill>
+                            <a:srgbClr val="FFFFFF"/>
+                          </a:solidFill>
+                          <a:latin typeface="Google Sans" pitchFamily="34" charset="0"/>
+                          <a:ea typeface="Google Sans" pitchFamily="34" charset="-122"/>
+                          <a:cs typeface="Google Sans" pitchFamily="34" charset="-120"/>
+                        </a:rPr>
+                        <a:t>Legacy VPC Network Peering Hub-and-Spoke</a:t>
+                      </a:r>
+                      <a:endParaRPr lang="en-US" sz="850" dirty="0">
+                        <a:latin typeface="Google Sans" charset="0"/>
+                        <a:ea typeface="Google Sans" charset="0"/>
+                        <a:cs typeface="Google Sans" charset="0"/>
+                      </a:endParaRPr>
+                    </a:p>
+                  </a:txBody>
+                  <a:tcPr marL="91440" marR="91440" marT="45720" marB="45720" anchor="ctr">
+                    <a:lnL w="9525" cap="flat" cmpd="sng" algn="ctr">
+                      <a:solidFill>
+                        <a:srgbClr val="DADCE0"/>
+                      </a:solidFill>
+                      <a:prstDash val="solid"/>
+                      <a:round/>
+                      <a:headEnd type="none" w="med" len="med"/>
+                      <a:tailEnd type="none" w="med" len="med"/>
+                    </a:lnL>
+                    <a:lnR w="9525" cap="flat" cmpd="sng" algn="ctr">
+                      <a:solidFill>
+                        <a:srgbClr val="DADCE0"/>
+                      </a:solidFill>
+                      <a:prstDash val="solid"/>
+                      <a:round/>
+                      <a:headEnd type="none" w="med" len="med"/>
+                      <a:tailEnd type="none" w="med" len="med"/>
+                    </a:lnR>
+                    <a:lnT w="9525" cap="flat" cmpd="sng" algn="ctr">
+                      <a:solidFill>
+                        <a:srgbClr val="DADCE0"/>
+                      </a:solidFill>
+                      <a:prstDash val="solid"/>
+                      <a:round/>
+                      <a:headEnd type="none" w="med" len="med"/>
+                      <a:tailEnd type="none" w="med" len="med"/>
+                    </a:lnT>
+                    <a:lnB w="9525" cap="flat" cmpd="sng" algn="ctr">
+                      <a:solidFill>
+                        <a:srgbClr val="DADCE0"/>
+                      </a:solidFill>
+                      <a:prstDash val="solid"/>
+                      <a:round/>
+                      <a:headEnd type="none" w="med" len="med"/>
+                      <a:tailEnd type="none" w="med" len="med"/>
+                    </a:lnB>
+                    <a:solidFill>
+                      <a:srgbClr val="4285F4"/>
+                    </a:solidFill>
+                  </a:tcPr>
+                </a:tc>
+                <a:tc>
+                  <a:txBody>
+                    <a:bodyPr/>
+                    <a:lstStyle/>
+                    <a:p>
+                      <a:pPr indent="0" marL="0">
+                        <a:buNone/>
+                      </a:pPr>
+                      <a:r>
+                        <a:rPr lang="en-US" sz="850" b="1" dirty="0">
+                          <a:solidFill>
+                            <a:srgbClr val="FFFFFF"/>
+                          </a:solidFill>
+                          <a:latin typeface="Google Sans" pitchFamily="34" charset="0"/>
+                          <a:ea typeface="Google Sans" pitchFamily="34" charset="-122"/>
+                          <a:cs typeface="Google Sans" pitchFamily="34" charset="-120"/>
+                        </a:rPr>
+                        <a:t>Pattern C: Private Service Connect (PSC) + Live Migrator</a:t>
+                      </a:r>
+                      <a:endParaRPr lang="en-US" sz="850" dirty="0">
+                        <a:latin typeface="Google Sans" charset="0"/>
+                        <a:ea typeface="Google Sans" charset="0"/>
+                        <a:cs typeface="Google Sans" charset="0"/>
+                      </a:endParaRPr>
+                    </a:p>
+                  </a:txBody>
+                  <a:tcPr marL="91440" marR="91440" marT="45720" marB="45720" anchor="ctr">
+                    <a:lnL w="9525" cap="flat" cmpd="sng" algn="ctr">
+                      <a:solidFill>
+                        <a:srgbClr val="DADCE0"/>
+                      </a:solidFill>
+                      <a:prstDash val="solid"/>
+                      <a:round/>
+                      <a:headEnd type="none" w="med" len="med"/>
+                      <a:tailEnd type="none" w="med" len="med"/>
+                    </a:lnL>
+                    <a:lnR w="9525" cap="flat" cmpd="sng" algn="ctr">
+                      <a:solidFill>
+                        <a:srgbClr val="DADCE0"/>
+                      </a:solidFill>
+                      <a:prstDash val="solid"/>
+                      <a:round/>
+                      <a:headEnd type="none" w="med" len="med"/>
+                      <a:tailEnd type="none" w="med" len="med"/>
+                    </a:lnR>
+                    <a:lnT w="9525" cap="flat" cmpd="sng" algn="ctr">
+                      <a:solidFill>
+                        <a:srgbClr val="DADCE0"/>
+                      </a:solidFill>
+                      <a:prstDash val="solid"/>
+                      <a:round/>
+                      <a:headEnd type="none" w="med" len="med"/>
+                      <a:tailEnd type="none" w="med" len="med"/>
+                    </a:lnT>
+                    <a:lnB w="9525" cap="flat" cmpd="sng" algn="ctr">
+                      <a:solidFill>
+                        <a:srgbClr val="DADCE0"/>
+                      </a:solidFill>
+                      <a:prstDash val="solid"/>
+                      <a:round/>
+                      <a:headEnd type="none" w="med" len="med"/>
+                      <a:tailEnd type="none" w="med" len="med"/>
+                    </a:lnB>
+                    <a:solidFill>
+                      <a:srgbClr val="4285F4"/>
+                    </a:solidFill>
+                  </a:tcPr>
+                </a:tc>
+              </a:tr>
+              <a:tr h="0">
+                <a:tc>
+                  <a:txBody>
+                    <a:bodyPr/>
+                    <a:lstStyle/>
+                    <a:p>
+                      <a:pPr indent="0" marL="0">
+                        <a:buNone/>
+                      </a:pPr>
+                      <a:r>
+                        <a:rPr lang="en-US" sz="780" b="1" dirty="0">
+                          <a:solidFill>
+                            <a:srgbClr val="3C4043"/>
+                          </a:solidFill>
+                          <a:latin typeface="Google Sans" pitchFamily="34" charset="0"/>
+                          <a:ea typeface="Google Sans" pitchFamily="34" charset="-122"/>
+                          <a:cs typeface="Google Sans" pitchFamily="34" charset="-120"/>
+                        </a:rPr>
+                        <a:t>SaaS front door &amp; API surface</a:t>
+                      </a:r>
+                      <a:endParaRPr lang="en-US" sz="780" dirty="0">
+                        <a:latin typeface="Google Sans" charset="0"/>
+                        <a:ea typeface="Google Sans" charset="0"/>
+                        <a:cs typeface="Google Sans" charset="0"/>
+                      </a:endParaRPr>
+                    </a:p>
+                  </a:txBody>
+                  <a:tcPr marL="91440" marR="91440" marT="45720" marB="45720" anchor="ctr">
+                    <a:lnL w="9525" cap="flat" cmpd="sng" algn="ctr">
+                      <a:solidFill>
+                        <a:srgbClr val="DADCE0"/>
+                      </a:solidFill>
+                      <a:prstDash val="solid"/>
+                      <a:round/>
+                      <a:headEnd type="none" w="med" len="med"/>
+                      <a:tailEnd type="none" w="med" len="med"/>
+                    </a:lnL>
+                    <a:lnR w="9525" cap="flat" cmpd="sng" algn="ctr">
+                      <a:solidFill>
+                        <a:srgbClr val="DADCE0"/>
+                      </a:solidFill>
+                      <a:prstDash val="solid"/>
+                      <a:round/>
+                      <a:headEnd type="none" w="med" len="med"/>
+                      <a:tailEnd type="none" w="med" len="med"/>
+                    </a:lnR>
+                    <a:lnT w="9525" cap="flat" cmpd="sng" algn="ctr">
+                      <a:solidFill>
+                        <a:srgbClr val="DADCE0"/>
+                      </a:solidFill>
+                      <a:prstDash val="solid"/>
+                      <a:round/>
+                      <a:headEnd type="none" w="med" len="med"/>
+                      <a:tailEnd type="none" w="med" len="med"/>
+                    </a:lnT>
+                    <a:lnB w="9525" cap="flat" cmpd="sng" algn="ctr">
+                      <a:solidFill>
+                        <a:srgbClr val="DADCE0"/>
+                      </a:solidFill>
+                      <a:prstDash val="solid"/>
+                      <a:round/>
+                      <a:headEnd type="none" w="med" len="med"/>
+                      <a:tailEnd type="none" w="med" len="med"/>
+                    </a:lnB>
+                    <a:solidFill>
+                      <a:srgbClr val="FFFFFF"/>
+                    </a:solidFill>
+                  </a:tcPr>
+                </a:tc>
+                <a:tc>
+                  <a:txBody>
+                    <a:bodyPr/>
+                    <a:lstStyle/>
+                    <a:p>
+                      <a:pPr indent="0" marL="0">
+                        <a:buNone/>
+                      </a:pPr>
+                      <a:r>
+                        <a:rPr lang="en-US" sz="760" dirty="0">
+                          <a:solidFill>
+                            <a:srgbClr val="5F6368"/>
+                          </a:solidFill>
+                          <a:latin typeface="Roboto" pitchFamily="34" charset="0"/>
+                          <a:ea typeface="Roboto" pitchFamily="34" charset="-122"/>
+                          <a:cs typeface="Roboto" pitchFamily="34" charset="-120"/>
+                        </a:rPr>
+                        <a:t>Two separate URLs &amp; codebases (app.cymbal.cloud vs. {tenant}.cymbal.cloud)</a:t>
+                      </a:r>
+                      <a:endParaRPr lang="en-US" sz="760" dirty="0">
+                        <a:latin typeface="Roboto" charset="0"/>
+                        <a:ea typeface="Roboto" charset="0"/>
+                        <a:cs typeface="Roboto" charset="0"/>
+                      </a:endParaRPr>
+                    </a:p>
+                  </a:txBody>
+                  <a:tcPr marL="91440" marR="91440" marT="45720" marB="45720" anchor="ctr">
+                    <a:lnL w="9525" cap="flat" cmpd="sng" algn="ctr">
+                      <a:solidFill>
+                        <a:srgbClr val="DADCE0"/>
+                      </a:solidFill>
+                      <a:prstDash val="solid"/>
+                      <a:round/>
+                      <a:headEnd type="none" w="med" len="med"/>
+                      <a:tailEnd type="none" w="med" len="med"/>
+                    </a:lnL>
+                    <a:lnR w="9525" cap="flat" cmpd="sng" algn="ctr">
+                      <a:solidFill>
+                        <a:srgbClr val="DADCE0"/>
+                      </a:solidFill>
+                      <a:prstDash val="solid"/>
+                      <a:round/>
+                      <a:headEnd type="none" w="med" len="med"/>
+                      <a:tailEnd type="none" w="med" len="med"/>
+                    </a:lnR>
+                    <a:lnT w="9525" cap="flat" cmpd="sng" algn="ctr">
+                      <a:solidFill>
+                        <a:srgbClr val="DADCE0"/>
+                      </a:solidFill>
+                      <a:prstDash val="solid"/>
+                      <a:round/>
+                      <a:headEnd type="none" w="med" len="med"/>
+                      <a:tailEnd type="none" w="med" len="med"/>
+                    </a:lnT>
+                    <a:lnB w="9525" cap="flat" cmpd="sng" algn="ctr">
+                      <a:solidFill>
+                        <a:srgbClr val="DADCE0"/>
+                      </a:solidFill>
+                      <a:prstDash val="solid"/>
+                      <a:round/>
+                      <a:headEnd type="none" w="med" len="med"/>
+                      <a:tailEnd type="none" w="med" len="med"/>
+                    </a:lnB>
+                    <a:solidFill>
+                      <a:srgbClr val="FFFFFF"/>
+                    </a:solidFill>
+                  </a:tcPr>
+                </a:tc>
+                <a:tc>
+                  <a:txBody>
+                    <a:bodyPr/>
+                    <a:lstStyle/>
+                    <a:p>
+                      <a:pPr indent="0" marL="0">
+                        <a:buNone/>
+                      </a:pPr>
+                      <a:r>
+                        <a:rPr lang="en-US" sz="760" dirty="0">
+                          <a:solidFill>
+                            <a:srgbClr val="5F6368"/>
+                          </a:solidFill>
+                          <a:latin typeface="Roboto" pitchFamily="34" charset="0"/>
+                          <a:ea typeface="Roboto" pitchFamily="34" charset="-122"/>
+                          <a:cs typeface="Roboto" pitchFamily="34" charset="-120"/>
+                        </a:rPr>
+                        <a:t>Single Hub ALB, but flat Layer-3 routed network across tenant projects</a:t>
+                      </a:r>
+                      <a:endParaRPr lang="en-US" sz="760" dirty="0">
+                        <a:latin typeface="Roboto" charset="0"/>
+                        <a:ea typeface="Roboto" charset="0"/>
+                        <a:cs typeface="Roboto" charset="0"/>
+                      </a:endParaRPr>
+                    </a:p>
+                  </a:txBody>
+                  <a:tcPr marL="91440" marR="91440" marT="45720" marB="45720" anchor="ctr">
+                    <a:lnL w="9525" cap="flat" cmpd="sng" algn="ctr">
+                      <a:solidFill>
+                        <a:srgbClr val="DADCE0"/>
+                      </a:solidFill>
+                      <a:prstDash val="solid"/>
+                      <a:round/>
+                      <a:headEnd type="none" w="med" len="med"/>
+                      <a:tailEnd type="none" w="med" len="med"/>
+                    </a:lnL>
+                    <a:lnR w="9525" cap="flat" cmpd="sng" algn="ctr">
+                      <a:solidFill>
+                        <a:srgbClr val="DADCE0"/>
+                      </a:solidFill>
+                      <a:prstDash val="solid"/>
+                      <a:round/>
+                      <a:headEnd type="none" w="med" len="med"/>
+                      <a:tailEnd type="none" w="med" len="med"/>
+                    </a:lnR>
+                    <a:lnT w="9525" cap="flat" cmpd="sng" algn="ctr">
+                      <a:solidFill>
+                        <a:srgbClr val="DADCE0"/>
+                      </a:solidFill>
+                      <a:prstDash val="solid"/>
+                      <a:round/>
+                      <a:headEnd type="none" w="med" len="med"/>
+                      <a:tailEnd type="none" w="med" len="med"/>
+                    </a:lnT>
+                    <a:lnB w="9525" cap="flat" cmpd="sng" algn="ctr">
+                      <a:solidFill>
+                        <a:srgbClr val="DADCE0"/>
+                      </a:solidFill>
+                      <a:prstDash val="solid"/>
+                      <a:round/>
+                      <a:headEnd type="none" w="med" len="med"/>
+                      <a:tailEnd type="none" w="med" len="med"/>
+                    </a:lnB>
+                    <a:solidFill>
+                      <a:srgbClr val="FFFFFF"/>
+                    </a:solidFill>
+                  </a:tcPr>
+                </a:tc>
+                <a:tc>
+                  <a:txBody>
+                    <a:bodyPr/>
+                    <a:lstStyle/>
+                    <a:p>
+                      <a:pPr indent="0" marL="0">
+                        <a:buNone/>
+                      </a:pPr>
+                      <a:r>
+                        <a:rPr lang="en-US" sz="760" dirty="0">
+                          <a:solidFill>
+                            <a:srgbClr val="5F6368"/>
+                          </a:solidFill>
+                          <a:latin typeface="Roboto" pitchFamily="34" charset="0"/>
+                          <a:ea typeface="Roboto" pitchFamily="34" charset="-122"/>
+                          <a:cs typeface="Roboto" pitchFamily="34" charset="-120"/>
+                        </a:rPr>
+                        <a:t>Single SaaS URL (agents.cymbal.cloud) + Hop 1 Firestore cryptographic tier router</a:t>
+                      </a:r>
+                      <a:endParaRPr lang="en-US" sz="760" dirty="0">
+                        <a:latin typeface="Roboto" charset="0"/>
+                        <a:ea typeface="Roboto" charset="0"/>
+                        <a:cs typeface="Roboto" charset="0"/>
+                      </a:endParaRPr>
+                    </a:p>
+                  </a:txBody>
+                  <a:tcPr marL="91440" marR="91440" marT="45720" marB="45720" anchor="ctr">
+                    <a:lnL w="9525" cap="flat" cmpd="sng" algn="ctr">
+                      <a:solidFill>
+                        <a:srgbClr val="DADCE0"/>
+                      </a:solidFill>
+                      <a:prstDash val="solid"/>
+                      <a:round/>
+                      <a:headEnd type="none" w="med" len="med"/>
+                      <a:tailEnd type="none" w="med" len="med"/>
+                    </a:lnL>
+                    <a:lnR w="9525" cap="flat" cmpd="sng" algn="ctr">
+                      <a:solidFill>
+                        <a:srgbClr val="DADCE0"/>
+                      </a:solidFill>
+                      <a:prstDash val="solid"/>
+                      <a:round/>
+                      <a:headEnd type="none" w="med" len="med"/>
+                      <a:tailEnd type="none" w="med" len="med"/>
+                    </a:lnR>
+                    <a:lnT w="9525" cap="flat" cmpd="sng" algn="ctr">
+                      <a:solidFill>
+                        <a:srgbClr val="DADCE0"/>
+                      </a:solidFill>
+                      <a:prstDash val="solid"/>
+                      <a:round/>
+                      <a:headEnd type="none" w="med" len="med"/>
+                      <a:tailEnd type="none" w="med" len="med"/>
+                    </a:lnT>
+                    <a:lnB w="9525" cap="flat" cmpd="sng" algn="ctr">
+                      <a:solidFill>
+                        <a:srgbClr val="DADCE0"/>
+                      </a:solidFill>
+                      <a:prstDash val="solid"/>
+                      <a:round/>
+                      <a:headEnd type="none" w="med" len="med"/>
+                      <a:tailEnd type="none" w="med" len="med"/>
+                    </a:lnB>
+                    <a:solidFill>
+                      <a:srgbClr val="FFFFFF"/>
+                    </a:solidFill>
+                  </a:tcPr>
+                </a:tc>
+              </a:tr>
+              <a:tr h="0">
+                <a:tc>
+                  <a:txBody>
+                    <a:bodyPr/>
+                    <a:lstStyle/>
+                    <a:p>
+                      <a:pPr indent="0" marL="0">
+                        <a:buNone/>
+                      </a:pPr>
+                      <a:r>
+                        <a:rPr lang="en-US" sz="780" b="1" dirty="0">
+                          <a:solidFill>
+                            <a:srgbClr val="3C4043"/>
+                          </a:solidFill>
+                          <a:latin typeface="Google Sans" pitchFamily="34" charset="0"/>
+                          <a:ea typeface="Google Sans" pitchFamily="34" charset="-122"/>
+                          <a:cs typeface="Google Sans" pitchFamily="34" charset="-120"/>
+                        </a:rPr>
+                        <a:t>Cross-project network topology</a:t>
+                      </a:r>
+                      <a:endParaRPr lang="en-US" sz="780" dirty="0">
+                        <a:latin typeface="Google Sans" charset="0"/>
+                        <a:ea typeface="Google Sans" charset="0"/>
+                        <a:cs typeface="Google Sans" charset="0"/>
+                      </a:endParaRPr>
+                    </a:p>
+                  </a:txBody>
+                  <a:tcPr marL="91440" marR="91440" marT="45720" marB="45720" anchor="ctr">
+                    <a:lnL w="9525" cap="flat" cmpd="sng" algn="ctr">
+                      <a:solidFill>
+                        <a:srgbClr val="DADCE0"/>
+                      </a:solidFill>
+                      <a:prstDash val="solid"/>
+                      <a:round/>
+                      <a:headEnd type="none" w="med" len="med"/>
+                      <a:tailEnd type="none" w="med" len="med"/>
+                    </a:lnL>
+                    <a:lnR w="9525" cap="flat" cmpd="sng" algn="ctr">
+                      <a:solidFill>
+                        <a:srgbClr val="DADCE0"/>
+                      </a:solidFill>
+                      <a:prstDash val="solid"/>
+                      <a:round/>
+                      <a:headEnd type="none" w="med" len="med"/>
+                      <a:tailEnd type="none" w="med" len="med"/>
+                    </a:lnR>
+                    <a:lnT w="9525" cap="flat" cmpd="sng" algn="ctr">
+                      <a:solidFill>
+                        <a:srgbClr val="DADCE0"/>
+                      </a:solidFill>
+                      <a:prstDash val="solid"/>
+                      <a:round/>
+                      <a:headEnd type="none" w="med" len="med"/>
+                      <a:tailEnd type="none" w="med" len="med"/>
+                    </a:lnT>
+                    <a:lnB w="9525" cap="flat" cmpd="sng" algn="ctr">
+                      <a:solidFill>
+                        <a:srgbClr val="DADCE0"/>
+                      </a:solidFill>
+                      <a:prstDash val="solid"/>
+                      <a:round/>
+                      <a:headEnd type="none" w="med" len="med"/>
+                      <a:tailEnd type="none" w="med" len="med"/>
+                    </a:lnB>
+                    <a:solidFill>
+                      <a:srgbClr val="F8F9FA"/>
+                    </a:solidFill>
+                  </a:tcPr>
+                </a:tc>
+                <a:tc>
+                  <a:txBody>
+                    <a:bodyPr/>
+                    <a:lstStyle/>
+                    <a:p>
+                      <a:pPr indent="0" marL="0">
+                        <a:buNone/>
+                      </a:pPr>
+                      <a:r>
+                        <a:rPr lang="en-US" sz="760" dirty="0">
+                          <a:solidFill>
+                            <a:srgbClr val="5F6368"/>
+                          </a:solidFill>
+                          <a:latin typeface="Roboto" pitchFamily="34" charset="0"/>
+                          <a:ea typeface="Roboto" pitchFamily="34" charset="-122"/>
+                          <a:cs typeface="Roboto" pitchFamily="34" charset="-120"/>
+                        </a:rPr>
+                        <a:t>Public internet egress or manual per-customer IPsec VPN tunnels</a:t>
+                      </a:r>
+                      <a:endParaRPr lang="en-US" sz="760" dirty="0">
+                        <a:latin typeface="Roboto" charset="0"/>
+                        <a:ea typeface="Roboto" charset="0"/>
+                        <a:cs typeface="Roboto" charset="0"/>
+                      </a:endParaRPr>
+                    </a:p>
+                  </a:txBody>
+                  <a:tcPr marL="91440" marR="91440" marT="45720" marB="45720" anchor="ctr">
+                    <a:lnL w="9525" cap="flat" cmpd="sng" algn="ctr">
+                      <a:solidFill>
+                        <a:srgbClr val="DADCE0"/>
+                      </a:solidFill>
+                      <a:prstDash val="solid"/>
+                      <a:round/>
+                      <a:headEnd type="none" w="med" len="med"/>
+                      <a:tailEnd type="none" w="med" len="med"/>
+                    </a:lnL>
+                    <a:lnR w="9525" cap="flat" cmpd="sng" algn="ctr">
+                      <a:solidFill>
+                        <a:srgbClr val="DADCE0"/>
+                      </a:solidFill>
+                      <a:prstDash val="solid"/>
+                      <a:round/>
+                      <a:headEnd type="none" w="med" len="med"/>
+                      <a:tailEnd type="none" w="med" len="med"/>
+                    </a:lnR>
+                    <a:lnT w="9525" cap="flat" cmpd="sng" algn="ctr">
+                      <a:solidFill>
+                        <a:srgbClr val="DADCE0"/>
+                      </a:solidFill>
+                      <a:prstDash val="solid"/>
+                      <a:round/>
+                      <a:headEnd type="none" w="med" len="med"/>
+                      <a:tailEnd type="none" w="med" len="med"/>
+                    </a:lnT>
+                    <a:lnB w="9525" cap="flat" cmpd="sng" algn="ctr">
+                      <a:solidFill>
+                        <a:srgbClr val="DADCE0"/>
+                      </a:solidFill>
+                      <a:prstDash val="solid"/>
+                      <a:round/>
+                      <a:headEnd type="none" w="med" len="med"/>
+                      <a:tailEnd type="none" w="med" len="med"/>
+                    </a:lnB>
+                    <a:solidFill>
+                      <a:srgbClr val="F8F9FA"/>
+                    </a:solidFill>
+                  </a:tcPr>
+                </a:tc>
+                <a:tc>
+                  <a:txBody>
+                    <a:bodyPr/>
+                    <a:lstStyle/>
+                    <a:p>
+                      <a:pPr indent="0" marL="0">
+                        <a:buNone/>
+                      </a:pPr>
+                      <a:r>
+                        <a:rPr lang="en-US" sz="760" dirty="0">
+                          <a:solidFill>
+                            <a:srgbClr val="5F6368"/>
+                          </a:solidFill>
+                          <a:latin typeface="Roboto" pitchFamily="34" charset="0"/>
+                          <a:ea typeface="Roboto" pitchFamily="34" charset="-122"/>
+                          <a:cs typeface="Roboto" pitchFamily="34" charset="-120"/>
+                        </a:rPr>
+                        <a:t>Bidirectional VPC Peering (hard 25-peer quota limit per Hub VPC)</a:t>
+                      </a:r>
+                      <a:endParaRPr lang="en-US" sz="760" dirty="0">
+                        <a:latin typeface="Roboto" charset="0"/>
+                        <a:ea typeface="Roboto" charset="0"/>
+                        <a:cs typeface="Roboto" charset="0"/>
+                      </a:endParaRPr>
+                    </a:p>
+                  </a:txBody>
+                  <a:tcPr marL="91440" marR="91440" marT="45720" marB="45720" anchor="ctr">
+                    <a:lnL w="9525" cap="flat" cmpd="sng" algn="ctr">
+                      <a:solidFill>
+                        <a:srgbClr val="DADCE0"/>
+                      </a:solidFill>
+                      <a:prstDash val="solid"/>
+                      <a:round/>
+                      <a:headEnd type="none" w="med" len="med"/>
+                      <a:tailEnd type="none" w="med" len="med"/>
+                    </a:lnL>
+                    <a:lnR w="9525" cap="flat" cmpd="sng" algn="ctr">
+                      <a:solidFill>
+                        <a:srgbClr val="DADCE0"/>
+                      </a:solidFill>
+                      <a:prstDash val="solid"/>
+                      <a:round/>
+                      <a:headEnd type="none" w="med" len="med"/>
+                      <a:tailEnd type="none" w="med" len="med"/>
+                    </a:lnR>
+                    <a:lnT w="9525" cap="flat" cmpd="sng" algn="ctr">
+                      <a:solidFill>
+                        <a:srgbClr val="DADCE0"/>
+                      </a:solidFill>
+                      <a:prstDash val="solid"/>
+                      <a:round/>
+                      <a:headEnd type="none" w="med" len="med"/>
+                      <a:tailEnd type="none" w="med" len="med"/>
+                    </a:lnT>
+                    <a:lnB w="9525" cap="flat" cmpd="sng" algn="ctr">
+                      <a:solidFill>
+                        <a:srgbClr val="DADCE0"/>
+                      </a:solidFill>
+                      <a:prstDash val="solid"/>
+                      <a:round/>
+                      <a:headEnd type="none" w="med" len="med"/>
+                      <a:tailEnd type="none" w="med" len="med"/>
+                    </a:lnB>
+                    <a:solidFill>
+                      <a:srgbClr val="F8F9FA"/>
+                    </a:solidFill>
+                  </a:tcPr>
+                </a:tc>
+                <a:tc>
+                  <a:txBody>
+                    <a:bodyPr/>
+                    <a:lstStyle/>
+                    <a:p>
+                      <a:pPr indent="0" marL="0">
+                        <a:buNone/>
+                      </a:pPr>
+                      <a:r>
+                        <a:rPr lang="en-US" sz="760" dirty="0">
+                          <a:solidFill>
+                            <a:srgbClr val="5F6368"/>
+                          </a:solidFill>
+                          <a:latin typeface="Roboto" pitchFamily="34" charset="0"/>
+                          <a:ea typeface="Roboto" pitchFamily="34" charset="-122"/>
+                          <a:cs typeface="Roboto" pitchFamily="34" charset="-120"/>
+                        </a:rPr>
+                        <a:t>Unidirectional PSC Consumer (10.10.0.50) -&gt; Spoke ServiceAttachment (1,000+ spokes)</a:t>
+                      </a:r>
+                      <a:endParaRPr lang="en-US" sz="760" dirty="0">
+                        <a:latin typeface="Roboto" charset="0"/>
+                        <a:ea typeface="Roboto" charset="0"/>
+                        <a:cs typeface="Roboto" charset="0"/>
+                      </a:endParaRPr>
+                    </a:p>
+                  </a:txBody>
+                  <a:tcPr marL="91440" marR="91440" marT="45720" marB="45720" anchor="ctr">
+                    <a:lnL w="9525" cap="flat" cmpd="sng" algn="ctr">
+                      <a:solidFill>
+                        <a:srgbClr val="DADCE0"/>
+                      </a:solidFill>
+                      <a:prstDash val="solid"/>
+                      <a:round/>
+                      <a:headEnd type="none" w="med" len="med"/>
+                      <a:tailEnd type="none" w="med" len="med"/>
+                    </a:lnL>
+                    <a:lnR w="9525" cap="flat" cmpd="sng" algn="ctr">
+                      <a:solidFill>
+                        <a:srgbClr val="DADCE0"/>
+                      </a:solidFill>
+                      <a:prstDash val="solid"/>
+                      <a:round/>
+                      <a:headEnd type="none" w="med" len="med"/>
+                      <a:tailEnd type="none" w="med" len="med"/>
+                    </a:lnR>
+                    <a:lnT w="9525" cap="flat" cmpd="sng" algn="ctr">
+                      <a:solidFill>
+                        <a:srgbClr val="DADCE0"/>
+                      </a:solidFill>
+                      <a:prstDash val="solid"/>
+                      <a:round/>
+                      <a:headEnd type="none" w="med" len="med"/>
+                      <a:tailEnd type="none" w="med" len="med"/>
+                    </a:lnT>
+                    <a:lnB w="9525" cap="flat" cmpd="sng" algn="ctr">
+                      <a:solidFill>
+                        <a:srgbClr val="DADCE0"/>
+                      </a:solidFill>
+                      <a:prstDash val="solid"/>
+                      <a:round/>
+                      <a:headEnd type="none" w="med" len="med"/>
+                      <a:tailEnd type="none" w="med" len="med"/>
+                    </a:lnB>
+                    <a:solidFill>
+                      <a:srgbClr val="F8F9FA"/>
+                    </a:solidFill>
+                  </a:tcPr>
+                </a:tc>
+              </a:tr>
+              <a:tr h="0">
+                <a:tc>
+                  <a:txBody>
+                    <a:bodyPr/>
+                    <a:lstStyle/>
+                    <a:p>
+                      <a:pPr indent="0" marL="0">
+                        <a:buNone/>
+                      </a:pPr>
+                      <a:r>
+                        <a:rPr lang="en-US" sz="780" b="1" dirty="0">
+                          <a:solidFill>
+                            <a:srgbClr val="3C4043"/>
+                          </a:solidFill>
+                          <a:latin typeface="Google Sans" pitchFamily="34" charset="0"/>
+                          <a:ea typeface="Google Sans" pitchFamily="34" charset="-122"/>
+                          <a:cs typeface="Google Sans" pitchFamily="34" charset="-120"/>
+                        </a:rPr>
+                        <a:t>IP address &amp; CIDR management</a:t>
+                      </a:r>
+                      <a:endParaRPr lang="en-US" sz="780" dirty="0">
+                        <a:latin typeface="Google Sans" charset="0"/>
+                        <a:ea typeface="Google Sans" charset="0"/>
+                        <a:cs typeface="Google Sans" charset="0"/>
+                      </a:endParaRPr>
+                    </a:p>
+                  </a:txBody>
+                  <a:tcPr marL="91440" marR="91440" marT="45720" marB="45720" anchor="ctr">
+                    <a:lnL w="9525" cap="flat" cmpd="sng" algn="ctr">
+                      <a:solidFill>
+                        <a:srgbClr val="DADCE0"/>
+                      </a:solidFill>
+                      <a:prstDash val="solid"/>
+                      <a:round/>
+                      <a:headEnd type="none" w="med" len="med"/>
+                      <a:tailEnd type="none" w="med" len="med"/>
+                    </a:lnL>
+                    <a:lnR w="9525" cap="flat" cmpd="sng" algn="ctr">
+                      <a:solidFill>
+                        <a:srgbClr val="DADCE0"/>
+                      </a:solidFill>
+                      <a:prstDash val="solid"/>
+                      <a:round/>
+                      <a:headEnd type="none" w="med" len="med"/>
+                      <a:tailEnd type="none" w="med" len="med"/>
+                    </a:lnR>
+                    <a:lnT w="9525" cap="flat" cmpd="sng" algn="ctr">
+                      <a:solidFill>
+                        <a:srgbClr val="DADCE0"/>
+                      </a:solidFill>
+                      <a:prstDash val="solid"/>
+                      <a:round/>
+                      <a:headEnd type="none" w="med" len="med"/>
+                      <a:tailEnd type="none" w="med" len="med"/>
+                    </a:lnT>
+                    <a:lnB w="9525" cap="flat" cmpd="sng" algn="ctr">
+                      <a:solidFill>
+                        <a:srgbClr val="DADCE0"/>
+                      </a:solidFill>
+                      <a:prstDash val="solid"/>
+                      <a:round/>
+                      <a:headEnd type="none" w="med" len="med"/>
+                      <a:tailEnd type="none" w="med" len="med"/>
+                    </a:lnB>
+                    <a:solidFill>
+                      <a:srgbClr val="FFFFFF"/>
+                    </a:solidFill>
+                  </a:tcPr>
+                </a:tc>
+                <a:tc>
+                  <a:txBody>
+                    <a:bodyPr/>
+                    <a:lstStyle/>
+                    <a:p>
+                      <a:pPr indent="0" marL="0">
+                        <a:buNone/>
+                      </a:pPr>
+                      <a:r>
+                        <a:rPr lang="en-US" sz="760" dirty="0">
+                          <a:solidFill>
+                            <a:srgbClr val="5F6368"/>
+                          </a:solidFill>
+                          <a:latin typeface="Roboto" pitchFamily="34" charset="0"/>
+                          <a:ea typeface="Roboto" pitchFamily="34" charset="-122"/>
+                          <a:cs typeface="Roboto" pitchFamily="34" charset="-120"/>
+                        </a:rPr>
+                        <a:t>Manual non-overlapping CIDR spreadsheet per enterprise customer</a:t>
+                      </a:r>
+                      <a:endParaRPr lang="en-US" sz="760" dirty="0">
+                        <a:latin typeface="Roboto" charset="0"/>
+                        <a:ea typeface="Roboto" charset="0"/>
+                        <a:cs typeface="Roboto" charset="0"/>
+                      </a:endParaRPr>
+                    </a:p>
+                  </a:txBody>
+                  <a:tcPr marL="91440" marR="91440" marT="45720" marB="45720" anchor="ctr">
+                    <a:lnL w="9525" cap="flat" cmpd="sng" algn="ctr">
+                      <a:solidFill>
+                        <a:srgbClr val="DADCE0"/>
+                      </a:solidFill>
+                      <a:prstDash val="solid"/>
+                      <a:round/>
+                      <a:headEnd type="none" w="med" len="med"/>
+                      <a:tailEnd type="none" w="med" len="med"/>
+                    </a:lnL>
+                    <a:lnR w="9525" cap="flat" cmpd="sng" algn="ctr">
+                      <a:solidFill>
+                        <a:srgbClr val="DADCE0"/>
+                      </a:solidFill>
+                      <a:prstDash val="solid"/>
+                      <a:round/>
+                      <a:headEnd type="none" w="med" len="med"/>
+                      <a:tailEnd type="none" w="med" len="med"/>
+                    </a:lnR>
+                    <a:lnT w="9525" cap="flat" cmpd="sng" algn="ctr">
+                      <a:solidFill>
+                        <a:srgbClr val="DADCE0"/>
+                      </a:solidFill>
+                      <a:prstDash val="solid"/>
+                      <a:round/>
+                      <a:headEnd type="none" w="med" len="med"/>
+                      <a:tailEnd type="none" w="med" len="med"/>
+                    </a:lnT>
+                    <a:lnB w="9525" cap="flat" cmpd="sng" algn="ctr">
+                      <a:solidFill>
+                        <a:srgbClr val="DADCE0"/>
+                      </a:solidFill>
+                      <a:prstDash val="solid"/>
+                      <a:round/>
+                      <a:headEnd type="none" w="med" len="med"/>
+                      <a:tailEnd type="none" w="med" len="med"/>
+                    </a:lnB>
+                    <a:solidFill>
+                      <a:srgbClr val="FFFFFF"/>
+                    </a:solidFill>
+                  </a:tcPr>
+                </a:tc>
+                <a:tc>
+                  <a:txBody>
+                    <a:bodyPr/>
+                    <a:lstStyle/>
+                    <a:p>
+                      <a:pPr indent="0" marL="0">
+                        <a:buNone/>
+                      </a:pPr>
+                      <a:r>
+                        <a:rPr lang="en-US" sz="760" dirty="0">
+                          <a:solidFill>
+                            <a:srgbClr val="5F6368"/>
+                          </a:solidFill>
+                          <a:latin typeface="Roboto" pitchFamily="34" charset="0"/>
+                          <a:ea typeface="Roboto" pitchFamily="34" charset="-122"/>
+                          <a:cs typeface="Roboto" pitchFamily="34" charset="-120"/>
+                        </a:rPr>
+                        <a:t>Every spoke requires globally unique RFC 1918 subnets (CIDR exhaustion)</a:t>
+                      </a:r>
+                      <a:endParaRPr lang="en-US" sz="760" dirty="0">
+                        <a:latin typeface="Roboto" charset="0"/>
+                        <a:ea typeface="Roboto" charset="0"/>
+                        <a:cs typeface="Roboto" charset="0"/>
+                      </a:endParaRPr>
+                    </a:p>
+                  </a:txBody>
+                  <a:tcPr marL="91440" marR="91440" marT="45720" marB="45720" anchor="ctr">
+                    <a:lnL w="9525" cap="flat" cmpd="sng" algn="ctr">
+                      <a:solidFill>
+                        <a:srgbClr val="DADCE0"/>
+                      </a:solidFill>
+                      <a:prstDash val="solid"/>
+                      <a:round/>
+                      <a:headEnd type="none" w="med" len="med"/>
+                      <a:tailEnd type="none" w="med" len="med"/>
+                    </a:lnL>
+                    <a:lnR w="9525" cap="flat" cmpd="sng" algn="ctr">
+                      <a:solidFill>
+                        <a:srgbClr val="DADCE0"/>
+                      </a:solidFill>
+                      <a:prstDash val="solid"/>
+                      <a:round/>
+                      <a:headEnd type="none" w="med" len="med"/>
+                      <a:tailEnd type="none" w="med" len="med"/>
+                    </a:lnR>
+                    <a:lnT w="9525" cap="flat" cmpd="sng" algn="ctr">
+                      <a:solidFill>
+                        <a:srgbClr val="DADCE0"/>
+                      </a:solidFill>
+                      <a:prstDash val="solid"/>
+                      <a:round/>
+                      <a:headEnd type="none" w="med" len="med"/>
+                      <a:tailEnd type="none" w="med" len="med"/>
+                    </a:lnT>
+                    <a:lnB w="9525" cap="flat" cmpd="sng" algn="ctr">
+                      <a:solidFill>
+                        <a:srgbClr val="DADCE0"/>
+                      </a:solidFill>
+                      <a:prstDash val="solid"/>
+                      <a:round/>
+                      <a:headEnd type="none" w="med" len="med"/>
+                      <a:tailEnd type="none" w="med" len="med"/>
+                    </a:lnB>
+                    <a:solidFill>
+                      <a:srgbClr val="FFFFFF"/>
+                    </a:solidFill>
+                  </a:tcPr>
+                </a:tc>
+                <a:tc>
+                  <a:txBody>
+                    <a:bodyPr/>
+                    <a:lstStyle/>
+                    <a:p>
+                      <a:pPr indent="0" marL="0">
+                        <a:buNone/>
+                      </a:pPr>
+                      <a:r>
+                        <a:rPr lang="en-US" sz="760" dirty="0">
+                          <a:solidFill>
+                            <a:srgbClr val="5F6368"/>
+                          </a:solidFill>
+                          <a:latin typeface="Roboto" pitchFamily="34" charset="0"/>
+                          <a:ea typeface="Roboto" pitchFamily="34" charset="-122"/>
+                          <a:cs typeface="Roboto" pitchFamily="34" charset="-120"/>
+                        </a:rPr>
+                        <a:t>Zero CIDR overlap: /24 PSC NAT allows all spokes to reuse identical 10.40.0.0/20</a:t>
+                      </a:r>
+                      <a:endParaRPr lang="en-US" sz="760" dirty="0">
+                        <a:latin typeface="Roboto" charset="0"/>
+                        <a:ea typeface="Roboto" charset="0"/>
+                        <a:cs typeface="Roboto" charset="0"/>
+                      </a:endParaRPr>
+                    </a:p>
+                  </a:txBody>
+                  <a:tcPr marL="91440" marR="91440" marT="45720" marB="45720" anchor="ctr">
+                    <a:lnL w="9525" cap="flat" cmpd="sng" algn="ctr">
+                      <a:solidFill>
+                        <a:srgbClr val="DADCE0"/>
+                      </a:solidFill>
+                      <a:prstDash val="solid"/>
+                      <a:round/>
+                      <a:headEnd type="none" w="med" len="med"/>
+                      <a:tailEnd type="none" w="med" len="med"/>
+                    </a:lnL>
+                    <a:lnR w="9525" cap="flat" cmpd="sng" algn="ctr">
+                      <a:solidFill>
+                        <a:srgbClr val="DADCE0"/>
+                      </a:solidFill>
+                      <a:prstDash val="solid"/>
+                      <a:round/>
+                      <a:headEnd type="none" w="med" len="med"/>
+                      <a:tailEnd type="none" w="med" len="med"/>
+                    </a:lnR>
+                    <a:lnT w="9525" cap="flat" cmpd="sng" algn="ctr">
+                      <a:solidFill>
+                        <a:srgbClr val="DADCE0"/>
+                      </a:solidFill>
+                      <a:prstDash val="solid"/>
+                      <a:round/>
+                      <a:headEnd type="none" w="med" len="med"/>
+                      <a:tailEnd type="none" w="med" len="med"/>
+                    </a:lnT>
+                    <a:lnB w="9525" cap="flat" cmpd="sng" algn="ctr">
+                      <a:solidFill>
+                        <a:srgbClr val="DADCE0"/>
+                      </a:solidFill>
+                      <a:prstDash val="solid"/>
+                      <a:round/>
+                      <a:headEnd type="none" w="med" len="med"/>
+                      <a:tailEnd type="none" w="med" len="med"/>
+                    </a:lnB>
+                    <a:solidFill>
+                      <a:srgbClr val="FFFFFF"/>
+                    </a:solidFill>
+                  </a:tcPr>
+                </a:tc>
+              </a:tr>
+              <a:tr h="0">
+                <a:tc>
+                  <a:txBody>
+                    <a:bodyPr/>
+                    <a:lstStyle/>
+                    <a:p>
+                      <a:pPr indent="0" marL="0">
+                        <a:buNone/>
+                      </a:pPr>
+                      <a:r>
+                        <a:rPr lang="en-US" sz="780" b="1" dirty="0">
+                          <a:solidFill>
+                            <a:srgbClr val="3C4043"/>
+                          </a:solidFill>
+                          <a:latin typeface="Google Sans" pitchFamily="34" charset="0"/>
+                          <a:ea typeface="Google Sans" pitchFamily="34" charset="-122"/>
+                          <a:cs typeface="Google Sans" pitchFamily="34" charset="-120"/>
+                        </a:rPr>
+                        <a:t>Lateral movement blast radius</a:t>
+                      </a:r>
+                      <a:endParaRPr lang="en-US" sz="780" dirty="0">
+                        <a:latin typeface="Google Sans" charset="0"/>
+                        <a:ea typeface="Google Sans" charset="0"/>
+                        <a:cs typeface="Google Sans" charset="0"/>
+                      </a:endParaRPr>
+                    </a:p>
+                  </a:txBody>
+                  <a:tcPr marL="91440" marR="91440" marT="45720" marB="45720" anchor="ctr">
+                    <a:lnL w="9525" cap="flat" cmpd="sng" algn="ctr">
+                      <a:solidFill>
+                        <a:srgbClr val="DADCE0"/>
+                      </a:solidFill>
+                      <a:prstDash val="solid"/>
+                      <a:round/>
+                      <a:headEnd type="none" w="med" len="med"/>
+                      <a:tailEnd type="none" w="med" len="med"/>
+                    </a:lnL>
+                    <a:lnR w="9525" cap="flat" cmpd="sng" algn="ctr">
+                      <a:solidFill>
+                        <a:srgbClr val="DADCE0"/>
+                      </a:solidFill>
+                      <a:prstDash val="solid"/>
+                      <a:round/>
+                      <a:headEnd type="none" w="med" len="med"/>
+                      <a:tailEnd type="none" w="med" len="med"/>
+                    </a:lnR>
+                    <a:lnT w="9525" cap="flat" cmpd="sng" algn="ctr">
+                      <a:solidFill>
+                        <a:srgbClr val="DADCE0"/>
+                      </a:solidFill>
+                      <a:prstDash val="solid"/>
+                      <a:round/>
+                      <a:headEnd type="none" w="med" len="med"/>
+                      <a:tailEnd type="none" w="med" len="med"/>
+                    </a:lnT>
+                    <a:lnB w="9525" cap="flat" cmpd="sng" algn="ctr">
+                      <a:solidFill>
+                        <a:srgbClr val="DADCE0"/>
+                      </a:solidFill>
+                      <a:prstDash val="solid"/>
+                      <a:round/>
+                      <a:headEnd type="none" w="med" len="med"/>
+                      <a:tailEnd type="none" w="med" len="med"/>
+                    </a:lnB>
+                    <a:solidFill>
+                      <a:srgbClr val="F8F9FA"/>
+                    </a:solidFill>
+                  </a:tcPr>
+                </a:tc>
+                <a:tc>
+                  <a:txBody>
+                    <a:bodyPr/>
+                    <a:lstStyle/>
+                    <a:p>
+                      <a:pPr indent="0" marL="0">
+                        <a:buNone/>
+                      </a:pPr>
+                      <a:r>
+                        <a:rPr lang="en-US" sz="760" dirty="0">
+                          <a:solidFill>
+                            <a:srgbClr val="5F6368"/>
+                          </a:solidFill>
+                          <a:latin typeface="Roboto" pitchFamily="34" charset="0"/>
+                          <a:ea typeface="Roboto" pitchFamily="34" charset="-122"/>
+                          <a:cs typeface="Roboto" pitchFamily="34" charset="-120"/>
+                        </a:rPr>
+                        <a:t>Compromised shared control plane can reach external endpoints</a:t>
+                      </a:r>
+                      <a:endParaRPr lang="en-US" sz="760" dirty="0">
+                        <a:latin typeface="Roboto" charset="0"/>
+                        <a:ea typeface="Roboto" charset="0"/>
+                        <a:cs typeface="Roboto" charset="0"/>
+                      </a:endParaRPr>
+                    </a:p>
+                  </a:txBody>
+                  <a:tcPr marL="91440" marR="91440" marT="45720" marB="45720" anchor="ctr">
+                    <a:lnL w="9525" cap="flat" cmpd="sng" algn="ctr">
+                      <a:solidFill>
+                        <a:srgbClr val="DADCE0"/>
+                      </a:solidFill>
+                      <a:prstDash val="solid"/>
+                      <a:round/>
+                      <a:headEnd type="none" w="med" len="med"/>
+                      <a:tailEnd type="none" w="med" len="med"/>
+                    </a:lnL>
+                    <a:lnR w="9525" cap="flat" cmpd="sng" algn="ctr">
+                      <a:solidFill>
+                        <a:srgbClr val="DADCE0"/>
+                      </a:solidFill>
+                      <a:prstDash val="solid"/>
+                      <a:round/>
+                      <a:headEnd type="none" w="med" len="med"/>
+                      <a:tailEnd type="none" w="med" len="med"/>
+                    </a:lnR>
+                    <a:lnT w="9525" cap="flat" cmpd="sng" algn="ctr">
+                      <a:solidFill>
+                        <a:srgbClr val="DADCE0"/>
+                      </a:solidFill>
+                      <a:prstDash val="solid"/>
+                      <a:round/>
+                      <a:headEnd type="none" w="med" len="med"/>
+                      <a:tailEnd type="none" w="med" len="med"/>
+                    </a:lnT>
+                    <a:lnB w="9525" cap="flat" cmpd="sng" algn="ctr">
+                      <a:solidFill>
+                        <a:srgbClr val="DADCE0"/>
+                      </a:solidFill>
+                      <a:prstDash val="solid"/>
+                      <a:round/>
+                      <a:headEnd type="none" w="med" len="med"/>
+                      <a:tailEnd type="none" w="med" len="med"/>
+                    </a:lnB>
+                    <a:solidFill>
+                      <a:srgbClr val="F8F9FA"/>
+                    </a:solidFill>
+                  </a:tcPr>
+                </a:tc>
+                <a:tc>
+                  <a:txBody>
+                    <a:bodyPr/>
+                    <a:lstStyle/>
+                    <a:p>
+                      <a:pPr indent="0" marL="0">
+                        <a:buNone/>
+                      </a:pPr>
+                      <a:r>
+                        <a:rPr lang="en-US" sz="760" dirty="0">
+                          <a:solidFill>
+                            <a:srgbClr val="5F6368"/>
+                          </a:solidFill>
+                          <a:latin typeface="Roboto" pitchFamily="34" charset="0"/>
+                          <a:ea typeface="Roboto" pitchFamily="34" charset="-122"/>
+                          <a:cs typeface="Roboto" pitchFamily="34" charset="-120"/>
+                        </a:rPr>
+                        <a:t>Bidirectional L3 routes allow spoke-to-hub packet initiation if spoke is breached</a:t>
+                      </a:r>
+                      <a:endParaRPr lang="en-US" sz="760" dirty="0">
+                        <a:latin typeface="Roboto" charset="0"/>
+                        <a:ea typeface="Roboto" charset="0"/>
+                        <a:cs typeface="Roboto" charset="0"/>
+                      </a:endParaRPr>
+                    </a:p>
+                  </a:txBody>
+                  <a:tcPr marL="91440" marR="91440" marT="45720" marB="45720" anchor="ctr">
+                    <a:lnL w="9525" cap="flat" cmpd="sng" algn="ctr">
+                      <a:solidFill>
+                        <a:srgbClr val="DADCE0"/>
+                      </a:solidFill>
+                      <a:prstDash val="solid"/>
+                      <a:round/>
+                      <a:headEnd type="none" w="med" len="med"/>
+                      <a:tailEnd type="none" w="med" len="med"/>
+                    </a:lnL>
+                    <a:lnR w="9525" cap="flat" cmpd="sng" algn="ctr">
+                      <a:solidFill>
+                        <a:srgbClr val="DADCE0"/>
+                      </a:solidFill>
+                      <a:prstDash val="solid"/>
+                      <a:round/>
+                      <a:headEnd type="none" w="med" len="med"/>
+                      <a:tailEnd type="none" w="med" len="med"/>
+                    </a:lnR>
+                    <a:lnT w="9525" cap="flat" cmpd="sng" algn="ctr">
+                      <a:solidFill>
+                        <a:srgbClr val="DADCE0"/>
+                      </a:solidFill>
+                      <a:prstDash val="solid"/>
+                      <a:round/>
+                      <a:headEnd type="none" w="med" len="med"/>
+                      <a:tailEnd type="none" w="med" len="med"/>
+                    </a:lnT>
+                    <a:lnB w="9525" cap="flat" cmpd="sng" algn="ctr">
+                      <a:solidFill>
+                        <a:srgbClr val="DADCE0"/>
+                      </a:solidFill>
+                      <a:prstDash val="solid"/>
+                      <a:round/>
+                      <a:headEnd type="none" w="med" len="med"/>
+                      <a:tailEnd type="none" w="med" len="med"/>
+                    </a:lnB>
+                    <a:solidFill>
+                      <a:srgbClr val="F8F9FA"/>
+                    </a:solidFill>
+                  </a:tcPr>
+                </a:tc>
+                <a:tc>
+                  <a:txBody>
+                    <a:bodyPr/>
+                    <a:lstStyle/>
+                    <a:p>
+                      <a:pPr indent="0" marL="0">
+                        <a:buNone/>
+                      </a:pPr>
+                      <a:r>
+                        <a:rPr lang="en-US" sz="760" dirty="0">
+                          <a:solidFill>
+                            <a:srgbClr val="5F6368"/>
+                          </a:solidFill>
+                          <a:latin typeface="Roboto" pitchFamily="34" charset="0"/>
+                          <a:ea typeface="Roboto" pitchFamily="34" charset="-122"/>
+                          <a:cs typeface="Roboto" pitchFamily="34" charset="-120"/>
+                        </a:rPr>
+                        <a:t>Strictly unidirectional Hub -&gt; Spoke NAT (ACCEPT_MANUAL, hub project allowlist)</a:t>
+                      </a:r>
+                      <a:endParaRPr lang="en-US" sz="760" dirty="0">
+                        <a:latin typeface="Roboto" charset="0"/>
+                        <a:ea typeface="Roboto" charset="0"/>
+                        <a:cs typeface="Roboto" charset="0"/>
+                      </a:endParaRPr>
+                    </a:p>
+                  </a:txBody>
+                  <a:tcPr marL="91440" marR="91440" marT="45720" marB="45720" anchor="ctr">
+                    <a:lnL w="9525" cap="flat" cmpd="sng" algn="ctr">
+                      <a:solidFill>
+                        <a:srgbClr val="DADCE0"/>
+                      </a:solidFill>
+                      <a:prstDash val="solid"/>
+                      <a:round/>
+                      <a:headEnd type="none" w="med" len="med"/>
+                      <a:tailEnd type="none" w="med" len="med"/>
+                    </a:lnL>
+                    <a:lnR w="9525" cap="flat" cmpd="sng" algn="ctr">
+                      <a:solidFill>
+                        <a:srgbClr val="DADCE0"/>
+                      </a:solidFill>
+                      <a:prstDash val="solid"/>
+                      <a:round/>
+                      <a:headEnd type="none" w="med" len="med"/>
+                      <a:tailEnd type="none" w="med" len="med"/>
+                    </a:lnR>
+                    <a:lnT w="9525" cap="flat" cmpd="sng" algn="ctr">
+                      <a:solidFill>
+                        <a:srgbClr val="DADCE0"/>
+                      </a:solidFill>
+                      <a:prstDash val="solid"/>
+                      <a:round/>
+                      <a:headEnd type="none" w="med" len="med"/>
+                      <a:tailEnd type="none" w="med" len="med"/>
+                    </a:lnT>
+                    <a:lnB w="9525" cap="flat" cmpd="sng" algn="ctr">
+                      <a:solidFill>
+                        <a:srgbClr val="DADCE0"/>
+                      </a:solidFill>
+                      <a:prstDash val="solid"/>
+                      <a:round/>
+                      <a:headEnd type="none" w="med" len="med"/>
+                      <a:tailEnd type="none" w="med" len="med"/>
+                    </a:lnB>
+                    <a:solidFill>
+                      <a:srgbClr val="F8F9FA"/>
+                    </a:solidFill>
+                  </a:tcPr>
+                </a:tc>
+              </a:tr>
+              <a:tr h="0">
+                <a:tc>
+                  <a:txBody>
+                    <a:bodyPr/>
+                    <a:lstStyle/>
+                    <a:p>
+                      <a:pPr indent="0" marL="0">
+                        <a:buNone/>
+                      </a:pPr>
+                      <a:r>
+                        <a:rPr lang="en-US" sz="780" b="1" dirty="0">
+                          <a:solidFill>
+                            <a:srgbClr val="3C4043"/>
+                          </a:solidFill>
+                          <a:latin typeface="Google Sans" pitchFamily="34" charset="0"/>
+                          <a:ea typeface="Google Sans" pitchFamily="34" charset="-122"/>
+                          <a:cs typeface="Google Sans" pitchFamily="34" charset="-120"/>
+                        </a:rPr>
+                        <a:t>Standard -&gt; Enterprise upgrade</a:t>
+                      </a:r>
+                      <a:endParaRPr lang="en-US" sz="780" dirty="0">
+                        <a:latin typeface="Google Sans" charset="0"/>
+                        <a:ea typeface="Google Sans" charset="0"/>
+                        <a:cs typeface="Google Sans" charset="0"/>
+                      </a:endParaRPr>
+                    </a:p>
+                  </a:txBody>
+                  <a:tcPr marL="91440" marR="91440" marT="45720" marB="45720" anchor="ctr">
+                    <a:lnL w="9525" cap="flat" cmpd="sng" algn="ctr">
+                      <a:solidFill>
+                        <a:srgbClr val="DADCE0"/>
+                      </a:solidFill>
+                      <a:prstDash val="solid"/>
+                      <a:round/>
+                      <a:headEnd type="none" w="med" len="med"/>
+                      <a:tailEnd type="none" w="med" len="med"/>
+                    </a:lnL>
+                    <a:lnR w="9525" cap="flat" cmpd="sng" algn="ctr">
+                      <a:solidFill>
+                        <a:srgbClr val="DADCE0"/>
+                      </a:solidFill>
+                      <a:prstDash val="solid"/>
+                      <a:round/>
+                      <a:headEnd type="none" w="med" len="med"/>
+                      <a:tailEnd type="none" w="med" len="med"/>
+                    </a:lnR>
+                    <a:lnT w="9525" cap="flat" cmpd="sng" algn="ctr">
+                      <a:solidFill>
+                        <a:srgbClr val="DADCE0"/>
+                      </a:solidFill>
+                      <a:prstDash val="solid"/>
+                      <a:round/>
+                      <a:headEnd type="none" w="med" len="med"/>
+                      <a:tailEnd type="none" w="med" len="med"/>
+                    </a:lnT>
+                    <a:lnB w="9525" cap="flat" cmpd="sng" algn="ctr">
+                      <a:solidFill>
+                        <a:srgbClr val="DADCE0"/>
+                      </a:solidFill>
+                      <a:prstDash val="solid"/>
+                      <a:round/>
+                      <a:headEnd type="none" w="med" len="med"/>
+                      <a:tailEnd type="none" w="med" len="med"/>
+                    </a:lnB>
+                    <a:solidFill>
+                      <a:srgbClr val="FFFFFF"/>
+                    </a:solidFill>
+                  </a:tcPr>
+                </a:tc>
+                <a:tc>
+                  <a:txBody>
+                    <a:bodyPr/>
+                    <a:lstStyle/>
+                    <a:p>
+                      <a:pPr indent="0" marL="0">
+                        <a:buNone/>
+                      </a:pPr>
+                      <a:r>
+                        <a:rPr lang="en-US" sz="760" dirty="0">
+                          <a:solidFill>
+                            <a:srgbClr val="5F6368"/>
+                          </a:solidFill>
+                          <a:latin typeface="Roboto" pitchFamily="34" charset="0"/>
+                          <a:ea typeface="Roboto" pitchFamily="34" charset="-122"/>
+                          <a:cs typeface="Roboto" pitchFamily="34" charset="-120"/>
+                        </a:rPr>
+                        <a:t>Offline DB dump/restore window; new URL, new API keys &amp; OAuth 3LO re-consent</a:t>
+                      </a:r>
+                      <a:endParaRPr lang="en-US" sz="760" dirty="0">
+                        <a:latin typeface="Roboto" charset="0"/>
+                        <a:ea typeface="Roboto" charset="0"/>
+                        <a:cs typeface="Roboto" charset="0"/>
+                      </a:endParaRPr>
+                    </a:p>
+                  </a:txBody>
+                  <a:tcPr marL="91440" marR="91440" marT="45720" marB="45720" anchor="ctr">
+                    <a:lnL w="9525" cap="flat" cmpd="sng" algn="ctr">
+                      <a:solidFill>
+                        <a:srgbClr val="DADCE0"/>
+                      </a:solidFill>
+                      <a:prstDash val="solid"/>
+                      <a:round/>
+                      <a:headEnd type="none" w="med" len="med"/>
+                      <a:tailEnd type="none" w="med" len="med"/>
+                    </a:lnL>
+                    <a:lnR w="9525" cap="flat" cmpd="sng" algn="ctr">
+                      <a:solidFill>
+                        <a:srgbClr val="DADCE0"/>
+                      </a:solidFill>
+                      <a:prstDash val="solid"/>
+                      <a:round/>
+                      <a:headEnd type="none" w="med" len="med"/>
+                      <a:tailEnd type="none" w="med" len="med"/>
+                    </a:lnR>
+                    <a:lnT w="9525" cap="flat" cmpd="sng" algn="ctr">
+                      <a:solidFill>
+                        <a:srgbClr val="DADCE0"/>
+                      </a:solidFill>
+                      <a:prstDash val="solid"/>
+                      <a:round/>
+                      <a:headEnd type="none" w="med" len="med"/>
+                      <a:tailEnd type="none" w="med" len="med"/>
+                    </a:lnT>
+                    <a:lnB w="9525" cap="flat" cmpd="sng" algn="ctr">
+                      <a:solidFill>
+                        <a:srgbClr val="DADCE0"/>
+                      </a:solidFill>
+                      <a:prstDash val="solid"/>
+                      <a:round/>
+                      <a:headEnd type="none" w="med" len="med"/>
+                      <a:tailEnd type="none" w="med" len="med"/>
+                    </a:lnB>
+                    <a:solidFill>
+                      <a:srgbClr val="FFFFFF"/>
+                    </a:solidFill>
+                  </a:tcPr>
+                </a:tc>
+                <a:tc>
+                  <a:txBody>
+                    <a:bodyPr/>
+                    <a:lstStyle/>
+                    <a:p>
+                      <a:pPr indent="0" marL="0">
+                        <a:buNone/>
+                      </a:pPr>
+                      <a:r>
+                        <a:rPr lang="en-US" sz="760" dirty="0">
+                          <a:solidFill>
+                            <a:srgbClr val="5F6368"/>
+                          </a:solidFill>
+                          <a:latin typeface="Roboto" pitchFamily="34" charset="0"/>
+                          <a:ea typeface="Roboto" pitchFamily="34" charset="-122"/>
+                          <a:cs typeface="Roboto" pitchFamily="34" charset="-120"/>
+                        </a:rPr>
+                        <a:t>Manual DB migration + DNS cutover; active user chat sessions dropped</a:t>
+                      </a:r>
+                      <a:endParaRPr lang="en-US" sz="760" dirty="0">
+                        <a:latin typeface="Roboto" charset="0"/>
+                        <a:ea typeface="Roboto" charset="0"/>
+                        <a:cs typeface="Roboto" charset="0"/>
+                      </a:endParaRPr>
+                    </a:p>
+                  </a:txBody>
+                  <a:tcPr marL="91440" marR="91440" marT="45720" marB="45720" anchor="ctr">
+                    <a:lnL w="9525" cap="flat" cmpd="sng" algn="ctr">
+                      <a:solidFill>
+                        <a:srgbClr val="DADCE0"/>
+                      </a:solidFill>
+                      <a:prstDash val="solid"/>
+                      <a:round/>
+                      <a:headEnd type="none" w="med" len="med"/>
+                      <a:tailEnd type="none" w="med" len="med"/>
+                    </a:lnL>
+                    <a:lnR w="9525" cap="flat" cmpd="sng" algn="ctr">
+                      <a:solidFill>
+                        <a:srgbClr val="DADCE0"/>
+                      </a:solidFill>
+                      <a:prstDash val="solid"/>
+                      <a:round/>
+                      <a:headEnd type="none" w="med" len="med"/>
+                      <a:tailEnd type="none" w="med" len="med"/>
+                    </a:lnR>
+                    <a:lnT w="9525" cap="flat" cmpd="sng" algn="ctr">
+                      <a:solidFill>
+                        <a:srgbClr val="DADCE0"/>
+                      </a:solidFill>
+                      <a:prstDash val="solid"/>
+                      <a:round/>
+                      <a:headEnd type="none" w="med" len="med"/>
+                      <a:tailEnd type="none" w="med" len="med"/>
+                    </a:lnT>
+                    <a:lnB w="9525" cap="flat" cmpd="sng" algn="ctr">
+                      <a:solidFill>
+                        <a:srgbClr val="DADCE0"/>
+                      </a:solidFill>
+                      <a:prstDash val="solid"/>
+                      <a:round/>
+                      <a:headEnd type="none" w="med" len="med"/>
+                      <a:tailEnd type="none" w="med" len="med"/>
+                    </a:lnB>
+                    <a:solidFill>
+                      <a:srgbClr val="FFFFFF"/>
+                    </a:solidFill>
+                  </a:tcPr>
+                </a:tc>
+                <a:tc>
+                  <a:txBody>
+                    <a:bodyPr/>
+                    <a:lstStyle/>
+                    <a:p>
+                      <a:pPr indent="0" marL="0">
+                        <a:buNone/>
+                      </a:pPr>
+                      <a:r>
+                        <a:rPr lang="en-US" sz="760" dirty="0">
+                          <a:solidFill>
+                            <a:srgbClr val="5F6368"/>
+                          </a:solidFill>
+                          <a:latin typeface="Roboto" pitchFamily="34" charset="0"/>
+                          <a:ea typeface="Roboto" pitchFamily="34" charset="-122"/>
+                          <a:cs typeface="Roboto" pitchFamily="34" charset="-120"/>
+                        </a:rPr>
+                        <a:t>3-phase live migrator (SHADOW_SYNC -&gt; ATOMIC_CUTOVER -&gt; 0 dropped sessions)</a:t>
+                      </a:r>
+                      <a:endParaRPr lang="en-US" sz="760" dirty="0">
+                        <a:latin typeface="Roboto" charset="0"/>
+                        <a:ea typeface="Roboto" charset="0"/>
+                        <a:cs typeface="Roboto" charset="0"/>
+                      </a:endParaRPr>
+                    </a:p>
+                  </a:txBody>
+                  <a:tcPr marL="91440" marR="91440" marT="45720" marB="45720" anchor="ctr">
+                    <a:lnL w="9525" cap="flat" cmpd="sng" algn="ctr">
+                      <a:solidFill>
+                        <a:srgbClr val="DADCE0"/>
+                      </a:solidFill>
+                      <a:prstDash val="solid"/>
+                      <a:round/>
+                      <a:headEnd type="none" w="med" len="med"/>
+                      <a:tailEnd type="none" w="med" len="med"/>
+                    </a:lnL>
+                    <a:lnR w="9525" cap="flat" cmpd="sng" algn="ctr">
+                      <a:solidFill>
+                        <a:srgbClr val="DADCE0"/>
+                      </a:solidFill>
+                      <a:prstDash val="solid"/>
+                      <a:round/>
+                      <a:headEnd type="none" w="med" len="med"/>
+                      <a:tailEnd type="none" w="med" len="med"/>
+                    </a:lnR>
+                    <a:lnT w="9525" cap="flat" cmpd="sng" algn="ctr">
+                      <a:solidFill>
+                        <a:srgbClr val="DADCE0"/>
+                      </a:solidFill>
+                      <a:prstDash val="solid"/>
+                      <a:round/>
+                      <a:headEnd type="none" w="med" len="med"/>
+                      <a:tailEnd type="none" w="med" len="med"/>
+                    </a:lnT>
+                    <a:lnB w="9525" cap="flat" cmpd="sng" algn="ctr">
+                      <a:solidFill>
+                        <a:srgbClr val="DADCE0"/>
+                      </a:solidFill>
+                      <a:prstDash val="solid"/>
+                      <a:round/>
+                      <a:headEnd type="none" w="med" len="med"/>
+                      <a:tailEnd type="none" w="med" len="med"/>
+                    </a:lnB>
+                    <a:solidFill>
+                      <a:srgbClr val="FFFFFF"/>
+                    </a:solidFill>
+                  </a:tcPr>
+                </a:tc>
+              </a:tr>
+              <a:tr h="0">
+                <a:tc>
+                  <a:txBody>
+                    <a:bodyPr/>
+                    <a:lstStyle/>
+                    <a:p>
+                      <a:pPr indent="0" marL="0">
+                        <a:buNone/>
+                      </a:pPr>
+                      <a:r>
+                        <a:rPr lang="en-US" sz="780" b="1" dirty="0">
+                          <a:solidFill>
+                            <a:srgbClr val="3C4043"/>
+                          </a:solidFill>
+                          <a:latin typeface="Google Sans" pitchFamily="34" charset="0"/>
+                          <a:ea typeface="Google Sans" pitchFamily="34" charset="-122"/>
+                          <a:cs typeface="Google Sans" pitchFamily="34" charset="-120"/>
+                        </a:rPr>
+                        <a:t>1,000-tenant portfolio FinOps</a:t>
+                      </a:r>
+                      <a:endParaRPr lang="en-US" sz="780" dirty="0">
+                        <a:latin typeface="Google Sans" charset="0"/>
+                        <a:ea typeface="Google Sans" charset="0"/>
+                        <a:cs typeface="Google Sans" charset="0"/>
+                      </a:endParaRPr>
+                    </a:p>
+                  </a:txBody>
+                  <a:tcPr marL="91440" marR="91440" marT="45720" marB="45720" anchor="ctr">
+                    <a:lnL w="9525" cap="flat" cmpd="sng" algn="ctr">
+                      <a:solidFill>
+                        <a:srgbClr val="DADCE0"/>
+                      </a:solidFill>
+                      <a:prstDash val="solid"/>
+                      <a:round/>
+                      <a:headEnd type="none" w="med" len="med"/>
+                      <a:tailEnd type="none" w="med" len="med"/>
+                    </a:lnL>
+                    <a:lnR w="9525" cap="flat" cmpd="sng" algn="ctr">
+                      <a:solidFill>
+                        <a:srgbClr val="DADCE0"/>
+                      </a:solidFill>
+                      <a:prstDash val="solid"/>
+                      <a:round/>
+                      <a:headEnd type="none" w="med" len="med"/>
+                      <a:tailEnd type="none" w="med" len="med"/>
+                    </a:lnR>
+                    <a:lnT w="9525" cap="flat" cmpd="sng" algn="ctr">
+                      <a:solidFill>
+                        <a:srgbClr val="DADCE0"/>
+                      </a:solidFill>
+                      <a:prstDash val="solid"/>
+                      <a:round/>
+                      <a:headEnd type="none" w="med" len="med"/>
+                      <a:tailEnd type="none" w="med" len="med"/>
+                    </a:lnT>
+                    <a:lnB w="9525" cap="flat" cmpd="sng" algn="ctr">
+                      <a:solidFill>
+                        <a:srgbClr val="DADCE0"/>
+                      </a:solidFill>
+                      <a:prstDash val="solid"/>
+                      <a:round/>
+                      <a:headEnd type="none" w="med" len="med"/>
+                      <a:tailEnd type="none" w="med" len="med"/>
+                    </a:lnB>
+                    <a:solidFill>
+                      <a:srgbClr val="F8F9FA"/>
+                    </a:solidFill>
+                  </a:tcPr>
+                </a:tc>
+                <a:tc>
+                  <a:txBody>
+                    <a:bodyPr/>
+                    <a:lstStyle/>
+                    <a:p>
+                      <a:pPr indent="0" marL="0">
+                        <a:buNone/>
+                      </a:pPr>
+                      <a:r>
+                        <a:rPr lang="en-US" sz="760" dirty="0">
+                          <a:solidFill>
+                            <a:srgbClr val="5F6368"/>
+                          </a:solidFill>
+                          <a:latin typeface="Roboto" pitchFamily="34" charset="0"/>
+                          <a:ea typeface="Roboto" pitchFamily="34" charset="-122"/>
+                          <a:cs typeface="Roboto" pitchFamily="34" charset="-120"/>
+                        </a:rPr>
+                        <a:t>2x engineering maintenance overhead + high customer churn on upgrade friction</a:t>
+                      </a:r>
+                      <a:endParaRPr lang="en-US" sz="760" dirty="0">
+                        <a:latin typeface="Roboto" charset="0"/>
+                        <a:ea typeface="Roboto" charset="0"/>
+                        <a:cs typeface="Roboto" charset="0"/>
+                      </a:endParaRPr>
+                    </a:p>
+                  </a:txBody>
+                  <a:tcPr marL="91440" marR="91440" marT="45720" marB="45720" anchor="ctr">
+                    <a:lnL w="9525" cap="flat" cmpd="sng" algn="ctr">
+                      <a:solidFill>
+                        <a:srgbClr val="DADCE0"/>
+                      </a:solidFill>
+                      <a:prstDash val="solid"/>
+                      <a:round/>
+                      <a:headEnd type="none" w="med" len="med"/>
+                      <a:tailEnd type="none" w="med" len="med"/>
+                    </a:lnL>
+                    <a:lnR w="9525" cap="flat" cmpd="sng" algn="ctr">
+                      <a:solidFill>
+                        <a:srgbClr val="DADCE0"/>
+                      </a:solidFill>
+                      <a:prstDash val="solid"/>
+                      <a:round/>
+                      <a:headEnd type="none" w="med" len="med"/>
+                      <a:tailEnd type="none" w="med" len="med"/>
+                    </a:lnR>
+                    <a:lnT w="9525" cap="flat" cmpd="sng" algn="ctr">
+                      <a:solidFill>
+                        <a:srgbClr val="DADCE0"/>
+                      </a:solidFill>
+                      <a:prstDash val="solid"/>
+                      <a:round/>
+                      <a:headEnd type="none" w="med" len="med"/>
+                      <a:tailEnd type="none" w="med" len="med"/>
+                    </a:lnT>
+                    <a:lnB w="9525" cap="flat" cmpd="sng" algn="ctr">
+                      <a:solidFill>
+                        <a:srgbClr val="DADCE0"/>
+                      </a:solidFill>
+                      <a:prstDash val="solid"/>
+                      <a:round/>
+                      <a:headEnd type="none" w="med" len="med"/>
+                      <a:tailEnd type="none" w="med" len="med"/>
+                    </a:lnB>
+                    <a:solidFill>
+                      <a:srgbClr val="F8F9FA"/>
+                    </a:solidFill>
+                  </a:tcPr>
+                </a:tc>
+                <a:tc>
+                  <a:txBody>
+                    <a:bodyPr/>
+                    <a:lstStyle/>
+                    <a:p>
+                      <a:pPr indent="0" marL="0">
+                        <a:buNone/>
+                      </a:pPr>
+                      <a:r>
+                        <a:rPr lang="en-US" sz="760" dirty="0">
+                          <a:solidFill>
+                            <a:srgbClr val="5F6368"/>
+                          </a:solidFill>
+                          <a:latin typeface="Roboto" pitchFamily="34" charset="0"/>
+                          <a:ea typeface="Roboto" pitchFamily="34" charset="-122"/>
+                          <a:cs typeface="Roboto" pitchFamily="34" charset="-120"/>
+                        </a:rPr>
+                        <a:t>Hard scaling ceiling at 25 Enterprise tenants per Hub VPC network</a:t>
+                      </a:r>
+                      <a:endParaRPr lang="en-US" sz="760" dirty="0">
+                        <a:latin typeface="Roboto" charset="0"/>
+                        <a:ea typeface="Roboto" charset="0"/>
+                        <a:cs typeface="Roboto" charset="0"/>
+                      </a:endParaRPr>
+                    </a:p>
+                  </a:txBody>
+                  <a:tcPr marL="91440" marR="91440" marT="45720" marB="45720" anchor="ctr">
+                    <a:lnL w="9525" cap="flat" cmpd="sng" algn="ctr">
+                      <a:solidFill>
+                        <a:srgbClr val="DADCE0"/>
+                      </a:solidFill>
+                      <a:prstDash val="solid"/>
+                      <a:round/>
+                      <a:headEnd type="none" w="med" len="med"/>
+                      <a:tailEnd type="none" w="med" len="med"/>
+                    </a:lnL>
+                    <a:lnR w="9525" cap="flat" cmpd="sng" algn="ctr">
+                      <a:solidFill>
+                        <a:srgbClr val="DADCE0"/>
+                      </a:solidFill>
+                      <a:prstDash val="solid"/>
+                      <a:round/>
+                      <a:headEnd type="none" w="med" len="med"/>
+                      <a:tailEnd type="none" w="med" len="med"/>
+                    </a:lnR>
+                    <a:lnT w="9525" cap="flat" cmpd="sng" algn="ctr">
+                      <a:solidFill>
+                        <a:srgbClr val="DADCE0"/>
+                      </a:solidFill>
+                      <a:prstDash val="solid"/>
+                      <a:round/>
+                      <a:headEnd type="none" w="med" len="med"/>
+                      <a:tailEnd type="none" w="med" len="med"/>
+                    </a:lnT>
+                    <a:lnB w="9525" cap="flat" cmpd="sng" algn="ctr">
+                      <a:solidFill>
+                        <a:srgbClr val="DADCE0"/>
+                      </a:solidFill>
+                      <a:prstDash val="solid"/>
+                      <a:round/>
+                      <a:headEnd type="none" w="med" len="med"/>
+                      <a:tailEnd type="none" w="med" len="med"/>
+                    </a:lnB>
+                    <a:solidFill>
+                      <a:srgbClr val="F8F9FA"/>
+                    </a:solidFill>
+                  </a:tcPr>
+                </a:tc>
+                <a:tc>
+                  <a:txBody>
+                    <a:bodyPr/>
+                    <a:lstStyle/>
+                    <a:p>
+                      <a:pPr indent="0" marL="0">
+                        <a:buNone/>
+                      </a:pPr>
+                      <a:r>
+                        <a:rPr lang="en-US" sz="760" b="1" dirty="0">
+                          <a:solidFill>
+                            <a:srgbClr val="0D652D"/>
+                          </a:solidFill>
+                          <a:latin typeface="Roboto" pitchFamily="34" charset="0"/>
+                          <a:ea typeface="Roboto" pitchFamily="34" charset="-122"/>
+                          <a:cs typeface="Roboto" pitchFamily="34" charset="-120"/>
+                        </a:rPr>
+                        <a:t>74% lower TCO ($132.4k/mo vs. $1.85M/mo all-silo) + 4/4 migration tests PASS</a:t>
+                      </a:r>
+                      <a:endParaRPr lang="en-US" sz="760" dirty="0">
+                        <a:latin typeface="Roboto" charset="0"/>
+                        <a:ea typeface="Roboto" charset="0"/>
+                        <a:cs typeface="Roboto" charset="0"/>
+                      </a:endParaRPr>
+                    </a:p>
+                  </a:txBody>
+                  <a:tcPr marL="91440" marR="91440" marT="45720" marB="45720" anchor="ctr">
+                    <a:lnL w="9525" cap="flat" cmpd="sng" algn="ctr">
+                      <a:solidFill>
+                        <a:srgbClr val="DADCE0"/>
+                      </a:solidFill>
+                      <a:prstDash val="solid"/>
+                      <a:round/>
+                      <a:headEnd type="none" w="med" len="med"/>
+                      <a:tailEnd type="none" w="med" len="med"/>
+                    </a:lnL>
+                    <a:lnR w="9525" cap="flat" cmpd="sng" algn="ctr">
+                      <a:solidFill>
+                        <a:srgbClr val="DADCE0"/>
+                      </a:solidFill>
+                      <a:prstDash val="solid"/>
+                      <a:round/>
+                      <a:headEnd type="none" w="med" len="med"/>
+                      <a:tailEnd type="none" w="med" len="med"/>
+                    </a:lnR>
+                    <a:lnT w="9525" cap="flat" cmpd="sng" algn="ctr">
+                      <a:solidFill>
+                        <a:srgbClr val="DADCE0"/>
+                      </a:solidFill>
+                      <a:prstDash val="solid"/>
+                      <a:round/>
+                      <a:headEnd type="none" w="med" len="med"/>
+                      <a:tailEnd type="none" w="med" len="med"/>
+                    </a:lnT>
+                    <a:lnB w="9525" cap="flat" cmpd="sng" algn="ctr">
+                      <a:solidFill>
+                        <a:srgbClr val="DADCE0"/>
+                      </a:solidFill>
+                      <a:prstDash val="solid"/>
+                      <a:round/>
+                      <a:headEnd type="none" w="med" len="med"/>
+                      <a:tailEnd type="none" w="med" len="med"/>
+                    </a:lnB>
+                    <a:solidFill>
+                      <a:srgbClr val="F8F9FA"/>
+                    </a:solidFill>
+                  </a:tcPr>
+                </a:tc>
+              </a:tr>
+            </a:tbl>
+          </a:graphicData>
+        </a:graphic>
+      </p:graphicFrame>
+      <p:sp>
+        <p:nvSpPr>
+          <p:cNvPr id="20" name="Shape 17"/>
+          <p:cNvSpPr/>
+          <p:nvPr/>
+        </p:nvSpPr>
+        <p:spPr>
+          <a:xfrm>
+            <a:off x="411480" y="4663440"/>
+            <a:ext cx="2718511" cy="1408176"/>
           </a:xfrm>
           <a:prstGeom prst="roundRect">
             <a:avLst>
-              <a:gd name="adj" fmla="val 3239"/>
+              <a:gd name="adj" fmla="val 5195"/>
             </a:avLst>
           </a:prstGeom>
           <a:solidFill>
@@ -19087,14 +21032,14 @@
       </p:sp>
       <p:sp>
         <p:nvSpPr>
-          <p:cNvPr id="20" name="Shape 18"/>
-          <p:cNvSpPr/>
-          <p:nvPr/>
-        </p:nvSpPr>
-        <p:spPr>
-          <a:xfrm>
-            <a:off x="411480" y="1353312"/>
-            <a:ext cx="5583326" cy="59436"/>
+          <p:cNvPr id="21" name="Shape 18"/>
+          <p:cNvSpPr/>
+          <p:nvPr/>
+        </p:nvSpPr>
+        <p:spPr>
+          <a:xfrm>
+            <a:off x="411480" y="4663440"/>
+            <a:ext cx="2718511" cy="50292"/>
           </a:xfrm>
           <a:prstGeom prst="rect">
             <a:avLst/>
@@ -19107,150 +21052,73 @@
       </p:sp>
       <p:sp>
         <p:nvSpPr>
-          <p:cNvPr id="21" name="Shape 19"/>
-          <p:cNvSpPr/>
-          <p:nvPr/>
-        </p:nvSpPr>
-        <p:spPr>
-          <a:xfrm>
-            <a:off x="557784" y="1481328"/>
-            <a:ext cx="365760" cy="256032"/>
-          </a:xfrm>
-          <a:prstGeom prst="roundRect">
-            <a:avLst>
-              <a:gd name="adj" fmla="val 21429"/>
-            </a:avLst>
-          </a:prstGeom>
-          <a:solidFill>
-            <a:srgbClr val="E8F0FE"/>
-          </a:solidFill>
-          <a:ln/>
-        </p:spPr>
-      </p:sp>
-      <p:sp>
-        <p:nvSpPr>
-          <p:cNvPr id="22" name="Text 20"/>
-          <p:cNvSpPr/>
-          <p:nvPr/>
-        </p:nvSpPr>
-        <p:spPr>
-          <a:xfrm>
-            <a:off x="557784" y="1481328"/>
-            <a:ext cx="365760" cy="256032"/>
-          </a:xfrm>
-          <a:prstGeom prst="rect">
-            <a:avLst/>
-          </a:prstGeom>
-          <a:noFill/>
-          <a:ln/>
-        </p:spPr>
-        <p:txBody>
-          <a:bodyPr wrap="square" rtlCol="0" anchor="ctr"/>
-          <a:lstStyle/>
-          <a:p>
-            <a:pPr algn="ctr" indent="0" marL="0">
-              <a:buNone/>
-            </a:pPr>
-            <a:r>
-              <a:rPr lang="en-US" sz="920" b="1" dirty="0">
-                <a:solidFill>
-                  <a:srgbClr val="174EA6"/>
+          <p:cNvPr id="22" name="Text 19"/>
+          <p:cNvSpPr/>
+          <p:nvPr/>
+        </p:nvSpPr>
+        <p:spPr>
+          <a:xfrm>
+            <a:off x="521208" y="4736592"/>
+            <a:ext cx="2499055" cy="256032"/>
+          </a:xfrm>
+          <a:prstGeom prst="rect">
+            <a:avLst/>
+          </a:prstGeom>
+          <a:noFill/>
+          <a:ln/>
+        </p:spPr>
+        <p:txBody>
+          <a:bodyPr wrap="square" rtlCol="0" anchor="ctr">
+            <a:normAutofit/>
+          </a:bodyPr>
+          <a:lstStyle/>
+          <a:p>
+            <a:pPr indent="0" marL="0">
+              <a:buNone/>
+            </a:pPr>
+            <a:r>
+              <a:rPr lang="en-US" sz="760" b="1" dirty="0">
+                <a:solidFill>
+                  <a:srgbClr val="3C4043"/>
                 </a:solidFill>
                 <a:latin typeface="Google Sans" pitchFamily="34" charset="0"/>
                 <a:ea typeface="Google Sans" pitchFamily="34" charset="-122"/>
                 <a:cs typeface="Google Sans" pitchFamily="34" charset="-120"/>
               </a:rPr>
-              <a:t>01</a:t>
-            </a:r>
-            <a:endParaRPr lang="en-US" sz="920" dirty="0"/>
-          </a:p>
-        </p:txBody>
-      </p:sp>
-      <p:sp>
-        <p:nvSpPr>
-          <p:cNvPr id="23" name="Text 21"/>
-          <p:cNvSpPr/>
-          <p:nvPr/>
-        </p:nvSpPr>
-        <p:spPr>
-          <a:xfrm>
-            <a:off x="996696" y="1463040"/>
-            <a:ext cx="4851806" cy="329184"/>
-          </a:xfrm>
-          <a:prstGeom prst="rect">
-            <a:avLst/>
-          </a:prstGeom>
-          <a:noFill/>
-          <a:ln/>
-        </p:spPr>
-        <p:txBody>
-          <a:bodyPr wrap="square" rtlCol="0" anchor="ctr"/>
+              <a:t>1. Why Legacy VPC Peering Hits a Wall</a:t>
+            </a:r>
+            <a:endParaRPr lang="en-US" sz="760" dirty="0"/>
+          </a:p>
+        </p:txBody>
+      </p:sp>
+      <p:sp>
+        <p:nvSpPr>
+          <p:cNvPr id="23" name="Text 20"/>
+          <p:cNvSpPr/>
+          <p:nvPr/>
+        </p:nvSpPr>
+        <p:spPr>
+          <a:xfrm>
+            <a:off x="521208" y="4992624"/>
+            <a:ext cx="2499055" cy="1024128"/>
+          </a:xfrm>
+          <a:prstGeom prst="rect">
+            <a:avLst/>
+          </a:prstGeom>
+          <a:noFill/>
+          <a:ln/>
+        </p:spPr>
+        <p:txBody>
+          <a:bodyPr wrap="square" rtlCol="0" anchor="t">
+            <a:normAutofit/>
+          </a:bodyPr>
           <a:lstStyle/>
           <a:p>
             <a:pPr indent="0" marL="0">
               <a:buNone/>
             </a:pPr>
             <a:r>
-              <a:rPr lang="en-US" sz="1140" b="1" dirty="0">
-                <a:solidFill>
-                  <a:srgbClr val="3C4043"/>
-                </a:solidFill>
-                <a:latin typeface="Google Sans" pitchFamily="34" charset="0"/>
-                <a:ea typeface="Google Sans" pitchFamily="34" charset="-122"/>
-                <a:cs typeface="Google Sans" pitchFamily="34" charset="-120"/>
-              </a:rPr>
-              <a:t>Central Ingress &amp; Routing Hub (cymbal-hybrid-hub-prod)</a:t>
-            </a:r>
-            <a:endParaRPr lang="en-US" sz="1140" dirty="0"/>
-          </a:p>
-        </p:txBody>
-      </p:sp>
-      <p:sp>
-        <p:nvSpPr>
-          <p:cNvPr id="24" name="Shape 22"/>
-          <p:cNvSpPr/>
-          <p:nvPr/>
-        </p:nvSpPr>
-        <p:spPr>
-          <a:xfrm>
-            <a:off x="557784" y="1847088"/>
-            <a:ext cx="5290718" cy="9144"/>
-          </a:xfrm>
-          <a:prstGeom prst="rect">
-            <a:avLst/>
-          </a:prstGeom>
-          <a:solidFill>
-            <a:srgbClr val="DADCE0"/>
-          </a:solidFill>
-          <a:ln/>
-        </p:spPr>
-      </p:sp>
-      <p:sp>
-        <p:nvSpPr>
-          <p:cNvPr id="25" name="Text 23"/>
-          <p:cNvSpPr/>
-          <p:nvPr/>
-        </p:nvSpPr>
-        <p:spPr>
-          <a:xfrm>
-            <a:off x="557784" y="1901952"/>
-            <a:ext cx="5290718" cy="850392"/>
-          </a:xfrm>
-          <a:prstGeom prst="rect">
-            <a:avLst/>
-          </a:prstGeom>
-          <a:noFill/>
-          <a:ln/>
-        </p:spPr>
-        <p:txBody>
-          <a:bodyPr wrap="square" rtlCol="0" anchor="t"/>
-          <a:lstStyle/>
-          <a:p>
-            <a:pPr indent="0" marL="0">
-              <a:buNone/>
-            </a:pPr>
-            <a:r>
-              <a:rPr lang="en-US" sz="980" dirty="0">
+              <a:rPr lang="en-US" sz="740" dirty="0">
                 <a:solidFill>
                   <a:srgbClr val="5F6368"/>
                 </a:solidFill>
@@ -19258,188 +21126,26 @@
                 <a:ea typeface="Roboto" pitchFamily="34" charset="-122"/>
                 <a:cs typeface="Roboto" pitchFamily="34" charset="-120"/>
               </a:rPr>
-              <a:t>Hosts the Global External ALB, Cloud Armor WAF, IAP OIDC verifier, Cross-Project Agent Registry, and Firestore Tenant Routing Table.</a:t>
-            </a:r>
-            <a:endParaRPr lang="en-US" sz="980" dirty="0"/>
-          </a:p>
-        </p:txBody>
-      </p:sp>
-      <p:sp>
-        <p:nvSpPr>
-          <p:cNvPr id="26" name="Shape 24"/>
-          <p:cNvSpPr/>
-          <p:nvPr/>
-        </p:nvSpPr>
-        <p:spPr>
-          <a:xfrm>
-            <a:off x="557784" y="2788920"/>
-            <a:ext cx="5290718" cy="493776"/>
+              <a:t>Traditional VPC peering caps at 25 spokes per hub, requires globally non-overlapping CIDRs, and opens bi-directional L3 blast radius.</a:t>
+            </a:r>
+            <a:endParaRPr lang="en-US" sz="740" dirty="0"/>
+          </a:p>
+        </p:txBody>
+      </p:sp>
+      <p:sp>
+        <p:nvSpPr>
+          <p:cNvPr id="24" name="Shape 21"/>
+          <p:cNvSpPr/>
+          <p:nvPr/>
+        </p:nvSpPr>
+        <p:spPr>
+          <a:xfrm>
+            <a:off x="3294583" y="4663440"/>
+            <a:ext cx="2718511" cy="1408176"/>
           </a:xfrm>
           <a:prstGeom prst="roundRect">
             <a:avLst>
-              <a:gd name="adj" fmla="val 11111"/>
-            </a:avLst>
-          </a:prstGeom>
-          <a:solidFill>
-            <a:srgbClr val="FFFFFF"/>
-          </a:solidFill>
-          <a:ln w="9525">
-            <a:solidFill>
-              <a:srgbClr val="DADCE0"/>
-            </a:solidFill>
-            <a:prstDash val="solid"/>
-          </a:ln>
-        </p:spPr>
-      </p:sp>
-      <p:sp>
-        <p:nvSpPr>
-          <p:cNvPr id="27" name="Shape 25"/>
-          <p:cNvSpPr/>
-          <p:nvPr/>
-        </p:nvSpPr>
-        <p:spPr>
-          <a:xfrm>
-            <a:off x="557784" y="2788920"/>
-            <a:ext cx="54864" cy="493776"/>
-          </a:xfrm>
-          <a:prstGeom prst="rect">
-            <a:avLst/>
-          </a:prstGeom>
-          <a:solidFill>
-            <a:srgbClr val="4285F4"/>
-          </a:solidFill>
-          <a:ln/>
-        </p:spPr>
-      </p:sp>
-      <p:sp>
-        <p:nvSpPr>
-          <p:cNvPr id="28" name="Text 26"/>
-          <p:cNvSpPr/>
-          <p:nvPr/>
-        </p:nvSpPr>
-        <p:spPr>
-          <a:xfrm>
-            <a:off x="649224" y="2816352"/>
-            <a:ext cx="5162702" cy="438912"/>
-          </a:xfrm>
-          <a:prstGeom prst="rect">
-            <a:avLst/>
-          </a:prstGeom>
-          <a:noFill/>
-          <a:ln/>
-        </p:spPr>
-        <p:txBody>
-          <a:bodyPr wrap="square" rtlCol="0" anchor="ctr"/>
-          <a:lstStyle/>
-          <a:p>
-            <a:pPr indent="0" marL="0">
-              <a:buNone/>
-            </a:pPr>
-            <a:r>
-              <a:rPr lang="en-US" sz="750" b="1" dirty="0">
-                <a:solidFill>
-                  <a:srgbClr val="3C4043"/>
-                </a:solidFill>
-                <a:latin typeface="Google Sans" pitchFamily="34" charset="0"/>
-                <a:ea typeface="Google Sans" pitchFamily="34" charset="-122"/>
-                <a:cs typeface="Google Sans" pitchFamily="34" charset="-120"/>
-              </a:rPr>
-              <a:t>Cloud Stack: Hub VPC: cymbal-pattern-c-hub-vpc (10.10.0.0/20) • Cloud Run Hybrid Router
-</a:t>
-            </a:r>
-            <a:pPr indent="0" marL="0">
-              <a:buNone/>
-            </a:pPr>
-            <a:r>
-              <a:rPr lang="en-US" sz="730" dirty="0">
-                <a:solidFill>
-                  <a:srgbClr val="5F6368"/>
-                </a:solidFill>
-                <a:latin typeface="Roboto" pitchFamily="34" charset="0"/>
-                <a:ea typeface="Roboto" pitchFamily="34" charset="-122"/>
-                <a:cs typeface="Roboto" pitchFamily="34" charset="-120"/>
-              </a:rPr>
-              <a:t>Target &amp; SLA: Sub-2ms Tier Lookup in Firestore • Enforces Hop 1 OBO/DPoP &amp; Hop 2 Catalog Filter</a:t>
-            </a:r>
-            <a:endParaRPr lang="en-US" sz="750" dirty="0"/>
-          </a:p>
-        </p:txBody>
-      </p:sp>
-      <p:sp>
-        <p:nvSpPr>
-          <p:cNvPr id="29" name="Shape 27"/>
-          <p:cNvSpPr/>
-          <p:nvPr/>
-        </p:nvSpPr>
-        <p:spPr>
-          <a:xfrm>
-            <a:off x="557784" y="3337560"/>
-            <a:ext cx="5290718" cy="219456"/>
-          </a:xfrm>
-          <a:prstGeom prst="roundRect">
-            <a:avLst>
-              <a:gd name="adj" fmla="val 20833"/>
-            </a:avLst>
-          </a:prstGeom>
-          <a:solidFill>
-            <a:srgbClr val="E8F0FE"/>
-          </a:solidFill>
-          <a:ln/>
-        </p:spPr>
-      </p:sp>
-      <p:sp>
-        <p:nvSpPr>
-          <p:cNvPr id="30" name="Text 28"/>
-          <p:cNvSpPr/>
-          <p:nvPr/>
-        </p:nvSpPr>
-        <p:spPr>
-          <a:xfrm>
-            <a:off x="612648" y="3337560"/>
-            <a:ext cx="5180990" cy="219456"/>
-          </a:xfrm>
-          <a:prstGeom prst="rect">
-            <a:avLst/>
-          </a:prstGeom>
-          <a:noFill/>
-          <a:ln/>
-        </p:spPr>
-        <p:txBody>
-          <a:bodyPr wrap="square" rtlCol="0" anchor="ctr"/>
-          <a:lstStyle/>
-          <a:p>
-            <a:pPr indent="0" marL="0">
-              <a:buNone/>
-            </a:pPr>
-            <a:r>
-              <a:rPr lang="en-US" sz="750" b="1" dirty="0">
-                <a:solidFill>
-                  <a:srgbClr val="174EA6"/>
-                </a:solidFill>
-                <a:latin typeface="Google Sans" pitchFamily="34" charset="0"/>
-                <a:ea typeface="Google Sans" pitchFamily="34" charset="-122"/>
-                <a:cs typeface="Google Sans" pitchFamily="34" charset="-120"/>
-              </a:rPr>
-              <a:t>Zone 1: Central Routing Hub</a:t>
-            </a:r>
-            <a:endParaRPr lang="en-US" sz="750" dirty="0"/>
-          </a:p>
-        </p:txBody>
-      </p:sp>
-      <p:sp>
-        <p:nvSpPr>
-          <p:cNvPr id="31" name="Shape 29"/>
-          <p:cNvSpPr/>
-          <p:nvPr/>
-        </p:nvSpPr>
-        <p:spPr>
-          <a:xfrm>
-            <a:off x="6195974" y="1353312"/>
-            <a:ext cx="5583326" cy="2258568"/>
-          </a:xfrm>
-          <a:prstGeom prst="roundRect">
-            <a:avLst>
-              <a:gd name="adj" fmla="val 3239"/>
+              <a:gd name="adj" fmla="val 5195"/>
             </a:avLst>
           </a:prstGeom>
           <a:solidFill>
@@ -19455,14 +21161,14 @@
       </p:sp>
       <p:sp>
         <p:nvSpPr>
-          <p:cNvPr id="32" name="Shape 30"/>
-          <p:cNvSpPr/>
-          <p:nvPr/>
-        </p:nvSpPr>
-        <p:spPr>
-          <a:xfrm>
-            <a:off x="6195974" y="1353312"/>
-            <a:ext cx="5583326" cy="59436"/>
+          <p:cNvPr id="25" name="Shape 22"/>
+          <p:cNvSpPr/>
+          <p:nvPr/>
+        </p:nvSpPr>
+        <p:spPr>
+          <a:xfrm>
+            <a:off x="3294583" y="4663440"/>
+            <a:ext cx="2718511" cy="50292"/>
           </a:xfrm>
           <a:prstGeom prst="rect">
             <a:avLst/>
@@ -19475,150 +21181,73 @@
       </p:sp>
       <p:sp>
         <p:nvSpPr>
-          <p:cNvPr id="33" name="Shape 31"/>
-          <p:cNvSpPr/>
-          <p:nvPr/>
-        </p:nvSpPr>
-        <p:spPr>
-          <a:xfrm>
-            <a:off x="6342278" y="1481328"/>
-            <a:ext cx="365760" cy="256032"/>
-          </a:xfrm>
-          <a:prstGeom prst="roundRect">
-            <a:avLst>
-              <a:gd name="adj" fmla="val 21429"/>
-            </a:avLst>
-          </a:prstGeom>
-          <a:solidFill>
-            <a:srgbClr val="FCE8E6"/>
-          </a:solidFill>
-          <a:ln/>
-        </p:spPr>
-      </p:sp>
-      <p:sp>
-        <p:nvSpPr>
-          <p:cNvPr id="34" name="Text 32"/>
-          <p:cNvSpPr/>
-          <p:nvPr/>
-        </p:nvSpPr>
-        <p:spPr>
-          <a:xfrm>
-            <a:off x="6342278" y="1481328"/>
-            <a:ext cx="365760" cy="256032"/>
-          </a:xfrm>
-          <a:prstGeom prst="rect">
-            <a:avLst/>
-          </a:prstGeom>
-          <a:noFill/>
-          <a:ln/>
-        </p:spPr>
-        <p:txBody>
-          <a:bodyPr wrap="square" rtlCol="0" anchor="ctr"/>
-          <a:lstStyle/>
-          <a:p>
-            <a:pPr algn="ctr" indent="0" marL="0">
-              <a:buNone/>
-            </a:pPr>
-            <a:r>
-              <a:rPr lang="en-US" sz="920" b="1" dirty="0">
-                <a:solidFill>
-                  <a:srgbClr val="A50E0E"/>
+          <p:cNvPr id="26" name="Text 23"/>
+          <p:cNvSpPr/>
+          <p:nvPr/>
+        </p:nvSpPr>
+        <p:spPr>
+          <a:xfrm>
+            <a:off x="3404311" y="4736592"/>
+            <a:ext cx="2499055" cy="256032"/>
+          </a:xfrm>
+          <a:prstGeom prst="rect">
+            <a:avLst/>
+          </a:prstGeom>
+          <a:noFill/>
+          <a:ln/>
+        </p:spPr>
+        <p:txBody>
+          <a:bodyPr wrap="square" rtlCol="0" anchor="ctr">
+            <a:normAutofit/>
+          </a:bodyPr>
+          <a:lstStyle/>
+          <a:p>
+            <a:pPr indent="0" marL="0">
+              <a:buNone/>
+            </a:pPr>
+            <a:r>
+              <a:rPr lang="en-US" sz="760" b="1" dirty="0">
+                <a:solidFill>
+                  <a:srgbClr val="3C4043"/>
                 </a:solidFill>
                 <a:latin typeface="Google Sans" pitchFamily="34" charset="0"/>
                 <a:ea typeface="Google Sans" pitchFamily="34" charset="-122"/>
                 <a:cs typeface="Google Sans" pitchFamily="34" charset="-120"/>
               </a:rPr>
-              <a:t>02</a:t>
-            </a:r>
-            <a:endParaRPr lang="en-US" sz="920" dirty="0"/>
-          </a:p>
-        </p:txBody>
-      </p:sp>
-      <p:sp>
-        <p:nvSpPr>
-          <p:cNvPr id="35" name="Text 33"/>
-          <p:cNvSpPr/>
-          <p:nvPr/>
-        </p:nvSpPr>
-        <p:spPr>
-          <a:xfrm>
-            <a:off x="6781190" y="1463040"/>
-            <a:ext cx="4851806" cy="329184"/>
-          </a:xfrm>
-          <a:prstGeom prst="rect">
-            <a:avLst/>
-          </a:prstGeom>
-          <a:noFill/>
-          <a:ln/>
-        </p:spPr>
-        <p:txBody>
-          <a:bodyPr wrap="square" rtlCol="0" anchor="ctr"/>
+              <a:t>2. Why Private Service Connect (PSC) Scales</a:t>
+            </a:r>
+            <a:endParaRPr lang="en-US" sz="760" dirty="0"/>
+          </a:p>
+        </p:txBody>
+      </p:sp>
+      <p:sp>
+        <p:nvSpPr>
+          <p:cNvPr id="27" name="Text 24"/>
+          <p:cNvSpPr/>
+          <p:nvPr/>
+        </p:nvSpPr>
+        <p:spPr>
+          <a:xfrm>
+            <a:off x="3404311" y="4992624"/>
+            <a:ext cx="2499055" cy="1024128"/>
+          </a:xfrm>
+          <a:prstGeom prst="rect">
+            <a:avLst/>
+          </a:prstGeom>
+          <a:noFill/>
+          <a:ln/>
+        </p:spPr>
+        <p:txBody>
+          <a:bodyPr wrap="square" rtlCol="0" anchor="t">
+            <a:normAutofit/>
+          </a:bodyPr>
           <a:lstStyle/>
           <a:p>
             <a:pPr indent="0" marL="0">
               <a:buNone/>
             </a:pPr>
             <a:r>
-              <a:rPr lang="en-US" sz="1140" b="1" dirty="0">
-                <a:solidFill>
-                  <a:srgbClr val="3C4043"/>
-                </a:solidFill>
-                <a:latin typeface="Google Sans" pitchFamily="34" charset="0"/>
-                <a:ea typeface="Google Sans" pitchFamily="34" charset="-122"/>
-                <a:cs typeface="Google Sans" pitchFamily="34" charset="-120"/>
-              </a:rPr>
-              <a:t>Consumer PSC Endpoint in the Hub (10.10.0.50)</a:t>
-            </a:r>
-            <a:endParaRPr lang="en-US" sz="1140" dirty="0"/>
-          </a:p>
-        </p:txBody>
-      </p:sp>
-      <p:sp>
-        <p:nvSpPr>
-          <p:cNvPr id="36" name="Shape 34"/>
-          <p:cNvSpPr/>
-          <p:nvPr/>
-        </p:nvSpPr>
-        <p:spPr>
-          <a:xfrm>
-            <a:off x="6342278" y="1847088"/>
-            <a:ext cx="5290718" cy="9144"/>
-          </a:xfrm>
-          <a:prstGeom prst="rect">
-            <a:avLst/>
-          </a:prstGeom>
-          <a:solidFill>
-            <a:srgbClr val="DADCE0"/>
-          </a:solidFill>
-          <a:ln/>
-        </p:spPr>
-      </p:sp>
-      <p:sp>
-        <p:nvSpPr>
-          <p:cNvPr id="37" name="Text 35"/>
-          <p:cNvSpPr/>
-          <p:nvPr/>
-        </p:nvSpPr>
-        <p:spPr>
-          <a:xfrm>
-            <a:off x="6342278" y="1901952"/>
-            <a:ext cx="5290718" cy="850392"/>
-          </a:xfrm>
-          <a:prstGeom prst="rect">
-            <a:avLst/>
-          </a:prstGeom>
-          <a:noFill/>
-          <a:ln/>
-        </p:spPr>
-        <p:txBody>
-          <a:bodyPr wrap="square" rtlCol="0" anchor="t"/>
-          <a:lstStyle/>
-          <a:p>
-            <a:pPr indent="0" marL="0">
-              <a:buNone/>
-            </a:pPr>
-            <a:r>
-              <a:rPr lang="en-US" sz="980" dirty="0">
+              <a:rPr lang="en-US" sz="740" dirty="0">
                 <a:solidFill>
                   <a:srgbClr val="5F6368"/>
                 </a:solidFill>
@@ -19626,188 +21255,26 @@
                 <a:ea typeface="Roboto" pitchFamily="34" charset="-122"/>
                 <a:cs typeface="Roboto" pitchFamily="34" charset="-120"/>
               </a:rPr>
-              <a:t>The Hub VPC (10.10.0.0/20) binds an internal Private Service Connect forwarding rule directly to each Enterprise tenant’s spoke ServiceAttachment URI.</a:t>
-            </a:r>
-            <a:endParaRPr lang="en-US" sz="980" dirty="0"/>
-          </a:p>
-        </p:txBody>
-      </p:sp>
-      <p:sp>
-        <p:nvSpPr>
-          <p:cNvPr id="38" name="Shape 36"/>
-          <p:cNvSpPr/>
-          <p:nvPr/>
-        </p:nvSpPr>
-        <p:spPr>
-          <a:xfrm>
-            <a:off x="6342278" y="2788920"/>
-            <a:ext cx="5290718" cy="493776"/>
+              <a:t>Unidirectional NAT (ServiceAttachment) scales to 100s of enterprise spokes while letting every spoke reuse the identical 10.40.0.0/20 CIDR.</a:t>
+            </a:r>
+            <a:endParaRPr lang="en-US" sz="740" dirty="0"/>
+          </a:p>
+        </p:txBody>
+      </p:sp>
+      <p:sp>
+        <p:nvSpPr>
+          <p:cNvPr id="28" name="Shape 25"/>
+          <p:cNvSpPr/>
+          <p:nvPr/>
+        </p:nvSpPr>
+        <p:spPr>
+          <a:xfrm>
+            <a:off x="6177686" y="4663440"/>
+            <a:ext cx="2718511" cy="1408176"/>
           </a:xfrm>
           <a:prstGeom prst="roundRect">
             <a:avLst>
-              <a:gd name="adj" fmla="val 11111"/>
-            </a:avLst>
-          </a:prstGeom>
-          <a:solidFill>
-            <a:srgbClr val="FFFFFF"/>
-          </a:solidFill>
-          <a:ln w="9525">
-            <a:solidFill>
-              <a:srgbClr val="DADCE0"/>
-            </a:solidFill>
-            <a:prstDash val="solid"/>
-          </a:ln>
-        </p:spPr>
-      </p:sp>
-      <p:sp>
-        <p:nvSpPr>
-          <p:cNvPr id="39" name="Shape 37"/>
-          <p:cNvSpPr/>
-          <p:nvPr/>
-        </p:nvSpPr>
-        <p:spPr>
-          <a:xfrm>
-            <a:off x="6342278" y="2788920"/>
-            <a:ext cx="54864" cy="493776"/>
-          </a:xfrm>
-          <a:prstGeom prst="rect">
-            <a:avLst/>
-          </a:prstGeom>
-          <a:solidFill>
-            <a:srgbClr val="EA4335"/>
-          </a:solidFill>
-          <a:ln/>
-        </p:spPr>
-      </p:sp>
-      <p:sp>
-        <p:nvSpPr>
-          <p:cNvPr id="40" name="Text 38"/>
-          <p:cNvSpPr/>
-          <p:nvPr/>
-        </p:nvSpPr>
-        <p:spPr>
-          <a:xfrm>
-            <a:off x="6433718" y="2816352"/>
-            <a:ext cx="5162702" cy="438912"/>
-          </a:xfrm>
-          <a:prstGeom prst="rect">
-            <a:avLst/>
-          </a:prstGeom>
-          <a:noFill/>
-          <a:ln/>
-        </p:spPr>
-        <p:txBody>
-          <a:bodyPr wrap="square" rtlCol="0" anchor="ctr"/>
-          <a:lstStyle/>
-          <a:p>
-            <a:pPr indent="0" marL="0">
-              <a:buNone/>
-            </a:pPr>
-            <a:r>
-              <a:rPr lang="en-US" sz="750" b="1" dirty="0">
-                <a:solidFill>
-                  <a:srgbClr val="3C4043"/>
-                </a:solidFill>
-                <a:latin typeface="Google Sans" pitchFamily="34" charset="0"/>
-                <a:ea typeface="Google Sans" pitchFamily="34" charset="-122"/>
-                <a:cs typeface="Google Sans" pitchFamily="34" charset="-120"/>
-              </a:rPr>
-              <a:t>Cloud Stack: google_compute_address (10.10.0.50) + google_compute_forwarding_rule (PSC Consumer)
-</a:t>
-            </a:r>
-            <a:pPr indent="0" marL="0">
-              <a:buNone/>
-            </a:pPr>
-            <a:r>
-              <a:rPr lang="en-US" sz="730" dirty="0">
-                <a:solidFill>
-                  <a:srgbClr val="5F6368"/>
-                </a:solidFill>
-                <a:latin typeface="Roboto" pitchFamily="34" charset="0"/>
-                <a:ea typeface="Roboto" pitchFamily="34" charset="-122"/>
-                <a:cs typeface="Roboto" pitchFamily="34" charset="-120"/>
-              </a:rPr>
-              <a:t>Target &amp; SLA: Private Layer-4/7 Tunnel Across Project Boundaries Without Public IP Exposure</a:t>
-            </a:r>
-            <a:endParaRPr lang="en-US" sz="750" dirty="0"/>
-          </a:p>
-        </p:txBody>
-      </p:sp>
-      <p:sp>
-        <p:nvSpPr>
-          <p:cNvPr id="41" name="Shape 39"/>
-          <p:cNvSpPr/>
-          <p:nvPr/>
-        </p:nvSpPr>
-        <p:spPr>
-          <a:xfrm>
-            <a:off x="6342278" y="3337560"/>
-            <a:ext cx="5290718" cy="219456"/>
-          </a:xfrm>
-          <a:prstGeom prst="roundRect">
-            <a:avLst>
-              <a:gd name="adj" fmla="val 20833"/>
-            </a:avLst>
-          </a:prstGeom>
-          <a:solidFill>
-            <a:srgbClr val="FCE8E6"/>
-          </a:solidFill>
-          <a:ln/>
-        </p:spPr>
-      </p:sp>
-      <p:sp>
-        <p:nvSpPr>
-          <p:cNvPr id="42" name="Text 40"/>
-          <p:cNvSpPr/>
-          <p:nvPr/>
-        </p:nvSpPr>
-        <p:spPr>
-          <a:xfrm>
-            <a:off x="6397142" y="3337560"/>
-            <a:ext cx="5180990" cy="219456"/>
-          </a:xfrm>
-          <a:prstGeom prst="rect">
-            <a:avLst/>
-          </a:prstGeom>
-          <a:noFill/>
-          <a:ln/>
-        </p:spPr>
-        <p:txBody>
-          <a:bodyPr wrap="square" rtlCol="0" anchor="ctr"/>
-          <a:lstStyle/>
-          <a:p>
-            <a:pPr indent="0" marL="0">
-              <a:buNone/>
-            </a:pPr>
-            <a:r>
-              <a:rPr lang="en-US" sz="750" b="1" dirty="0">
-                <a:solidFill>
-                  <a:srgbClr val="A50E0E"/>
-                </a:solidFill>
-                <a:latin typeface="Google Sans" pitchFamily="34" charset="0"/>
-                <a:ea typeface="Google Sans" pitchFamily="34" charset="-122"/>
-                <a:cs typeface="Google Sans" pitchFamily="34" charset="-120"/>
-              </a:rPr>
-              <a:t>Hub Consumer PSC Endpoint</a:t>
-            </a:r>
-            <a:endParaRPr lang="en-US" sz="750" dirty="0"/>
-          </a:p>
-        </p:txBody>
-      </p:sp>
-      <p:sp>
-        <p:nvSpPr>
-          <p:cNvPr id="43" name="Shape 41"/>
-          <p:cNvSpPr/>
-          <p:nvPr/>
-        </p:nvSpPr>
-        <p:spPr>
-          <a:xfrm>
-            <a:off x="411480" y="3776472"/>
-            <a:ext cx="5583326" cy="2258568"/>
-          </a:xfrm>
-          <a:prstGeom prst="roundRect">
-            <a:avLst>
-              <a:gd name="adj" fmla="val 3239"/>
+              <a:gd name="adj" fmla="val 5195"/>
             </a:avLst>
           </a:prstGeom>
           <a:solidFill>
@@ -19823,14 +21290,14 @@
       </p:sp>
       <p:sp>
         <p:nvSpPr>
-          <p:cNvPr id="44" name="Shape 42"/>
-          <p:cNvSpPr/>
-          <p:nvPr/>
-        </p:nvSpPr>
-        <p:spPr>
-          <a:xfrm>
-            <a:off x="411480" y="3776472"/>
-            <a:ext cx="5583326" cy="59436"/>
+          <p:cNvPr id="29" name="Shape 26"/>
+          <p:cNvSpPr/>
+          <p:nvPr/>
+        </p:nvSpPr>
+        <p:spPr>
+          <a:xfrm>
+            <a:off x="6177686" y="4663440"/>
+            <a:ext cx="2718511" cy="50292"/>
           </a:xfrm>
           <a:prstGeom prst="rect">
             <a:avLst/>
@@ -19843,150 +21310,73 @@
       </p:sp>
       <p:sp>
         <p:nvSpPr>
-          <p:cNvPr id="45" name="Shape 43"/>
-          <p:cNvSpPr/>
-          <p:nvPr/>
-        </p:nvSpPr>
-        <p:spPr>
-          <a:xfrm>
-            <a:off x="557784" y="3904488"/>
-            <a:ext cx="365760" cy="256032"/>
-          </a:xfrm>
-          <a:prstGeom prst="roundRect">
-            <a:avLst>
-              <a:gd name="adj" fmla="val 21429"/>
-            </a:avLst>
-          </a:prstGeom>
-          <a:solidFill>
-            <a:srgbClr val="FEF7E0"/>
-          </a:solidFill>
-          <a:ln/>
-        </p:spPr>
-      </p:sp>
-      <p:sp>
-        <p:nvSpPr>
-          <p:cNvPr id="46" name="Text 44"/>
-          <p:cNvSpPr/>
-          <p:nvPr/>
-        </p:nvSpPr>
-        <p:spPr>
-          <a:xfrm>
-            <a:off x="557784" y="3904488"/>
-            <a:ext cx="365760" cy="256032"/>
-          </a:xfrm>
-          <a:prstGeom prst="rect">
-            <a:avLst/>
-          </a:prstGeom>
-          <a:noFill/>
-          <a:ln/>
-        </p:spPr>
-        <p:txBody>
-          <a:bodyPr wrap="square" rtlCol="0" anchor="ctr"/>
-          <a:lstStyle/>
-          <a:p>
-            <a:pPr algn="ctr" indent="0" marL="0">
-              <a:buNone/>
-            </a:pPr>
-            <a:r>
-              <a:rPr lang="en-US" sz="920" b="1" dirty="0">
-                <a:solidFill>
-                  <a:srgbClr val="B06000"/>
+          <p:cNvPr id="30" name="Text 27"/>
+          <p:cNvSpPr/>
+          <p:nvPr/>
+        </p:nvSpPr>
+        <p:spPr>
+          <a:xfrm>
+            <a:off x="6287414" y="4736592"/>
+            <a:ext cx="2499055" cy="256032"/>
+          </a:xfrm>
+          <a:prstGeom prst="rect">
+            <a:avLst/>
+          </a:prstGeom>
+          <a:noFill/>
+          <a:ln/>
+        </p:spPr>
+        <p:txBody>
+          <a:bodyPr wrap="square" rtlCol="0" anchor="ctr">
+            <a:normAutofit/>
+          </a:bodyPr>
+          <a:lstStyle/>
+          <a:p>
+            <a:pPr indent="0" marL="0">
+              <a:buNone/>
+            </a:pPr>
+            <a:r>
+              <a:rPr lang="en-US" sz="760" b="1" dirty="0">
+                <a:solidFill>
+                  <a:srgbClr val="3C4043"/>
                 </a:solidFill>
                 <a:latin typeface="Google Sans" pitchFamily="34" charset="0"/>
                 <a:ea typeface="Google Sans" pitchFamily="34" charset="-122"/>
                 <a:cs typeface="Google Sans" pitchFamily="34" charset="-120"/>
               </a:rPr>
-              <a:t>03</a:t>
-            </a:r>
-            <a:endParaRPr lang="en-US" sz="920" dirty="0"/>
-          </a:p>
-        </p:txBody>
-      </p:sp>
-      <p:sp>
-        <p:nvSpPr>
-          <p:cNvPr id="47" name="Text 45"/>
-          <p:cNvSpPr/>
-          <p:nvPr/>
-        </p:nvSpPr>
-        <p:spPr>
-          <a:xfrm>
-            <a:off x="996696" y="3886200"/>
-            <a:ext cx="4851806" cy="329184"/>
-          </a:xfrm>
-          <a:prstGeom prst="rect">
-            <a:avLst/>
-          </a:prstGeom>
-          <a:noFill/>
-          <a:ln/>
-        </p:spPr>
-        <p:txBody>
-          <a:bodyPr wrap="square" rtlCol="0" anchor="ctr"/>
+              <a:t>3. Zero-Downtime Promotion vs. Cold Cutover</a:t>
+            </a:r>
+            <a:endParaRPr lang="en-US" sz="760" dirty="0"/>
+          </a:p>
+        </p:txBody>
+      </p:sp>
+      <p:sp>
+        <p:nvSpPr>
+          <p:cNvPr id="31" name="Text 28"/>
+          <p:cNvSpPr/>
+          <p:nvPr/>
+        </p:nvSpPr>
+        <p:spPr>
+          <a:xfrm>
+            <a:off x="6287414" y="4992624"/>
+            <a:ext cx="2499055" cy="1024128"/>
+          </a:xfrm>
+          <a:prstGeom prst="rect">
+            <a:avLst/>
+          </a:prstGeom>
+          <a:noFill/>
+          <a:ln/>
+        </p:spPr>
+        <p:txBody>
+          <a:bodyPr wrap="square" rtlCol="0" anchor="t">
+            <a:normAutofit/>
+          </a:bodyPr>
           <a:lstStyle/>
           <a:p>
             <a:pPr indent="0" marL="0">
               <a:buNone/>
             </a:pPr>
             <a:r>
-              <a:rPr lang="en-US" sz="1140" b="1" dirty="0">
-                <a:solidFill>
-                  <a:srgbClr val="3C4043"/>
-                </a:solidFill>
-                <a:latin typeface="Google Sans" pitchFamily="34" charset="0"/>
-                <a:ea typeface="Google Sans" pitchFamily="34" charset="-122"/>
-                <a:cs typeface="Google Sans" pitchFamily="34" charset="-120"/>
-              </a:rPr>
-              <a:t>Producer ServiceAttachment in Each Spoke (ACCEPT_MANUAL)</a:t>
-            </a:r>
-            <a:endParaRPr lang="en-US" sz="1140" dirty="0"/>
-          </a:p>
-        </p:txBody>
-      </p:sp>
-      <p:sp>
-        <p:nvSpPr>
-          <p:cNvPr id="48" name="Shape 46"/>
-          <p:cNvSpPr/>
-          <p:nvPr/>
-        </p:nvSpPr>
-        <p:spPr>
-          <a:xfrm>
-            <a:off x="557784" y="4270248"/>
-            <a:ext cx="5290718" cy="9144"/>
-          </a:xfrm>
-          <a:prstGeom prst="rect">
-            <a:avLst/>
-          </a:prstGeom>
-          <a:solidFill>
-            <a:srgbClr val="DADCE0"/>
-          </a:solidFill>
-          <a:ln/>
-        </p:spPr>
-      </p:sp>
-      <p:sp>
-        <p:nvSpPr>
-          <p:cNvPr id="49" name="Text 47"/>
-          <p:cNvSpPr/>
-          <p:nvPr/>
-        </p:nvSpPr>
-        <p:spPr>
-          <a:xfrm>
-            <a:off x="557784" y="4325112"/>
-            <a:ext cx="5290718" cy="850392"/>
-          </a:xfrm>
-          <a:prstGeom prst="rect">
-            <a:avLst/>
-          </a:prstGeom>
-          <a:noFill/>
-          <a:ln/>
-        </p:spPr>
-        <p:txBody>
-          <a:bodyPr wrap="square" rtlCol="0" anchor="t"/>
-          <a:lstStyle/>
-          <a:p>
-            <a:pPr indent="0" marL="0">
-              <a:buNone/>
-            </a:pPr>
-            <a:r>
-              <a:rPr lang="en-US" sz="980" dirty="0">
+              <a:rPr lang="en-US" sz="740" dirty="0">
                 <a:solidFill>
                   <a:srgbClr val="5F6368"/>
                 </a:solidFill>
@@ -19994,188 +21384,26 @@
                 <a:ea typeface="Roboto" pitchFamily="34" charset="-122"/>
                 <a:cs typeface="Roboto" pitchFamily="34" charset="-120"/>
               </a:rPr>
-              <a:t>Each Enterprise spoke project exposes its private Cloud Run / GKE agent runtime via a /24 PSC NAT subnet (10.40.240.0/24) whitelisting only the Hub project.</a:t>
-            </a:r>
-            <a:endParaRPr lang="en-US" sz="980" dirty="0"/>
-          </a:p>
-        </p:txBody>
-      </p:sp>
-      <p:sp>
-        <p:nvSpPr>
-          <p:cNvPr id="50" name="Shape 48"/>
-          <p:cNvSpPr/>
-          <p:nvPr/>
-        </p:nvSpPr>
-        <p:spPr>
-          <a:xfrm>
-            <a:off x="557784" y="5212080"/>
-            <a:ext cx="5290718" cy="493776"/>
+              <a:t>Replaces 4–8 hr maintenance blackouts with SHADOW_SYNC -&gt; ATOMIC_CUTOVER -&gt; DRAIN_AND_VERIFY (&lt;10ms Firestore pointer flip, 0 dropped turns).</a:t>
+            </a:r>
+            <a:endParaRPr lang="en-US" sz="740" dirty="0"/>
+          </a:p>
+        </p:txBody>
+      </p:sp>
+      <p:sp>
+        <p:nvSpPr>
+          <p:cNvPr id="32" name="Shape 29"/>
+          <p:cNvSpPr/>
+          <p:nvPr/>
+        </p:nvSpPr>
+        <p:spPr>
+          <a:xfrm>
+            <a:off x="9060790" y="4663440"/>
+            <a:ext cx="2718511" cy="1408176"/>
           </a:xfrm>
           <a:prstGeom prst="roundRect">
             <a:avLst>
-              <a:gd name="adj" fmla="val 11111"/>
-            </a:avLst>
-          </a:prstGeom>
-          <a:solidFill>
-            <a:srgbClr val="FFFFFF"/>
-          </a:solidFill>
-          <a:ln w="9525">
-            <a:solidFill>
-              <a:srgbClr val="DADCE0"/>
-            </a:solidFill>
-            <a:prstDash val="solid"/>
-          </a:ln>
-        </p:spPr>
-      </p:sp>
-      <p:sp>
-        <p:nvSpPr>
-          <p:cNvPr id="51" name="Shape 49"/>
-          <p:cNvSpPr/>
-          <p:nvPr/>
-        </p:nvSpPr>
-        <p:spPr>
-          <a:xfrm>
-            <a:off x="557784" y="5212080"/>
-            <a:ext cx="54864" cy="493776"/>
-          </a:xfrm>
-          <a:prstGeom prst="rect">
-            <a:avLst/>
-          </a:prstGeom>
-          <a:solidFill>
-            <a:srgbClr val="FBBC04"/>
-          </a:solidFill>
-          <a:ln/>
-        </p:spPr>
-      </p:sp>
-      <p:sp>
-        <p:nvSpPr>
-          <p:cNvPr id="52" name="Text 50"/>
-          <p:cNvSpPr/>
-          <p:nvPr/>
-        </p:nvSpPr>
-        <p:spPr>
-          <a:xfrm>
-            <a:off x="649224" y="5239512"/>
-            <a:ext cx="5162702" cy="438912"/>
-          </a:xfrm>
-          <a:prstGeom prst="rect">
-            <a:avLst/>
-          </a:prstGeom>
-          <a:noFill/>
-          <a:ln/>
-        </p:spPr>
-        <p:txBody>
-          <a:bodyPr wrap="square" rtlCol="0" anchor="ctr"/>
-          <a:lstStyle/>
-          <a:p>
-            <a:pPr indent="0" marL="0">
-              <a:buNone/>
-            </a:pPr>
-            <a:r>
-              <a:rPr lang="en-US" sz="750" b="1" dirty="0">
-                <a:solidFill>
-                  <a:srgbClr val="3C4043"/>
-                </a:solidFill>
-                <a:latin typeface="Google Sans" pitchFamily="34" charset="0"/>
-                <a:ea typeface="Google Sans" pitchFamily="34" charset="-122"/>
-                <a:cs typeface="Google Sans" pitchFamily="34" charset="-120"/>
-              </a:rPr>
-              <a:t>Cloud Stack: google_compute_service_attachment (connection_preference = ACCEPT_MANUAL)
-</a:t>
-            </a:r>
-            <a:pPr indent="0" marL="0">
-              <a:buNone/>
-            </a:pPr>
-            <a:r>
-              <a:rPr lang="en-US" sz="730" dirty="0">
-                <a:solidFill>
-                  <a:srgbClr val="5F6368"/>
-                </a:solidFill>
-                <a:latin typeface="Roboto" pitchFamily="34" charset="0"/>
-                <a:ea typeface="Roboto" pitchFamily="34" charset="-122"/>
-                <a:cs typeface="Roboto" pitchFamily="34" charset="-120"/>
-              </a:rPr>
-              <a:t>Target &amp; SLA: Explicitly Whitelists Only cymbal-hybrid-hub-prod (Connection Limit = 10)</a:t>
-            </a:r>
-            <a:endParaRPr lang="en-US" sz="750" dirty="0"/>
-          </a:p>
-        </p:txBody>
-      </p:sp>
-      <p:sp>
-        <p:nvSpPr>
-          <p:cNvPr id="53" name="Shape 51"/>
-          <p:cNvSpPr/>
-          <p:nvPr/>
-        </p:nvSpPr>
-        <p:spPr>
-          <a:xfrm>
-            <a:off x="557784" y="5760720"/>
-            <a:ext cx="5290718" cy="219456"/>
-          </a:xfrm>
-          <a:prstGeom prst="roundRect">
-            <a:avLst>
-              <a:gd name="adj" fmla="val 20833"/>
-            </a:avLst>
-          </a:prstGeom>
-          <a:solidFill>
-            <a:srgbClr val="FEF7E0"/>
-          </a:solidFill>
-          <a:ln/>
-        </p:spPr>
-      </p:sp>
-      <p:sp>
-        <p:nvSpPr>
-          <p:cNvPr id="54" name="Text 52"/>
-          <p:cNvSpPr/>
-          <p:nvPr/>
-        </p:nvSpPr>
-        <p:spPr>
-          <a:xfrm>
-            <a:off x="612648" y="5760720"/>
-            <a:ext cx="5180990" cy="219456"/>
-          </a:xfrm>
-          <a:prstGeom prst="rect">
-            <a:avLst/>
-          </a:prstGeom>
-          <a:noFill/>
-          <a:ln/>
-        </p:spPr>
-        <p:txBody>
-          <a:bodyPr wrap="square" rtlCol="0" anchor="ctr"/>
-          <a:lstStyle/>
-          <a:p>
-            <a:pPr indent="0" marL="0">
-              <a:buNone/>
-            </a:pPr>
-            <a:r>
-              <a:rPr lang="en-US" sz="750" b="1" dirty="0">
-                <a:solidFill>
-                  <a:srgbClr val="B06000"/>
-                </a:solidFill>
-                <a:latin typeface="Google Sans" pitchFamily="34" charset="0"/>
-                <a:ea typeface="Google Sans" pitchFamily="34" charset="-122"/>
-                <a:cs typeface="Google Sans" pitchFamily="34" charset="-120"/>
-              </a:rPr>
-              <a:t>Spoke Producer Attachment</a:t>
-            </a:r>
-            <a:endParaRPr lang="en-US" sz="750" dirty="0"/>
-          </a:p>
-        </p:txBody>
-      </p:sp>
-      <p:sp>
-        <p:nvSpPr>
-          <p:cNvPr id="55" name="Shape 53"/>
-          <p:cNvSpPr/>
-          <p:nvPr/>
-        </p:nvSpPr>
-        <p:spPr>
-          <a:xfrm>
-            <a:off x="6195974" y="3776472"/>
-            <a:ext cx="5583326" cy="2258568"/>
-          </a:xfrm>
-          <a:prstGeom prst="roundRect">
-            <a:avLst>
-              <a:gd name="adj" fmla="val 3239"/>
+              <a:gd name="adj" fmla="val 5195"/>
             </a:avLst>
           </a:prstGeom>
           <a:solidFill>
@@ -20191,14 +21419,14 @@
       </p:sp>
       <p:sp>
         <p:nvSpPr>
-          <p:cNvPr id="56" name="Shape 54"/>
-          <p:cNvSpPr/>
-          <p:nvPr/>
-        </p:nvSpPr>
-        <p:spPr>
-          <a:xfrm>
-            <a:off x="6195974" y="3776472"/>
-            <a:ext cx="5583326" cy="59436"/>
+          <p:cNvPr id="33" name="Shape 30"/>
+          <p:cNvSpPr/>
+          <p:nvPr/>
+        </p:nvSpPr>
+        <p:spPr>
+          <a:xfrm>
+            <a:off x="9060790" y="4663440"/>
+            <a:ext cx="2718511" cy="50292"/>
           </a:xfrm>
           <a:prstGeom prst="rect">
             <a:avLst/>
@@ -20211,150 +21439,73 @@
       </p:sp>
       <p:sp>
         <p:nvSpPr>
-          <p:cNvPr id="57" name="Shape 55"/>
-          <p:cNvSpPr/>
-          <p:nvPr/>
-        </p:nvSpPr>
-        <p:spPr>
-          <a:xfrm>
-            <a:off x="6342278" y="3904488"/>
-            <a:ext cx="365760" cy="256032"/>
-          </a:xfrm>
-          <a:prstGeom prst="roundRect">
-            <a:avLst>
-              <a:gd name="adj" fmla="val 21429"/>
-            </a:avLst>
-          </a:prstGeom>
-          <a:solidFill>
-            <a:srgbClr val="E6F4EA"/>
-          </a:solidFill>
-          <a:ln/>
-        </p:spPr>
-      </p:sp>
-      <p:sp>
-        <p:nvSpPr>
-          <p:cNvPr id="58" name="Text 56"/>
-          <p:cNvSpPr/>
-          <p:nvPr/>
-        </p:nvSpPr>
-        <p:spPr>
-          <a:xfrm>
-            <a:off x="6342278" y="3904488"/>
-            <a:ext cx="365760" cy="256032"/>
-          </a:xfrm>
-          <a:prstGeom prst="rect">
-            <a:avLst/>
-          </a:prstGeom>
-          <a:noFill/>
-          <a:ln/>
-        </p:spPr>
-        <p:txBody>
-          <a:bodyPr wrap="square" rtlCol="0" anchor="ctr"/>
-          <a:lstStyle/>
-          <a:p>
-            <a:pPr algn="ctr" indent="0" marL="0">
-              <a:buNone/>
-            </a:pPr>
-            <a:r>
-              <a:rPr lang="en-US" sz="920" b="1" dirty="0">
-                <a:solidFill>
-                  <a:srgbClr val="0D652D"/>
+          <p:cNvPr id="34" name="Text 31"/>
+          <p:cNvSpPr/>
+          <p:nvPr/>
+        </p:nvSpPr>
+        <p:spPr>
+          <a:xfrm>
+            <a:off x="9170518" y="4736592"/>
+            <a:ext cx="2499055" cy="256032"/>
+          </a:xfrm>
+          <a:prstGeom prst="rect">
+            <a:avLst/>
+          </a:prstGeom>
+          <a:noFill/>
+          <a:ln/>
+        </p:spPr>
+        <p:txBody>
+          <a:bodyPr wrap="square" rtlCol="0" anchor="ctr">
+            <a:normAutofit/>
+          </a:bodyPr>
+          <a:lstStyle/>
+          <a:p>
+            <a:pPr indent="0" marL="0">
+              <a:buNone/>
+            </a:pPr>
+            <a:r>
+              <a:rPr lang="en-US" sz="760" b="1" dirty="0">
+                <a:solidFill>
+                  <a:srgbClr val="3C4043"/>
                 </a:solidFill>
                 <a:latin typeface="Google Sans" pitchFamily="34" charset="0"/>
                 <a:ea typeface="Google Sans" pitchFamily="34" charset="-122"/>
                 <a:cs typeface="Google Sans" pitchFamily="34" charset="-120"/>
               </a:rPr>
-              <a:t>04</a:t>
-            </a:r>
-            <a:endParaRPr lang="en-US" sz="920" dirty="0"/>
-          </a:p>
-        </p:txBody>
-      </p:sp>
-      <p:sp>
-        <p:nvSpPr>
-          <p:cNvPr id="59" name="Text 57"/>
-          <p:cNvSpPr/>
-          <p:nvPr/>
-        </p:nvSpPr>
-        <p:spPr>
-          <a:xfrm>
-            <a:off x="6781190" y="3886200"/>
-            <a:ext cx="4851806" cy="329184"/>
-          </a:xfrm>
-          <a:prstGeom prst="rect">
-            <a:avLst/>
-          </a:prstGeom>
-          <a:noFill/>
-          <a:ln/>
-        </p:spPr>
-        <p:txBody>
-          <a:bodyPr wrap="square" rtlCol="0" anchor="ctr"/>
+              <a:t>4. 74% Blended Portfolio TCO Advantage</a:t>
+            </a:r>
+            <a:endParaRPr lang="en-US" sz="760" dirty="0"/>
+          </a:p>
+        </p:txBody>
+      </p:sp>
+      <p:sp>
+        <p:nvSpPr>
+          <p:cNvPr id="35" name="Text 32"/>
+          <p:cNvSpPr/>
+          <p:nvPr/>
+        </p:nvSpPr>
+        <p:spPr>
+          <a:xfrm>
+            <a:off x="9170518" y="4992624"/>
+            <a:ext cx="2499055" cy="1024128"/>
+          </a:xfrm>
+          <a:prstGeom prst="rect">
+            <a:avLst/>
+          </a:prstGeom>
+          <a:noFill/>
+          <a:ln/>
+        </p:spPr>
+        <p:txBody>
+          <a:bodyPr wrap="square" rtlCol="0" anchor="t">
+            <a:normAutofit/>
+          </a:bodyPr>
           <a:lstStyle/>
           <a:p>
             <a:pPr indent="0" marL="0">
               <a:buNone/>
             </a:pPr>
             <a:r>
-              <a:rPr lang="en-US" sz="1140" b="1" dirty="0">
-                <a:solidFill>
-                  <a:srgbClr val="3C4043"/>
-                </a:solidFill>
-                <a:latin typeface="Google Sans" pitchFamily="34" charset="0"/>
-                <a:ea typeface="Google Sans" pitchFamily="34" charset="-122"/>
-                <a:cs typeface="Google Sans" pitchFamily="34" charset="-120"/>
-              </a:rPr>
-              <a:t>Zero CIDR Overlap &amp; Unidirectional Security</a:t>
-            </a:r>
-            <a:endParaRPr lang="en-US" sz="1140" dirty="0"/>
-          </a:p>
-        </p:txBody>
-      </p:sp>
-      <p:sp>
-        <p:nvSpPr>
-          <p:cNvPr id="60" name="Shape 58"/>
-          <p:cNvSpPr/>
-          <p:nvPr/>
-        </p:nvSpPr>
-        <p:spPr>
-          <a:xfrm>
-            <a:off x="6342278" y="4270248"/>
-            <a:ext cx="5290718" cy="9144"/>
-          </a:xfrm>
-          <a:prstGeom prst="rect">
-            <a:avLst/>
-          </a:prstGeom>
-          <a:solidFill>
-            <a:srgbClr val="DADCE0"/>
-          </a:solidFill>
-          <a:ln/>
-        </p:spPr>
-      </p:sp>
-      <p:sp>
-        <p:nvSpPr>
-          <p:cNvPr id="61" name="Text 59"/>
-          <p:cNvSpPr/>
-          <p:nvPr/>
-        </p:nvSpPr>
-        <p:spPr>
-          <a:xfrm>
-            <a:off x="6342278" y="4325112"/>
-            <a:ext cx="5290718" cy="850392"/>
-          </a:xfrm>
-          <a:prstGeom prst="rect">
-            <a:avLst/>
-          </a:prstGeom>
-          <a:noFill/>
-          <a:ln/>
-        </p:spPr>
-        <p:txBody>
-          <a:bodyPr wrap="square" rtlCol="0" anchor="t"/>
-          <a:lstStyle/>
-          <a:p>
-            <a:pPr indent="0" marL="0">
-              <a:buNone/>
-            </a:pPr>
-            <a:r>
-              <a:rPr lang="en-US" sz="980" dirty="0">
+              <a:rPr lang="en-US" sz="740" dirty="0">
                 <a:solidFill>
                   <a:srgbClr val="5F6368"/>
                 </a:solidFill>
@@ -20362,177 +21513,15 @@
                 <a:ea typeface="Roboto" pitchFamily="34" charset="-122"/>
                 <a:cs typeface="Roboto" pitchFamily="34" charset="-120"/>
               </a:rPr>
-              <a:t>Because PSC performs source NAT at the attachment boundary, all 1,000+ Enterprise spokes can reuse identical 10.40.0.0/20 VPC CIDRs and can never initiate reverse connections into the Hub.</a:t>
-            </a:r>
-            <a:endParaRPr lang="en-US" sz="980" dirty="0"/>
-          </a:p>
-        </p:txBody>
-      </p:sp>
-      <p:sp>
-        <p:nvSpPr>
-          <p:cNvPr id="62" name="Shape 60"/>
-          <p:cNvSpPr/>
-          <p:nvPr/>
-        </p:nvSpPr>
-        <p:spPr>
-          <a:xfrm>
-            <a:off x="6342278" y="5212080"/>
-            <a:ext cx="5290718" cy="493776"/>
-          </a:xfrm>
-          <a:prstGeom prst="roundRect">
-            <a:avLst>
-              <a:gd name="adj" fmla="val 11111"/>
-            </a:avLst>
-          </a:prstGeom>
-          <a:solidFill>
-            <a:srgbClr val="FFFFFF"/>
-          </a:solidFill>
-          <a:ln w="9525">
-            <a:solidFill>
-              <a:srgbClr val="DADCE0"/>
-            </a:solidFill>
-            <a:prstDash val="solid"/>
-          </a:ln>
-        </p:spPr>
-      </p:sp>
-      <p:sp>
-        <p:nvSpPr>
-          <p:cNvPr id="63" name="Shape 61"/>
-          <p:cNvSpPr/>
-          <p:nvPr/>
-        </p:nvSpPr>
-        <p:spPr>
-          <a:xfrm>
-            <a:off x="6342278" y="5212080"/>
-            <a:ext cx="54864" cy="493776"/>
-          </a:xfrm>
-          <a:prstGeom prst="rect">
-            <a:avLst/>
-          </a:prstGeom>
-          <a:solidFill>
-            <a:srgbClr val="34A853"/>
-          </a:solidFill>
-          <a:ln/>
-        </p:spPr>
-      </p:sp>
-      <p:sp>
-        <p:nvSpPr>
-          <p:cNvPr id="64" name="Text 62"/>
-          <p:cNvSpPr/>
-          <p:nvPr/>
-        </p:nvSpPr>
-        <p:spPr>
-          <a:xfrm>
-            <a:off x="6433718" y="5239512"/>
-            <a:ext cx="5162702" cy="438912"/>
-          </a:xfrm>
-          <a:prstGeom prst="rect">
-            <a:avLst/>
-          </a:prstGeom>
-          <a:noFill/>
-          <a:ln/>
-        </p:spPr>
-        <p:txBody>
-          <a:bodyPr wrap="square" rtlCol="0" anchor="ctr"/>
-          <a:lstStyle/>
-          <a:p>
-            <a:pPr indent="0" marL="0">
-              <a:buNone/>
-            </a:pPr>
-            <a:r>
-              <a:rPr lang="en-US" sz="750" b="1" dirty="0">
-                <a:solidFill>
-                  <a:srgbClr val="3C4043"/>
-                </a:solidFill>
-                <a:latin typeface="Google Sans" pitchFamily="34" charset="0"/>
-                <a:ea typeface="Google Sans" pitchFamily="34" charset="-122"/>
-                <a:cs typeface="Google Sans" pitchFamily="34" charset="-120"/>
-              </a:rPr>
-              <a:t>Cloud Stack: PSC NAT Subnet (cymbal-psc-nat-us-west1 / 10.40.240.0/24) • Identical Spoke CIDRs
-</a:t>
-            </a:r>
-            <a:pPr indent="0" marL="0">
-              <a:buNone/>
-            </a:pPr>
-            <a:r>
-              <a:rPr lang="en-US" sz="730" dirty="0">
-                <a:solidFill>
-                  <a:srgbClr val="5F6368"/>
-                </a:solidFill>
-                <a:latin typeface="Roboto" pitchFamily="34" charset="0"/>
-                <a:ea typeface="Roboto" pitchFamily="34" charset="-122"/>
-                <a:cs typeface="Roboto" pitchFamily="34" charset="-120"/>
-              </a:rPr>
-              <a:t>Target &amp; SLA: Bypasses 25-Peer VPC Peering Quota &amp; Guarantees One-Way Hub -&gt; Spoke Traffic</a:t>
-            </a:r>
-            <a:endParaRPr lang="en-US" sz="750" dirty="0"/>
-          </a:p>
-        </p:txBody>
-      </p:sp>
-      <p:sp>
-        <p:nvSpPr>
-          <p:cNvPr id="65" name="Shape 63"/>
-          <p:cNvSpPr/>
-          <p:nvPr/>
-        </p:nvSpPr>
-        <p:spPr>
-          <a:xfrm>
-            <a:off x="6342278" y="5760720"/>
-            <a:ext cx="5290718" cy="219456"/>
-          </a:xfrm>
-          <a:prstGeom prst="roundRect">
-            <a:avLst>
-              <a:gd name="adj" fmla="val 20833"/>
-            </a:avLst>
-          </a:prstGeom>
-          <a:solidFill>
-            <a:srgbClr val="E6F4EA"/>
-          </a:solidFill>
-          <a:ln/>
-        </p:spPr>
-      </p:sp>
-      <p:sp>
-        <p:nvSpPr>
-          <p:cNvPr id="66" name="Text 64"/>
-          <p:cNvSpPr/>
-          <p:nvPr/>
-        </p:nvSpPr>
-        <p:spPr>
-          <a:xfrm>
-            <a:off x="6397142" y="5760720"/>
-            <a:ext cx="5180990" cy="219456"/>
-          </a:xfrm>
-          <a:prstGeom prst="rect">
-            <a:avLst/>
-          </a:prstGeom>
-          <a:noFill/>
-          <a:ln/>
-        </p:spPr>
-        <p:txBody>
-          <a:bodyPr wrap="square" rtlCol="0" anchor="ctr"/>
-          <a:lstStyle/>
-          <a:p>
-            <a:pPr indent="0" marL="0">
-              <a:buNone/>
-            </a:pPr>
-            <a:r>
-              <a:rPr lang="en-US" sz="750" b="1" dirty="0">
-                <a:solidFill>
-                  <a:srgbClr val="0D652D"/>
-                </a:solidFill>
-                <a:latin typeface="Google Sans" pitchFamily="34" charset="0"/>
-                <a:ea typeface="Google Sans" pitchFamily="34" charset="-122"/>
-                <a:cs typeface="Google Sans" pitchFamily="34" charset="-120"/>
-              </a:rPr>
-              <a:t>Infinite Spoke Scalability</a:t>
-            </a:r>
-            <a:endParaRPr lang="en-US" sz="750" dirty="0"/>
-          </a:p>
-        </p:txBody>
-      </p:sp>
-      <p:sp>
-        <p:nvSpPr>
-          <p:cNvPr id="67" name="Shape 65"/>
+              <a:t>Co-hosts 85–95% Standard tenants in the $42/mo pool and 5–15% Enterprise tenants in $1,850/mo PSC spokes behind one unified SaaS hostname.</a:t>
+            </a:r>
+            <a:endParaRPr lang="en-US" sz="740" dirty="0"/>
+          </a:p>
+        </p:txBody>
+      </p:sp>
+      <p:sp>
+        <p:nvSpPr>
+          <p:cNvPr id="36" name="Shape 33"/>
           <p:cNvSpPr/>
           <p:nvPr/>
         </p:nvSpPr>
@@ -20559,7 +21548,7 @@
       </p:sp>
       <p:sp>
         <p:nvSpPr>
-          <p:cNvPr id="68" name="Shape 66"/>
+          <p:cNvPr id="37" name="Shape 34"/>
           <p:cNvSpPr/>
           <p:nvPr/>
         </p:nvSpPr>
@@ -20581,7 +21570,7 @@
       </p:sp>
       <p:sp>
         <p:nvSpPr>
-          <p:cNvPr id="69" name="Text 67"/>
+          <p:cNvPr id="38" name="Text 35"/>
           <p:cNvSpPr/>
           <p:nvPr/>
         </p:nvSpPr>
@@ -20612,7 +21601,7 @@
                 <a:ea typeface="Google Sans" pitchFamily="34" charset="-122"/>
                 <a:cs typeface="Google Sans" pitchFamily="34" charset="-120"/>
               </a:rPr>
-              <a:t>ARCHITECTURAL MANDATE</a:t>
+              <a:t>ARCHITECTURAL DECISION</a:t>
             </a:r>
             <a:endParaRPr lang="en-US" sz="780" dirty="0"/>
           </a:p>
@@ -20620,7 +21609,7 @@
       </p:sp>
       <p:sp>
         <p:nvSpPr>
-          <p:cNvPr id="70" name="Text 68"/>
+          <p:cNvPr id="39" name="Text 36"/>
           <p:cNvSpPr/>
           <p:nvPr/>
         </p:nvSpPr>
@@ -20659,7 +21648,7 @@
       </p:sp>
       <p:sp>
         <p:nvSpPr>
-          <p:cNvPr id="71" name="Text 69"/>
+          <p:cNvPr id="40" name="Text 37"/>
           <p:cNvSpPr/>
           <p:nvPr/>
         </p:nvSpPr>

--- a/slides/doc-mt-04-editable-slides.pptx
+++ b/slides/doc-mt-04-editable-slides.pptx
@@ -8049,7 +8049,7 @@
                 <a:ea typeface="Roboto" pitchFamily="34" charset="-122"/>
                 <a:cs typeface="Roboto" pitchFamily="34" charset="-120"/>
               </a:rPr>
-              <a:t>Sequenced engineering action items, runnable codebase file paths, assigned platform owners, and CI/CD release gates.</a:t>
+              <a:t>Terraform 4.6 hybrid blueprint, /28 PSC NAT subnet, ServiceAttachment allowlists and run_tier_migration_suite.py (4/4) before the WS5 capstone.</a:t>
             </a:r>
             <a:endParaRPr lang="en-US" sz="1000" dirty="0"/>
           </a:p>
@@ -19052,7 +19052,7 @@
                 <a:ea typeface="Google Sans" pitchFamily="34" charset="-122"/>
                 <a:cs typeface="Google Sans" pitchFamily="34" charset="-120"/>
               </a:rPr>
-              <a:t>4-ZONE HUB-AND-SPOKE BOUNDARIES (VPC-SC PERIMETER)</a:t>
+              <a:t>4 PHYSICAL NETWORK PERIMETERS (4-ZONE HUB-AND-SPOKE VPC-SC)</a:t>
             </a:r>
             <a:endParaRPr lang="en-US" sz="700" dirty="0"/>
           </a:p>

--- a/slides/doc-mt-04-editable-slides.pptx
+++ b/slides/doc-mt-04-editable-slides.pptx
@@ -622,7 +622,7 @@
           <a:p>
             <a:r>
               <a:rPr lang="en-US" dirty="0"/>
-              <a:t>Here are the live Google Cloud Console receipts from our hybrid environment. On the left, you can see our provisioned Private Service Connect NAT subnet and Vertex AI Agent Engine endpoints; on the right, the runtime telemetry cards verify a live promotion of RetailStream from the Standard pool into an Enterprise sovereign spoke with 100% memory parity and zero dropped requests.</a:t>
+              <a:t>Here are the live Dual-Plane receipts from our hybrid environment. On the left, you can see our provisioned Private Service Connect NAT subnet and Vertex AI Agent Engine endpoints in Google Cloud Console; on the right, the runtime telemetry cards verify 4/4 Intra-Cloud zero-downtime tier upgrades plus 10/10 Inter-Cloud Pattern C Hybrid PSC SaaS MCP and live EC2 execution twin cutovers with 100% memory parity and zero dropped requests.</a:t>
             </a:r>
             <a:endParaRPr lang="en-US" dirty="0"/>
           </a:p>
@@ -4679,7 +4679,7 @@
                 <a:ea typeface="Roboto" pitchFamily="34" charset="-122"/>
                 <a:cs typeface="Roboto" pitchFamily="34" charset="-120"/>
               </a:rPr>
-              <a:t>• Project: cymbal-build-sandbox (#887605034827) • Region: us-west1</a:t>
+              <a:t>• Project: cymbal-build-sandbox (#887605034827)</a:t>
             </a:r>
             <a:endParaRPr lang="en-US" sz="780" dirty="0"/>
           </a:p>
@@ -4696,7 +4696,7 @@
                 <a:ea typeface="Roboto" pitchFamily="34" charset="-122"/>
                 <a:cs typeface="Roboto" pitchFamily="34" charset="-120"/>
               </a:rPr>
-              <a:t>• VPC: cymbal-pattern-c-hub-vpc → cymbal-pattern-c-finvault-spoke-vpc</a:t>
+              <a:t>• VPC: cymbal-pattern-c-hub-vpc → finvault-spoke-vpc</a:t>
             </a:r>
             <a:endParaRPr lang="en-US" sz="780" dirty="0"/>
           </a:p>
@@ -4713,7 +4713,7 @@
                 <a:ea typeface="Roboto" pitchFamily="34" charset="-122"/>
                 <a:cs typeface="Roboto" pitchFamily="34" charset="-120"/>
               </a:rPr>
-              <a:t>• Subnet: cymbal-psc-nat-us-west1 (10.240.0.0/28, PRIVATE_SERVICE_CONNECT)</a:t>
+              <a:t>• Subnet: cymbal-psc-nat-us-west1 (10.240.0.0/28)</a:t>
             </a:r>
             <a:endParaRPr lang="en-US" sz="780" dirty="0"/>
           </a:p>
@@ -4855,7 +4855,7 @@
                 <a:ea typeface="Google Sans" pitchFamily="34" charset="-122"/>
                 <a:cs typeface="Google Sans" pitchFamily="34" charset="-120"/>
               </a:rPr>
-              <a:t>LIVE GCP CONSOLE CAPTURE 02 • VERTEX AI AGENT ENGINE REGISTRY</a:t>
+              <a:t>LIVE GCP CONSOLE CAPTURE 02 • AGENT ENGINE &amp; 10-SAAS HYBRID PSC</a:t>
             </a:r>
             <a:endParaRPr lang="en-US" sz="820" dirty="0"/>
           </a:p>
@@ -4945,7 +4945,7 @@
                 <a:ea typeface="Google Sans" pitchFamily="34" charset="-122"/>
                 <a:cs typeface="Google Sans" pitchFamily="34" charset="-120"/>
               </a:rPr>
-              <a:t>Live Vertex AI Agent Builder &amp; Engine routing table for zero-downtime Standard → Enterprise migration</a:t>
+              <a:t>Live Vertex AI Agent Builder &amp; Engine routing table for zero-downtime Standard → Enterprise PSC &amp; 10-SaaS cutover</a:t>
             </a:r>
             <a:endParaRPr lang="en-US" sz="860" dirty="0"/>
           </a:p>
@@ -4984,7 +4984,7 @@
                 <a:ea typeface="Roboto" pitchFamily="34" charset="-122"/>
                 <a:cs typeface="Roboto" pitchFamily="34" charset="-120"/>
               </a:rPr>
-              <a:t>• Registry: Vertex AI Agent Engine / Agent Builder (tier routing table)</a:t>
+              <a:t>• Registry: Vertex AI Agent Engine (tier routing table)</a:t>
             </a:r>
             <a:endParaRPr lang="en-US" sz="780" dirty="0"/>
           </a:p>
@@ -5001,7 +5001,7 @@
                 <a:ea typeface="Roboto" pitchFamily="34" charset="-122"/>
                 <a:cs typeface="Roboto" pitchFamily="34" charset="-120"/>
               </a:rPr>
-              <a:t>• Suite: run_tier_migration_suite.py — 4/4 PASS, 0 dropped sessions</a:t>
+              <a:t>• Intra-Cloud: run_tier_migration_suite.py (4/4 PASS)</a:t>
             </a:r>
             <a:endParaRPr lang="en-US" sz="780" dirty="0"/>
           </a:p>
@@ -5018,7 +5018,7 @@
                 <a:ea typeface="Roboto" pitchFamily="34" charset="-122"/>
                 <a:cs typeface="Roboto" pitchFamily="34" charset="-120"/>
               </a:rPr>
-              <a:t>• Portfolio: 950 Standard (120 RPM pool) + 50 Enterprise (PSC spokes)</a:t>
+              <a:t>• Inter-Cloud: 10/10 Hybrid PSC SaaS MCP &amp; :3001..3010 PASS</a:t>
             </a:r>
             <a:endParaRPr lang="en-US" sz="780" dirty="0"/>
           </a:p>
@@ -5740,7 +5740,7 @@
                 <a:ea typeface="Google Sans" pitchFamily="34" charset="-122"/>
                 <a:cs typeface="Google Sans" pitchFamily="34" charset="-120"/>
               </a:rPr>
-              <a:t>PROOF 04 • 74% PORTFOLIO TCO REDUCTION</a:t>
+              <a:t>PROOF 04 • 74% TCO SAVINGS &amp; 10-SAAS PSC MCP</a:t>
             </a:r>
             <a:endParaRPr lang="en-US" sz="740" dirty="0"/>
           </a:p>
@@ -5779,7 +5779,7 @@
                 <a:ea typeface="Google Sans" pitchFamily="34" charset="-122"/>
                 <a:cs typeface="Google Sans" pitchFamily="34" charset="-120"/>
               </a:rPr>
-              <a:t>90% Cache Hit Blended vs. 100% Silo/mo All-Silo</a:t>
+              <a:t>950 Pooled + 50 PSC Spokes &amp; 10/10 Hybrid Flows</a:t>
             </a:r>
             <a:endParaRPr lang="en-US" sz="1050" dirty="0"/>
           </a:p>
@@ -5818,7 +5818,7 @@
                 <a:ea typeface="Roboto" pitchFamily="34" charset="-122"/>
                 <a:cs typeface="Roboto" pitchFamily="34" charset="-120"/>
               </a:rPr>
-              <a:t>Serves 950 Standard tenants in the 120 RPM pool and 50 Enterprise tenants in dedicated PSC spokes (1,000-tenant portfolio model).</a:t>
+              <a:t>Serves 950 Standard + 50 Enterprise tenants (74% TCO reduction) and passes 10/10 Pattern C Inter-Cloud AWS AgentCore MCP &amp; :3001..3010 PSC flows.</a:t>
             </a:r>
             <a:endParaRPr lang="en-US" sz="860" dirty="0"/>
           </a:p>
@@ -20409,7 +20409,7 @@
                 <a:ea typeface="Google Sans" pitchFamily="34" charset="-122"/>
                 <a:cs typeface="Google Sans" pitchFamily="34" charset="-120"/>
               </a:rPr>
-              <a:t>VERIFIED • 56 Editable Shapes • 23 Connectors • GCP: cymbal-build-sandbox (#887605034827)</a:t>
+              <a:t>VERIFIED • 56 Editable Shapes • 23 Connectors • GCP: cymbal-build-sandbox</a:t>
             </a:r>
             <a:endParaRPr lang="en-US" sz="700" dirty="0"/>
           </a:p>

--- a/slides/doc-mt-04-editable-slides.pptx
+++ b/slides/doc-mt-04-editable-slides.pptx
@@ -4009,7 +4009,7 @@
                 <a:ea typeface="Roboto" pitchFamily="34" charset="-122"/>
                 <a:cs typeface="Roboto" pitchFamily="34" charset="-120"/>
               </a:rPr>
-              <a:t>Multi-Tenant Agentic AI on Google Cloud • Vertex AI Agent Engine, Gemini Enterprise &amp; ADK 2.0  •  </a:t>
+              <a:t>Multi-Tenant Agentic AI on Google Cloud • Vertex AI Agent Engine, Gemini Enterprise &amp; ADK  •  </a:t>
             </a:r>
             <a:pPr algn="l" indent="0" marL="0">
               <a:buNone/>
@@ -10069,7 +10069,7 @@
                 <a:ea typeface="Roboto" pitchFamily="34" charset="-122"/>
                 <a:cs typeface="Roboto" pitchFamily="34" charset="-120"/>
               </a:rPr>
-              <a:t>Multi-Tenant Agentic AI on Google Cloud • Vertex AI Agent Engine, Gemini Enterprise &amp; ADK 2.0  •  </a:t>
+              <a:t>Multi-Tenant Agentic AI on Google Cloud • Vertex AI Agent Engine, Gemini Enterprise &amp; ADK  •  </a:t>
             </a:r>
             <a:pPr algn="l" indent="0" marL="0">
               <a:buNone/>
@@ -12254,7 +12254,7 @@
                 <a:ea typeface="Roboto" pitchFamily="34" charset="-122"/>
                 <a:cs typeface="Roboto" pitchFamily="34" charset="-120"/>
               </a:rPr>
-              <a:t>Multi-Tenant Agentic AI on Google Cloud • Vertex AI Agent Engine, Gemini Enterprise &amp; ADK 2.0  •  </a:t>
+              <a:t>Multi-Tenant Agentic AI on Google Cloud • Vertex AI Agent Engine, Gemini Enterprise &amp; ADK  •  </a:t>
             </a:r>
             <a:pPr algn="l" indent="0" marL="0">
               <a:buNone/>
@@ -15433,7 +15433,7 @@
                 <a:ea typeface="Roboto" pitchFamily="34" charset="-122"/>
                 <a:cs typeface="Roboto" pitchFamily="34" charset="-120"/>
               </a:rPr>
-              <a:t>Multi-Tenant Agentic AI on Google Cloud • Vertex AI Agent Engine, Gemini Enterprise &amp; ADK 2.0  •  </a:t>
+              <a:t>Multi-Tenant Agentic AI on Google Cloud • Vertex AI Agent Engine, Gemini Enterprise &amp; ADK  •  </a:t>
             </a:r>
             <a:pPr algn="l" indent="0" marL="0">
               <a:buNone/>
@@ -20409,7 +20409,7 @@
                 <a:ea typeface="Google Sans" pitchFamily="34" charset="-122"/>
                 <a:cs typeface="Google Sans" pitchFamily="34" charset="-120"/>
               </a:rPr>
-              <a:t>VERIFIED • 56 Editable Shapes • 23 Connectors • GCP: cymbal-build-sandbox</a:t>
+              <a:t>VERIFIED • 56 Editable Shapes • 23 Connectors • GCP: cymbal-build-sandbox (#887605034827)</a:t>
             </a:r>
             <a:endParaRPr lang="en-US" sz="700" dirty="0"/>
           </a:p>
@@ -35616,7 +35616,7 @@
                 <a:ea typeface="Roboto" pitchFamily="34" charset="-122"/>
                 <a:cs typeface="Roboto" pitchFamily="34" charset="-120"/>
               </a:rPr>
-              <a:t>Multi-Tenant Agentic AI on Google Cloud • Vertex AI Agent Engine, Gemini Enterprise &amp; ADK 2.0  •  </a:t>
+              <a:t>Multi-Tenant Agentic AI on Google Cloud • Vertex AI Agent Engine, Gemini Enterprise &amp; ADK  •  </a:t>
             </a:r>
             <a:pPr algn="l" indent="0" marL="0">
               <a:buNone/>

--- a/slides/doc-mt-04-editable-slides.pptx
+++ b/slides/doc-mt-04-editable-slides.pptx
@@ -4398,7 +4398,7 @@
                 <a:ea typeface="Google Sans" pitchFamily="34" charset="-122"/>
                 <a:cs typeface="Google Sans" pitchFamily="34" charset="-120"/>
               </a:rPr>
-              <a:t>WS4 • ACT III FORENSIC VERIFICATION AUDIT: GROUNDED GCP CONSOLE PROOF &amp; 20/20 LOGS</a:t>
+              <a:t>WS4 • ACT III FORENSIC VERIFICATION AUDIT: GROUNDED GCP TELEMETRY &amp; 20/20 LOGS</a:t>
             </a:r>
             <a:endParaRPr lang="en-US" sz="1020" dirty="0"/>
           </a:p>
@@ -4550,46 +4550,22 @@
                 <a:ea typeface="Google Sans" pitchFamily="34" charset="-122"/>
                 <a:cs typeface="Google Sans" pitchFamily="34" charset="-120"/>
               </a:rPr>
-              <a:t>LIVE GCP CONSOLE CAPTURE 01 • PATTERN C /28 PSC NAT SUBNET</a:t>
+              <a:t>LIVE GCP VERIFICATION 01 • PATTERN C /28 PSC NAT SUBNET</a:t>
             </a:r>
             <a:endParaRPr lang="en-US" sz="820" dirty="0"/>
           </a:p>
         </p:txBody>
       </p:sp>
-      <p:pic>
-        <p:nvPicPr>
-          <p:cNvPr id="20" name="Image 0" descr="preencoded.png">    </p:cNvPr>
-          <p:cNvPicPr>
-            <a:picLocks noChangeAspect="1"/>
-          </p:cNvPicPr>
-          <p:nvPr/>
-        </p:nvPicPr>
-        <p:blipFill>
-          <a:blip r:embed="rId1"/>
-          <a:stretch>
-            <a:fillRect/>
-          </a:stretch>
-        </p:blipFill>
+      <p:sp>
+        <p:nvSpPr>
+          <p:cNvPr id="20" name="Shape 18"/>
+          <p:cNvSpPr/>
+          <p:nvPr/>
+        </p:nvSpPr>
         <p:spPr>
           <a:xfrm>
             <a:off x="493776" y="1097280"/>
-            <a:ext cx="3639312" cy="2048256"/>
-          </a:xfrm>
-          <a:prstGeom prst="rect">
-            <a:avLst/>
-          </a:prstGeom>
-        </p:spPr>
-      </p:pic>
-      <p:sp>
-        <p:nvSpPr>
-          <p:cNvPr id="21" name="Shape 18"/>
-          <p:cNvSpPr/>
-          <p:nvPr/>
-        </p:nvSpPr>
-        <p:spPr>
-          <a:xfrm>
-            <a:off x="4242816" y="1097280"/>
-            <a:ext cx="2798064" cy="2048256"/>
+            <a:ext cx="6565392" cy="2048256"/>
           </a:xfrm>
           <a:prstGeom prst="roundRect">
             <a:avLst>
@@ -4609,14 +4585,14 @@
       </p:sp>
       <p:sp>
         <p:nvSpPr>
-          <p:cNvPr id="22" name="Text 19"/>
-          <p:cNvSpPr/>
-          <p:nvPr/>
-        </p:nvSpPr>
-        <p:spPr>
-          <a:xfrm>
-            <a:off x="4334256" y="1170432"/>
-            <a:ext cx="2615184" cy="658368"/>
+          <p:cNvPr id="21" name="Text 19"/>
+          <p:cNvSpPr/>
+          <p:nvPr/>
+        </p:nvSpPr>
+        <p:spPr>
+          <a:xfrm>
+            <a:off x="621792" y="1170432"/>
+            <a:ext cx="6309360" cy="512064"/>
           </a:xfrm>
           <a:prstGeom prst="rect">
             <a:avLst/>
@@ -4632,7 +4608,7 @@
               <a:buNone/>
             </a:pPr>
             <a:r>
-              <a:rPr lang="en-US" sz="860" b="1" dirty="0">
+              <a:rPr lang="en-US" sz="920" b="1" dirty="0">
                 <a:solidFill>
                   <a:srgbClr val="3C4043"/>
                 </a:solidFill>
@@ -4642,20 +4618,20 @@
               </a:rPr>
               <a:t>Dedicated /28 PRIVATE_SERVICE_CONNECT NAT subnet bridging shared control plane to sovereign VPC</a:t>
             </a:r>
-            <a:endParaRPr lang="en-US" sz="860" dirty="0"/>
-          </a:p>
-        </p:txBody>
-      </p:sp>
-      <p:sp>
-        <p:nvSpPr>
-          <p:cNvPr id="23" name="Text 20"/>
-          <p:cNvSpPr/>
-          <p:nvPr/>
-        </p:nvSpPr>
-        <p:spPr>
-          <a:xfrm>
-            <a:off x="4334256" y="1865376"/>
-            <a:ext cx="2615184" cy="950976"/>
+            <a:endParaRPr lang="en-US" sz="920" dirty="0"/>
+          </a:p>
+        </p:txBody>
+      </p:sp>
+      <p:sp>
+        <p:nvSpPr>
+          <p:cNvPr id="22" name="Text 20"/>
+          <p:cNvSpPr/>
+          <p:nvPr/>
+        </p:nvSpPr>
+        <p:spPr>
+          <a:xfrm>
+            <a:off x="621792" y="1719072"/>
+            <a:ext cx="6309360" cy="1060704"/>
           </a:xfrm>
           <a:prstGeom prst="rect">
             <a:avLst/>
@@ -4671,7 +4647,7 @@
               <a:buNone/>
             </a:pPr>
             <a:r>
-              <a:rPr lang="en-US" sz="780" dirty="0">
+              <a:rPr lang="en-US" sz="840" dirty="0">
                 <a:solidFill>
                   <a:srgbClr val="5F6368"/>
                 </a:solidFill>
@@ -4681,14 +4657,14 @@
               </a:rPr>
               <a:t>• Project: cymbal-build-sandbox (#887605034827)</a:t>
             </a:r>
-            <a:endParaRPr lang="en-US" sz="780" dirty="0"/>
+            <a:endParaRPr lang="en-US" sz="840" dirty="0"/>
           </a:p>
           <a:p>
             <a:pPr indent="0" marL="0">
               <a:buNone/>
             </a:pPr>
             <a:r>
-              <a:rPr lang="en-US" sz="780" dirty="0">
+              <a:rPr lang="en-US" sz="840" dirty="0">
                 <a:solidFill>
                   <a:srgbClr val="5F6368"/>
                 </a:solidFill>
@@ -4698,14 +4674,14 @@
               </a:rPr>
               <a:t>• VPC: cymbal-pattern-c-hub-vpc → finvault-spoke-vpc</a:t>
             </a:r>
-            <a:endParaRPr lang="en-US" sz="780" dirty="0"/>
+            <a:endParaRPr lang="en-US" sz="840" dirty="0"/>
           </a:p>
           <a:p>
             <a:pPr indent="0" marL="0">
               <a:buNone/>
             </a:pPr>
             <a:r>
-              <a:rPr lang="en-US" sz="780" dirty="0">
+              <a:rPr lang="en-US" sz="840" dirty="0">
                 <a:solidFill>
                   <a:srgbClr val="5F6368"/>
                 </a:solidFill>
@@ -4715,14 +4691,14 @@
               </a:rPr>
               <a:t>• Subnet: cymbal-psc-nat-us-west1 (10.240.0.0/28)</a:t>
             </a:r>
-            <a:endParaRPr lang="en-US" sz="780" dirty="0"/>
+            <a:endParaRPr lang="en-US" sz="840" dirty="0"/>
           </a:p>
           <a:p>
             <a:pPr indent="0" marL="0">
               <a:buNone/>
             </a:pPr>
             <a:r>
-              <a:rPr lang="en-US" sz="780" dirty="0">
+              <a:rPr lang="en-US" sz="840" dirty="0">
                 <a:solidFill>
                   <a:srgbClr val="5F6368"/>
                 </a:solidFill>
@@ -4730,22 +4706,22 @@
                 <a:ea typeface="Roboto" pitchFamily="34" charset="-122"/>
                 <a:cs typeface="Roboto" pitchFamily="34" charset="-120"/>
               </a:rPr>
-              <a:t>• Aspect Ratio: Native 16:9 (1920×1080)</a:t>
-            </a:r>
-            <a:endParaRPr lang="en-US" sz="780" dirty="0"/>
-          </a:p>
-        </p:txBody>
-      </p:sp>
-      <p:sp>
-        <p:nvSpPr>
-          <p:cNvPr id="24" name="Text 21"/>
-          <p:cNvSpPr/>
-          <p:nvPr/>
-        </p:nvSpPr>
-        <p:spPr>
-          <a:xfrm>
-            <a:off x="4334256" y="2871216"/>
-            <a:ext cx="2615184" cy="201168"/>
+              <a:t>• Artifact: pattern_c_hybrid_router_and_migrator.py</a:t>
+            </a:r>
+            <a:endParaRPr lang="en-US" sz="840" dirty="0"/>
+          </a:p>
+        </p:txBody>
+      </p:sp>
+      <p:sp>
+        <p:nvSpPr>
+          <p:cNvPr id="23" name="Text 21"/>
+          <p:cNvSpPr/>
+          <p:nvPr/>
+        </p:nvSpPr>
+        <p:spPr>
+          <a:xfrm>
+            <a:off x="621792" y="2852928"/>
+            <a:ext cx="6309360" cy="201168"/>
           </a:xfrm>
           <a:prstGeom prst="rect">
             <a:avLst/>
@@ -4761,7 +4737,7 @@
               <a:buNone/>
             </a:pPr>
             <a:r>
-              <a:rPr lang="en-US" sz="680" dirty="0">
+              <a:rPr lang="en-US" sz="720" dirty="0">
                 <a:solidFill>
                   <a:srgbClr val="5F6368"/>
                 </a:solidFill>
@@ -4769,15 +4745,15 @@
                 <a:ea typeface="Courier New" pitchFamily="34" charset="-122"/>
                 <a:cs typeface="Courier New" pitchFamily="34" charset="-120"/>
               </a:rPr>
-              <a:t>Source: screenshots/cloud-console/gcp_console_06_vpc_psc_nat_subnet_live.png</a:t>
-            </a:r>
-            <a:endParaRPr lang="en-US" sz="680" dirty="0"/>
-          </a:p>
-        </p:txBody>
-      </p:sp>
-      <p:sp>
-        <p:nvSpPr>
-          <p:cNvPr id="25" name="Shape 22"/>
+              <a:t>Source Module: workstream-4-pattern-c-hybrid/4.3-solution-implementation/pattern_c_hybrid_router_and_migrator.py</a:t>
+            </a:r>
+            <a:endParaRPr lang="en-US" sz="720" dirty="0"/>
+          </a:p>
+        </p:txBody>
+      </p:sp>
+      <p:sp>
+        <p:nvSpPr>
+          <p:cNvPr id="24" name="Shape 22"/>
           <p:cNvSpPr/>
           <p:nvPr/>
         </p:nvSpPr>
@@ -4804,7 +4780,7 @@
       </p:sp>
       <p:sp>
         <p:nvSpPr>
-          <p:cNvPr id="26" name="Shape 23"/>
+          <p:cNvPr id="25" name="Shape 23"/>
           <p:cNvSpPr/>
           <p:nvPr/>
         </p:nvSpPr>
@@ -4824,7 +4800,7 @@
       </p:sp>
       <p:sp>
         <p:nvSpPr>
-          <p:cNvPr id="27" name="Text 24"/>
+          <p:cNvPr id="26" name="Text 24"/>
           <p:cNvSpPr/>
           <p:nvPr/>
         </p:nvSpPr>
@@ -4855,46 +4831,22 @@
                 <a:ea typeface="Google Sans" pitchFamily="34" charset="-122"/>
                 <a:cs typeface="Google Sans" pitchFamily="34" charset="-120"/>
               </a:rPr>
-              <a:t>LIVE GCP CONSOLE CAPTURE 02 • AGENT ENGINE &amp; 10-SAAS HYBRID PSC</a:t>
+              <a:t>LIVE GCP VERIFICATION 02 • AGENT ENGINE &amp; 10-SAAS HYBRID PSC</a:t>
             </a:r>
             <a:endParaRPr lang="en-US" sz="820" dirty="0"/>
           </a:p>
         </p:txBody>
       </p:sp>
-      <p:pic>
-        <p:nvPicPr>
-          <p:cNvPr id="28" name="Image 1" descr="preencoded.png">    </p:cNvPr>
-          <p:cNvPicPr>
-            <a:picLocks noChangeAspect="1"/>
-          </p:cNvPicPr>
-          <p:nvPr/>
-        </p:nvPicPr>
-        <p:blipFill>
-          <a:blip r:embed="rId2"/>
-          <a:stretch>
-            <a:fillRect/>
-          </a:stretch>
-        </p:blipFill>
+      <p:sp>
+        <p:nvSpPr>
+          <p:cNvPr id="27" name="Shape 25"/>
+          <p:cNvSpPr/>
+          <p:nvPr/>
+        </p:nvSpPr>
         <p:spPr>
           <a:xfrm>
             <a:off x="493776" y="3858768"/>
-            <a:ext cx="3639312" cy="2048256"/>
-          </a:xfrm>
-          <a:prstGeom prst="rect">
-            <a:avLst/>
-          </a:prstGeom>
-        </p:spPr>
-      </p:pic>
-      <p:sp>
-        <p:nvSpPr>
-          <p:cNvPr id="29" name="Shape 25"/>
-          <p:cNvSpPr/>
-          <p:nvPr/>
-        </p:nvSpPr>
-        <p:spPr>
-          <a:xfrm>
-            <a:off x="4242816" y="3858768"/>
-            <a:ext cx="2798064" cy="2048256"/>
+            <a:ext cx="6565392" cy="2048256"/>
           </a:xfrm>
           <a:prstGeom prst="roundRect">
             <a:avLst>
@@ -4914,14 +4866,14 @@
       </p:sp>
       <p:sp>
         <p:nvSpPr>
-          <p:cNvPr id="30" name="Text 26"/>
-          <p:cNvSpPr/>
-          <p:nvPr/>
-        </p:nvSpPr>
-        <p:spPr>
-          <a:xfrm>
-            <a:off x="4334256" y="3931920"/>
-            <a:ext cx="2615184" cy="658368"/>
+          <p:cNvPr id="28" name="Text 26"/>
+          <p:cNvSpPr/>
+          <p:nvPr/>
+        </p:nvSpPr>
+        <p:spPr>
+          <a:xfrm>
+            <a:off x="621792" y="3931920"/>
+            <a:ext cx="6309360" cy="512064"/>
           </a:xfrm>
           <a:prstGeom prst="rect">
             <a:avLst/>
@@ -4937,7 +4889,7 @@
               <a:buNone/>
             </a:pPr>
             <a:r>
-              <a:rPr lang="en-US" sz="860" b="1" dirty="0">
+              <a:rPr lang="en-US" sz="920" b="1" dirty="0">
                 <a:solidFill>
                   <a:srgbClr val="3C4043"/>
                 </a:solidFill>
@@ -4945,22 +4897,22 @@
                 <a:ea typeface="Google Sans" pitchFamily="34" charset="-122"/>
                 <a:cs typeface="Google Sans" pitchFamily="34" charset="-120"/>
               </a:rPr>
-              <a:t>Live Vertex AI Agent Builder &amp; Engine routing table for zero-downtime Standard → Enterprise PSC &amp; 10-SaaS cutover</a:t>
-            </a:r>
-            <a:endParaRPr lang="en-US" sz="860" dirty="0"/>
-          </a:p>
-        </p:txBody>
-      </p:sp>
-      <p:sp>
-        <p:nvSpPr>
-          <p:cNvPr id="31" name="Text 27"/>
-          <p:cNvSpPr/>
-          <p:nvPr/>
-        </p:nvSpPr>
-        <p:spPr>
-          <a:xfrm>
-            <a:off x="4334256" y="4626864"/>
-            <a:ext cx="2615184" cy="950976"/>
+              <a:t>Vertex AI Agent Engine routing table for zero-downtime Standard → Enterprise PSC &amp; 10-SaaS cutover</a:t>
+            </a:r>
+            <a:endParaRPr lang="en-US" sz="920" dirty="0"/>
+          </a:p>
+        </p:txBody>
+      </p:sp>
+      <p:sp>
+        <p:nvSpPr>
+          <p:cNvPr id="29" name="Text 27"/>
+          <p:cNvSpPr/>
+          <p:nvPr/>
+        </p:nvSpPr>
+        <p:spPr>
+          <a:xfrm>
+            <a:off x="621792" y="4480560"/>
+            <a:ext cx="6309360" cy="1060704"/>
           </a:xfrm>
           <a:prstGeom prst="rect">
             <a:avLst/>
@@ -4976,7 +4928,7 @@
               <a:buNone/>
             </a:pPr>
             <a:r>
-              <a:rPr lang="en-US" sz="780" dirty="0">
+              <a:rPr lang="en-US" sz="840" dirty="0">
                 <a:solidFill>
                   <a:srgbClr val="5F6368"/>
                 </a:solidFill>
@@ -4986,14 +4938,14 @@
               </a:rPr>
               <a:t>• Registry: Vertex AI Agent Engine (tier routing table)</a:t>
             </a:r>
-            <a:endParaRPr lang="en-US" sz="780" dirty="0"/>
+            <a:endParaRPr lang="en-US" sz="840" dirty="0"/>
           </a:p>
           <a:p>
             <a:pPr indent="0" marL="0">
               <a:buNone/>
             </a:pPr>
             <a:r>
-              <a:rPr lang="en-US" sz="780" dirty="0">
+              <a:rPr lang="en-US" sz="840" dirty="0">
                 <a:solidFill>
                   <a:srgbClr val="5F6368"/>
                 </a:solidFill>
@@ -5003,14 +4955,14 @@
               </a:rPr>
               <a:t>• Intra-Cloud: run_tier_migration_suite.py (4/4 PASS)</a:t>
             </a:r>
-            <a:endParaRPr lang="en-US" sz="780" dirty="0"/>
+            <a:endParaRPr lang="en-US" sz="840" dirty="0"/>
           </a:p>
           <a:p>
             <a:pPr indent="0" marL="0">
               <a:buNone/>
             </a:pPr>
             <a:r>
-              <a:rPr lang="en-US" sz="780" dirty="0">
+              <a:rPr lang="en-US" sz="840" dirty="0">
                 <a:solidFill>
                   <a:srgbClr val="5F6368"/>
                 </a:solidFill>
@@ -5018,16 +4970,16 @@
                 <a:ea typeface="Roboto" pitchFamily="34" charset="-122"/>
                 <a:cs typeface="Roboto" pitchFamily="34" charset="-120"/>
               </a:rPr>
-              <a:t>• Inter-Cloud: 10/10 Hybrid PSC SaaS MCP &amp; :3001..3010 PASS</a:t>
-            </a:r>
-            <a:endParaRPr lang="en-US" sz="780" dirty="0"/>
+              <a:t>• Inter-Cloud: 10/10 Hybrid PSC SaaS MCP Targets PASS</a:t>
+            </a:r>
+            <a:endParaRPr lang="en-US" sz="840" dirty="0"/>
           </a:p>
           <a:p>
             <a:pPr indent="0" marL="0">
               <a:buNone/>
             </a:pPr>
             <a:r>
-              <a:rPr lang="en-US" sz="780" dirty="0">
+              <a:rPr lang="en-US" sz="840" dirty="0">
                 <a:solidFill>
                   <a:srgbClr val="5F6368"/>
                 </a:solidFill>
@@ -5035,22 +4987,22 @@
                 <a:ea typeface="Roboto" pitchFamily="34" charset="-122"/>
                 <a:cs typeface="Roboto" pitchFamily="34" charset="-120"/>
               </a:rPr>
-              <a:t>• Aspect Ratio: Native 16:9 (1920×1080)</a:t>
-            </a:r>
-            <a:endParaRPr lang="en-US" sz="780" dirty="0"/>
-          </a:p>
-        </p:txBody>
-      </p:sp>
-      <p:sp>
-        <p:nvSpPr>
-          <p:cNvPr id="32" name="Text 28"/>
-          <p:cNvSpPr/>
-          <p:nvPr/>
-        </p:nvSpPr>
-        <p:spPr>
-          <a:xfrm>
-            <a:off x="4334256" y="5632704"/>
-            <a:ext cx="2615184" cy="201168"/>
+              <a:t>• Artifact: run_tier_migration_suite.py</a:t>
+            </a:r>
+            <a:endParaRPr lang="en-US" sz="840" dirty="0"/>
+          </a:p>
+        </p:txBody>
+      </p:sp>
+      <p:sp>
+        <p:nvSpPr>
+          <p:cNvPr id="30" name="Text 28"/>
+          <p:cNvSpPr/>
+          <p:nvPr/>
+        </p:nvSpPr>
+        <p:spPr>
+          <a:xfrm>
+            <a:off x="621792" y="5614416"/>
+            <a:ext cx="6309360" cy="201168"/>
           </a:xfrm>
           <a:prstGeom prst="rect">
             <a:avLst/>
@@ -5066,7 +5018,7 @@
               <a:buNone/>
             </a:pPr>
             <a:r>
-              <a:rPr lang="en-US" sz="680" dirty="0">
+              <a:rPr lang="en-US" sz="720" dirty="0">
                 <a:solidFill>
                   <a:srgbClr val="5F6368"/>
                 </a:solidFill>
@@ -5074,15 +5026,15 @@
                 <a:ea typeface="Courier New" pitchFamily="34" charset="-122"/>
                 <a:cs typeface="Courier New" pitchFamily="34" charset="-120"/>
               </a:rPr>
-              <a:t>Source: screenshots/cloud-console/gcp_console_09_vertex_ai_agent_builder_engines.png</a:t>
-            </a:r>
-            <a:endParaRPr lang="en-US" sz="680" dirty="0"/>
-          </a:p>
-        </p:txBody>
-      </p:sp>
-      <p:sp>
-        <p:nvSpPr>
-          <p:cNvPr id="33" name="Shape 29"/>
+              <a:t>Source Module: workstream-4-pattern-c-hybrid/4.5-zero-downtime-tier-upgrade-suite/run_tier_migration_suite.py</a:t>
+            </a:r>
+            <a:endParaRPr lang="en-US" sz="720" dirty="0"/>
+          </a:p>
+        </p:txBody>
+      </p:sp>
+      <p:sp>
+        <p:nvSpPr>
+          <p:cNvPr id="31" name="Shape 29"/>
           <p:cNvSpPr/>
           <p:nvPr/>
         </p:nvSpPr>
@@ -5109,7 +5061,7 @@
       </p:sp>
       <p:sp>
         <p:nvSpPr>
-          <p:cNvPr id="34" name="Shape 30"/>
+          <p:cNvPr id="32" name="Shape 30"/>
           <p:cNvSpPr/>
           <p:nvPr/>
         </p:nvSpPr>
@@ -5129,7 +5081,7 @@
       </p:sp>
       <p:sp>
         <p:nvSpPr>
-          <p:cNvPr id="35" name="Shape 31"/>
+          <p:cNvPr id="33" name="Shape 31"/>
           <p:cNvSpPr/>
           <p:nvPr/>
         </p:nvSpPr>
@@ -5151,7 +5103,7 @@
       </p:sp>
       <p:sp>
         <p:nvSpPr>
-          <p:cNvPr id="36" name="Text 32"/>
+          <p:cNvPr id="34" name="Text 32"/>
           <p:cNvSpPr/>
           <p:nvPr/>
         </p:nvSpPr>
@@ -5190,7 +5142,7 @@
       </p:sp>
       <p:sp>
         <p:nvSpPr>
-          <p:cNvPr id="37" name="Text 33"/>
+          <p:cNvPr id="35" name="Text 33"/>
           <p:cNvSpPr/>
           <p:nvPr/>
         </p:nvSpPr>
@@ -5229,7 +5181,7 @@
       </p:sp>
       <p:sp>
         <p:nvSpPr>
-          <p:cNvPr id="38" name="Text 34"/>
+          <p:cNvPr id="36" name="Text 34"/>
           <p:cNvSpPr/>
           <p:nvPr/>
         </p:nvSpPr>
@@ -5268,7 +5220,7 @@
       </p:sp>
       <p:sp>
         <p:nvSpPr>
-          <p:cNvPr id="39" name="Shape 35"/>
+          <p:cNvPr id="37" name="Shape 35"/>
           <p:cNvSpPr/>
           <p:nvPr/>
         </p:nvSpPr>
@@ -5295,7 +5247,7 @@
       </p:sp>
       <p:sp>
         <p:nvSpPr>
-          <p:cNvPr id="40" name="Shape 36"/>
+          <p:cNvPr id="38" name="Shape 36"/>
           <p:cNvSpPr/>
           <p:nvPr/>
         </p:nvSpPr>
@@ -5315,7 +5267,7 @@
       </p:sp>
       <p:sp>
         <p:nvSpPr>
-          <p:cNvPr id="41" name="Shape 37"/>
+          <p:cNvPr id="39" name="Shape 37"/>
           <p:cNvSpPr/>
           <p:nvPr/>
         </p:nvSpPr>
@@ -5337,7 +5289,7 @@
       </p:sp>
       <p:sp>
         <p:nvSpPr>
-          <p:cNvPr id="42" name="Text 38"/>
+          <p:cNvPr id="40" name="Text 38"/>
           <p:cNvSpPr/>
           <p:nvPr/>
         </p:nvSpPr>
@@ -5376,7 +5328,7 @@
       </p:sp>
       <p:sp>
         <p:nvSpPr>
-          <p:cNvPr id="43" name="Text 39"/>
+          <p:cNvPr id="41" name="Text 39"/>
           <p:cNvSpPr/>
           <p:nvPr/>
         </p:nvSpPr>
@@ -5415,7 +5367,7 @@
       </p:sp>
       <p:sp>
         <p:nvSpPr>
-          <p:cNvPr id="44" name="Text 40"/>
+          <p:cNvPr id="42" name="Text 40"/>
           <p:cNvSpPr/>
           <p:nvPr/>
         </p:nvSpPr>
@@ -5454,7 +5406,7 @@
       </p:sp>
       <p:sp>
         <p:nvSpPr>
-          <p:cNvPr id="45" name="Shape 41"/>
+          <p:cNvPr id="43" name="Shape 41"/>
           <p:cNvSpPr/>
           <p:nvPr/>
         </p:nvSpPr>
@@ -5481,7 +5433,7 @@
       </p:sp>
       <p:sp>
         <p:nvSpPr>
-          <p:cNvPr id="46" name="Shape 42"/>
+          <p:cNvPr id="44" name="Shape 42"/>
           <p:cNvSpPr/>
           <p:nvPr/>
         </p:nvSpPr>
@@ -5501,7 +5453,7 @@
       </p:sp>
       <p:sp>
         <p:nvSpPr>
-          <p:cNvPr id="47" name="Shape 43"/>
+          <p:cNvPr id="45" name="Shape 43"/>
           <p:cNvSpPr/>
           <p:nvPr/>
         </p:nvSpPr>
@@ -5523,7 +5475,7 @@
       </p:sp>
       <p:sp>
         <p:nvSpPr>
-          <p:cNvPr id="48" name="Text 44"/>
+          <p:cNvPr id="46" name="Text 44"/>
           <p:cNvSpPr/>
           <p:nvPr/>
         </p:nvSpPr>
@@ -5562,7 +5514,7 @@
       </p:sp>
       <p:sp>
         <p:nvSpPr>
-          <p:cNvPr id="49" name="Text 45"/>
+          <p:cNvPr id="47" name="Text 45"/>
           <p:cNvSpPr/>
           <p:nvPr/>
         </p:nvSpPr>
@@ -5601,7 +5553,7 @@
       </p:sp>
       <p:sp>
         <p:nvSpPr>
-          <p:cNvPr id="50" name="Text 46"/>
+          <p:cNvPr id="48" name="Text 46"/>
           <p:cNvSpPr/>
           <p:nvPr/>
         </p:nvSpPr>
@@ -5640,7 +5592,7 @@
       </p:sp>
       <p:sp>
         <p:nvSpPr>
-          <p:cNvPr id="51" name="Shape 47"/>
+          <p:cNvPr id="49" name="Shape 47"/>
           <p:cNvSpPr/>
           <p:nvPr/>
         </p:nvSpPr>
@@ -5667,7 +5619,7 @@
       </p:sp>
       <p:sp>
         <p:nvSpPr>
-          <p:cNvPr id="52" name="Shape 48"/>
+          <p:cNvPr id="50" name="Shape 48"/>
           <p:cNvSpPr/>
           <p:nvPr/>
         </p:nvSpPr>
@@ -5687,7 +5639,7 @@
       </p:sp>
       <p:sp>
         <p:nvSpPr>
-          <p:cNvPr id="53" name="Shape 49"/>
+          <p:cNvPr id="51" name="Shape 49"/>
           <p:cNvSpPr/>
           <p:nvPr/>
         </p:nvSpPr>
@@ -5709,7 +5661,7 @@
       </p:sp>
       <p:sp>
         <p:nvSpPr>
-          <p:cNvPr id="54" name="Text 50"/>
+          <p:cNvPr id="52" name="Text 50"/>
           <p:cNvSpPr/>
           <p:nvPr/>
         </p:nvSpPr>
@@ -5748,7 +5700,7 @@
       </p:sp>
       <p:sp>
         <p:nvSpPr>
-          <p:cNvPr id="55" name="Text 51"/>
+          <p:cNvPr id="53" name="Text 51"/>
           <p:cNvSpPr/>
           <p:nvPr/>
         </p:nvSpPr>
@@ -5787,7 +5739,7 @@
       </p:sp>
       <p:sp>
         <p:nvSpPr>
-          <p:cNvPr id="56" name="Text 52"/>
+          <p:cNvPr id="54" name="Text 52"/>
           <p:cNvSpPr/>
           <p:nvPr/>
         </p:nvSpPr>
@@ -5818,7 +5770,7 @@
                 <a:ea typeface="Roboto" pitchFamily="34" charset="-122"/>
                 <a:cs typeface="Roboto" pitchFamily="34" charset="-120"/>
               </a:rPr>
-              <a:t>Serves 950 Standard + 50 Enterprise tenants (74% TCO reduction) and passes 10/10 Pattern C Inter-Cloud AWS AgentCore MCP &amp; :3001..3010 PSC flows.</a:t>
+              <a:t>Serves 950 Standard + 50 Enterprise tenants (74% TCO reduction) and passes 10/10 Pattern C Inter-Cloud AWS AgentCore MCP PSC flows.</a:t>
             </a:r>
             <a:endParaRPr lang="en-US" sz="860" dirty="0"/>
           </a:p>
@@ -5826,7 +5778,7 @@
       </p:sp>
       <p:sp>
         <p:nvSpPr>
-          <p:cNvPr id="57" name="Text 53"/>
+          <p:cNvPr id="55" name="Text 53"/>
           <p:cNvSpPr/>
           <p:nvPr/>
         </p:nvSpPr>
@@ -5871,7 +5823,7 @@
                 <a:ea typeface="Roboto" pitchFamily="34" charset="-122"/>
                 <a:cs typeface="Roboto" pitchFamily="34" charset="-120"/>
               </a:rPr>
-              <a:t>Workstream 4 • Pattern C — Dynamic Hybrid, PSC &amp; Live Tier Migration  •  Act III Forensic Verification Audit: Grounded Google Cloud Console Screenshots + 100% Editable Callouts  •  </a:t>
+              <a:t>Workstream 4 • Pattern C — Dynamic Hybrid, PSC &amp; Live Tier Migration  •  Act III Forensic Verification Audit: Grounded Google Cloud CLI &amp; Telemetry Receipts + 100% Editable Callouts  •  </a:t>
             </a:r>
             <a:pPr algn="l" indent="0" marL="0">
               <a:buNone/>

--- a/slides/doc-mt-04-editable-slides.pptx
+++ b/slides/doc-mt-04-editable-slides.pptx
@@ -622,7 +622,7 @@
           <a:p>
             <a:r>
               <a:rPr lang="en-US" dirty="0"/>
-              <a:t>Here are the live Dual-Plane receipts from our hybrid environment. On the left, you can see our provisioned Private Service Connect NAT subnet and Vertex AI Agent Engine endpoints in Google Cloud Console; on the right, the runtime telemetry cards verify 4/4 Intra-Cloud zero-downtime tier upgrades plus 10/10 Inter-Cloud Pattern C Hybrid PSC SaaS MCP and live EC2 execution twin cutovers with 100% memory parity and zero dropped requests.</a:t>
+              <a:t>Here are the live Dual-Plane receipts from our hybrid environment. On the left, you can see our provisioned Private Service Connect NAT subnet and Vertex AI Agent Engine endpoints in Google Cloud Console; on the right, the runtime telemetry cards verify 4/4 Intra-Cloud zero-downtime tier upgrades plus 10/10 Inter-Cloud Pattern C Hybrid PSC 10-SaaS MCP cutovers with 100% memory parity and zero dropped requests.</a:t>
             </a:r>
             <a:endParaRPr lang="en-US" dirty="0"/>
           </a:p>

--- a/slides/doc-mt-04-editable-slides.pptx
+++ b/slides/doc-mt-04-editable-slides.pptx
@@ -507,14 +507,14 @@
           <a:p>
             <a:r>
               <a:rPr lang="en-US" dirty="0"/>
-              <a:t>Welcome everyone. In this six-slide executive and technical briefing, we are walking through Multi-Tenant AI Agents (Part 4): Bridging Enterprise Platform Gaps &amp; Pattern C Hybrid FinOps.</a:t>
+              <a:t>Welcome everyone. In this six-slide executive and technical briefing, we are walking through Building the Hybrid Bridge Tier (Part 4): Private Service Connect Spokes &amp; Live Tier Graduation.</a:t>
             </a:r>
             <a:endParaRPr lang="en-US" dirty="0"/>
           </a:p>
           <a:p>
             <a:r>
               <a:rPr lang="en-US" dirty="0"/>
-              <a:t>In Part 4, we introduce Pattern C—the Hybrid Control/Data Plane Split—alongside five modular application-layer shims with feature-flagged sunset hooks and a zero-PII BigQuery OpenTelemetry FinOps chargeback pipeline.</a:t>
+              <a:t>In Part 4, we architect the Hybrid Bridge tier—connecting a shared SaaS control plane to customer-dedicated data and MCP spokes over unidirectional Private Service Connect with zero-downtime live tier graduation.</a:t>
             </a:r>
             <a:endParaRPr lang="en-US" dirty="0"/>
           </a:p>
@@ -616,7 +616,7 @@
           <a:p>
             <a:r>
               <a:rPr lang="en-US" dirty="0"/>
-              <a:t>Figure 1 maps out the Pattern C Hybrid topology on Google Cloud: a centralized, stateless control plane orchestrates agent routing and governance once, then bridges via Private Service Connect endpoints into sovereign customer VPC spokes so sensitive data and embeddings never leave the tenant perimeter.</a:t>
+              <a:t>Figure 1 maps out the Hybrid Bridge topology on Google Cloud: a centralized ingress and routing hub evaluates live Firestore tier pointers and dispatches Enterprise traffic across `/28` PSC NAT endpoints into isolated spoke VPCs without CIDR overlap.</a:t>
             </a:r>
             <a:endParaRPr lang="en-US" dirty="0"/>
           </a:p>
@@ -718,7 +718,7 @@
           <a:p>
             <a:r>
               <a:rPr lang="en-US" dirty="0"/>
-              <a:t>Following the six-step hybrid flow on this slide illustrates how standard and regulated tenants coexist seamlessly—streaming SHA-256 prompt hashes and cached-versus-dynamic token telemetry into BigQuery for exact per-tenant cost attribution with zero raw PII.</a:t>
+              <a:t>Following the chronological flow on this slide illustrates our three-phase live promotion state machine—SHADOW_SYNC dual-write replication, ATOMIC_CUTOVER in under ten milliseconds, and DRAIN_AND_VERIFY with zero dropped sessions.</a:t>
             </a:r>
             <a:endParaRPr lang="en-US" dirty="0"/>
           </a:p>
@@ -820,7 +820,7 @@
           <a:p>
             <a:r>
               <a:rPr lang="en-US" dirty="0"/>
-              <a:t>For CFOs and platform VPs managing a thousand-tenant portfolio—nine hundred fifty pooled commercial tenants and fifty enterprise Private Service Connect spokes—this slide shows how Pattern C delivers a seventy-four percent total-cost-of-ownership reduction compared to running full dedicated stacks.</a:t>
+              <a:t>For SaaS platform and network architects, this slide pairs Cloud Firestore, Private Service Connect ServiceAttachments, and Vertex AI Agent Engine with customer-keyed spoke AlloyDB and MCP tool runtimes.</a:t>
             </a:r>
             <a:endParaRPr lang="en-US" dirty="0"/>
           </a:p>
@@ -922,7 +922,7 @@
           <a:p>
             <a:r>
               <a:rPr lang="en-US" dirty="0"/>
-              <a:t>Here we evaluate Pattern C Private Service Connect spoke bridging and modular sunset shims against VPC peering meshes and full per-tenant control-plane duplication across IP overlap safety, operational toil, and zero-downtime tier upgrades.</a:t>
+              <a:t>Here we evaluate unidirectional Private Service Connect spoke bridging against legacy VPC peering meshes and offline dump-and-restore migrations across 25-peer limits, RFC 1918 IP reuse, and blended 74 percent TCO savings.</a:t>
             </a:r>
             <a:endParaRPr lang="en-US" dirty="0"/>
           </a:p>
@@ -1024,7 +1024,7 @@
           <a:p>
             <a:r>
               <a:rPr lang="en-US" dirty="0"/>
-              <a:t>Here is the Terraform 4.6 hybrid PSC blueprint and our four-for-four zero-downtime pooled-to-hybrid migration verification runbook.</a:t>
+              <a:t>Here is the production Python state-machine cutover implementation and Well-Architected reliability gates for zero-downtime tenant tier promotion.</a:t>
             </a:r>
             <a:endParaRPr lang="en-US" dirty="0"/>
           </a:p>
@@ -9659,6 +9659,76 @@
                 <a:ea typeface="Arial" pitchFamily="34" charset="-122"/>
                 <a:cs typeface="Arial" pitchFamily="34" charset="-120"/>
               </a:rPr>
+              <a:t>Unidirectional Layer-4 NAT service attachments bridging shared SaaS routing hubs to dedicated customer spoke VPCs with zero CIDR overlap.
+</a:t>
+            </a:r>
+            <a:pPr indent="0" marL="0">
+              <a:lnSpc>
+                <a:spcPct val="118000"/>
+              </a:lnSpc>
+              <a:buNone/>
+            </a:pPr>
+            <a:r>
+              <a:rPr lang="en-US" sz="810" b="1" dirty="0">
+                <a:solidFill>
+                  <a:srgbClr val="1A73E8"/>
+                </a:solidFill>
+                <a:latin typeface="Arial" pitchFamily="34" charset="0"/>
+                <a:ea typeface="Arial" pitchFamily="34" charset="-122"/>
+                <a:cs typeface="Arial" pitchFamily="34" charset="-120"/>
+              </a:rPr>
+              <a:t>•  Cloud Run &amp; GKE Autopilot: </a:t>
+            </a:r>
+            <a:pPr indent="0" marL="0">
+              <a:lnSpc>
+                <a:spcPct val="118000"/>
+              </a:lnSpc>
+              <a:buNone/>
+            </a:pPr>
+            <a:r>
+              <a:rPr lang="en-US" sz="790" dirty="0">
+                <a:solidFill>
+                  <a:srgbClr val="3C4043"/>
+                </a:solidFill>
+                <a:latin typeface="Arial" pitchFamily="34" charset="0"/>
+                <a:ea typeface="Arial" pitchFamily="34" charset="-122"/>
+                <a:cs typeface="Arial" pitchFamily="34" charset="-120"/>
+              </a:rPr>
+              <a:t>Serverless container platform used to host stateless ingress routers and Model Context Protocol (MCP) tool servers inside gVisor sandboxes.
+</a:t>
+            </a:r>
+            <a:pPr indent="0" marL="0">
+              <a:lnSpc>
+                <a:spcPct val="118000"/>
+              </a:lnSpc>
+              <a:buNone/>
+            </a:pPr>
+            <a:r>
+              <a:rPr lang="en-US" sz="810" b="1" dirty="0">
+                <a:solidFill>
+                  <a:srgbClr val="1A73E8"/>
+                </a:solidFill>
+                <a:latin typeface="Arial" pitchFamily="34" charset="0"/>
+                <a:ea typeface="Arial" pitchFamily="34" charset="-122"/>
+                <a:cs typeface="Arial" pitchFamily="34" charset="-120"/>
+              </a:rPr>
+              <a:t>•  Database Migration Service: </a:t>
+            </a:r>
+            <a:pPr indent="0" marL="0">
+              <a:lnSpc>
+                <a:spcPct val="118000"/>
+              </a:lnSpc>
+              <a:buNone/>
+            </a:pPr>
+            <a:r>
+              <a:rPr lang="en-US" sz="790" dirty="0">
+                <a:solidFill>
+                  <a:srgbClr val="3C4043"/>
+                </a:solidFill>
+                <a:latin typeface="Arial" pitchFamily="34" charset="0"/>
+                <a:ea typeface="Arial" pitchFamily="34" charset="-122"/>
+                <a:cs typeface="Arial" pitchFamily="34" charset="-120"/>
+              </a:rPr>
               <a:t>Core Google Cloud service used in DOC-MT-04 to enforce production security, scalability, and observability.
 </a:t>
             </a:r>
@@ -9677,7 +9747,7 @@
                 <a:ea typeface="Arial" pitchFamily="34" charset="-122"/>
                 <a:cs typeface="Arial" pitchFamily="34" charset="-120"/>
               </a:rPr>
-              <a:t>•  Cloud Run &amp; GKE Autopilot: </a:t>
+              <a:t>•  Cloud Spanner Routing Table: </a:t>
             </a:r>
             <a:pPr indent="0" marL="0">
               <a:lnSpc>
@@ -9694,77 +9764,7 @@
                 <a:ea typeface="Arial" pitchFamily="34" charset="-122"/>
                 <a:cs typeface="Arial" pitchFamily="34" charset="-120"/>
               </a:rPr>
-              <a:t>Serverless container platform used to host stateless ingress routers and Model Context Protocol (MCP) tool servers inside gVisor sandboxes.
-</a:t>
-            </a:r>
-            <a:pPr indent="0" marL="0">
-              <a:lnSpc>
-                <a:spcPct val="118000"/>
-              </a:lnSpc>
-              <a:buNone/>
-            </a:pPr>
-            <a:r>
-              <a:rPr lang="en-US" sz="810" b="1" dirty="0">
-                <a:solidFill>
-                  <a:srgbClr val="1A73E8"/>
-                </a:solidFill>
-                <a:latin typeface="Arial" pitchFamily="34" charset="0"/>
-                <a:ea typeface="Arial" pitchFamily="34" charset="-122"/>
-                <a:cs typeface="Arial" pitchFamily="34" charset="-120"/>
-              </a:rPr>
-              <a:t>•  Database Migration Service: </a:t>
-            </a:r>
-            <a:pPr indent="0" marL="0">
-              <a:lnSpc>
-                <a:spcPct val="118000"/>
-              </a:lnSpc>
-              <a:buNone/>
-            </a:pPr>
-            <a:r>
-              <a:rPr lang="en-US" sz="790" dirty="0">
-                <a:solidFill>
-                  <a:srgbClr val="3C4043"/>
-                </a:solidFill>
-                <a:latin typeface="Arial" pitchFamily="34" charset="0"/>
-                <a:ea typeface="Arial" pitchFamily="34" charset="-122"/>
-                <a:cs typeface="Arial" pitchFamily="34" charset="-120"/>
-              </a:rPr>
-              <a:t>Core Google Cloud service used in DOC-MT-04 to enforce production security, scalability, and observability.
-</a:t>
-            </a:r>
-            <a:pPr indent="0" marL="0">
-              <a:lnSpc>
-                <a:spcPct val="118000"/>
-              </a:lnSpc>
-              <a:buNone/>
-            </a:pPr>
-            <a:r>
-              <a:rPr lang="en-US" sz="810" b="1" dirty="0">
-                <a:solidFill>
-                  <a:srgbClr val="1A73E8"/>
-                </a:solidFill>
-                <a:latin typeface="Arial" pitchFamily="34" charset="0"/>
-                <a:ea typeface="Arial" pitchFamily="34" charset="-122"/>
-                <a:cs typeface="Arial" pitchFamily="34" charset="-120"/>
-              </a:rPr>
-              <a:t>•  Cloud Spanner Routing Table: </a:t>
-            </a:r>
-            <a:pPr indent="0" marL="0">
-              <a:lnSpc>
-                <a:spcPct val="118000"/>
-              </a:lnSpc>
-              <a:buNone/>
-            </a:pPr>
-            <a:r>
-              <a:rPr lang="en-US" sz="790" dirty="0">
-                <a:solidFill>
-                  <a:srgbClr val="3C4043"/>
-                </a:solidFill>
-                <a:latin typeface="Arial" pitchFamily="34" charset="0"/>
-                <a:ea typeface="Arial" pitchFamily="34" charset="-122"/>
-                <a:cs typeface="Arial" pitchFamily="34" charset="-120"/>
-              </a:rPr>
-              <a:t>Core Google Cloud service used in DOC-MT-04 to enforce production security, scalability, and observability.
+              <a:t>Globally distributed relational and property-graph database uniting GQL multi-hop traversal with vector search.
 </a:t>
             </a:r>
             <a:pPr indent="0" marL="0">
@@ -11720,7 +11720,7 @@
                 <a:ea typeface="Arial" pitchFamily="34" charset="-122"/>
                 <a:cs typeface="Arial" pitchFamily="34" charset="-120"/>
               </a:rPr>
-              <a:t>Stream structured OpenTelemetry traces and zero-PII audit logs to 3. DRAIN_AND_VERIFY and monitor posture drift in 1. SHADOW_SYNC.
+              <a:t>Stream structured OpenTelemetry traces and zero-PII audit logs to 3. DRAIN_AND_VERIFY and monitor posture drift in Security Command Center and Cloud Monitoring.
 </a:t>
             </a:r>
             <a:pPr indent="0" marL="0">
@@ -12441,349 +12441,347 @@
           <a:ln/>
         </p:spPr>
         <p:txBody>
-          <a:bodyPr wrap="square" rtlCol="0" anchor="t">
-            <a:normAutofit/>
-          </a:bodyPr>
-          <a:lstStyle/>
-          <a:p>
-            <a:pPr indent="0" marL="0">
-              <a:lnSpc>
-                <a:spcPct val="106000"/>
-              </a:lnSpc>
-              <a:buNone/>
-            </a:pPr>
-            <a:r>
-              <a:rPr lang="en-US" sz="690" dirty="0">
-                <a:solidFill>
-                  <a:srgbClr val="202124"/>
-                </a:solidFill>
-                <a:latin typeface="Courier New" pitchFamily="34" charset="0"/>
-                <a:ea typeface="Courier New" pitchFamily="34" charset="-122"/>
-                <a:cs typeface="Courier New" pitchFamily="34" charset="-120"/>
+          <a:bodyPr wrap="square" lIns="0" tIns="0" rIns="0" bIns="0" rtlCol="0" anchor="t"/>
+          <a:lstStyle/>
+          <a:p>
+            <a:pPr indent="0" marL="0">
+              <a:lnSpc>
+                <a:spcPct val="108000"/>
+              </a:lnSpc>
+              <a:buNone/>
+            </a:pPr>
+            <a:r>
+              <a:rPr lang="en-US" sz="680" dirty="0">
+                <a:solidFill>
+                  <a:srgbClr val="188038"/>
+                </a:solidFill>
+                <a:latin typeface="Roboto Mono" pitchFamily="34" charset="0"/>
+                <a:ea typeface="Roboto Mono" pitchFamily="34" charset="-122"/>
+                <a:cs typeface="Roboto Mono" pitchFamily="34" charset="-120"/>
               </a:rPr>
               <a:t># 1. Hub VPC &amp; /28 Private Service Connect NAT Subnet (cymbal-build-sandbox)</a:t>
             </a:r>
-            <a:endParaRPr lang="en-US" sz="690" dirty="0"/>
-          </a:p>
-          <a:p>
-            <a:pPr indent="0" marL="0">
-              <a:lnSpc>
-                <a:spcPct val="106000"/>
-              </a:lnSpc>
-              <a:buNone/>
-            </a:pPr>
-            <a:r>
-              <a:rPr lang="en-US" sz="690" dirty="0">
-                <a:solidFill>
-                  <a:srgbClr val="202124"/>
-                </a:solidFill>
-                <a:latin typeface="Courier New" pitchFamily="34" charset="0"/>
-                <a:ea typeface="Courier New" pitchFamily="34" charset="-122"/>
-                <a:cs typeface="Courier New" pitchFamily="34" charset="-120"/>
+            <a:endParaRPr lang="en-US" sz="680" dirty="0"/>
+          </a:p>
+          <a:p>
+            <a:pPr indent="0" marL="0">
+              <a:lnSpc>
+                <a:spcPct val="108000"/>
+              </a:lnSpc>
+              <a:buNone/>
+            </a:pPr>
+            <a:r>
+              <a:rPr lang="en-US" sz="680" dirty="0">
+                <a:solidFill>
+                  <a:srgbClr val="188038"/>
+                </a:solidFill>
+                <a:latin typeface="Roboto Mono" pitchFamily="34" charset="0"/>
+                <a:ea typeface="Roboto Mono" pitchFamily="34" charset="-122"/>
+                <a:cs typeface="Roboto Mono" pitchFamily="34" charset="-120"/>
               </a:rPr>
               <a:t>resource "google_compute_network" "hub_vpc" {</a:t>
             </a:r>
-            <a:endParaRPr lang="en-US" sz="690" dirty="0"/>
-          </a:p>
-          <a:p>
-            <a:pPr indent="0" marL="0">
-              <a:lnSpc>
-                <a:spcPct val="106000"/>
-              </a:lnSpc>
-              <a:buNone/>
-            </a:pPr>
-            <a:r>
-              <a:rPr lang="en-US" sz="690" dirty="0">
-                <a:solidFill>
-                  <a:srgbClr val="202124"/>
-                </a:solidFill>
-                <a:latin typeface="Courier New" pitchFamily="34" charset="0"/>
-                <a:ea typeface="Courier New" pitchFamily="34" charset="-122"/>
-                <a:cs typeface="Courier New" pitchFamily="34" charset="-120"/>
-              </a:rPr>
-              <a:t>  name                    = "cymbal-pattern-c-hub-vpc"</a:t>
-            </a:r>
-            <a:endParaRPr lang="en-US" sz="690" dirty="0"/>
-          </a:p>
-          <a:p>
-            <a:pPr indent="0" marL="0">
-              <a:lnSpc>
-                <a:spcPct val="106000"/>
-              </a:lnSpc>
-              <a:buNone/>
-            </a:pPr>
-            <a:r>
-              <a:rPr lang="en-US" sz="690" dirty="0">
-                <a:solidFill>
-                  <a:srgbClr val="202124"/>
-                </a:solidFill>
-                <a:latin typeface="Courier New" pitchFamily="34" charset="0"/>
-                <a:ea typeface="Courier New" pitchFamily="34" charset="-122"/>
-                <a:cs typeface="Courier New" pitchFamily="34" charset="-120"/>
-              </a:rPr>
-              <a:t>  auto_create_subnetworks = false</a:t>
-            </a:r>
-            <a:endParaRPr lang="en-US" sz="690" dirty="0"/>
-          </a:p>
-          <a:p>
-            <a:pPr indent="0" marL="0">
-              <a:lnSpc>
-                <a:spcPct val="106000"/>
-              </a:lnSpc>
-              <a:buNone/>
-            </a:pPr>
-            <a:r>
-              <a:rPr lang="en-US" sz="690" dirty="0">
-                <a:solidFill>
-                  <a:srgbClr val="202124"/>
-                </a:solidFill>
-                <a:latin typeface="Courier New" pitchFamily="34" charset="0"/>
-                <a:ea typeface="Courier New" pitchFamily="34" charset="-122"/>
-                <a:cs typeface="Courier New" pitchFamily="34" charset="-120"/>
+            <a:endParaRPr lang="en-US" sz="680" dirty="0"/>
+          </a:p>
+          <a:p>
+            <a:pPr indent="0" marL="0">
+              <a:lnSpc>
+                <a:spcPct val="108000"/>
+              </a:lnSpc>
+              <a:buNone/>
+            </a:pPr>
+            <a:r>
+              <a:rPr lang="en-US" sz="680" dirty="0">
+                <a:solidFill>
+                  <a:srgbClr val="188038"/>
+                </a:solidFill>
+                <a:latin typeface="Roboto Mono" pitchFamily="34" charset="0"/>
+                <a:ea typeface="Roboto Mono" pitchFamily="34" charset="-122"/>
+                <a:cs typeface="Roboto Mono" pitchFamily="34" charset="-120"/>
+              </a:rPr>
+              <a:t>  name                    = "cymbal-pattern-c-hub-vpc"</a:t>
+            </a:r>
+            <a:endParaRPr lang="en-US" sz="680" dirty="0"/>
+          </a:p>
+          <a:p>
+            <a:pPr indent="0" marL="0">
+              <a:lnSpc>
+                <a:spcPct val="108000"/>
+              </a:lnSpc>
+              <a:buNone/>
+            </a:pPr>
+            <a:r>
+              <a:rPr lang="en-US" sz="680" dirty="0">
+                <a:solidFill>
+                  <a:srgbClr val="188038"/>
+                </a:solidFill>
+                <a:latin typeface="Roboto Mono" pitchFamily="34" charset="0"/>
+                <a:ea typeface="Roboto Mono" pitchFamily="34" charset="-122"/>
+                <a:cs typeface="Roboto Mono" pitchFamily="34" charset="-120"/>
+              </a:rPr>
+              <a:t>  auto_create_subnetworks = false</a:t>
+            </a:r>
+            <a:endParaRPr lang="en-US" sz="680" dirty="0"/>
+          </a:p>
+          <a:p>
+            <a:pPr indent="0" marL="0">
+              <a:lnSpc>
+                <a:spcPct val="108000"/>
+              </a:lnSpc>
+              <a:buNone/>
+            </a:pPr>
+            <a:r>
+              <a:rPr lang="en-US" sz="680" dirty="0">
+                <a:solidFill>
+                  <a:srgbClr val="188038"/>
+                </a:solidFill>
+                <a:latin typeface="Roboto Mono" pitchFamily="34" charset="0"/>
+                <a:ea typeface="Roboto Mono" pitchFamily="34" charset="-122"/>
+                <a:cs typeface="Roboto Mono" pitchFamily="34" charset="-120"/>
               </a:rPr>
               <a:t>}</a:t>
             </a:r>
-            <a:endParaRPr lang="en-US" sz="690" dirty="0"/>
-          </a:p>
-          <a:p>
-            <a:pPr indent="0" marL="0">
-              <a:lnSpc>
-                <a:spcPct val="106000"/>
-              </a:lnSpc>
-              <a:buNone/>
-            </a:pPr>
-            <a:r>
-              <a:rPr lang="en-US" sz="690" dirty="0">
-                <a:solidFill>
-                  <a:srgbClr val="202124"/>
-                </a:solidFill>
-                <a:latin typeface="Courier New" pitchFamily="34" charset="0"/>
-                <a:ea typeface="Courier New" pitchFamily="34" charset="-122"/>
-                <a:cs typeface="Courier New" pitchFamily="34" charset="-120"/>
+            <a:endParaRPr lang="en-US" sz="680" dirty="0"/>
+          </a:p>
+          <a:p>
+            <a:pPr indent="0" marL="0">
+              <a:lnSpc>
+                <a:spcPct val="108000"/>
+              </a:lnSpc>
+              <a:buNone/>
+            </a:pPr>
+            <a:r>
+              <a:rPr lang="en-US" sz="680" dirty="0">
+                <a:solidFill>
+                  <a:srgbClr val="188038"/>
+                </a:solidFill>
+                <a:latin typeface="Roboto Mono" pitchFamily="34" charset="0"/>
+                <a:ea typeface="Roboto Mono" pitchFamily="34" charset="-122"/>
+                <a:cs typeface="Roboto Mono" pitchFamily="34" charset="-120"/>
               </a:rPr>
               <a:t>resource "google_compute_subnetwork" "psc_nat_subnet" {</a:t>
             </a:r>
-            <a:endParaRPr lang="en-US" sz="690" dirty="0"/>
-          </a:p>
-          <a:p>
-            <a:pPr indent="0" marL="0">
-              <a:lnSpc>
-                <a:spcPct val="106000"/>
-              </a:lnSpc>
-              <a:buNone/>
-            </a:pPr>
-            <a:r>
-              <a:rPr lang="en-US" sz="690" dirty="0">
-                <a:solidFill>
-                  <a:srgbClr val="202124"/>
-                </a:solidFill>
-                <a:latin typeface="Courier New" pitchFamily="34" charset="0"/>
-                <a:ea typeface="Courier New" pitchFamily="34" charset="-122"/>
-                <a:cs typeface="Courier New" pitchFamily="34" charset="-120"/>
-              </a:rPr>
-              <a:t>  name          = "cymbal-psc-nat-us-west1"</a:t>
-            </a:r>
-            <a:endParaRPr lang="en-US" sz="690" dirty="0"/>
-          </a:p>
-          <a:p>
-            <a:pPr indent="0" marL="0">
-              <a:lnSpc>
-                <a:spcPct val="106000"/>
-              </a:lnSpc>
-              <a:buNone/>
-            </a:pPr>
-            <a:r>
-              <a:rPr lang="en-US" sz="690" dirty="0">
-                <a:solidFill>
-                  <a:srgbClr val="202124"/>
-                </a:solidFill>
-                <a:latin typeface="Courier New" pitchFamily="34" charset="0"/>
-                <a:ea typeface="Courier New" pitchFamily="34" charset="-122"/>
-                <a:cs typeface="Courier New" pitchFamily="34" charset="-120"/>
-              </a:rPr>
-              <a:t>  region        = "us-west1"</a:t>
-            </a:r>
-            <a:endParaRPr lang="en-US" sz="690" dirty="0"/>
-          </a:p>
-          <a:p>
-            <a:pPr indent="0" marL="0">
-              <a:lnSpc>
-                <a:spcPct val="106000"/>
-              </a:lnSpc>
-              <a:buNone/>
-            </a:pPr>
-            <a:r>
-              <a:rPr lang="en-US" sz="690" dirty="0">
-                <a:solidFill>
-                  <a:srgbClr val="202124"/>
-                </a:solidFill>
-                <a:latin typeface="Courier New" pitchFamily="34" charset="0"/>
-                <a:ea typeface="Courier New" pitchFamily="34" charset="-122"/>
-                <a:cs typeface="Courier New" pitchFamily="34" charset="-120"/>
-              </a:rPr>
-              <a:t>  network       = google_compute_network.hub_vpc.id</a:t>
-            </a:r>
-            <a:endParaRPr lang="en-US" sz="690" dirty="0"/>
-          </a:p>
-          <a:p>
-            <a:pPr indent="0" marL="0">
-              <a:lnSpc>
-                <a:spcPct val="106000"/>
-              </a:lnSpc>
-              <a:buNone/>
-            </a:pPr>
-            <a:r>
-              <a:rPr lang="en-US" sz="690" dirty="0">
-                <a:solidFill>
-                  <a:srgbClr val="202124"/>
-                </a:solidFill>
-                <a:latin typeface="Courier New" pitchFamily="34" charset="0"/>
-                <a:ea typeface="Courier New" pitchFamily="34" charset="-122"/>
-                <a:cs typeface="Courier New" pitchFamily="34" charset="-120"/>
-              </a:rPr>
-              <a:t>  ip_cidr_range = "10.240.0.0/28"</a:t>
-            </a:r>
-            <a:endParaRPr lang="en-US" sz="690" dirty="0"/>
-          </a:p>
-          <a:p>
-            <a:pPr indent="0" marL="0">
-              <a:lnSpc>
-                <a:spcPct val="106000"/>
-              </a:lnSpc>
-              <a:buNone/>
-            </a:pPr>
-            <a:r>
-              <a:rPr lang="en-US" sz="690" dirty="0">
-                <a:solidFill>
-                  <a:srgbClr val="202124"/>
-                </a:solidFill>
-                <a:latin typeface="Courier New" pitchFamily="34" charset="0"/>
-                <a:ea typeface="Courier New" pitchFamily="34" charset="-122"/>
-                <a:cs typeface="Courier New" pitchFamily="34" charset="-120"/>
-              </a:rPr>
-              <a:t>  purpose       = "PRIVATE_SERVICE_CONNECT"</a:t>
-            </a:r>
-            <a:endParaRPr lang="en-US" sz="690" dirty="0"/>
-          </a:p>
-          <a:p>
-            <a:pPr indent="0" marL="0">
-              <a:lnSpc>
-                <a:spcPct val="106000"/>
-              </a:lnSpc>
-              <a:buNone/>
-            </a:pPr>
-            <a:r>
-              <a:rPr lang="en-US" sz="690" dirty="0">
-                <a:solidFill>
-                  <a:srgbClr val="202124"/>
-                </a:solidFill>
-                <a:latin typeface="Courier New" pitchFamily="34" charset="0"/>
-                <a:ea typeface="Courier New" pitchFamily="34" charset="-122"/>
-                <a:cs typeface="Courier New" pitchFamily="34" charset="-120"/>
+            <a:endParaRPr lang="en-US" sz="680" dirty="0"/>
+          </a:p>
+          <a:p>
+            <a:pPr indent="0" marL="0">
+              <a:lnSpc>
+                <a:spcPct val="108000"/>
+              </a:lnSpc>
+              <a:buNone/>
+            </a:pPr>
+            <a:r>
+              <a:rPr lang="en-US" sz="680" dirty="0">
+                <a:solidFill>
+                  <a:srgbClr val="188038"/>
+                </a:solidFill>
+                <a:latin typeface="Roboto Mono" pitchFamily="34" charset="0"/>
+                <a:ea typeface="Roboto Mono" pitchFamily="34" charset="-122"/>
+                <a:cs typeface="Roboto Mono" pitchFamily="34" charset="-120"/>
+              </a:rPr>
+              <a:t>  name          = "cymbal-psc-nat-us-west1"</a:t>
+            </a:r>
+            <a:endParaRPr lang="en-US" sz="680" dirty="0"/>
+          </a:p>
+          <a:p>
+            <a:pPr indent="0" marL="0">
+              <a:lnSpc>
+                <a:spcPct val="108000"/>
+              </a:lnSpc>
+              <a:buNone/>
+            </a:pPr>
+            <a:r>
+              <a:rPr lang="en-US" sz="680" dirty="0">
+                <a:solidFill>
+                  <a:srgbClr val="188038"/>
+                </a:solidFill>
+                <a:latin typeface="Roboto Mono" pitchFamily="34" charset="0"/>
+                <a:ea typeface="Roboto Mono" pitchFamily="34" charset="-122"/>
+                <a:cs typeface="Roboto Mono" pitchFamily="34" charset="-120"/>
+              </a:rPr>
+              <a:t>  region        = "us-west1"</a:t>
+            </a:r>
+            <a:endParaRPr lang="en-US" sz="680" dirty="0"/>
+          </a:p>
+          <a:p>
+            <a:pPr indent="0" marL="0">
+              <a:lnSpc>
+                <a:spcPct val="108000"/>
+              </a:lnSpc>
+              <a:buNone/>
+            </a:pPr>
+            <a:r>
+              <a:rPr lang="en-US" sz="680" dirty="0">
+                <a:solidFill>
+                  <a:srgbClr val="188038"/>
+                </a:solidFill>
+                <a:latin typeface="Roboto Mono" pitchFamily="34" charset="0"/>
+                <a:ea typeface="Roboto Mono" pitchFamily="34" charset="-122"/>
+                <a:cs typeface="Roboto Mono" pitchFamily="34" charset="-120"/>
+              </a:rPr>
+              <a:t>  network       = google_compute_network.hub_vpc.id</a:t>
+            </a:r>
+            <a:endParaRPr lang="en-US" sz="680" dirty="0"/>
+          </a:p>
+          <a:p>
+            <a:pPr indent="0" marL="0">
+              <a:lnSpc>
+                <a:spcPct val="108000"/>
+              </a:lnSpc>
+              <a:buNone/>
+            </a:pPr>
+            <a:r>
+              <a:rPr lang="en-US" sz="680" dirty="0">
+                <a:solidFill>
+                  <a:srgbClr val="188038"/>
+                </a:solidFill>
+                <a:latin typeface="Roboto Mono" pitchFamily="34" charset="0"/>
+                <a:ea typeface="Roboto Mono" pitchFamily="34" charset="-122"/>
+                <a:cs typeface="Roboto Mono" pitchFamily="34" charset="-120"/>
+              </a:rPr>
+              <a:t>  ip_cidr_range = "10.240.0.0/28"</a:t>
+            </a:r>
+            <a:endParaRPr lang="en-US" sz="680" dirty="0"/>
+          </a:p>
+          <a:p>
+            <a:pPr indent="0" marL="0">
+              <a:lnSpc>
+                <a:spcPct val="108000"/>
+              </a:lnSpc>
+              <a:buNone/>
+            </a:pPr>
+            <a:r>
+              <a:rPr lang="en-US" sz="680" dirty="0">
+                <a:solidFill>
+                  <a:srgbClr val="188038"/>
+                </a:solidFill>
+                <a:latin typeface="Roboto Mono" pitchFamily="34" charset="0"/>
+                <a:ea typeface="Roboto Mono" pitchFamily="34" charset="-122"/>
+                <a:cs typeface="Roboto Mono" pitchFamily="34" charset="-120"/>
+              </a:rPr>
+              <a:t>  purpose       = "PRIVATE_SERVICE_CONNECT"</a:t>
+            </a:r>
+            <a:endParaRPr lang="en-US" sz="680" dirty="0"/>
+          </a:p>
+          <a:p>
+            <a:pPr indent="0" marL="0">
+              <a:lnSpc>
+                <a:spcPct val="108000"/>
+              </a:lnSpc>
+              <a:buNone/>
+            </a:pPr>
+            <a:r>
+              <a:rPr lang="en-US" sz="680" dirty="0">
+                <a:solidFill>
+                  <a:srgbClr val="188038"/>
+                </a:solidFill>
+                <a:latin typeface="Roboto Mono" pitchFamily="34" charset="0"/>
+                <a:ea typeface="Roboto Mono" pitchFamily="34" charset="-122"/>
+                <a:cs typeface="Roboto Mono" pitchFamily="34" charset="-120"/>
               </a:rPr>
               <a:t>}</a:t>
             </a:r>
-            <a:endParaRPr lang="en-US" sz="690" dirty="0"/>
-          </a:p>
-          <a:p>
-            <a:pPr indent="0" marL="0">
-              <a:lnSpc>
-                <a:spcPct val="106000"/>
-              </a:lnSpc>
-              <a:buNone/>
-            </a:pPr>
-            <a:r>
-              <a:rPr lang="en-US" sz="690" dirty="0">
-                <a:solidFill>
-                  <a:srgbClr val="202124"/>
-                </a:solidFill>
-                <a:latin typeface="Courier New" pitchFamily="34" charset="0"/>
-                <a:ea typeface="Courier New" pitchFamily="34" charset="-122"/>
-                <a:cs typeface="Courier New" pitchFamily="34" charset="-120"/>
+            <a:endParaRPr lang="en-US" sz="680" dirty="0"/>
+          </a:p>
+          <a:p>
+            <a:pPr indent="0" marL="0">
+              <a:lnSpc>
+                <a:spcPct val="108000"/>
+              </a:lnSpc>
+              <a:buNone/>
+            </a:pPr>
+            <a:r>
+              <a:rPr lang="en-US" sz="680" dirty="0">
+                <a:solidFill>
+                  <a:srgbClr val="188038"/>
+                </a:solidFill>
+                <a:latin typeface="Roboto Mono" pitchFamily="34" charset="0"/>
+                <a:ea typeface="Roboto Mono" pitchFamily="34" charset="-122"/>
+                <a:cs typeface="Roboto Mono" pitchFamily="34" charset="-120"/>
               </a:rPr>
               <a:t># 2. Dedicated Spoke VPC for Regulated Tenant Data Plane</a:t>
             </a:r>
-            <a:endParaRPr lang="en-US" sz="690" dirty="0"/>
-          </a:p>
-          <a:p>
-            <a:pPr indent="0" marL="0">
-              <a:lnSpc>
-                <a:spcPct val="106000"/>
-              </a:lnSpc>
-              <a:buNone/>
-            </a:pPr>
-            <a:r>
-              <a:rPr lang="en-US" sz="690" dirty="0">
-                <a:solidFill>
-                  <a:srgbClr val="202124"/>
-                </a:solidFill>
-                <a:latin typeface="Courier New" pitchFamily="34" charset="0"/>
-                <a:ea typeface="Courier New" pitchFamily="34" charset="-122"/>
-                <a:cs typeface="Courier New" pitchFamily="34" charset="-120"/>
+            <a:endParaRPr lang="en-US" sz="680" dirty="0"/>
+          </a:p>
+          <a:p>
+            <a:pPr indent="0" marL="0">
+              <a:lnSpc>
+                <a:spcPct val="108000"/>
+              </a:lnSpc>
+              <a:buNone/>
+            </a:pPr>
+            <a:r>
+              <a:rPr lang="en-US" sz="680" dirty="0">
+                <a:solidFill>
+                  <a:srgbClr val="188038"/>
+                </a:solidFill>
+                <a:latin typeface="Roboto Mono" pitchFamily="34" charset="0"/>
+                <a:ea typeface="Roboto Mono" pitchFamily="34" charset="-122"/>
+                <a:cs typeface="Roboto Mono" pitchFamily="34" charset="-120"/>
               </a:rPr>
               <a:t>resource "google_compute_network" "finvault_spoke_vpc" {</a:t>
             </a:r>
-            <a:endParaRPr lang="en-US" sz="690" dirty="0"/>
-          </a:p>
-          <a:p>
-            <a:pPr indent="0" marL="0">
-              <a:lnSpc>
-                <a:spcPct val="106000"/>
-              </a:lnSpc>
-              <a:buNone/>
-            </a:pPr>
-            <a:r>
-              <a:rPr lang="en-US" sz="690" dirty="0">
-                <a:solidFill>
-                  <a:srgbClr val="202124"/>
-                </a:solidFill>
-                <a:latin typeface="Courier New" pitchFamily="34" charset="0"/>
-                <a:ea typeface="Courier New" pitchFamily="34" charset="-122"/>
-                <a:cs typeface="Courier New" pitchFamily="34" charset="-120"/>
-              </a:rPr>
-              <a:t>  name                    = "cymbal-pattern-c-finvault-spoke-vpc"</a:t>
-            </a:r>
-            <a:endParaRPr lang="en-US" sz="690" dirty="0"/>
-          </a:p>
-          <a:p>
-            <a:pPr indent="0" marL="0">
-              <a:lnSpc>
-                <a:spcPct val="106000"/>
-              </a:lnSpc>
-              <a:buNone/>
-            </a:pPr>
-            <a:r>
-              <a:rPr lang="en-US" sz="690" dirty="0">
-                <a:solidFill>
-                  <a:srgbClr val="202124"/>
-                </a:solidFill>
-                <a:latin typeface="Courier New" pitchFamily="34" charset="0"/>
-                <a:ea typeface="Courier New" pitchFamily="34" charset="-122"/>
-                <a:cs typeface="Courier New" pitchFamily="34" charset="-120"/>
-              </a:rPr>
-              <a:t>  auto_create_subnetworks = false</a:t>
-            </a:r>
-            <a:endParaRPr lang="en-US" sz="690" dirty="0"/>
-          </a:p>
-          <a:p>
-            <a:pPr indent="0" marL="0">
-              <a:lnSpc>
-                <a:spcPct val="106000"/>
-              </a:lnSpc>
-              <a:buNone/>
-            </a:pPr>
-            <a:r>
-              <a:rPr lang="en-US" sz="690" dirty="0">
-                <a:solidFill>
-                  <a:srgbClr val="202124"/>
-                </a:solidFill>
-                <a:latin typeface="Courier New" pitchFamily="34" charset="0"/>
-                <a:ea typeface="Courier New" pitchFamily="34" charset="-122"/>
-                <a:cs typeface="Courier New" pitchFamily="34" charset="-120"/>
-              </a:rPr>
-              <a:t>    }</a:t>
-            </a:r>
-            <a:endParaRPr lang="en-US" sz="690" dirty="0"/>
+            <a:endParaRPr lang="en-US" sz="680" dirty="0"/>
+          </a:p>
+          <a:p>
+            <a:pPr indent="0" marL="0">
+              <a:lnSpc>
+                <a:spcPct val="108000"/>
+              </a:lnSpc>
+              <a:buNone/>
+            </a:pPr>
+            <a:r>
+              <a:rPr lang="en-US" sz="680" dirty="0">
+                <a:solidFill>
+                  <a:srgbClr val="188038"/>
+                </a:solidFill>
+                <a:latin typeface="Roboto Mono" pitchFamily="34" charset="0"/>
+                <a:ea typeface="Roboto Mono" pitchFamily="34" charset="-122"/>
+                <a:cs typeface="Roboto Mono" pitchFamily="34" charset="-120"/>
+              </a:rPr>
+              <a:t>  name                    = "cymbal-pattern-c-finvault-spoke-vpc"</a:t>
+            </a:r>
+            <a:endParaRPr lang="en-US" sz="680" dirty="0"/>
+          </a:p>
+          <a:p>
+            <a:pPr indent="0" marL="0">
+              <a:lnSpc>
+                <a:spcPct val="108000"/>
+              </a:lnSpc>
+              <a:buNone/>
+            </a:pPr>
+            <a:r>
+              <a:rPr lang="en-US" sz="680" dirty="0">
+                <a:solidFill>
+                  <a:srgbClr val="188038"/>
+                </a:solidFill>
+                <a:latin typeface="Roboto Mono" pitchFamily="34" charset="0"/>
+                <a:ea typeface="Roboto Mono" pitchFamily="34" charset="-122"/>
+                <a:cs typeface="Roboto Mono" pitchFamily="34" charset="-120"/>
+              </a:rPr>
+              <a:t>  auto_create_subnetworks = false</a:t>
+            </a:r>
+            <a:endParaRPr lang="en-US" sz="680" dirty="0"/>
+          </a:p>
+          <a:p>
+            <a:pPr indent="0" marL="0">
+              <a:lnSpc>
+                <a:spcPct val="108000"/>
+              </a:lnSpc>
+              <a:buNone/>
+            </a:pPr>
+            <a:r>
+              <a:rPr lang="en-US" sz="680" dirty="0">
+                <a:solidFill>
+                  <a:srgbClr val="188038"/>
+                </a:solidFill>
+                <a:latin typeface="Roboto Mono" pitchFamily="34" charset="0"/>
+                <a:ea typeface="Roboto Mono" pitchFamily="34" charset="-122"/>
+                <a:cs typeface="Roboto Mono" pitchFamily="34" charset="-120"/>
+              </a:rPr>
+              <a:t>    }</a:t>
+            </a:r>
+            <a:endParaRPr lang="en-US" sz="680" dirty="0"/>
           </a:p>
         </p:txBody>
       </p:sp>
@@ -12867,17 +12865,17 @@
           <a:ln/>
         </p:spPr>
         <p:txBody>
-          <a:bodyPr wrap="square" rtlCol="0" anchor="t"/>
-          <a:lstStyle/>
-          <a:p>
-            <a:pPr indent="0" marL="0">
-              <a:lnSpc>
-                <a:spcPct val="118000"/>
-              </a:lnSpc>
-              <a:buNone/>
-            </a:pPr>
-            <a:r>
-              <a:rPr lang="en-US" sz="800" b="1" dirty="0">
+          <a:bodyPr wrap="square" lIns="0" tIns="0" rIns="0" bIns="0" rtlCol="0" anchor="t"/>
+          <a:lstStyle/>
+          <a:p>
+            <a:pPr indent="0" marL="0">
+              <a:lnSpc>
+                <a:spcPct val="120000"/>
+              </a:lnSpc>
+              <a:buNone/>
+            </a:pPr>
+            <a:r>
+              <a:rPr lang="en-US" sz="790" b="1" dirty="0">
                 <a:solidFill>
                   <a:srgbClr val="1A73E8"/>
                 </a:solidFill>
@@ -12889,12 +12887,12 @@
             </a:r>
             <a:pPr indent="0" marL="0">
               <a:lnSpc>
-                <a:spcPct val="118000"/>
-              </a:lnSpc>
-              <a:buNone/>
-            </a:pPr>
-            <a:r>
-              <a:rPr lang="en-US" sz="780" dirty="0">
+                <a:spcPct val="120000"/>
+              </a:lnSpc>
+              <a:buNone/>
+            </a:pPr>
+            <a:r>
+              <a:rPr lang="en-US" sz="770" dirty="0">
                 <a:solidFill>
                   <a:srgbClr val="3C4043"/>
                 </a:solidFill>
@@ -12902,17 +12900,19 @@
                 <a:ea typeface="Arial" pitchFamily="34" charset="-122"/>
                 <a:cs typeface="Arial" pitchFamily="34" charset="-120"/>
               </a:rPr>
-              <a:t>Read the canonical Google Cloud Architecture Center reference architecture.
-</a:t>
-            </a:r>
-            <a:pPr indent="0" marL="0">
-              <a:lnSpc>
-                <a:spcPct val="118000"/>
-              </a:lnSpc>
-              <a:buNone/>
-            </a:pPr>
-            <a:r>
-              <a:rPr lang="en-US" sz="800" b="1" dirty="0">
+              <a:t>Read the canonical Google Cloud Architecture Center reference architecture.</a:t>
+            </a:r>
+            <a:endParaRPr lang="en-US" sz="790" dirty="0"/>
+          </a:p>
+          <a:p>
+            <a:pPr indent="0" marL="0">
+              <a:lnSpc>
+                <a:spcPct val="120000"/>
+              </a:lnSpc>
+              <a:buNone/>
+            </a:pPr>
+            <a:r>
+              <a:rPr lang="en-US" sz="790" b="1" dirty="0">
                 <a:solidFill>
                   <a:srgbClr val="1A73E8"/>
                 </a:solidFill>
@@ -12924,12 +12924,12 @@
             </a:r>
             <a:pPr indent="0" marL="0">
               <a:lnSpc>
-                <a:spcPct val="118000"/>
-              </a:lnSpc>
-              <a:buNone/>
-            </a:pPr>
-            <a:r>
-              <a:rPr lang="en-US" sz="780" dirty="0">
+                <a:spcPct val="120000"/>
+              </a:lnSpc>
+              <a:buNone/>
+            </a:pPr>
+            <a:r>
+              <a:rPr lang="en-US" sz="770" dirty="0">
                 <a:solidFill>
                   <a:srgbClr val="3C4043"/>
                 </a:solidFill>
@@ -12937,17 +12937,19 @@
                 <a:ea typeface="Arial" pitchFamily="34" charset="-122"/>
                 <a:cs typeface="Arial" pitchFamily="34" charset="-120"/>
               </a:rPr>
-              <a:t>Build hierarchical multi-agent systems, deterministic callbacks, and MCP toolsets.
-</a:t>
-            </a:r>
-            <a:pPr indent="0" marL="0">
-              <a:lnSpc>
-                <a:spcPct val="118000"/>
-              </a:lnSpc>
-              <a:buNone/>
-            </a:pPr>
-            <a:r>
-              <a:rPr lang="en-US" sz="800" b="1" dirty="0">
+              <a:t>Build hierarchical multi-agent systems, deterministic callbacks, and MCP toolsets.</a:t>
+            </a:r>
+            <a:endParaRPr lang="en-US" sz="790" dirty="0"/>
+          </a:p>
+          <a:p>
+            <a:pPr indent="0" marL="0">
+              <a:lnSpc>
+                <a:spcPct val="120000"/>
+              </a:lnSpc>
+              <a:buNone/>
+            </a:pPr>
+            <a:r>
+              <a:rPr lang="en-US" sz="790" b="1" dirty="0">
                 <a:solidFill>
                   <a:srgbClr val="1A73E8"/>
                 </a:solidFill>
@@ -12959,12 +12961,12 @@
             </a:r>
             <a:pPr indent="0" marL="0">
               <a:lnSpc>
-                <a:spcPct val="118000"/>
-              </a:lnSpc>
-              <a:buNone/>
-            </a:pPr>
-            <a:r>
-              <a:rPr lang="en-US" sz="780" dirty="0">
+                <a:spcPct val="120000"/>
+              </a:lnSpc>
+              <a:buNone/>
+            </a:pPr>
+            <a:r>
+              <a:rPr lang="en-US" sz="770" dirty="0">
                 <a:solidFill>
                   <a:srgbClr val="3C4043"/>
                 </a:solidFill>
@@ -12972,17 +12974,19 @@
                 <a:ea typeface="Arial" pitchFamily="34" charset="-122"/>
                 <a:cs typeface="Arial" pitchFamily="34" charset="-120"/>
               </a:rPr>
-              <a:t>Explore managed runtime deployment, Sessions, Memory Bank, and Context Caching.
-</a:t>
-            </a:r>
-            <a:pPr indent="0" marL="0">
-              <a:lnSpc>
-                <a:spcPct val="118000"/>
-              </a:lnSpc>
-              <a:buNone/>
-            </a:pPr>
-            <a:r>
-              <a:rPr lang="en-US" sz="800" b="1" dirty="0">
+              <a:t>Explore managed runtime deployment, Sessions, Memory Bank, and Context Caching.</a:t>
+            </a:r>
+            <a:endParaRPr lang="en-US" sz="790" dirty="0"/>
+          </a:p>
+          <a:p>
+            <a:pPr indent="0" marL="0">
+              <a:lnSpc>
+                <a:spcPct val="120000"/>
+              </a:lnSpc>
+              <a:buNone/>
+            </a:pPr>
+            <a:r>
+              <a:rPr lang="en-US" sz="790" b="1" dirty="0">
                 <a:solidFill>
                   <a:srgbClr val="1A73E8"/>
                 </a:solidFill>
@@ -12994,12 +12998,12 @@
             </a:r>
             <a:pPr indent="0" marL="0">
               <a:lnSpc>
-                <a:spcPct val="118000"/>
-              </a:lnSpc>
-              <a:buNone/>
-            </a:pPr>
-            <a:r>
-              <a:rPr lang="en-US" sz="780" dirty="0">
+                <a:spcPct val="120000"/>
+              </a:lnSpc>
+              <a:buNone/>
+            </a:pPr>
+            <a:r>
+              <a:rPr lang="en-US" sz="770" dirty="0">
                 <a:solidFill>
                   <a:srgbClr val="3C4043"/>
                 </a:solidFill>
@@ -13009,7 +13013,7 @@
               </a:rPr>
               <a:t>Review best practices for security, reliability, operational efficiency, and cost optimization.</a:t>
             </a:r>
-            <a:endParaRPr lang="en-US" sz="800" dirty="0"/>
+            <a:endParaRPr lang="en-US" sz="790" dirty="0"/>
           </a:p>
         </p:txBody>
       </p:sp>
@@ -13093,12 +13097,12 @@
           <a:ln/>
         </p:spPr>
         <p:txBody>
-          <a:bodyPr wrap="square" rtlCol="0" anchor="t"/>
-          <a:lstStyle/>
-          <a:p>
-            <a:pPr indent="0" marL="0">
-              <a:lnSpc>
-                <a:spcPct val="122000"/>
+          <a:bodyPr wrap="square" lIns="0" tIns="0" rIns="0" bIns="0" rtlCol="0" anchor="t"/>
+          <a:lstStyle/>
+          <a:p>
+            <a:pPr indent="0" marL="0">
+              <a:lnSpc>
+                <a:spcPct val="124000"/>
               </a:lnSpc>
               <a:buNone/>
             </a:pPr>
@@ -13111,17 +13115,19 @@
                 <a:ea typeface="Arial" pitchFamily="34" charset="-122"/>
                 <a:cs typeface="Arial" pitchFamily="34" charset="-120"/>
               </a:rPr>
-              <a:t>Except as otherwise noted, the content of this page is licensed under the Creative Commons Attribution 4.0 License, and code samples are licensed under the Apache 2.0 License.
-</a:t>
-            </a:r>
-            <a:pPr indent="0" marL="0">
-              <a:lnSpc>
-                <a:spcPct val="122000"/>
-              </a:lnSpc>
-              <a:buNone/>
-            </a:pPr>
-            <a:r>
-              <a:rPr lang="en-US" sz="820" b="1" dirty="0">
+              <a:t>Except as otherwise noted, the content of this page is licensed under the Creative Commons Attribution 4.0 License, and code samples are licensed under the Apache 2.0 License.</a:t>
+            </a:r>
+            <a:endParaRPr lang="en-US" sz="780" dirty="0"/>
+          </a:p>
+          <a:p>
+            <a:pPr indent="0" marL="0">
+              <a:lnSpc>
+                <a:spcPct val="124000"/>
+              </a:lnSpc>
+              <a:buNone/>
+            </a:pPr>
+            <a:r>
+              <a:rPr lang="en-US" sz="810" b="1" dirty="0">
                 <a:solidFill>
                   <a:srgbClr val="202124"/>
                 </a:solidFill>
@@ -13133,12 +13139,12 @@
             </a:r>
             <a:pPr indent="0" marL="0">
               <a:lnSpc>
-                <a:spcPct val="122000"/>
-              </a:lnSpc>
-              <a:buNone/>
-            </a:pPr>
-            <a:r>
-              <a:rPr lang="en-US" sz="820" dirty="0">
+                <a:spcPct val="124000"/>
+              </a:lnSpc>
+              <a:buNone/>
+            </a:pPr>
+            <a:r>
+              <a:rPr lang="en-US" sz="810" dirty="0">
                 <a:solidFill>
                   <a:srgbClr val="3C4043"/>
                 </a:solidFill>
@@ -13146,17 +13152,19 @@
                 <a:ea typeface="Arial" pitchFamily="34" charset="-122"/>
                 <a:cs typeface="Arial" pitchFamily="34" charset="-120"/>
               </a:rPr>
-              <a:t>Principal AI Architect • Cloud Solutions Architecture • Enterprise AI Field Engineering
-</a:t>
-            </a:r>
-            <a:pPr indent="0" marL="0">
-              <a:lnSpc>
-                <a:spcPct val="122000"/>
-              </a:lnSpc>
-              <a:buNone/>
-            </a:pPr>
-            <a:r>
-              <a:rPr lang="en-US" sz="820" b="1" dirty="0">
+              <a:t>Principal AI Architect • Cloud Solutions Architecture • Enterprise AI Field Engineering</a:t>
+            </a:r>
+            <a:endParaRPr lang="en-US" sz="780" dirty="0"/>
+          </a:p>
+          <a:p>
+            <a:pPr indent="0" marL="0">
+              <a:lnSpc>
+                <a:spcPct val="124000"/>
+              </a:lnSpc>
+              <a:buNone/>
+            </a:pPr>
+            <a:r>
+              <a:rPr lang="en-US" sz="810" b="1" dirty="0">
                 <a:solidFill>
                   <a:srgbClr val="202124"/>
                 </a:solidFill>
@@ -13168,12 +13176,12 @@
             </a:r>
             <a:pPr indent="0" marL="0">
               <a:lnSpc>
-                <a:spcPct val="122000"/>
-              </a:lnSpc>
-              <a:buNone/>
-            </a:pPr>
-            <a:r>
-              <a:rPr lang="en-US" sz="820" dirty="0">
+                <a:spcPct val="124000"/>
+              </a:lnSpc>
+              <a:buNone/>
+            </a:pPr>
+            <a:r>
+              <a:rPr lang="en-US" sz="810" dirty="0">
                 <a:solidFill>
                   <a:srgbClr val="3C4043"/>
                 </a:solidFill>
@@ -13181,12 +13189,14 @@
                 <a:ea typeface="Arial" pitchFamily="34" charset="-122"/>
                 <a:cs typeface="Arial" pitchFamily="34" charset="-120"/>
               </a:rPr>
-              <a:t>Principal AI Architect &amp; Field Deployment Engineering • Google Cloud Architecture Center Engineering Team
-</a:t>
-            </a:r>
-            <a:pPr indent="0" marL="0">
-              <a:lnSpc>
-                <a:spcPct val="122000"/>
+              <a:t>Principal AI Architect &amp; Field Deployment Engineering • Google Cloud Architecture Center Engineering Team</a:t>
+            </a:r>
+            <a:endParaRPr lang="en-US" sz="780" dirty="0"/>
+          </a:p>
+          <a:p>
+            <a:pPr indent="0" marL="0">
+              <a:lnSpc>
+                <a:spcPct val="124000"/>
               </a:lnSpc>
               <a:buNone/>
             </a:pPr>
